--- a/data/archive/pulse_2026-03-16.pptx
+++ b/data/archive/pulse_2026-03-16.pptx
@@ -27,6 +27,10 @@
     <p:sldId id="275" r:id="rId26"/>
     <p:sldId id="276" r:id="rId27"/>
     <p:sldId id="277" r:id="rId28"/>
+    <p:sldId id="278" r:id="rId29"/>
+    <p:sldId id="279" r:id="rId30"/>
+    <p:sldId id="280" r:id="rId31"/>
+    <p:sldId id="281" r:id="rId32"/>
   </p:sldIdLst>
   <p:sldSz cx="12191695" cy="6858000" type="screen4x3"/>
   <p:notesSz cx="6858000" cy="9144000"/>
@@ -3309,7 +3313,7 @@
             <a:avLst/>
           </a:prstGeom>
           <a:solidFill>
-            <a:srgbClr val="8B5CF6"/>
+            <a:srgbClr val="607D8B"/>
           </a:solidFill>
           <a:ln>
             <a:noFill/>
@@ -3362,13 +3366,13 @@
             <a:pPr algn="l">
               <a:defRPr sz="1000" b="1">
                 <a:solidFill>
-                  <a:srgbClr val="8B5CF6"/>
-                </a:solidFill>
-                <a:latin typeface="Calibri"/>
-              </a:defRPr>
-            </a:pPr>
-            <a:r>
-              <a:t>🌟  CLAPS</a:t>
+                  <a:srgbClr val="607D8B"/>
+                </a:solidFill>
+                <a:latin typeface="Calibri"/>
+              </a:defRPr>
+            </a:pPr>
+            <a:r>
+              <a:t>🏠  EVENT</a:t>
             </a:r>
           </a:p>
         </p:txBody>
@@ -3398,13 +3402,13 @@
             <a:pPr algn="l">
               <a:defRPr sz="3200" b="1" i="0">
                 <a:solidFill>
-                  <a:srgbClr val="8B5CF6"/>
-                </a:solidFill>
-                <a:latin typeface="Calibri"/>
-              </a:defRPr>
-            </a:pPr>
-            <a:r>
-              <a:t>Cross-Team Excellence</a:t>
+                  <a:srgbClr val="607D8B"/>
+                </a:solidFill>
+                <a:latin typeface="Calibri"/>
+              </a:defRPr>
+            </a:pPr>
+            <a:r>
+              <a:t>Global Operations</a:t>
             </a:r>
           </a:p>
         </p:txBody>
@@ -3418,29 +3422,29 @@
         <p:spPr>
           <a:xfrm>
             <a:off x="1097280" y="2103120"/>
-            <a:ext cx="2743200" cy="548640"/>
-          </a:xfrm>
-          <a:prstGeom prst="rect">
-            <a:avLst/>
-          </a:prstGeom>
-          <a:noFill/>
-        </p:spPr>
-        <p:txBody>
-          <a:bodyPr wrap="square">
-            <a:spAutoFit/>
-          </a:bodyPr>
-          <a:lstStyle/>
-          <a:p>
-            <a:pPr algn="l">
-              <a:defRPr sz="2800" b="1" i="0">
-                <a:solidFill>
-                  <a:srgbClr val="8B5CF6"/>
-                </a:solidFill>
-                <a:latin typeface="Calibri"/>
-              </a:defRPr>
-            </a:pPr>
-            <a:r>
-              <a:t>90</a:t>
+            <a:ext cx="9966960" cy="548640"/>
+          </a:xfrm>
+          <a:prstGeom prst="rect">
+            <a:avLst/>
+          </a:prstGeom>
+          <a:noFill/>
+        </p:spPr>
+        <p:txBody>
+          <a:bodyPr wrap="square">
+            <a:spAutoFit/>
+          </a:bodyPr>
+          <a:lstStyle/>
+          <a:p>
+            <a:pPr algn="l">
+              <a:defRPr sz="2200" b="1" i="0">
+                <a:solidFill>
+                  <a:srgbClr val="FFFFFF"/>
+                </a:solidFill>
+                <a:latin typeface="Calibri"/>
+              </a:defRPr>
+            </a:pPr>
+            <a:r>
+              <a:t>PerchPeek Relocation Partnership</a:t>
             </a:r>
           </a:p>
         </p:txBody>
@@ -3453,7 +3457,7 @@
         </p:nvSpPr>
         <p:spPr>
           <a:xfrm>
-            <a:off x="1097280" y="2651760"/>
+            <a:off x="1097280" y="2743200"/>
             <a:ext cx="9966960" cy="365760"/>
           </a:xfrm>
           <a:prstGeom prst="rect">
@@ -3468,7 +3472,43 @@
           <a:lstStyle/>
           <a:p>
             <a:pPr algn="l">
-              <a:defRPr sz="1400" b="0" i="0">
+              <a:defRPr sz="1400" b="1" i="0">
+                <a:solidFill>
+                  <a:srgbClr val="607D8B"/>
+                </a:solidFill>
+                <a:latin typeface="Calibri"/>
+              </a:defRPr>
+            </a:pPr>
+            <a:r>
+              <a:t>Implementation Starting</a:t>
+            </a:r>
+          </a:p>
+        </p:txBody>
+      </p:sp>
+      <p:sp>
+        <p:nvSpPr>
+          <p:cNvPr id="7" name="TextBox 6"/>
+          <p:cNvSpPr txBox="1"/>
+          <p:nvPr/>
+        </p:nvSpPr>
+        <p:spPr>
+          <a:xfrm>
+            <a:off x="1097280" y="3291840"/>
+            <a:ext cx="9966960" cy="1371600"/>
+          </a:xfrm>
+          <a:prstGeom prst="rect">
+            <a:avLst/>
+          </a:prstGeom>
+          <a:noFill/>
+        </p:spPr>
+        <p:txBody>
+          <a:bodyPr wrap="square">
+            <a:spAutoFit/>
+          </a:bodyPr>
+          <a:lstStyle/>
+          <a:p>
+            <a:pPr algn="l">
+              <a:defRPr sz="1500" b="0" i="0">
                 <a:solidFill>
                   <a:srgbClr val="E2E2EA"/>
                 </a:solidFill>
@@ -3476,20 +3516,20 @@
               </a:defRPr>
             </a:pPr>
             <a:r>
-              <a:t>from Viktor Trykolenko</a:t>
-            </a:r>
-          </a:p>
-        </p:txBody>
-      </p:sp>
-      <p:sp>
-        <p:nvSpPr>
-          <p:cNvPr id="7" name="TextBox 6"/>
-          <p:cNvSpPr txBox="1"/>
-          <p:nvPr/>
-        </p:nvSpPr>
-        <p:spPr>
-          <a:xfrm>
-            <a:off x="1097280" y="3108960"/>
+              <a:t>New end-to-end relocation platform being introduced to streamline employee relocations globally, especially to Barcelona. Focus on improving timing and employee experience.</a:t>
+            </a:r>
+          </a:p>
+        </p:txBody>
+      </p:sp>
+      <p:sp>
+        <p:nvSpPr>
+          <p:cNvPr id="8" name="TextBox 7"/>
+          <p:cNvSpPr txBox="1"/>
+          <p:nvPr/>
+        </p:nvSpPr>
+        <p:spPr>
+          <a:xfrm>
+            <a:off x="1097280" y="5029200"/>
             <a:ext cx="9966960" cy="365760"/>
           </a:xfrm>
           <a:prstGeom prst="rect">
@@ -3504,87 +3544,15 @@
           <a:lstStyle/>
           <a:p>
             <a:pPr algn="l">
-              <a:defRPr sz="1400" b="1" i="0">
-                <a:solidFill>
-                  <a:srgbClr val="FFFFFF"/>
-                </a:solidFill>
-                <a:latin typeface="Calibri"/>
-              </a:defRPr>
-            </a:pPr>
-            <a:r>
-              <a:t>to: Iurii Kotov</a:t>
-            </a:r>
-          </a:p>
-        </p:txBody>
-      </p:sp>
-      <p:sp>
-        <p:nvSpPr>
-          <p:cNvPr id="8" name="TextBox 7"/>
-          <p:cNvSpPr txBox="1"/>
-          <p:nvPr/>
-        </p:nvSpPr>
-        <p:spPr>
-          <a:xfrm>
-            <a:off x="1097280" y="3749039"/>
-            <a:ext cx="9966960" cy="1097280"/>
-          </a:xfrm>
-          <a:prstGeom prst="rect">
-            <a:avLst/>
-          </a:prstGeom>
-          <a:noFill/>
-        </p:spPr>
-        <p:txBody>
-          <a:bodyPr wrap="square">
-            <a:spAutoFit/>
-          </a:bodyPr>
-          <a:lstStyle/>
-          <a:p>
-            <a:pPr algn="l">
-              <a:defRPr sz="1500" b="0" i="1">
-                <a:solidFill>
-                  <a:srgbClr val="E2E2EA"/>
-                </a:solidFill>
-                <a:latin typeface="Calibri"/>
-              </a:defRPr>
-            </a:pPr>
-            <a:r>
-              <a:t>"Exceptional collaboration and technical expertise driving key platform improvements"</a:t>
-            </a:r>
-          </a:p>
-        </p:txBody>
-      </p:sp>
-      <p:sp>
-        <p:nvSpPr>
-          <p:cNvPr id="9" name="TextBox 8"/>
-          <p:cNvSpPr txBox="1"/>
-          <p:nvPr/>
-        </p:nvSpPr>
-        <p:spPr>
-          <a:xfrm>
-            <a:off x="1097280" y="5120640"/>
-            <a:ext cx="9966960" cy="457200"/>
-          </a:xfrm>
-          <a:prstGeom prst="rect">
-            <a:avLst/>
-          </a:prstGeom>
-          <a:noFill/>
-        </p:spPr>
-        <p:txBody>
-          <a:bodyPr wrap="square">
-            <a:spAutoFit/>
-          </a:bodyPr>
-          <a:lstStyle/>
-          <a:p>
-            <a:pPr algn="l">
-              <a:defRPr sz="1200" b="1" i="0">
-                <a:solidFill>
-                  <a:srgbClr val="8B5CF6"/>
-                </a:solidFill>
-                <a:latin typeface="Calibri"/>
-              </a:defRPr>
-            </a:pPr>
-            <a:r>
-              <a:t>Teamwork · Excellence</a:t>
+              <a:defRPr sz="1300" b="0" i="0">
+                <a:solidFill>
+                  <a:srgbClr val="8F95A3"/>
+                </a:solidFill>
+                <a:latin typeface="Calibri"/>
+              </a:defRPr>
+            </a:pPr>
+            <a:r>
+              <a:t>Organized by HR &amp; Operations Teams</a:t>
             </a:r>
           </a:p>
         </p:txBody>
@@ -3630,7 +3598,7 @@
             <a:avLst/>
           </a:prstGeom>
           <a:solidFill>
-            <a:srgbClr val="EC4899"/>
+            <a:srgbClr val="3F51B5"/>
           </a:solidFill>
           <a:ln>
             <a:noFill/>
@@ -3683,13 +3651,13 @@
             <a:pPr algn="l">
               <a:defRPr sz="1000" b="1">
                 <a:solidFill>
-                  <a:srgbClr val="EC4899"/>
-                </a:solidFill>
-                <a:latin typeface="Calibri"/>
-              </a:defRPr>
-            </a:pPr>
-            <a:r>
-              <a:t>🎯  CLAPS</a:t>
+                  <a:srgbClr val="3F51B5"/>
+                </a:solidFill>
+                <a:latin typeface="Calibri"/>
+              </a:defRPr>
+            </a:pPr>
+            <a:r>
+              <a:t>🤖  MILESTONE</a:t>
             </a:r>
           </a:p>
         </p:txBody>
@@ -3719,13 +3687,13 @@
             <a:pPr algn="l">
               <a:defRPr sz="3200" b="1" i="0">
                 <a:solidFill>
-                  <a:srgbClr val="EC4899"/>
-                </a:solidFill>
-                <a:latin typeface="Calibri"/>
-              </a:defRPr>
-            </a:pPr>
-            <a:r>
-              <a:t>Leadership Recognition</a:t>
+                  <a:srgbClr val="3F51B5"/>
+                </a:solidFill>
+                <a:latin typeface="Calibri"/>
+              </a:defRPr>
+            </a:pPr>
+            <a:r>
+              <a:t>AI Revolution</a:t>
             </a:r>
           </a:p>
         </p:txBody>
@@ -3739,29 +3707,29 @@
         <p:spPr>
           <a:xfrm>
             <a:off x="1097280" y="2103120"/>
-            <a:ext cx="2743200" cy="548640"/>
-          </a:xfrm>
-          <a:prstGeom prst="rect">
-            <a:avLst/>
-          </a:prstGeom>
-          <a:noFill/>
-        </p:spPr>
-        <p:txBody>
-          <a:bodyPr wrap="square">
-            <a:spAutoFit/>
-          </a:bodyPr>
-          <a:lstStyle/>
-          <a:p>
-            <a:pPr algn="l">
-              <a:defRPr sz="2800" b="1" i="0">
-                <a:solidFill>
-                  <a:srgbClr val="EC4899"/>
-                </a:solidFill>
-                <a:latin typeface="Calibri"/>
-              </a:defRPr>
-            </a:pPr>
-            <a:r>
-              <a:t>50</a:t>
+            <a:ext cx="4572000" cy="822960"/>
+          </a:xfrm>
+          <a:prstGeom prst="rect">
+            <a:avLst/>
+          </a:prstGeom>
+          <a:noFill/>
+        </p:spPr>
+        <p:txBody>
+          <a:bodyPr wrap="square">
+            <a:spAutoFit/>
+          </a:bodyPr>
+          <a:lstStyle/>
+          <a:p>
+            <a:pPr algn="l">
+              <a:defRPr sz="5200" b="1" i="0">
+                <a:solidFill>
+                  <a:srgbClr val="3F51B5"/>
+                </a:solidFill>
+                <a:latin typeface="Calibri"/>
+              </a:defRPr>
+            </a:pPr>
+            <a:r>
+              <a:t>AI-Enhanced</a:t>
             </a:r>
           </a:p>
         </p:txBody>
@@ -3774,22 +3742,94 @@
         </p:nvSpPr>
         <p:spPr>
           <a:xfrm>
-            <a:off x="1097280" y="2651760"/>
-            <a:ext cx="9966960" cy="365760"/>
-          </a:xfrm>
-          <a:prstGeom prst="rect">
-            <a:avLst/>
-          </a:prstGeom>
-          <a:noFill/>
-        </p:spPr>
-        <p:txBody>
-          <a:bodyPr wrap="square">
-            <a:spAutoFit/>
-          </a:bodyPr>
-          <a:lstStyle/>
-          <a:p>
-            <a:pPr algn="l">
-              <a:defRPr sz="1400" b="0" i="0">
+            <a:off x="1097280" y="2926080"/>
+            <a:ext cx="4572000" cy="365760"/>
+          </a:xfrm>
+          <a:prstGeom prst="rect">
+            <a:avLst/>
+          </a:prstGeom>
+          <a:noFill/>
+        </p:spPr>
+        <p:txBody>
+          <a:bodyPr wrap="square">
+            <a:spAutoFit/>
+          </a:bodyPr>
+          <a:lstStyle/>
+          <a:p>
+            <a:pPr algn="l">
+              <a:defRPr sz="1100" b="0" i="0">
+                <a:solidFill>
+                  <a:srgbClr val="8F95A3"/>
+                </a:solidFill>
+                <a:latin typeface="Calibri"/>
+              </a:defRPr>
+            </a:pPr>
+            <a:r>
+              <a:t>performance evaluations</a:t>
+            </a:r>
+          </a:p>
+        </p:txBody>
+      </p:sp>
+      <p:sp>
+        <p:nvSpPr>
+          <p:cNvPr id="7" name="TextBox 6"/>
+          <p:cNvSpPr txBox="1"/>
+          <p:nvPr/>
+        </p:nvSpPr>
+        <p:spPr>
+          <a:xfrm>
+            <a:off x="1097280" y="3566160"/>
+            <a:ext cx="9966960" cy="457200"/>
+          </a:xfrm>
+          <a:prstGeom prst="rect">
+            <a:avLst/>
+          </a:prstGeom>
+          <a:noFill/>
+        </p:spPr>
+        <p:txBody>
+          <a:bodyPr wrap="square">
+            <a:spAutoFit/>
+          </a:bodyPr>
+          <a:lstStyle/>
+          <a:p>
+            <a:pPr algn="l">
+              <a:defRPr sz="1800" b="1" i="0">
+                <a:solidFill>
+                  <a:srgbClr val="FFFFFF"/>
+                </a:solidFill>
+                <a:latin typeface="Calibri"/>
+              </a:defRPr>
+            </a:pPr>
+            <a:r>
+              <a:t>AI-Powered Performance Reviews</a:t>
+            </a:r>
+          </a:p>
+        </p:txBody>
+      </p:sp>
+      <p:sp>
+        <p:nvSpPr>
+          <p:cNvPr id="8" name="TextBox 7"/>
+          <p:cNvSpPr txBox="1"/>
+          <p:nvPr/>
+        </p:nvSpPr>
+        <p:spPr>
+          <a:xfrm>
+            <a:off x="1097280" y="4206240"/>
+            <a:ext cx="9966960" cy="1371600"/>
+          </a:xfrm>
+          <a:prstGeom prst="rect">
+            <a:avLst/>
+          </a:prstGeom>
+          <a:noFill/>
+        </p:spPr>
+        <p:txBody>
+          <a:bodyPr wrap="square">
+            <a:spAutoFit/>
+          </a:bodyPr>
+          <a:lstStyle/>
+          <a:p>
+            <a:pPr algn="l">
+              <a:defRPr sz="1500" b="0" i="0">
                 <a:solidFill>
                   <a:srgbClr val="E2E2EA"/>
                 </a:solidFill>
@@ -3797,115 +3837,7 @@
               </a:defRPr>
             </a:pPr>
             <a:r>
-              <a:t>from Jasmine Nunez</a:t>
-            </a:r>
-          </a:p>
-        </p:txBody>
-      </p:sp>
-      <p:sp>
-        <p:nvSpPr>
-          <p:cNvPr id="7" name="TextBox 6"/>
-          <p:cNvSpPr txBox="1"/>
-          <p:nvPr/>
-        </p:nvSpPr>
-        <p:spPr>
-          <a:xfrm>
-            <a:off x="1097280" y="3108960"/>
-            <a:ext cx="9966960" cy="365760"/>
-          </a:xfrm>
-          <a:prstGeom prst="rect">
-            <a:avLst/>
-          </a:prstGeom>
-          <a:noFill/>
-        </p:spPr>
-        <p:txBody>
-          <a:bodyPr wrap="square">
-            <a:spAutoFit/>
-          </a:bodyPr>
-          <a:lstStyle/>
-          <a:p>
-            <a:pPr algn="l">
-              <a:defRPr sz="1400" b="1" i="0">
-                <a:solidFill>
-                  <a:srgbClr val="FFFFFF"/>
-                </a:solidFill>
-                <a:latin typeface="Calibri"/>
-              </a:defRPr>
-            </a:pPr>
-            <a:r>
-              <a:t>to: Michelle Walter</a:t>
-            </a:r>
-          </a:p>
-        </p:txBody>
-      </p:sp>
-      <p:sp>
-        <p:nvSpPr>
-          <p:cNvPr id="8" name="TextBox 7"/>
-          <p:cNvSpPr txBox="1"/>
-          <p:nvPr/>
-        </p:nvSpPr>
-        <p:spPr>
-          <a:xfrm>
-            <a:off x="1097280" y="3749039"/>
-            <a:ext cx="9966960" cy="1097280"/>
-          </a:xfrm>
-          <a:prstGeom prst="rect">
-            <a:avLst/>
-          </a:prstGeom>
-          <a:noFill/>
-        </p:spPr>
-        <p:txBody>
-          <a:bodyPr wrap="square">
-            <a:spAutoFit/>
-          </a:bodyPr>
-          <a:lstStyle/>
-          <a:p>
-            <a:pPr algn="l">
-              <a:defRPr sz="1500" b="0" i="1">
-                <a:solidFill>
-                  <a:srgbClr val="E2E2EA"/>
-                </a:solidFill>
-                <a:latin typeface="Calibri"/>
-              </a:defRPr>
-            </a:pPr>
-            <a:r>
-              <a:t>"Exceptional leadership and strategic vision that guides our teams to success"</a:t>
-            </a:r>
-          </a:p>
-        </p:txBody>
-      </p:sp>
-      <p:sp>
-        <p:nvSpPr>
-          <p:cNvPr id="9" name="TextBox 8"/>
-          <p:cNvSpPr txBox="1"/>
-          <p:nvPr/>
-        </p:nvSpPr>
-        <p:spPr>
-          <a:xfrm>
-            <a:off x="1097280" y="5120640"/>
-            <a:ext cx="9966960" cy="457200"/>
-          </a:xfrm>
-          <a:prstGeom prst="rect">
-            <a:avLst/>
-          </a:prstGeom>
-          <a:noFill/>
-        </p:spPr>
-        <p:txBody>
-          <a:bodyPr wrap="square">
-            <a:spAutoFit/>
-          </a:bodyPr>
-          <a:lstStyle/>
-          <a:p>
-            <a:pPr algn="l">
-              <a:defRPr sz="1200" b="1" i="0">
-                <a:solidFill>
-                  <a:srgbClr val="EC4899"/>
-                </a:solidFill>
-                <a:latin typeface="Calibri"/>
-              </a:defRPr>
-            </a:pPr>
-            <a:r>
-              <a:t>Leadership · Vision</a:t>
+              <a:t>Transitioning from formal calibrations to manager-led evaluations supported by AI insights, ensuring fairness and accuracy in performance assessments across all teams.</a:t>
             </a:r>
           </a:p>
         </p:txBody>
@@ -3951,7 +3883,7 @@
             <a:avLst/>
           </a:prstGeom>
           <a:solidFill>
-            <a:srgbClr val="DC2626"/>
+            <a:srgbClr val="009688"/>
           </a:solidFill>
           <a:ln>
             <a:noFill/>
@@ -4004,13 +3936,13 @@
             <a:pPr algn="l">
               <a:defRPr sz="1000" b="1">
                 <a:solidFill>
-                  <a:srgbClr val="DC2626"/>
-                </a:solidFill>
-                <a:latin typeface="Calibri"/>
-              </a:defRPr>
-            </a:pPr>
-            <a:r>
-              <a:t>🔥  CLAPS</a:t>
+                  <a:srgbClr val="009688"/>
+                </a:solidFill>
+                <a:latin typeface="Calibri"/>
+              </a:defRPr>
+            </a:pPr>
+            <a:r>
+              <a:t>📱  WIN</a:t>
             </a:r>
           </a:p>
         </p:txBody>
@@ -4040,13 +3972,13 @@
             <a:pPr algn="l">
               <a:defRPr sz="3200" b="1" i="0">
                 <a:solidFill>
-                  <a:srgbClr val="DC2626"/>
-                </a:solidFill>
-                <a:latin typeface="Calibri"/>
-              </a:defRPr>
-            </a:pPr>
-            <a:r>
-              <a:t>Outstanding Performance</a:t>
+                  <a:srgbClr val="009688"/>
+                </a:solidFill>
+                <a:latin typeface="Calibri"/>
+              </a:defRPr>
+            </a:pPr>
+            <a:r>
+              <a:t>Product Innovation</a:t>
             </a:r>
           </a:p>
         </p:txBody>
@@ -4060,29 +3992,29 @@
         <p:spPr>
           <a:xfrm>
             <a:off x="1097280" y="2103120"/>
-            <a:ext cx="2743200" cy="548640"/>
-          </a:xfrm>
-          <a:prstGeom prst="rect">
-            <a:avLst/>
-          </a:prstGeom>
-          <a:noFill/>
-        </p:spPr>
-        <p:txBody>
-          <a:bodyPr wrap="square">
-            <a:spAutoFit/>
-          </a:bodyPr>
-          <a:lstStyle/>
-          <a:p>
-            <a:pPr algn="l">
-              <a:defRPr sz="2800" b="1" i="0">
-                <a:solidFill>
-                  <a:srgbClr val="DC2626"/>
-                </a:solidFill>
-                <a:latin typeface="Calibri"/>
-              </a:defRPr>
-            </a:pPr>
-            <a:r>
-              <a:t>50</a:t>
+            <a:ext cx="4572000" cy="822960"/>
+          </a:xfrm>
+          <a:prstGeom prst="rect">
+            <a:avLst/>
+          </a:prstGeom>
+          <a:noFill/>
+        </p:spPr>
+        <p:txBody>
+          <a:bodyPr wrap="square">
+            <a:spAutoFit/>
+          </a:bodyPr>
+          <a:lstStyle/>
+          <a:p>
+            <a:pPr algn="l">
+              <a:defRPr sz="4800" b="1" i="0">
+                <a:solidFill>
+                  <a:srgbClr val="009688"/>
+                </a:solidFill>
+                <a:latin typeface="Calibri"/>
+              </a:defRPr>
+            </a:pPr>
+            <a:r>
+              <a:t>v5.5.0</a:t>
             </a:r>
           </a:p>
         </p:txBody>
@@ -4095,7 +4027,43 @@
         </p:nvSpPr>
         <p:spPr>
           <a:xfrm>
-            <a:off x="1097280" y="2651760"/>
+            <a:off x="1097280" y="2834640"/>
+            <a:ext cx="4572000" cy="365760"/>
+          </a:xfrm>
+          <a:prstGeom prst="rect">
+            <a:avLst/>
+          </a:prstGeom>
+          <a:noFill/>
+        </p:spPr>
+        <p:txBody>
+          <a:bodyPr wrap="square">
+            <a:spAutoFit/>
+          </a:bodyPr>
+          <a:lstStyle/>
+          <a:p>
+            <a:pPr algn="l">
+              <a:defRPr sz="1200" b="0" i="0">
+                <a:solidFill>
+                  <a:srgbClr val="8F95A3"/>
+                </a:solidFill>
+                <a:latin typeface="Calibri"/>
+              </a:defRPr>
+            </a:pPr>
+            <a:r>
+              <a:t>successful launch</a:t>
+            </a:r>
+          </a:p>
+        </p:txBody>
+      </p:sp>
+      <p:sp>
+        <p:nvSpPr>
+          <p:cNvPr id="7" name="TextBox 6"/>
+          <p:cNvSpPr txBox="1"/>
+          <p:nvPr/>
+        </p:nvSpPr>
+        <p:spPr>
+          <a:xfrm>
+            <a:off x="1097280" y="3291840"/>
             <a:ext cx="9966960" cy="365760"/>
           </a:xfrm>
           <a:prstGeom prst="rect">
@@ -4118,35 +4086,35 @@
               </a:defRPr>
             </a:pPr>
             <a:r>
-              <a:t>from Michael Lotfy</a:t>
-            </a:r>
-          </a:p>
-        </p:txBody>
-      </p:sp>
-      <p:sp>
-        <p:nvSpPr>
-          <p:cNvPr id="7" name="TextBox 6"/>
-          <p:cNvSpPr txBox="1"/>
-          <p:nvPr/>
-        </p:nvSpPr>
-        <p:spPr>
-          <a:xfrm>
-            <a:off x="1097280" y="3108960"/>
-            <a:ext cx="9966960" cy="365760"/>
-          </a:xfrm>
-          <a:prstGeom prst="rect">
-            <a:avLst/>
-          </a:prstGeom>
-          <a:noFill/>
-        </p:spPr>
-        <p:txBody>
-          <a:bodyPr wrap="square">
-            <a:spAutoFit/>
-          </a:bodyPr>
-          <a:lstStyle/>
-          <a:p>
-            <a:pPr algn="l">
-              <a:defRPr sz="1400" b="1" i="0">
+              <a:t>by Solitaire Team</a:t>
+            </a:r>
+          </a:p>
+        </p:txBody>
+      </p:sp>
+      <p:sp>
+        <p:nvSpPr>
+          <p:cNvPr id="8" name="TextBox 7"/>
+          <p:cNvSpPr txBox="1"/>
+          <p:nvPr/>
+        </p:nvSpPr>
+        <p:spPr>
+          <a:xfrm>
+            <a:off x="1097280" y="3840480"/>
+            <a:ext cx="9966960" cy="457200"/>
+          </a:xfrm>
+          <a:prstGeom prst="rect">
+            <a:avLst/>
+          </a:prstGeom>
+          <a:noFill/>
+        </p:spPr>
+        <p:txBody>
+          <a:bodyPr wrap="square">
+            <a:spAutoFit/>
+          </a:bodyPr>
+          <a:lstStyle/>
+          <a:p>
+            <a:pPr algn="l">
+              <a:defRPr sz="1800" b="1" i="0">
                 <a:solidFill>
                   <a:srgbClr val="FFFFFF"/>
                 </a:solidFill>
@@ -4154,35 +4122,35 @@
               </a:defRPr>
             </a:pPr>
             <a:r>
-              <a:t>to: Issa Isahakyan</a:t>
-            </a:r>
-          </a:p>
-        </p:txBody>
-      </p:sp>
-      <p:sp>
-        <p:nvSpPr>
-          <p:cNvPr id="8" name="TextBox 7"/>
-          <p:cNvSpPr txBox="1"/>
-          <p:nvPr/>
-        </p:nvSpPr>
-        <p:spPr>
-          <a:xfrm>
-            <a:off x="1097280" y="3749039"/>
-            <a:ext cx="9966960" cy="1097280"/>
-          </a:xfrm>
-          <a:prstGeom prst="rect">
-            <a:avLst/>
-          </a:prstGeom>
-          <a:noFill/>
-        </p:spPr>
-        <p:txBody>
-          <a:bodyPr wrap="square">
-            <a:spAutoFit/>
-          </a:bodyPr>
-          <a:lstStyle/>
-          <a:p>
-            <a:pPr algn="l">
-              <a:defRPr sz="1500" b="0" i="1">
+              <a:t>Version 5.5.0 Rollout Success</a:t>
+            </a:r>
+          </a:p>
+        </p:txBody>
+      </p:sp>
+      <p:sp>
+        <p:nvSpPr>
+          <p:cNvPr id="9" name="TextBox 8"/>
+          <p:cNvSpPr txBox="1"/>
+          <p:nvPr/>
+        </p:nvSpPr>
+        <p:spPr>
+          <a:xfrm>
+            <a:off x="1097280" y="4389120"/>
+            <a:ext cx="9966960" cy="914400"/>
+          </a:xfrm>
+          <a:prstGeom prst="rect">
+            <a:avLst/>
+          </a:prstGeom>
+          <a:noFill/>
+        </p:spPr>
+        <p:txBody>
+          <a:bodyPr wrap="square">
+            <a:spAutoFit/>
+          </a:bodyPr>
+          <a:lstStyle/>
+          <a:p>
+            <a:pPr algn="l">
+              <a:defRPr sz="1400" b="0" i="0">
                 <a:solidFill>
                   <a:srgbClr val="E2E2EA"/>
                 </a:solidFill>
@@ -4190,20 +4158,20 @@
               </a:defRPr>
             </a:pPr>
             <a:r>
-              <a:t>"Consistently delivering exceptional results and inspiring the team with dedication"</a:t>
-            </a:r>
-          </a:p>
-        </p:txBody>
-      </p:sp>
-      <p:sp>
-        <p:nvSpPr>
-          <p:cNvPr id="9" name="TextBox 8"/>
-          <p:cNvSpPr txBox="1"/>
-          <p:nvPr/>
-        </p:nvSpPr>
-        <p:spPr>
-          <a:xfrm>
-            <a:off x="1097280" y="5120640"/>
+              <a:t>Successfully rolled out to 10% of users with version 5.6.0 targeted for March 27, featuring key improvements and optimizations.</a:t>
+            </a:r>
+          </a:p>
+        </p:txBody>
+      </p:sp>
+      <p:sp>
+        <p:nvSpPr>
+          <p:cNvPr id="10" name="TextBox 9"/>
+          <p:cNvSpPr txBox="1"/>
+          <p:nvPr/>
+        </p:nvSpPr>
+        <p:spPr>
+          <a:xfrm>
+            <a:off x="1097280" y="5486400"/>
             <a:ext cx="9966960" cy="457200"/>
           </a:xfrm>
           <a:prstGeom prst="rect">
@@ -4218,15 +4186,15 @@
           <a:lstStyle/>
           <a:p>
             <a:pPr algn="l">
-              <a:defRPr sz="1200" b="1" i="0">
-                <a:solidFill>
-                  <a:srgbClr val="DC2626"/>
-                </a:solidFill>
-                <a:latin typeface="Calibri"/>
-              </a:defRPr>
-            </a:pPr>
-            <a:r>
-              <a:t>Excellence · Dedication</a:t>
+              <a:defRPr sz="1300" b="0" i="1">
+                <a:solidFill>
+                  <a:srgbClr val="8F95A3"/>
+                </a:solidFill>
+                <a:latin typeface="Calibri"/>
+              </a:defRPr>
+            </a:pPr>
+            <a:r>
+              <a:t>💬 "Consistent product iterations are driving user experience improvements"</a:t>
             </a:r>
           </a:p>
         </p:txBody>
@@ -4272,7 +4240,7 @@
             <a:avLst/>
           </a:prstGeom>
           <a:solidFill>
-            <a:srgbClr val="10B981"/>
+            <a:srgbClr val="795548"/>
           </a:solidFill>
           <a:ln>
             <a:noFill/>
@@ -4325,13 +4293,13 @@
             <a:pPr algn="l">
               <a:defRPr sz="1000" b="1">
                 <a:solidFill>
-                  <a:srgbClr val="10B981"/>
-                </a:solidFill>
-                <a:latin typeface="Calibri"/>
-              </a:defRPr>
-            </a:pPr>
-            <a:r>
-              <a:t>🎮  MILESTONE</a:t>
+                  <a:srgbClr val="795548"/>
+                </a:solidFill>
+                <a:latin typeface="Calibri"/>
+              </a:defRPr>
+            </a:pPr>
+            <a:r>
+              <a:t>🧪  EVENT</a:t>
             </a:r>
           </a:p>
         </p:txBody>
@@ -4361,13 +4329,13 @@
             <a:pPr algn="l">
               <a:defRPr sz="3200" b="1" i="0">
                 <a:solidFill>
-                  <a:srgbClr val="10B981"/>
-                </a:solidFill>
-                <a:latin typeface="Calibri"/>
-              </a:defRPr>
-            </a:pPr>
-            <a:r>
-              <a:t>Gaming Success Story</a:t>
+                  <a:srgbClr val="795548"/>
+                </a:solidFill>
+                <a:latin typeface="Calibri"/>
+              </a:defRPr>
+            </a:pPr>
+            <a:r>
+              <a:t>Technical Architecture</a:t>
             </a:r>
           </a:p>
         </p:txBody>
@@ -4381,29 +4349,29 @@
         <p:spPr>
           <a:xfrm>
             <a:off x="1097280" y="2103120"/>
-            <a:ext cx="4572000" cy="822960"/>
-          </a:xfrm>
-          <a:prstGeom prst="rect">
-            <a:avLst/>
-          </a:prstGeom>
-          <a:noFill/>
-        </p:spPr>
-        <p:txBody>
-          <a:bodyPr wrap="square">
-            <a:spAutoFit/>
-          </a:bodyPr>
-          <a:lstStyle/>
-          <a:p>
-            <a:pPr algn="l">
-              <a:defRPr sz="5200" b="1" i="0">
-                <a:solidFill>
-                  <a:srgbClr val="10B981"/>
-                </a:solidFill>
-                <a:latin typeface="Calibri"/>
-              </a:defRPr>
-            </a:pPr>
-            <a:r>
-              <a:t>8%</a:t>
+            <a:ext cx="9966960" cy="548640"/>
+          </a:xfrm>
+          <a:prstGeom prst="rect">
+            <a:avLst/>
+          </a:prstGeom>
+          <a:noFill/>
+        </p:spPr>
+        <p:txBody>
+          <a:bodyPr wrap="square">
+            <a:spAutoFit/>
+          </a:bodyPr>
+          <a:lstStyle/>
+          <a:p>
+            <a:pPr algn="l">
+              <a:defRPr sz="2200" b="1" i="0">
+                <a:solidFill>
+                  <a:srgbClr val="FFFFFF"/>
+                </a:solidFill>
+                <a:latin typeface="Calibri"/>
+              </a:defRPr>
+            </a:pPr>
+            <a:r>
+              <a:t>Experimentation Platform Integration</a:t>
             </a:r>
           </a:p>
         </p:txBody>
@@ -4416,22 +4384,94 @@
         </p:nvSpPr>
         <p:spPr>
           <a:xfrm>
-            <a:off x="1097280" y="2926080"/>
-            <a:ext cx="4572000" cy="365760"/>
-          </a:xfrm>
-          <a:prstGeom prst="rect">
-            <a:avLst/>
-          </a:prstGeom>
-          <a:noFill/>
-        </p:spPr>
-        <p:txBody>
-          <a:bodyPr wrap="square">
-            <a:spAutoFit/>
-          </a:bodyPr>
-          <a:lstStyle/>
-          <a:p>
-            <a:pPr algn="l">
-              <a:defRPr sz="1100" b="0" i="0">
+            <a:off x="1097280" y="2743200"/>
+            <a:ext cx="9966960" cy="365760"/>
+          </a:xfrm>
+          <a:prstGeom prst="rect">
+            <a:avLst/>
+          </a:prstGeom>
+          <a:noFill/>
+        </p:spPr>
+        <p:txBody>
+          <a:bodyPr wrap="square">
+            <a:spAutoFit/>
+          </a:bodyPr>
+          <a:lstStyle/>
+          <a:p>
+            <a:pPr algn="l">
+              <a:defRPr sz="1400" b="1" i="0">
+                <a:solidFill>
+                  <a:srgbClr val="795548"/>
+                </a:solidFill>
+                <a:latin typeface="Calibri"/>
+              </a:defRPr>
+            </a:pPr>
+            <a:r>
+              <a:t>Q2 Implementation</a:t>
+            </a:r>
+          </a:p>
+        </p:txBody>
+      </p:sp>
+      <p:sp>
+        <p:nvSpPr>
+          <p:cNvPr id="7" name="TextBox 6"/>
+          <p:cNvSpPr txBox="1"/>
+          <p:nvPr/>
+        </p:nvSpPr>
+        <p:spPr>
+          <a:xfrm>
+            <a:off x="1097280" y="3291840"/>
+            <a:ext cx="9966960" cy="1371600"/>
+          </a:xfrm>
+          <a:prstGeom prst="rect">
+            <a:avLst/>
+          </a:prstGeom>
+          <a:noFill/>
+        </p:spPr>
+        <p:txBody>
+          <a:bodyPr wrap="square">
+            <a:spAutoFit/>
+          </a:bodyPr>
+          <a:lstStyle/>
+          <a:p>
+            <a:pPr algn="l">
+              <a:defRPr sz="1500" b="0" i="0">
+                <a:solidFill>
+                  <a:srgbClr val="E2E2EA"/>
+                </a:solidFill>
+                <a:latin typeface="Calibri"/>
+              </a:defRPr>
+            </a:pPr>
+            <a:r>
+              <a:t>Integrating experimentation platform while Rust rewrite progresses, with solution design document guiding decisions for smoother migration later.</a:t>
+            </a:r>
+          </a:p>
+        </p:txBody>
+      </p:sp>
+      <p:sp>
+        <p:nvSpPr>
+          <p:cNvPr id="8" name="TextBox 7"/>
+          <p:cNvSpPr txBox="1"/>
+          <p:nvPr/>
+        </p:nvSpPr>
+        <p:spPr>
+          <a:xfrm>
+            <a:off x="1097280" y="5029200"/>
+            <a:ext cx="9966960" cy="365760"/>
+          </a:xfrm>
+          <a:prstGeom prst="rect">
+            <a:avLst/>
+          </a:prstGeom>
+          <a:noFill/>
+        </p:spPr>
+        <p:txBody>
+          <a:bodyPr wrap="square">
+            <a:spAutoFit/>
+          </a:bodyPr>
+          <a:lstStyle/>
+          <a:p>
+            <a:pPr algn="l">
+              <a:defRPr sz="1300" b="0" i="0">
                 <a:solidFill>
                   <a:srgbClr val="8F95A3"/>
                 </a:solidFill>
@@ -4439,79 +4479,7 @@
               </a:defRPr>
             </a:pPr>
             <a:r>
-              <a:t>Retention Improvement</a:t>
-            </a:r>
-          </a:p>
-        </p:txBody>
-      </p:sp>
-      <p:sp>
-        <p:nvSpPr>
-          <p:cNvPr id="7" name="TextBox 6"/>
-          <p:cNvSpPr txBox="1"/>
-          <p:nvPr/>
-        </p:nvSpPr>
-        <p:spPr>
-          <a:xfrm>
-            <a:off x="1097280" y="3566160"/>
-            <a:ext cx="9966960" cy="457200"/>
-          </a:xfrm>
-          <a:prstGeom prst="rect">
-            <a:avLst/>
-          </a:prstGeom>
-          <a:noFill/>
-        </p:spPr>
-        <p:txBody>
-          <a:bodyPr wrap="square">
-            <a:spAutoFit/>
-          </a:bodyPr>
-          <a:lstStyle/>
-          <a:p>
-            <a:pPr algn="l">
-              <a:defRPr sz="1800" b="1" i="0">
-                <a:solidFill>
-                  <a:srgbClr val="FFFFFF"/>
-                </a:solidFill>
-                <a:latin typeface="Calibri"/>
-              </a:defRPr>
-            </a:pPr>
-            <a:r>
-              <a:t>Solitaire Achieves Major Retention Breakthrough</a:t>
-            </a:r>
-          </a:p>
-        </p:txBody>
-      </p:sp>
-      <p:sp>
-        <p:nvSpPr>
-          <p:cNvPr id="8" name="TextBox 7"/>
-          <p:cNvSpPr txBox="1"/>
-          <p:nvPr/>
-        </p:nvSpPr>
-        <p:spPr>
-          <a:xfrm>
-            <a:off x="1097280" y="4206240"/>
-            <a:ext cx="9966960" cy="1371600"/>
-          </a:xfrm>
-          <a:prstGeom prst="rect">
-            <a:avLst/>
-          </a:prstGeom>
-          <a:noFill/>
-        </p:spPr>
-        <p:txBody>
-          <a:bodyPr wrap="square">
-            <a:spAutoFit/>
-          </a:bodyPr>
-          <a:lstStyle/>
-          <a:p>
-            <a:pPr algn="l">
-              <a:defRPr sz="1500" b="0" i="0">
-                <a:solidFill>
-                  <a:srgbClr val="E2E2EA"/>
-                </a:solidFill>
-                <a:latin typeface="Calibri"/>
-              </a:defRPr>
-            </a:pPr>
-            <a:r>
-              <a:t>Our Solitaire game is making significant strides with bug fixes resolved, new level-up features boosting engagement, and quest data showing 8% improvement in early retention metrics.</a:t>
+              <a:t>Organized by Engineering Team</a:t>
             </a:r>
           </a:p>
         </p:txBody>
@@ -4557,7 +4525,7 @@
             <a:avLst/>
           </a:prstGeom>
           <a:solidFill>
-            <a:srgbClr val="F59E0B"/>
+            <a:srgbClr val="FF9800"/>
           </a:solidFill>
           <a:ln>
             <a:noFill/>
@@ -4610,13 +4578,13 @@
             <a:pPr algn="l">
               <a:defRPr sz="1000" b="1">
                 <a:solidFill>
-                  <a:srgbClr val="F59E0B"/>
-                </a:solidFill>
-                <a:latin typeface="Calibri"/>
-              </a:defRPr>
-            </a:pPr>
-            <a:r>
-              <a:t>⚡  WIN</a:t>
+                  <a:srgbClr val="FF9800"/>
+                </a:solidFill>
+                <a:latin typeface="Calibri"/>
+              </a:defRPr>
+            </a:pPr>
+            <a:r>
+              <a:t>🎯  OFFICE LIFE</a:t>
             </a:r>
           </a:p>
         </p:txBody>
@@ -4646,13 +4614,13 @@
             <a:pPr algn="l">
               <a:defRPr sz="3200" b="1" i="0">
                 <a:solidFill>
-                  <a:srgbClr val="F59E0B"/>
-                </a:solidFill>
-                <a:latin typeface="Calibri"/>
-              </a:defRPr>
-            </a:pPr>
-            <a:r>
-              <a:t>Campaign Optimization Win</a:t>
+                  <a:srgbClr val="FF9800"/>
+                </a:solidFill>
+                <a:latin typeface="Calibri"/>
+              </a:defRPr>
+            </a:pPr>
+            <a:r>
+              <a:t>Leadership Focus</a:t>
             </a:r>
           </a:p>
         </p:txBody>
@@ -4666,29 +4634,29 @@
         <p:spPr>
           <a:xfrm>
             <a:off x="1097280" y="2103120"/>
-            <a:ext cx="4572000" cy="822960"/>
-          </a:xfrm>
-          <a:prstGeom prst="rect">
-            <a:avLst/>
-          </a:prstGeom>
-          <a:noFill/>
-        </p:spPr>
-        <p:txBody>
-          <a:bodyPr wrap="square">
-            <a:spAutoFit/>
-          </a:bodyPr>
-          <a:lstStyle/>
-          <a:p>
-            <a:pPr algn="l">
-              <a:defRPr sz="4800" b="1" i="0">
-                <a:solidFill>
-                  <a:srgbClr val="F59E0B"/>
-                </a:solidFill>
-                <a:latin typeface="Calibri"/>
-              </a:defRPr>
-            </a:pPr>
-            <a:r>
-              <a:t>80% → 10%</a:t>
+            <a:ext cx="9966960" cy="457200"/>
+          </a:xfrm>
+          <a:prstGeom prst="rect">
+            <a:avLst/>
+          </a:prstGeom>
+          <a:noFill/>
+        </p:spPr>
+        <p:txBody>
+          <a:bodyPr wrap="square">
+            <a:spAutoFit/>
+          </a:bodyPr>
+          <a:lstStyle/>
+          <a:p>
+            <a:pPr algn="l">
+              <a:defRPr sz="1800" b="1" i="0">
+                <a:solidFill>
+                  <a:srgbClr val="FFFFFF"/>
+                </a:solidFill>
+                <a:latin typeface="Calibri"/>
+              </a:defRPr>
+            </a:pPr>
+            <a:r>
+              <a:t>Performance Review Kickoff</a:t>
             </a:r>
           </a:p>
         </p:txBody>
@@ -4701,22 +4669,58 @@
         </p:nvSpPr>
         <p:spPr>
           <a:xfrm>
-            <a:off x="1097280" y="2834640"/>
-            <a:ext cx="4572000" cy="365760"/>
-          </a:xfrm>
-          <a:prstGeom prst="rect">
-            <a:avLst/>
-          </a:prstGeom>
-          <a:noFill/>
-        </p:spPr>
-        <p:txBody>
-          <a:bodyPr wrap="square">
-            <a:spAutoFit/>
-          </a:bodyPr>
-          <a:lstStyle/>
-          <a:p>
-            <a:pPr algn="l">
-              <a:defRPr sz="1200" b="0" i="0">
+            <a:off x="1371600" y="2743200"/>
+            <a:ext cx="9692640" cy="1828800"/>
+          </a:xfrm>
+          <a:prstGeom prst="rect">
+            <a:avLst/>
+          </a:prstGeom>
+          <a:noFill/>
+        </p:spPr>
+        <p:txBody>
+          <a:bodyPr wrap="square">
+            <a:spAutoFit/>
+          </a:bodyPr>
+          <a:lstStyle/>
+          <a:p>
+            <a:pPr algn="l">
+              <a:defRPr sz="1500" b="0" i="1">
+                <a:solidFill>
+                  <a:srgbClr val="E2E2EA"/>
+                </a:solidFill>
+                <a:latin typeface="Calibri"/>
+              </a:defRPr>
+            </a:pPr>
+            <a:r>
+              <a:t>"Performance review kicks off today! We're keeping things light and focused with just 3 manager questions and self-assessments covering performance, culture, and psychological safety."</a:t>
+            </a:r>
+          </a:p>
+        </p:txBody>
+      </p:sp>
+      <p:sp>
+        <p:nvSpPr>
+          <p:cNvPr id="7" name="TextBox 6"/>
+          <p:cNvSpPr txBox="1"/>
+          <p:nvPr/>
+        </p:nvSpPr>
+        <p:spPr>
+          <a:xfrm>
+            <a:off x="1097280" y="4754880"/>
+            <a:ext cx="9966960" cy="365760"/>
+          </a:xfrm>
+          <a:prstGeom prst="rect">
+            <a:avLst/>
+          </a:prstGeom>
+          <a:noFill/>
+        </p:spPr>
+        <p:txBody>
+          <a:bodyPr wrap="square">
+            <a:spAutoFit/>
+          </a:bodyPr>
+          <a:lstStyle/>
+          <a:p>
+            <a:pPr algn="l">
+              <a:defRPr sz="1400" b="0" i="0">
                 <a:solidFill>
                   <a:srgbClr val="8F95A3"/>
                 </a:solidFill>
@@ -4724,20 +4728,20 @@
               </a:defRPr>
             </a:pPr>
             <a:r>
-              <a:t>Fail Rate Drop</a:t>
-            </a:r>
-          </a:p>
-        </p:txBody>
-      </p:sp>
-      <p:sp>
-        <p:nvSpPr>
-          <p:cNvPr id="7" name="TextBox 6"/>
-          <p:cNvSpPr txBox="1"/>
-          <p:nvPr/>
-        </p:nvSpPr>
-        <p:spPr>
-          <a:xfrm>
-            <a:off x="1097280" y="3291840"/>
+              <a:t>— Lise Brandely</a:t>
+            </a:r>
+          </a:p>
+        </p:txBody>
+      </p:sp>
+      <p:sp>
+        <p:nvSpPr>
+          <p:cNvPr id="8" name="TextBox 7"/>
+          <p:cNvSpPr txBox="1"/>
+          <p:nvPr/>
+        </p:nvSpPr>
+        <p:spPr>
+          <a:xfrm>
+            <a:off x="1097280" y="5212080"/>
             <a:ext cx="9966960" cy="365760"/>
           </a:xfrm>
           <a:prstGeom prst="rect">
@@ -4752,51 +4756,15 @@
           <a:lstStyle/>
           <a:p>
             <a:pPr algn="l">
-              <a:defRPr sz="1400" b="0" i="0">
-                <a:solidFill>
-                  <a:srgbClr val="E2E2EA"/>
-                </a:solidFill>
-                <a:latin typeface="Calibri"/>
-              </a:defRPr>
-            </a:pPr>
-            <a:r>
-              <a:t>by Marketing Team</a:t>
-            </a:r>
-          </a:p>
-        </p:txBody>
-      </p:sp>
-      <p:sp>
-        <p:nvSpPr>
-          <p:cNvPr id="8" name="TextBox 7"/>
-          <p:cNvSpPr txBox="1"/>
-          <p:nvPr/>
-        </p:nvSpPr>
-        <p:spPr>
-          <a:xfrm>
-            <a:off x="1097280" y="3840480"/>
-            <a:ext cx="9966960" cy="457200"/>
-          </a:xfrm>
-          <a:prstGeom prst="rect">
-            <a:avLst/>
-          </a:prstGeom>
-          <a:noFill/>
-        </p:spPr>
-        <p:txBody>
-          <a:bodyPr wrap="square">
-            <a:spAutoFit/>
-          </a:bodyPr>
-          <a:lstStyle/>
-          <a:p>
-            <a:pPr algn="l">
-              <a:defRPr sz="1800" b="1" i="0">
-                <a:solidFill>
-                  <a:srgbClr val="FFFFFF"/>
-                </a:solidFill>
-                <a:latin typeface="Calibri"/>
-              </a:defRPr>
-            </a:pPr>
-            <a:r>
-              <a:t>Smart Config Changes Drive Major Results</a:t>
+              <a:defRPr sz="1400" b="1" i="0">
+                <a:solidFill>
+                  <a:srgbClr val="FF9800"/>
+                </a:solidFill>
+                <a:latin typeface="Calibri"/>
+              </a:defRPr>
+            </a:pPr>
+            <a:r>
+              <a:t>👀 × 3, 🐱‍💻 × 3</a:t>
             </a:r>
           </a:p>
         </p:txBody>
@@ -4809,66 +4777,30 @@
         </p:nvSpPr>
         <p:spPr>
           <a:xfrm>
-            <a:off x="1097280" y="4389120"/>
-            <a:ext cx="9966960" cy="914400"/>
-          </a:xfrm>
-          <a:prstGeom prst="rect">
-            <a:avLst/>
-          </a:prstGeom>
-          <a:noFill/>
-        </p:spPr>
-        <p:txBody>
-          <a:bodyPr wrap="square">
-            <a:spAutoFit/>
-          </a:bodyPr>
-          <a:lstStyle/>
-          <a:p>
-            <a:pPr algn="l">
-              <a:defRPr sz="1400" b="0" i="0">
-                <a:solidFill>
-                  <a:srgbClr val="E2E2EA"/>
-                </a:solidFill>
-                <a:latin typeface="Calibri"/>
-              </a:defRPr>
-            </a:pPr>
-            <a:r>
-              <a:t>Warmaker campaign adjustments improved session length and progression dramatically. The configuration flexibility is proving to be a game-changer for user engagement.</a:t>
-            </a:r>
-          </a:p>
-        </p:txBody>
-      </p:sp>
-      <p:sp>
-        <p:nvSpPr>
-          <p:cNvPr id="10" name="TextBox 9"/>
-          <p:cNvSpPr txBox="1"/>
-          <p:nvPr/>
-        </p:nvSpPr>
-        <p:spPr>
-          <a:xfrm>
-            <a:off x="1097280" y="5486400"/>
-            <a:ext cx="9966960" cy="457200"/>
-          </a:xfrm>
-          <a:prstGeom prst="rect">
-            <a:avLst/>
-          </a:prstGeom>
-          <a:noFill/>
-        </p:spPr>
-        <p:txBody>
-          <a:bodyPr wrap="square">
-            <a:spAutoFit/>
-          </a:bodyPr>
-          <a:lstStyle/>
-          <a:p>
-            <a:pPr algn="l">
-              <a:defRPr sz="1300" b="0" i="1">
-                <a:solidFill>
-                  <a:srgbClr val="8F95A3"/>
-                </a:solidFill>
-                <a:latin typeface="Calibri"/>
-              </a:defRPr>
-            </a:pPr>
-            <a:r>
-              <a:t>💬 "Data-driven optimization delivers massive improvements"</a:t>
+            <a:off x="1097280" y="5760720"/>
+            <a:ext cx="9966960" cy="274320"/>
+          </a:xfrm>
+          <a:prstGeom prst="rect">
+            <a:avLst/>
+          </a:prstGeom>
+          <a:noFill/>
+        </p:spPr>
+        <p:txBody>
+          <a:bodyPr wrap="square">
+            <a:spAutoFit/>
+          </a:bodyPr>
+          <a:lstStyle/>
+          <a:p>
+            <a:pPr algn="l">
+              <a:defRPr sz="1100" b="0" i="0">
+                <a:solidFill>
+                  <a:srgbClr val="5C6270"/>
+                </a:solidFill>
+                <a:latin typeface="Calibri"/>
+              </a:defRPr>
+            </a:pPr>
+            <a:r>
+              <a:t>#general</a:t>
             </a:r>
           </a:p>
         </p:txBody>
@@ -4914,7 +4846,7 @@
             <a:avLst/>
           </a:prstGeom>
           <a:solidFill>
-            <a:srgbClr val="8B5CF6"/>
+            <a:srgbClr val="607D8B"/>
           </a:solidFill>
           <a:ln>
             <a:noFill/>
@@ -4967,13 +4899,13 @@
             <a:pPr algn="l">
               <a:defRPr sz="1000" b="1">
                 <a:solidFill>
-                  <a:srgbClr val="8B5CF6"/>
-                </a:solidFill>
-                <a:latin typeface="Calibri"/>
-              </a:defRPr>
-            </a:pPr>
-            <a:r>
-              <a:t>🤖  MILESTONE</a:t>
+                  <a:srgbClr val="607D8B"/>
+                </a:solidFill>
+                <a:latin typeface="Calibri"/>
+              </a:defRPr>
+            </a:pPr>
+            <a:r>
+              <a:t>🔧  MILESTONE</a:t>
             </a:r>
           </a:p>
         </p:txBody>
@@ -5003,13 +4935,13 @@
             <a:pPr algn="l">
               <a:defRPr sz="3200" b="1" i="0">
                 <a:solidFill>
-                  <a:srgbClr val="8B5CF6"/>
-                </a:solidFill>
-                <a:latin typeface="Calibri"/>
-              </a:defRPr>
-            </a:pPr>
-            <a:r>
-              <a:t>AI Innovation Progress</a:t>
+                  <a:srgbClr val="607D8B"/>
+                </a:solidFill>
+                <a:latin typeface="Calibri"/>
+              </a:defRPr>
+            </a:pPr>
+            <a:r>
+              <a:t>Engineering Standards</a:t>
             </a:r>
           </a:p>
         </p:txBody>
@@ -5039,13 +4971,13 @@
             <a:pPr algn="l">
               <a:defRPr sz="5200" b="1" i="0">
                 <a:solidFill>
-                  <a:srgbClr val="8B5CF6"/>
-                </a:solidFill>
-                <a:latin typeface="Calibri"/>
-              </a:defRPr>
-            </a:pPr>
-            <a:r>
-              <a:t>56</a:t>
+                  <a:srgbClr val="607D8B"/>
+                </a:solidFill>
+                <a:latin typeface="Calibri"/>
+              </a:defRPr>
+            </a:pPr>
+            <a:r>
+              <a:t>Managed</a:t>
             </a:r>
           </a:p>
         </p:txBody>
@@ -5081,7 +5013,7 @@
               </a:defRPr>
             </a:pPr>
             <a:r>
-              <a:t>Machines Testing AI System</a:t>
+              <a:t>deployment standards</a:t>
             </a:r>
           </a:p>
         </p:txBody>
@@ -5117,7 +5049,7 @@
               </a:defRPr>
             </a:pPr>
             <a:r>
-              <a:t>Automated Data Analysis Takes Shape</a:t>
+              <a:t>Security &amp; Deployment Excellence</a:t>
             </a:r>
           </a:p>
         </p:txBody>
@@ -5153,7 +5085,7 @@
               </a:defRPr>
             </a:pPr>
             <a:r>
-              <a:t>Our AI-powered data analysis system is being tested across 56 machines, designed to minimize manual work and errors. The AI agent is already generating and testing code, discovering bugs that affect 20% of our data.</a:t>
+              <a:t>Teams are making great progress building products and tools, especially non-engineering teams creating useful solutions. Now focusing on proper engineering and security practices as we scale, moving to managed deployments for better reliability.</a:t>
             </a:r>
           </a:p>
         </p:txBody>
@@ -5199,7 +5131,7 @@
             <a:avLst/>
           </a:prstGeom>
           <a:solidFill>
-            <a:srgbClr val="06B6D4"/>
+            <a:srgbClr val="8BC34A"/>
           </a:solidFill>
           <a:ln>
             <a:noFill/>
@@ -5252,13 +5184,13 @@
             <a:pPr algn="l">
               <a:defRPr sz="1000" b="1">
                 <a:solidFill>
-                  <a:srgbClr val="06B6D4"/>
-                </a:solidFill>
-                <a:latin typeface="Calibri"/>
-              </a:defRPr>
-            </a:pPr>
-            <a:r>
-              <a:t>📱  WIN</a:t>
+                  <a:srgbClr val="8BC34A"/>
+                </a:solidFill>
+                <a:latin typeface="Calibri"/>
+              </a:defRPr>
+            </a:pPr>
+            <a:r>
+              <a:t>🎮  WIN</a:t>
             </a:r>
           </a:p>
         </p:txBody>
@@ -5288,13 +5220,13 @@
             <a:pPr algn="l">
               <a:defRPr sz="3200" b="1" i="0">
                 <a:solidFill>
-                  <a:srgbClr val="06B6D4"/>
-                </a:solidFill>
-                <a:latin typeface="Calibri"/>
-              </a:defRPr>
-            </a:pPr>
-            <a:r>
-              <a:t>SDK Platform Progress</a:t>
+                  <a:srgbClr val="8BC34A"/>
+                </a:solidFill>
+                <a:latin typeface="Calibri"/>
+              </a:defRPr>
+            </a:pPr>
+            <a:r>
+              <a:t>Gaming Success</a:t>
             </a:r>
           </a:p>
         </p:txBody>
@@ -5324,13 +5256,13 @@
             <a:pPr algn="l">
               <a:defRPr sz="4800" b="1" i="0">
                 <a:solidFill>
-                  <a:srgbClr val="06B6D4"/>
-                </a:solidFill>
-                <a:latin typeface="Calibri"/>
-              </a:defRPr>
-            </a:pPr>
-            <a:r>
-              <a:t>4.1.0</a:t>
+                  <a:srgbClr val="8BC34A"/>
+                </a:solidFill>
+                <a:latin typeface="Calibri"/>
+              </a:defRPr>
+            </a:pPr>
+            <a:r>
+              <a:t>30%</a:t>
             </a:r>
           </a:p>
         </p:txBody>
@@ -5366,7 +5298,7 @@
               </a:defRPr>
             </a:pPr>
             <a:r>
-              <a:t>Version Release</a:t>
+              <a:t>ARPDAU increase</a:t>
             </a:r>
           </a:p>
         </p:txBody>
@@ -5402,7 +5334,7 @@
               </a:defRPr>
             </a:pPr>
             <a:r>
-              <a:t>by Mediation Team</a:t>
+              <a:t>by Game Development Teams</a:t>
             </a:r>
           </a:p>
         </p:txBody>
@@ -5438,7 +5370,7 @@
               </a:defRPr>
             </a:pPr>
             <a:r>
-              <a:t>SDK Development on Track for April</a:t>
+              <a:t>Screw Twist Performance Boost</a:t>
             </a:r>
           </a:p>
         </p:txBody>
@@ -5474,7 +5406,7 @@
               </a:defRPr>
             </a:pPr>
             <a:r>
-              <a:t>SDK version 4.1.0 is planned for April with only 9 work items remaining. Cross-platform solutions are being successfully tested on both iOS and Android.</a:t>
+              <a:t>Version 1.3.5 launched with new onboarding levels and increased interstitial ad frequency, targeting improved retention and reduced churn.</a:t>
             </a:r>
           </a:p>
         </p:txBody>
@@ -5510,7 +5442,7 @@
               </a:defRPr>
             </a:pPr>
             <a:r>
-              <a:t>💬 "Solid progress toward our next major SDK milestone"</a:t>
+              <a:t>💬 "Strategic product updates are directly translating to revenue growth"</a:t>
             </a:r>
           </a:p>
         </p:txBody>
@@ -5556,7 +5488,7 @@
             <a:avLst/>
           </a:prstGeom>
           <a:solidFill>
-            <a:srgbClr val="10B981"/>
+            <a:srgbClr val="FF9800"/>
           </a:solidFill>
           <a:ln>
             <a:noFill/>
@@ -5609,13 +5541,13 @@
             <a:pPr algn="l">
               <a:defRPr sz="1000" b="1">
                 <a:solidFill>
-                  <a:srgbClr val="10B981"/>
-                </a:solidFill>
-                <a:latin typeface="Calibri"/>
-              </a:defRPr>
-            </a:pPr>
-            <a:r>
-              <a:t>💰  WIN</a:t>
+                  <a:srgbClr val="FF9800"/>
+                </a:solidFill>
+                <a:latin typeface="Calibri"/>
+              </a:defRPr>
+            </a:pPr>
+            <a:r>
+              <a:t>💪  CLAPS</a:t>
             </a:r>
           </a:p>
         </p:txBody>
@@ -5645,13 +5577,13 @@
             <a:pPr algn="l">
               <a:defRPr sz="3200" b="1" i="0">
                 <a:solidFill>
-                  <a:srgbClr val="10B981"/>
-                </a:solidFill>
-                <a:latin typeface="Calibri"/>
-              </a:defRPr>
-            </a:pPr>
-            <a:r>
-              <a:t>Revenue Growth Engine</a:t>
+                  <a:srgbClr val="FF9800"/>
+                </a:solidFill>
+                <a:latin typeface="Calibri"/>
+              </a:defRPr>
+            </a:pPr>
+            <a:r>
+              <a:t>Cross-Team Excellence</a:t>
             </a:r>
           </a:p>
         </p:txBody>
@@ -5665,29 +5597,29 @@
         <p:spPr>
           <a:xfrm>
             <a:off x="1097280" y="2103120"/>
-            <a:ext cx="4572000" cy="822960"/>
-          </a:xfrm>
-          <a:prstGeom prst="rect">
-            <a:avLst/>
-          </a:prstGeom>
-          <a:noFill/>
-        </p:spPr>
-        <p:txBody>
-          <a:bodyPr wrap="square">
-            <a:spAutoFit/>
-          </a:bodyPr>
-          <a:lstStyle/>
-          <a:p>
-            <a:pPr algn="l">
-              <a:defRPr sz="4800" b="1" i="0">
-                <a:solidFill>
-                  <a:srgbClr val="10B981"/>
-                </a:solidFill>
-                <a:latin typeface="Calibri"/>
-              </a:defRPr>
-            </a:pPr>
-            <a:r>
-              <a:t>$100M</a:t>
+            <a:ext cx="2743200" cy="548640"/>
+          </a:xfrm>
+          <a:prstGeom prst="rect">
+            <a:avLst/>
+          </a:prstGeom>
+          <a:noFill/>
+        </p:spPr>
+        <p:txBody>
+          <a:bodyPr wrap="square">
+            <a:spAutoFit/>
+          </a:bodyPr>
+          <a:lstStyle/>
+          <a:p>
+            <a:pPr algn="l">
+              <a:defRPr sz="2800" b="1" i="0">
+                <a:solidFill>
+                  <a:srgbClr val="FF9800"/>
+                </a:solidFill>
+                <a:latin typeface="Calibri"/>
+              </a:defRPr>
+            </a:pPr>
+            <a:r>
+              <a:t>25</a:t>
             </a:r>
           </a:p>
         </p:txBody>
@@ -5700,30 +5632,30 @@
         </p:nvSpPr>
         <p:spPr>
           <a:xfrm>
-            <a:off x="1097280" y="2834640"/>
-            <a:ext cx="4572000" cy="365760"/>
-          </a:xfrm>
-          <a:prstGeom prst="rect">
-            <a:avLst/>
-          </a:prstGeom>
-          <a:noFill/>
-        </p:spPr>
-        <p:txBody>
-          <a:bodyPr wrap="square">
-            <a:spAutoFit/>
-          </a:bodyPr>
-          <a:lstStyle/>
-          <a:p>
-            <a:pPr algn="l">
-              <a:defRPr sz="1200" b="0" i="0">
-                <a:solidFill>
-                  <a:srgbClr val="8F95A3"/>
-                </a:solidFill>
-                <a:latin typeface="Calibri"/>
-              </a:defRPr>
-            </a:pPr>
-            <a:r>
-              <a:t>Gross Profit</a:t>
+            <a:off x="1097280" y="2651760"/>
+            <a:ext cx="9966960" cy="365760"/>
+          </a:xfrm>
+          <a:prstGeom prst="rect">
+            <a:avLst/>
+          </a:prstGeom>
+          <a:noFill/>
+        </p:spPr>
+        <p:txBody>
+          <a:bodyPr wrap="square">
+            <a:spAutoFit/>
+          </a:bodyPr>
+          <a:lstStyle/>
+          <a:p>
+            <a:pPr algn="l">
+              <a:defRPr sz="1400" b="0" i="0">
+                <a:solidFill>
+                  <a:srgbClr val="E2E2EA"/>
+                </a:solidFill>
+                <a:latin typeface="Calibri"/>
+              </a:defRPr>
+            </a:pPr>
+            <a:r>
+              <a:t>from Sergey Orlov</a:t>
             </a:r>
           </a:p>
         </p:txBody>
@@ -5736,7 +5668,7 @@
         </p:nvSpPr>
         <p:spPr>
           <a:xfrm>
-            <a:off x="1097280" y="3291840"/>
+            <a:off x="1097280" y="3108960"/>
             <a:ext cx="9966960" cy="365760"/>
           </a:xfrm>
           <a:prstGeom prst="rect">
@@ -5751,7 +5683,43 @@
           <a:lstStyle/>
           <a:p>
             <a:pPr algn="l">
-              <a:defRPr sz="1400" b="0" i="0">
+              <a:defRPr sz="1400" b="1" i="0">
+                <a:solidFill>
+                  <a:srgbClr val="FFFFFF"/>
+                </a:solidFill>
+                <a:latin typeface="Calibri"/>
+              </a:defRPr>
+            </a:pPr>
+            <a:r>
+              <a:t>to: Roman de las Heras</a:t>
+            </a:r>
+          </a:p>
+        </p:txBody>
+      </p:sp>
+      <p:sp>
+        <p:nvSpPr>
+          <p:cNvPr id="8" name="TextBox 7"/>
+          <p:cNvSpPr txBox="1"/>
+          <p:nvPr/>
+        </p:nvSpPr>
+        <p:spPr>
+          <a:xfrm>
+            <a:off x="1097280" y="3749039"/>
+            <a:ext cx="9966960" cy="1097280"/>
+          </a:xfrm>
+          <a:prstGeom prst="rect">
+            <a:avLst/>
+          </a:prstGeom>
+          <a:noFill/>
+        </p:spPr>
+        <p:txBody>
+          <a:bodyPr wrap="square">
+            <a:spAutoFit/>
+          </a:bodyPr>
+          <a:lstStyle/>
+          <a:p>
+            <a:pPr algn="l">
+              <a:defRPr sz="1500" b="0" i="1">
                 <a:solidFill>
                   <a:srgbClr val="E2E2EA"/>
                 </a:solidFill>
@@ -5759,20 +5727,20 @@
               </a:defRPr>
             </a:pPr>
             <a:r>
-              <a:t>by Company</a:t>
-            </a:r>
-          </a:p>
-        </p:txBody>
-      </p:sp>
-      <p:sp>
-        <p:nvSpPr>
-          <p:cNvPr id="8" name="TextBox 7"/>
-          <p:cNvSpPr txBox="1"/>
-          <p:nvPr/>
-        </p:nvSpPr>
-        <p:spPr>
-          <a:xfrm>
-            <a:off x="1097280" y="3840480"/>
+              <a:t>"Outstanding project delivery and team collaboration"</a:t>
+            </a:r>
+          </a:p>
+        </p:txBody>
+      </p:sp>
+      <p:sp>
+        <p:nvSpPr>
+          <p:cNvPr id="9" name="TextBox 8"/>
+          <p:cNvSpPr txBox="1"/>
+          <p:nvPr/>
+        </p:nvSpPr>
+        <p:spPr>
+          <a:xfrm>
+            <a:off x="1097280" y="5120640"/>
             <a:ext cx="9966960" cy="457200"/>
           </a:xfrm>
           <a:prstGeom prst="rect">
@@ -5787,87 +5755,15 @@
           <a:lstStyle/>
           <a:p>
             <a:pPr algn="l">
-              <a:defRPr sz="1800" b="1" i="0">
-                <a:solidFill>
-                  <a:srgbClr val="FFFFFF"/>
-                </a:solidFill>
-                <a:latin typeface="Calibri"/>
-              </a:defRPr>
-            </a:pPr>
-            <a:r>
-              <a:t>Strong Financial Foundation</a:t>
-            </a:r>
-          </a:p>
-        </p:txBody>
-      </p:sp>
-      <p:sp>
-        <p:nvSpPr>
-          <p:cNvPr id="9" name="TextBox 8"/>
-          <p:cNvSpPr txBox="1"/>
-          <p:nvPr/>
-        </p:nvSpPr>
-        <p:spPr>
-          <a:xfrm>
-            <a:off x="1097280" y="4389120"/>
-            <a:ext cx="9966960" cy="914400"/>
-          </a:xfrm>
-          <a:prstGeom prst="rect">
-            <a:avLst/>
-          </a:prstGeom>
-          <a:noFill/>
-        </p:spPr>
-        <p:txBody>
-          <a:bodyPr wrap="square">
-            <a:spAutoFit/>
-          </a:bodyPr>
-          <a:lstStyle/>
-          <a:p>
-            <a:pPr algn="l">
-              <a:defRPr sz="1400" b="0" i="0">
-                <a:solidFill>
-                  <a:srgbClr val="E2E2EA"/>
-                </a:solidFill>
-                <a:latin typeface="Calibri"/>
-              </a:defRPr>
-            </a:pPr>
-            <a:r>
-              <a:t>We've achieved approximately $100M in gross profit with $20M EBITDA, positioning us for 40% year-over-year growth as we build toward our ambitious vision.</a:t>
-            </a:r>
-          </a:p>
-        </p:txBody>
-      </p:sp>
-      <p:sp>
-        <p:nvSpPr>
-          <p:cNvPr id="10" name="TextBox 9"/>
-          <p:cNvSpPr txBox="1"/>
-          <p:nvPr/>
-        </p:nvSpPr>
-        <p:spPr>
-          <a:xfrm>
-            <a:off x="1097280" y="5486400"/>
-            <a:ext cx="9966960" cy="457200"/>
-          </a:xfrm>
-          <a:prstGeom prst="rect">
-            <a:avLst/>
-          </a:prstGeom>
-          <a:noFill/>
-        </p:spPr>
-        <p:txBody>
-          <a:bodyPr wrap="square">
-            <a:spAutoFit/>
-          </a:bodyPr>
-          <a:lstStyle/>
-          <a:p>
-            <a:pPr algn="l">
-              <a:defRPr sz="1300" b="0" i="1">
-                <a:solidFill>
-                  <a:srgbClr val="8F95A3"/>
-                </a:solidFill>
-                <a:latin typeface="Calibri"/>
-              </a:defRPr>
-            </a:pPr>
-            <a:r>
-              <a:t>💬 "Solid fundamentals fuel our expansion plans"</a:t>
+              <a:defRPr sz="1200" b="1" i="0">
+                <a:solidFill>
+                  <a:srgbClr val="FF9800"/>
+                </a:solidFill>
+                <a:latin typeface="Calibri"/>
+              </a:defRPr>
+            </a:pPr>
+            <a:r>
+              <a:t>Excellence · Teamwork</a:t>
             </a:r>
           </a:p>
         </p:txBody>
@@ -5913,7 +5809,7 @@
             <a:avLst/>
           </a:prstGeom>
           <a:solidFill>
-            <a:srgbClr val="DC2626"/>
+            <a:srgbClr val="4CAF50"/>
           </a:solidFill>
           <a:ln>
             <a:noFill/>
@@ -5966,13 +5862,13 @@
             <a:pPr algn="l">
               <a:defRPr sz="1000" b="1">
                 <a:solidFill>
-                  <a:srgbClr val="DC2626"/>
-                </a:solidFill>
-                <a:latin typeface="Calibri"/>
-              </a:defRPr>
-            </a:pPr>
-            <a:r>
-              <a:t>🎯  MILESTONE</a:t>
+                  <a:srgbClr val="4CAF50"/>
+                </a:solidFill>
+                <a:latin typeface="Calibri"/>
+              </a:defRPr>
+            </a:pPr>
+            <a:r>
+              <a:t>🏆  MILESTONE</a:t>
             </a:r>
           </a:p>
         </p:txBody>
@@ -6002,13 +5898,13 @@
             <a:pPr algn="l">
               <a:defRPr sz="3200" b="1" i="0">
                 <a:solidFill>
-                  <a:srgbClr val="DC2626"/>
-                </a:solidFill>
-                <a:latin typeface="Calibri"/>
-              </a:defRPr>
-            </a:pPr>
-            <a:r>
-              <a:t>AI-Powered Efficiency</a:t>
+                  <a:srgbClr val="4CAF50"/>
+                </a:solidFill>
+                <a:latin typeface="Calibri"/>
+              </a:defRPr>
+            </a:pPr>
+            <a:r>
+              <a:t>Product Excellence</a:t>
             </a:r>
           </a:p>
         </p:txBody>
@@ -6038,13 +5934,13 @@
             <a:pPr algn="l">
               <a:defRPr sz="5200" b="1" i="0">
                 <a:solidFill>
-                  <a:srgbClr val="DC2626"/>
-                </a:solidFill>
-                <a:latin typeface="Calibri"/>
-              </a:defRPr>
-            </a:pPr>
-            <a:r>
-              <a:t>1,000+</a:t>
+                  <a:srgbClr val="4CAF50"/>
+                </a:solidFill>
+                <a:latin typeface="Calibri"/>
+              </a:defRPr>
+            </a:pPr>
+            <a:r>
+              <a:t>Precision Testing</a:t>
             </a:r>
           </a:p>
         </p:txBody>
@@ -6080,7 +5976,7 @@
               </a:defRPr>
             </a:pPr>
             <a:r>
-              <a:t>Daily OKR Checks</a:t>
+              <a:t>capability launched</a:t>
             </a:r>
           </a:p>
         </p:txBody>
@@ -6116,7 +6012,7 @@
               </a:defRPr>
             </a:pPr>
             <a:r>
-              <a:t>OKR Auditor Transforms Goal Tracking</a:t>
+              <a:t>TV Monkey Model Deployed</a:t>
             </a:r>
           </a:p>
         </p:txBody>
@@ -6152,7 +6048,7 @@
               </a:defRPr>
             </a:pPr>
             <a:r>
-              <a:t>Our AI OKR Auditor now checks over 1,000 individual OKRs daily, bringing unprecedented visibility and accountability to our goal-setting process across all teams.</a:t>
+              <a:t>Forecast model successfully integrated with acquisition team, including bundle ID, network, and country data for future precision testing and improved campaign optimization.</a:t>
             </a:r>
           </a:p>
         </p:txBody>
@@ -6198,7 +6094,7 @@
             <a:avLst/>
           </a:prstGeom>
           <a:solidFill>
-            <a:srgbClr val="8B5CF6"/>
+            <a:srgbClr val="9C27B0"/>
           </a:solidFill>
           <a:ln>
             <a:noFill/>
@@ -6251,13 +6147,13 @@
             <a:pPr algn="l">
               <a:defRPr sz="1000" b="1">
                 <a:solidFill>
-                  <a:srgbClr val="8B5CF6"/>
-                </a:solidFill>
-                <a:latin typeface="Calibri"/>
-              </a:defRPr>
-            </a:pPr>
-            <a:r>
-              <a:t>🛡️  WIN</a:t>
+                  <a:srgbClr val="9C27B0"/>
+                </a:solidFill>
+                <a:latin typeface="Calibri"/>
+              </a:defRPr>
+            </a:pPr>
+            <a:r>
+              <a:t>🌟  OFFICE LIFE</a:t>
             </a:r>
           </a:p>
         </p:txBody>
@@ -6287,13 +6183,13 @@
             <a:pPr algn="l">
               <a:defRPr sz="3200" b="1" i="0">
                 <a:solidFill>
-                  <a:srgbClr val="8B5CF6"/>
-                </a:solidFill>
-                <a:latin typeface="Calibri"/>
-              </a:defRPr>
-            </a:pPr>
-            <a:r>
-              <a:t>Security Victory</a:t>
+                  <a:srgbClr val="9C27B0"/>
+                </a:solidFill>
+                <a:latin typeface="Calibri"/>
+              </a:defRPr>
+            </a:pPr>
+            <a:r>
+              <a:t>Innovation Mindset</a:t>
             </a:r>
           </a:p>
         </p:txBody>
@@ -6307,29 +6203,29 @@
         <p:spPr>
           <a:xfrm>
             <a:off x="1097280" y="2103120"/>
-            <a:ext cx="4572000" cy="822960"/>
-          </a:xfrm>
-          <a:prstGeom prst="rect">
-            <a:avLst/>
-          </a:prstGeom>
-          <a:noFill/>
-        </p:spPr>
-        <p:txBody>
-          <a:bodyPr wrap="square">
-            <a:spAutoFit/>
-          </a:bodyPr>
-          <a:lstStyle/>
-          <a:p>
-            <a:pPr algn="l">
-              <a:defRPr sz="4800" b="1" i="0">
-                <a:solidFill>
-                  <a:srgbClr val="8B5CF6"/>
-                </a:solidFill>
-                <a:latin typeface="Calibri"/>
-              </a:defRPr>
-            </a:pPr>
-            <a:r>
-              <a:t>22% → 4%</a:t>
+            <a:ext cx="9966960" cy="457200"/>
+          </a:xfrm>
+          <a:prstGeom prst="rect">
+            <a:avLst/>
+          </a:prstGeom>
+          <a:noFill/>
+        </p:spPr>
+        <p:txBody>
+          <a:bodyPr wrap="square">
+            <a:spAutoFit/>
+          </a:bodyPr>
+          <a:lstStyle/>
+          <a:p>
+            <a:pPr algn="l">
+              <a:defRPr sz="1800" b="1" i="0">
+                <a:solidFill>
+                  <a:srgbClr val="FFFFFF"/>
+                </a:solidFill>
+                <a:latin typeface="Calibri"/>
+              </a:defRPr>
+            </a:pPr>
+            <a:r>
+              <a:t>Build, Ship, Improve Culture</a:t>
             </a:r>
           </a:p>
         </p:txBody>
@@ -6342,22 +6238,58 @@
         </p:nvSpPr>
         <p:spPr>
           <a:xfrm>
-            <a:off x="1097280" y="2834640"/>
-            <a:ext cx="4572000" cy="365760"/>
-          </a:xfrm>
-          <a:prstGeom prst="rect">
-            <a:avLst/>
-          </a:prstGeom>
-          <a:noFill/>
-        </p:spPr>
-        <p:txBody>
-          <a:bodyPr wrap="square">
-            <a:spAutoFit/>
-          </a:bodyPr>
-          <a:lstStyle/>
-          <a:p>
-            <a:pPr algn="l">
-              <a:defRPr sz="1200" b="0" i="0">
+            <a:off x="1371600" y="2743200"/>
+            <a:ext cx="9692640" cy="1828800"/>
+          </a:xfrm>
+          <a:prstGeom prst="rect">
+            <a:avLst/>
+          </a:prstGeom>
+          <a:noFill/>
+        </p:spPr>
+        <p:txBody>
+          <a:bodyPr wrap="square">
+            <a:spAutoFit/>
+          </a:bodyPr>
+          <a:lstStyle/>
+          <a:p>
+            <a:pPr algn="l">
+              <a:defRPr sz="1500" b="0" i="1">
+                <a:solidFill>
+                  <a:srgbClr val="E2E2EA"/>
+                </a:solidFill>
+                <a:latin typeface="Calibri"/>
+              </a:defRPr>
+            </a:pPr>
+            <a:r>
+              <a:t>"It's especially exciting to see how quickly non-engineering teams have created so many useful tools. This is a strong sign that we're learning fast and moving in the right direction."</a:t>
+            </a:r>
+          </a:p>
+        </p:txBody>
+      </p:sp>
+      <p:sp>
+        <p:nvSpPr>
+          <p:cNvPr id="7" name="TextBox 6"/>
+          <p:cNvSpPr txBox="1"/>
+          <p:nvPr/>
+        </p:nvSpPr>
+        <p:spPr>
+          <a:xfrm>
+            <a:off x="1097280" y="4754880"/>
+            <a:ext cx="9966960" cy="365760"/>
+          </a:xfrm>
+          <a:prstGeom prst="rect">
+            <a:avLst/>
+          </a:prstGeom>
+          <a:noFill/>
+        </p:spPr>
+        <p:txBody>
+          <a:bodyPr wrap="square">
+            <a:spAutoFit/>
+          </a:bodyPr>
+          <a:lstStyle/>
+          <a:p>
+            <a:pPr algn="l">
+              <a:defRPr sz="1400" b="0" i="0">
                 <a:solidFill>
                   <a:srgbClr val="8F95A3"/>
                 </a:solidFill>
@@ -6365,20 +6297,20 @@
               </a:defRPr>
             </a:pPr>
             <a:r>
-              <a:t>Fraud Reduction</a:t>
-            </a:r>
-          </a:p>
-        </p:txBody>
-      </p:sp>
-      <p:sp>
-        <p:nvSpPr>
-          <p:cNvPr id="7" name="TextBox 6"/>
-          <p:cNvSpPr txBox="1"/>
-          <p:nvPr/>
-        </p:nvSpPr>
-        <p:spPr>
-          <a:xfrm>
-            <a:off x="1097280" y="3291840"/>
+              <a:t>— Leadership Team</a:t>
+            </a:r>
+          </a:p>
+        </p:txBody>
+      </p:sp>
+      <p:sp>
+        <p:nvSpPr>
+          <p:cNvPr id="8" name="TextBox 7"/>
+          <p:cNvSpPr txBox="1"/>
+          <p:nvPr/>
+        </p:nvSpPr>
+        <p:spPr>
+          <a:xfrm>
+            <a:off x="1097280" y="5212080"/>
             <a:ext cx="9966960" cy="365760"/>
           </a:xfrm>
           <a:prstGeom prst="rect">
@@ -6393,51 +6325,15 @@
           <a:lstStyle/>
           <a:p>
             <a:pPr algn="l">
-              <a:defRPr sz="1400" b="0" i="0">
-                <a:solidFill>
-                  <a:srgbClr val="E2E2EA"/>
-                </a:solidFill>
-                <a:latin typeface="Calibri"/>
-              </a:defRPr>
-            </a:pPr>
-            <a:r>
-              <a:t>by Platform Team</a:t>
-            </a:r>
-          </a:p>
-        </p:txBody>
-      </p:sp>
-      <p:sp>
-        <p:nvSpPr>
-          <p:cNvPr id="8" name="TextBox 7"/>
-          <p:cNvSpPr txBox="1"/>
-          <p:nvPr/>
-        </p:nvSpPr>
-        <p:spPr>
-          <a:xfrm>
-            <a:off x="1097280" y="3840480"/>
-            <a:ext cx="9966960" cy="457200"/>
-          </a:xfrm>
-          <a:prstGeom prst="rect">
-            <a:avLst/>
-          </a:prstGeom>
-          <a:noFill/>
-        </p:spPr>
-        <p:txBody>
-          <a:bodyPr wrap="square">
-            <a:spAutoFit/>
-          </a:bodyPr>
-          <a:lstStyle/>
-          <a:p>
-            <a:pPr algn="l">
-              <a:defRPr sz="1800" b="1" i="0">
-                <a:solidFill>
-                  <a:srgbClr val="FFFFFF"/>
-                </a:solidFill>
-                <a:latin typeface="Calibri"/>
-              </a:defRPr>
-            </a:pPr>
-            <a:r>
-              <a:t>Dynamic SDK Signatures Crush Fraud</a:t>
+              <a:defRPr sz="1400" b="1" i="0">
+                <a:solidFill>
+                  <a:srgbClr val="9C27B0"/>
+                </a:solidFill>
+                <a:latin typeface="Calibri"/>
+              </a:defRPr>
+            </a:pPr>
+            <a:r>
+              <a:t>🐱‍💻 × 11, 👏 × 15, 🔥 × 16</a:t>
             </a:r>
           </a:p>
         </p:txBody>
@@ -6450,66 +6346,30 @@
         </p:nvSpPr>
         <p:spPr>
           <a:xfrm>
-            <a:off x="1097280" y="4389120"/>
-            <a:ext cx="9966960" cy="914400"/>
-          </a:xfrm>
-          <a:prstGeom prst="rect">
-            <a:avLst/>
-          </a:prstGeom>
-          <a:noFill/>
-        </p:spPr>
-        <p:txBody>
-          <a:bodyPr wrap="square">
-            <a:spAutoFit/>
-          </a:bodyPr>
-          <a:lstStyle/>
-          <a:p>
-            <a:pPr algn="l">
-              <a:defRPr sz="1400" b="0" i="0">
-                <a:solidFill>
-                  <a:srgbClr val="E2E2EA"/>
-                </a:solidFill>
-                <a:latin typeface="Calibri"/>
-              </a:defRPr>
-            </a:pPr>
-            <a:r>
-              <a:t>Our advanced fraud detection system using dynamic SDK signatures has dramatically reduced fraud from 22% to under 4%, protecting our platform and partners.</a:t>
-            </a:r>
-          </a:p>
-        </p:txBody>
-      </p:sp>
-      <p:sp>
-        <p:nvSpPr>
-          <p:cNvPr id="10" name="TextBox 9"/>
-          <p:cNvSpPr txBox="1"/>
-          <p:nvPr/>
-        </p:nvSpPr>
-        <p:spPr>
-          <a:xfrm>
-            <a:off x="1097280" y="5486400"/>
-            <a:ext cx="9966960" cy="457200"/>
-          </a:xfrm>
-          <a:prstGeom prst="rect">
-            <a:avLst/>
-          </a:prstGeom>
-          <a:noFill/>
-        </p:spPr>
-        <p:txBody>
-          <a:bodyPr wrap="square">
-            <a:spAutoFit/>
-          </a:bodyPr>
-          <a:lstStyle/>
-          <a:p>
-            <a:pPr algn="l">
-              <a:defRPr sz="1300" b="0" i="1">
-                <a:solidFill>
-                  <a:srgbClr val="8F95A3"/>
-                </a:solidFill>
-                <a:latin typeface="Calibri"/>
-              </a:defRPr>
-            </a:pPr>
-            <a:r>
-              <a:t>💬 "Smart security innovations deliver massive results"</a:t>
+            <a:off x="1097280" y="5760720"/>
+            <a:ext cx="9966960" cy="274320"/>
+          </a:xfrm>
+          <a:prstGeom prst="rect">
+            <a:avLst/>
+          </a:prstGeom>
+          <a:noFill/>
+        </p:spPr>
+        <p:txBody>
+          <a:bodyPr wrap="square">
+            <a:spAutoFit/>
+          </a:bodyPr>
+          <a:lstStyle/>
+          <a:p>
+            <a:pPr algn="l">
+              <a:defRPr sz="1100" b="0" i="0">
+                <a:solidFill>
+                  <a:srgbClr val="5C6270"/>
+                </a:solidFill>
+                <a:latin typeface="Calibri"/>
+              </a:defRPr>
+            </a:pPr>
+            <a:r>
+              <a:t>#general</a:t>
             </a:r>
           </a:p>
         </p:txBody>
@@ -6555,7 +6415,7 @@
             <a:avLst/>
           </a:prstGeom>
           <a:solidFill>
-            <a:srgbClr val="F59E0B"/>
+            <a:srgbClr val="E91E63"/>
           </a:solidFill>
           <a:ln>
             <a:noFill/>
@@ -6608,7 +6468,7 @@
             <a:pPr algn="l">
               <a:defRPr sz="1000" b="1">
                 <a:solidFill>
-                  <a:srgbClr val="F59E0B"/>
+                  <a:srgbClr val="E91E63"/>
                 </a:solidFill>
                 <a:latin typeface="Calibri"/>
               </a:defRPr>
@@ -6644,13 +6504,13 @@
             <a:pPr algn="l">
               <a:defRPr sz="3200" b="1" i="0">
                 <a:solidFill>
-                  <a:srgbClr val="F59E0B"/>
-                </a:solidFill>
-                <a:latin typeface="Calibri"/>
-              </a:defRPr>
-            </a:pPr>
-            <a:r>
-              <a:t>Birthday Celebration</a:t>
+                  <a:srgbClr val="E91E63"/>
+                </a:solidFill>
+                <a:latin typeface="Calibri"/>
+              </a:defRPr>
+            </a:pPr>
+            <a:r>
+              <a:t>Birthday Celebrations</a:t>
             </a:r>
           </a:p>
         </p:txBody>
@@ -6686,7 +6546,7 @@
               </a:defRPr>
             </a:pPr>
             <a:r>
-              <a:t>Armaan Pandher</a:t>
+              <a:t>Anna Kolyada, Mikhail Ladutko &amp; Armaan Pandher</a:t>
             </a:r>
           </a:p>
         </p:txBody>
@@ -6758,7 +6618,7 @@
               </a:defRPr>
             </a:pPr>
             <a:r>
-              <a:t>Thank you all for the wonderful birthday wishes! Your support means the world to me. Here's to another amazing year at Appodeal!</a:t>
+              <a:t>The whole team is sending warm wishes and celebrating these amazing colleagues today!</a:t>
             </a:r>
           </a:p>
         </p:txBody>
@@ -6788,13 +6648,13 @@
             <a:pPr algn="l">
               <a:defRPr sz="1400" b="0" i="1">
                 <a:solidFill>
-                  <a:srgbClr val="F59E0B"/>
-                </a:solidFill>
-                <a:latin typeface="Calibri"/>
-              </a:defRPr>
-            </a:pPr>
-            <a:r>
-              <a:t>Product Team</a:t>
+                  <a:srgbClr val="E91E63"/>
+                </a:solidFill>
+                <a:latin typeface="Calibri"/>
+              </a:defRPr>
+            </a:pPr>
+            <a:r>
+              <a:t>Anna leads our daily yoga sessions, Mikhail brings technical excellence, and Armaan adds fresh energy to the team</a:t>
             </a:r>
           </a:p>
         </p:txBody>
@@ -6840,7 +6700,7 @@
             <a:avLst/>
           </a:prstGeom>
           <a:solidFill>
-            <a:srgbClr val="F59E0B"/>
+            <a:srgbClr val="2196F3"/>
           </a:solidFill>
           <a:ln>
             <a:noFill/>
@@ -6893,13 +6753,13 @@
             <a:pPr algn="l">
               <a:defRPr sz="1000" b="1">
                 <a:solidFill>
-                  <a:srgbClr val="F59E0B"/>
-                </a:solidFill>
-                <a:latin typeface="Calibri"/>
-              </a:defRPr>
-            </a:pPr>
-            <a:r>
-              <a:t>📚  MILESTONE</a:t>
+                  <a:srgbClr val="2196F3"/>
+                </a:solidFill>
+                <a:latin typeface="Calibri"/>
+              </a:defRPr>
+            </a:pPr>
+            <a:r>
+              <a:t>🎯  WIN</a:t>
             </a:r>
           </a:p>
         </p:txBody>
@@ -6929,13 +6789,13 @@
             <a:pPr algn="l">
               <a:defRPr sz="3200" b="1" i="0">
                 <a:solidFill>
-                  <a:srgbClr val="F59E0B"/>
-                </a:solidFill>
-                <a:latin typeface="Calibri"/>
-              </a:defRPr>
-            </a:pPr>
-            <a:r>
-              <a:t>Learning Culture Thrives</a:t>
+                  <a:srgbClr val="2196F3"/>
+                </a:solidFill>
+                <a:latin typeface="Calibri"/>
+              </a:defRPr>
+            </a:pPr>
+            <a:r>
+              <a:t>UA Excellence</a:t>
             </a:r>
           </a:p>
         </p:txBody>
@@ -6963,15 +6823,15 @@
           <a:lstStyle/>
           <a:p>
             <a:pPr algn="l">
-              <a:defRPr sz="5200" b="1" i="0">
-                <a:solidFill>
-                  <a:srgbClr val="F59E0B"/>
-                </a:solidFill>
-                <a:latin typeface="Calibri"/>
-              </a:defRPr>
-            </a:pPr>
-            <a:r>
-              <a:t>140+</a:t>
+              <a:defRPr sz="4800" b="1" i="0">
+                <a:solidFill>
+                  <a:srgbClr val="2196F3"/>
+                </a:solidFill>
+                <a:latin typeface="Calibri"/>
+              </a:defRPr>
+            </a:pPr>
+            <a:r>
+              <a:t>Health Rate</a:t>
             </a:r>
           </a:p>
         </p:txBody>
@@ -6984,7 +6844,7 @@
         </p:nvSpPr>
         <p:spPr>
           <a:xfrm>
-            <a:off x="1097280" y="2926080"/>
+            <a:off x="1097280" y="2834640"/>
             <a:ext cx="4572000" cy="365760"/>
           </a:xfrm>
           <a:prstGeom prst="rect">
@@ -6999,7 +6859,7 @@
           <a:lstStyle/>
           <a:p>
             <a:pPr algn="l">
-              <a:defRPr sz="1100" b="0" i="0">
+              <a:defRPr sz="1200" b="0" i="0">
                 <a:solidFill>
                   <a:srgbClr val="8F95A3"/>
                 </a:solidFill>
@@ -7007,7 +6867,7 @@
               </a:defRPr>
             </a:pPr>
             <a:r>
-              <a:t>Book Club Members</a:t>
+              <a:t>metrics introduced</a:t>
             </a:r>
           </a:p>
         </p:txBody>
@@ -7020,7 +6880,43 @@
         </p:nvSpPr>
         <p:spPr>
           <a:xfrm>
-            <a:off x="1097280" y="3566160"/>
+            <a:off x="1097280" y="3291840"/>
+            <a:ext cx="9966960" cy="365760"/>
+          </a:xfrm>
+          <a:prstGeom prst="rect">
+            <a:avLst/>
+          </a:prstGeom>
+          <a:noFill/>
+        </p:spPr>
+        <p:txBody>
+          <a:bodyPr wrap="square">
+            <a:spAutoFit/>
+          </a:bodyPr>
+          <a:lstStyle/>
+          <a:p>
+            <a:pPr algn="l">
+              <a:defRPr sz="1400" b="0" i="0">
+                <a:solidFill>
+                  <a:srgbClr val="E2E2EA"/>
+                </a:solidFill>
+                <a:latin typeface="Calibri"/>
+              </a:defRPr>
+            </a:pPr>
+            <a:r>
+              <a:t>by User Acquisition Team</a:t>
+            </a:r>
+          </a:p>
+        </p:txBody>
+      </p:sp>
+      <p:sp>
+        <p:nvSpPr>
+          <p:cNvPr id="8" name="TextBox 7"/>
+          <p:cNvSpPr txBox="1"/>
+          <p:nvPr/>
+        </p:nvSpPr>
+        <p:spPr>
+          <a:xfrm>
+            <a:off x="1097280" y="3840480"/>
             <a:ext cx="9966960" cy="457200"/>
           </a:xfrm>
           <a:prstGeom prst="rect">
@@ -7043,35 +6939,35 @@
               </a:defRPr>
             </a:pPr>
             <a:r>
-              <a:t>Book Club Reaches 140+ Members</a:t>
-            </a:r>
-          </a:p>
-        </p:txBody>
-      </p:sp>
-      <p:sp>
-        <p:nvSpPr>
-          <p:cNvPr id="8" name="TextBox 7"/>
-          <p:cNvSpPr txBox="1"/>
-          <p:nvPr/>
-        </p:nvSpPr>
-        <p:spPr>
-          <a:xfrm>
-            <a:off x="1097280" y="4206240"/>
-            <a:ext cx="9966960" cy="1371600"/>
-          </a:xfrm>
-          <a:prstGeom prst="rect">
-            <a:avLst/>
-          </a:prstGeom>
-          <a:noFill/>
-        </p:spPr>
-        <p:txBody>
-          <a:bodyPr wrap="square">
-            <a:spAutoFit/>
-          </a:bodyPr>
-          <a:lstStyle/>
-          <a:p>
-            <a:pPr algn="l">
-              <a:defRPr sz="1500" b="0" i="0">
+              <a:t>UA Playbook Optimization</a:t>
+            </a:r>
+          </a:p>
+        </p:txBody>
+      </p:sp>
+      <p:sp>
+        <p:nvSpPr>
+          <p:cNvPr id="9" name="TextBox 8"/>
+          <p:cNvSpPr txBox="1"/>
+          <p:nvPr/>
+        </p:nvSpPr>
+        <p:spPr>
+          <a:xfrm>
+            <a:off x="1097280" y="4389120"/>
+            <a:ext cx="9966960" cy="914400"/>
+          </a:xfrm>
+          <a:prstGeom prst="rect">
+            <a:avLst/>
+          </a:prstGeom>
+          <a:noFill/>
+        </p:spPr>
+        <p:txBody>
+          <a:bodyPr wrap="square">
+            <a:spAutoFit/>
+          </a:bodyPr>
+          <a:lstStyle/>
+          <a:p>
+            <a:pPr algn="l">
+              <a:defRPr sz="1400" b="0" i="0">
                 <a:solidFill>
                   <a:srgbClr val="E2E2EA"/>
                 </a:solidFill>
@@ -7079,7 +6975,43 @@
               </a:defRPr>
             </a:pPr>
             <a:r>
-              <a:t>Our 'Passionate Curiosity' book club continues to grow, now with over 140 participants fostering a culture of continuous learning and intellectual curiosity across the company.</a:t>
+              <a:t>New health rate metric for UA activities developed with revisions aimed at optimizing user acquisition and improving accuracy across campaigns.</a:t>
+            </a:r>
+          </a:p>
+        </p:txBody>
+      </p:sp>
+      <p:sp>
+        <p:nvSpPr>
+          <p:cNvPr id="10" name="TextBox 9"/>
+          <p:cNvSpPr txBox="1"/>
+          <p:nvPr/>
+        </p:nvSpPr>
+        <p:spPr>
+          <a:xfrm>
+            <a:off x="1097280" y="5486400"/>
+            <a:ext cx="9966960" cy="457200"/>
+          </a:xfrm>
+          <a:prstGeom prst="rect">
+            <a:avLst/>
+          </a:prstGeom>
+          <a:noFill/>
+        </p:spPr>
+        <p:txBody>
+          <a:bodyPr wrap="square">
+            <a:spAutoFit/>
+          </a:bodyPr>
+          <a:lstStyle/>
+          <a:p>
+            <a:pPr algn="l">
+              <a:defRPr sz="1300" b="0" i="1">
+                <a:solidFill>
+                  <a:srgbClr val="8F95A3"/>
+                </a:solidFill>
+                <a:latin typeface="Calibri"/>
+              </a:defRPr>
+            </a:pPr>
+            <a:r>
+              <a:t>💬 "Data-driven approaches to user acquisition are becoming more sophisticated"</a:t>
             </a:r>
           </a:p>
         </p:txBody>
@@ -7125,7 +7057,7 @@
             <a:avLst/>
           </a:prstGeom>
           <a:solidFill>
-            <a:srgbClr val="10B981"/>
+            <a:srgbClr val="E91E63"/>
           </a:solidFill>
           <a:ln>
             <a:noFill/>
@@ -7178,13 +7110,13 @@
             <a:pPr algn="l">
               <a:defRPr sz="1000" b="1">
                 <a:solidFill>
-                  <a:srgbClr val="10B981"/>
-                </a:solidFill>
-                <a:latin typeface="Calibri"/>
-              </a:defRPr>
-            </a:pPr>
-            <a:r>
-              <a:t>🧘  OFFICE LIFE</a:t>
+                  <a:srgbClr val="E91E63"/>
+                </a:solidFill>
+                <a:latin typeface="Calibri"/>
+              </a:defRPr>
+            </a:pPr>
+            <a:r>
+              <a:t>🎊  WEEKLY RITUAL</a:t>
             </a:r>
           </a:p>
         </p:txBody>
@@ -7214,13 +7146,13 @@
             <a:pPr algn="l">
               <a:defRPr sz="3200" b="1" i="0">
                 <a:solidFill>
-                  <a:srgbClr val="10B981"/>
-                </a:solidFill>
-                <a:latin typeface="Calibri"/>
-              </a:defRPr>
-            </a:pPr>
-            <a:r>
-              <a:t>Wellness Initiative</a:t>
+                  <a:srgbClr val="E91E63"/>
+                </a:solidFill>
+                <a:latin typeface="Calibri"/>
+              </a:defRPr>
+            </a:pPr>
+            <a:r>
+              <a:t>Team Spirit</a:t>
             </a:r>
           </a:p>
         </p:txBody>
@@ -7256,7 +7188,7 @@
               </a:defRPr>
             </a:pPr>
             <a:r>
-              <a:t>Daily Yoga Builds Team Wellness</a:t>
+              <a:t>March Birthday Celebration</a:t>
             </a:r>
           </a:p>
         </p:txBody>
@@ -7269,8 +7201,80 @@
         </p:nvSpPr>
         <p:spPr>
           <a:xfrm>
-            <a:off x="1371600" y="2743200"/>
-            <a:ext cx="9692640" cy="1828800"/>
+            <a:off x="1371600" y="2926080"/>
+            <a:ext cx="9418320" cy="548640"/>
+          </a:xfrm>
+          <a:prstGeom prst="rect">
+            <a:avLst/>
+          </a:prstGeom>
+          <a:noFill/>
+        </p:spPr>
+        <p:txBody>
+          <a:bodyPr wrap="square">
+            <a:spAutoFit/>
+          </a:bodyPr>
+          <a:lstStyle/>
+          <a:p>
+            <a:pPr algn="l">
+              <a:defRPr sz="1400" b="0" i="0">
+                <a:solidFill>
+                  <a:srgbClr val="E2E2EA"/>
+                </a:solidFill>
+                <a:latin typeface="Calibri"/>
+              </a:defRPr>
+            </a:pPr>
+            <a:r>
+              <a:t>What's your favorite way to celebrate team milestones?</a:t>
+            </a:r>
+          </a:p>
+        </p:txBody>
+      </p:sp>
+      <p:sp>
+        <p:nvSpPr>
+          <p:cNvPr id="7" name="TextBox 6"/>
+          <p:cNvSpPr txBox="1"/>
+          <p:nvPr/>
+        </p:nvSpPr>
+        <p:spPr>
+          <a:xfrm>
+            <a:off x="1371600" y="3657600"/>
+            <a:ext cx="9418320" cy="548640"/>
+          </a:xfrm>
+          <a:prstGeom prst="rect">
+            <a:avLst/>
+          </a:prstGeom>
+          <a:noFill/>
+        </p:spPr>
+        <p:txBody>
+          <a:bodyPr wrap="square">
+            <a:spAutoFit/>
+          </a:bodyPr>
+          <a:lstStyle/>
+          <a:p>
+            <a:pPr algn="l">
+              <a:defRPr sz="1400" b="0" i="0">
+                <a:solidFill>
+                  <a:srgbClr val="E2E2EA"/>
+                </a:solidFill>
+                <a:latin typeface="Calibri"/>
+              </a:defRPr>
+            </a:pPr>
+            <a:r>
+              <a:t>How do you make remote colleagues feel included in office celebrations?</a:t>
+            </a:r>
+          </a:p>
+        </p:txBody>
+      </p:sp>
+      <p:sp>
+        <p:nvSpPr>
+          <p:cNvPr id="8" name="TextBox 7"/>
+          <p:cNvSpPr txBox="1"/>
+          <p:nvPr/>
+        </p:nvSpPr>
+        <p:spPr>
+          <a:xfrm>
+            <a:off x="1097280" y="4754880"/>
+            <a:ext cx="9966960" cy="731520"/>
           </a:xfrm>
           <a:prstGeom prst="rect">
             <a:avLst/>
@@ -7292,79 +7296,7 @@
               </a:defRPr>
             </a:pPr>
             <a:r>
-              <a:t>"Join us every day at 13:10 CET for yoga — streaming online and in the office for everyone's wellbeing"</a:t>
-            </a:r>
-          </a:p>
-        </p:txBody>
-      </p:sp>
-      <p:sp>
-        <p:nvSpPr>
-          <p:cNvPr id="7" name="TextBox 6"/>
-          <p:cNvSpPr txBox="1"/>
-          <p:nvPr/>
-        </p:nvSpPr>
-        <p:spPr>
-          <a:xfrm>
-            <a:off x="1097280" y="4754880"/>
-            <a:ext cx="9966960" cy="365760"/>
-          </a:xfrm>
-          <a:prstGeom prst="rect">
-            <a:avLst/>
-          </a:prstGeom>
-          <a:noFill/>
-        </p:spPr>
-        <p:txBody>
-          <a:bodyPr wrap="square">
-            <a:spAutoFit/>
-          </a:bodyPr>
-          <a:lstStyle/>
-          <a:p>
-            <a:pPr algn="l">
-              <a:defRPr sz="1400" b="0" i="0">
-                <a:solidFill>
-                  <a:srgbClr val="8F95A3"/>
-                </a:solidFill>
-                <a:latin typeface="Calibri"/>
-              </a:defRPr>
-            </a:pPr>
-            <a:r>
-              <a:t>— Anna Kolyada</a:t>
-            </a:r>
-          </a:p>
-        </p:txBody>
-      </p:sp>
-      <p:sp>
-        <p:nvSpPr>
-          <p:cNvPr id="8" name="TextBox 7"/>
-          <p:cNvSpPr txBox="1"/>
-          <p:nvPr/>
-        </p:nvSpPr>
-        <p:spPr>
-          <a:xfrm>
-            <a:off x="1097280" y="5212080"/>
-            <a:ext cx="9966960" cy="365760"/>
-          </a:xfrm>
-          <a:prstGeom prst="rect">
-            <a:avLst/>
-          </a:prstGeom>
-          <a:noFill/>
-        </p:spPr>
-        <p:txBody>
-          <a:bodyPr wrap="square">
-            <a:spAutoFit/>
-          </a:bodyPr>
-          <a:lstStyle/>
-          <a:p>
-            <a:pPr algn="l">
-              <a:defRPr sz="1400" b="1" i="0">
-                <a:solidFill>
-                  <a:srgbClr val="10B981"/>
-                </a:solidFill>
-                <a:latin typeface="Calibri"/>
-              </a:defRPr>
-            </a:pPr>
-            <a:r>
-              <a:t>🧘‍♀️ 15, ❤️ 8</a:t>
+              <a:t>We work TOGETHER to serve others</a:t>
             </a:r>
           </a:p>
         </p:txBody>
@@ -7400,7 +7332,7 @@
               </a:defRPr>
             </a:pPr>
             <a:r>
-              <a:t>Wellness Program</a:t>
+              <a:t>#birthdays</a:t>
             </a:r>
           </a:p>
         </p:txBody>
@@ -7446,7 +7378,7 @@
             <a:avLst/>
           </a:prstGeom>
           <a:solidFill>
-            <a:srgbClr val="EC4899"/>
+            <a:srgbClr val="673AB7"/>
           </a:solidFill>
           <a:ln>
             <a:noFill/>
@@ -7499,13 +7431,13 @@
             <a:pPr algn="l">
               <a:defRPr sz="1000" b="1">
                 <a:solidFill>
-                  <a:srgbClr val="EC4899"/>
-                </a:solidFill>
-                <a:latin typeface="Calibri"/>
-              </a:defRPr>
-            </a:pPr>
-            <a:r>
-              <a:t>🎯  WEEKLY RITUAL</a:t>
+                  <a:srgbClr val="673AB7"/>
+                </a:solidFill>
+                <a:latin typeface="Calibri"/>
+              </a:defRPr>
+            </a:pPr>
+            <a:r>
+              <a:t>🔮  MILESTONE</a:t>
             </a:r>
           </a:p>
         </p:txBody>
@@ -7535,13 +7467,13 @@
             <a:pPr algn="l">
               <a:defRPr sz="3200" b="1" i="0">
                 <a:solidFill>
-                  <a:srgbClr val="EC4899"/>
-                </a:solidFill>
-                <a:latin typeface="Calibri"/>
-              </a:defRPr>
-            </a:pPr>
-            <a:r>
-              <a:t>Monday Motivation</a:t>
+                  <a:srgbClr val="673AB7"/>
+                </a:solidFill>
+                <a:latin typeface="Calibri"/>
+              </a:defRPr>
+            </a:pPr>
+            <a:r>
+              <a:t>AI Integration</a:t>
             </a:r>
           </a:p>
         </p:txBody>
@@ -7555,6 +7487,78 @@
         <p:spPr>
           <a:xfrm>
             <a:off x="1097280" y="2103120"/>
+            <a:ext cx="4572000" cy="822960"/>
+          </a:xfrm>
+          <a:prstGeom prst="rect">
+            <a:avLst/>
+          </a:prstGeom>
+          <a:noFill/>
+        </p:spPr>
+        <p:txBody>
+          <a:bodyPr wrap="square">
+            <a:spAutoFit/>
+          </a:bodyPr>
+          <a:lstStyle/>
+          <a:p>
+            <a:pPr algn="l">
+              <a:defRPr sz="5200" b="1" i="0">
+                <a:solidFill>
+                  <a:srgbClr val="673AB7"/>
+                </a:solidFill>
+                <a:latin typeface="Calibri"/>
+              </a:defRPr>
+            </a:pPr>
+            <a:r>
+              <a:t>5-10</a:t>
+            </a:r>
+          </a:p>
+        </p:txBody>
+      </p:sp>
+      <p:sp>
+        <p:nvSpPr>
+          <p:cNvPr id="6" name="TextBox 5"/>
+          <p:cNvSpPr txBox="1"/>
+          <p:nvPr/>
+        </p:nvSpPr>
+        <p:spPr>
+          <a:xfrm>
+            <a:off x="1097280" y="2926080"/>
+            <a:ext cx="4572000" cy="365760"/>
+          </a:xfrm>
+          <a:prstGeom prst="rect">
+            <a:avLst/>
+          </a:prstGeom>
+          <a:noFill/>
+        </p:spPr>
+        <p:txBody>
+          <a:bodyPr wrap="square">
+            <a:spAutoFit/>
+          </a:bodyPr>
+          <a:lstStyle/>
+          <a:p>
+            <a:pPr algn="l">
+              <a:defRPr sz="1100" b="0" i="0">
+                <a:solidFill>
+                  <a:srgbClr val="8F95A3"/>
+                </a:solidFill>
+                <a:latin typeface="Calibri"/>
+              </a:defRPr>
+            </a:pPr>
+            <a:r>
+              <a:t>AI agents per employee</a:t>
+            </a:r>
+          </a:p>
+        </p:txBody>
+      </p:sp>
+      <p:sp>
+        <p:nvSpPr>
+          <p:cNvPr id="7" name="TextBox 6"/>
+          <p:cNvSpPr txBox="1"/>
+          <p:nvPr/>
+        </p:nvSpPr>
+        <p:spPr>
+          <a:xfrm>
+            <a:off x="1097280" y="3566160"/>
             <a:ext cx="9966960" cy="457200"/>
           </a:xfrm>
           <a:prstGeom prst="rect">
@@ -7577,7 +7581,220 @@
               </a:defRPr>
             </a:pPr>
             <a:r>
-              <a:t>Build. Ship. Improve.</a:t>
+              <a:t>AI-Powered Company Growth</a:t>
+            </a:r>
+          </a:p>
+        </p:txBody>
+      </p:sp>
+      <p:sp>
+        <p:nvSpPr>
+          <p:cNvPr id="8" name="TextBox 7"/>
+          <p:cNvSpPr txBox="1"/>
+          <p:nvPr/>
+        </p:nvSpPr>
+        <p:spPr>
+          <a:xfrm>
+            <a:off x="1097280" y="4206240"/>
+            <a:ext cx="9966960" cy="1371600"/>
+          </a:xfrm>
+          <a:prstGeom prst="rect">
+            <a:avLst/>
+          </a:prstGeom>
+          <a:noFill/>
+        </p:spPr>
+        <p:txBody>
+          <a:bodyPr wrap="square">
+            <a:spAutoFit/>
+          </a:bodyPr>
+          <a:lstStyle/>
+          <a:p>
+            <a:pPr algn="l">
+              <a:defRPr sz="1500" b="0" i="0">
+                <a:solidFill>
+                  <a:srgbClr val="E2E2EA"/>
+                </a:solidFill>
+                <a:latin typeface="Calibri"/>
+              </a:defRPr>
+            </a:pPr>
+            <a:r>
+              <a:t>Every employee will manage 5-10 AI agents within 3-6 months as part of our vision to build toward a $50B company with 1,500 employees and 100 studios.</a:t>
+            </a:r>
+          </a:p>
+        </p:txBody>
+      </p:sp>
+    </p:spTree>
+  </p:cSld>
+  <p:clrMapOvr>
+    <a:masterClrMapping/>
+  </p:clrMapOvr>
+</p:sld>
+</file>
+
+<file path=ppt/slides/slide23.xml><?xml version="1.0" encoding="utf-8"?>
+<p:sld xmlns:a="http://schemas.openxmlformats.org/drawingml/2006/main" xmlns:p="http://schemas.openxmlformats.org/presentationml/2006/main" xmlns:r="http://schemas.openxmlformats.org/officeDocument/2006/relationships">
+  <p:cSld>
+    <p:bg>
+      <p:bgPr>
+        <a:solidFill>
+          <a:srgbClr val="08080C"/>
+        </a:solidFill>
+        <a:effectLst/>
+      </p:bgPr>
+    </p:bg>
+    <p:spTree>
+      <p:nvGrpSpPr>
+        <p:cNvPr id="1" name=""/>
+        <p:cNvGrpSpPr/>
+        <p:nvPr/>
+      </p:nvGrpSpPr>
+      <p:grpSpPr/>
+      <p:sp>
+        <p:nvSpPr>
+          <p:cNvPr id="2" name="Rectangle 1"/>
+          <p:cNvSpPr/>
+          <p:nvPr/>
+        </p:nvSpPr>
+        <p:spPr>
+          <a:xfrm>
+            <a:off x="0" y="365760"/>
+            <a:ext cx="12191695" cy="54864"/>
+          </a:xfrm>
+          <a:prstGeom prst="rect">
+            <a:avLst/>
+          </a:prstGeom>
+          <a:solidFill>
+            <a:srgbClr val="009688"/>
+          </a:solidFill>
+          <a:ln>
+            <a:noFill/>
+          </a:ln>
+        </p:spPr>
+        <p:style>
+          <a:lnRef idx="1">
+            <a:schemeClr val="accent1"/>
+          </a:lnRef>
+          <a:fillRef idx="3">
+            <a:schemeClr val="accent1"/>
+          </a:fillRef>
+          <a:effectRef idx="2">
+            <a:schemeClr val="accent1"/>
+          </a:effectRef>
+          <a:fontRef idx="minor">
+            <a:schemeClr val="lt1"/>
+          </a:fontRef>
+        </p:style>
+        <p:txBody>
+          <a:bodyPr rtlCol="0" anchor="ctr"/>
+          <a:lstStyle/>
+          <a:p>
+            <a:pPr algn="ctr"/>
+          </a:p>
+        </p:txBody>
+      </p:sp>
+      <p:sp>
+        <p:nvSpPr>
+          <p:cNvPr id="3" name="TextBox 2"/>
+          <p:cNvSpPr txBox="1"/>
+          <p:nvPr/>
+        </p:nvSpPr>
+        <p:spPr>
+          <a:xfrm>
+            <a:off x="1097280" y="731520"/>
+            <a:ext cx="3657600" cy="365760"/>
+          </a:xfrm>
+          <a:prstGeom prst="rect">
+            <a:avLst/>
+          </a:prstGeom>
+          <a:noFill/>
+        </p:spPr>
+        <p:txBody>
+          <a:bodyPr wrap="none">
+            <a:spAutoFit/>
+          </a:bodyPr>
+          <a:lstStyle/>
+          <a:p>
+            <a:pPr algn="l">
+              <a:defRPr sz="1000" b="1">
+                <a:solidFill>
+                  <a:srgbClr val="009688"/>
+                </a:solidFill>
+                <a:latin typeface="Calibri"/>
+              </a:defRPr>
+            </a:pPr>
+            <a:r>
+              <a:t>🤖  WIN</a:t>
+            </a:r>
+          </a:p>
+        </p:txBody>
+      </p:sp>
+      <p:sp>
+        <p:nvSpPr>
+          <p:cNvPr id="4" name="TextBox 3"/>
+          <p:cNvSpPr txBox="1"/>
+          <p:nvPr/>
+        </p:nvSpPr>
+        <p:spPr>
+          <a:xfrm>
+            <a:off x="1097280" y="1188720"/>
+            <a:ext cx="9966960" cy="731520"/>
+          </a:xfrm>
+          <a:prstGeom prst="rect">
+            <a:avLst/>
+          </a:prstGeom>
+          <a:noFill/>
+        </p:spPr>
+        <p:txBody>
+          <a:bodyPr wrap="square">
+            <a:spAutoFit/>
+          </a:bodyPr>
+          <a:lstStyle/>
+          <a:p>
+            <a:pPr algn="l">
+              <a:defRPr sz="3200" b="1" i="0">
+                <a:solidFill>
+                  <a:srgbClr val="009688"/>
+                </a:solidFill>
+                <a:latin typeface="Calibri"/>
+              </a:defRPr>
+            </a:pPr>
+            <a:r>
+              <a:t>Automation Success</a:t>
+            </a:r>
+          </a:p>
+        </p:txBody>
+      </p:sp>
+      <p:sp>
+        <p:nvSpPr>
+          <p:cNvPr id="5" name="TextBox 4"/>
+          <p:cNvSpPr txBox="1"/>
+          <p:nvPr/>
+        </p:nvSpPr>
+        <p:spPr>
+          <a:xfrm>
+            <a:off x="1097280" y="2103120"/>
+            <a:ext cx="4572000" cy="822960"/>
+          </a:xfrm>
+          <a:prstGeom prst="rect">
+            <a:avLst/>
+          </a:prstGeom>
+          <a:noFill/>
+        </p:spPr>
+        <p:txBody>
+          <a:bodyPr wrap="square">
+            <a:spAutoFit/>
+          </a:bodyPr>
+          <a:lstStyle/>
+          <a:p>
+            <a:pPr algn="l">
+              <a:defRPr sz="4800" b="1" i="0">
+                <a:solidFill>
+                  <a:srgbClr val="009688"/>
+                </a:solidFill>
+                <a:latin typeface="Calibri"/>
+              </a:defRPr>
+            </a:pPr>
+            <a:r>
+              <a:t>1,000+</a:t>
             </a:r>
           </a:p>
         </p:txBody>
@@ -7590,8 +7807,44 @@
         </p:nvSpPr>
         <p:spPr>
           <a:xfrm>
-            <a:off x="1371600" y="2926080"/>
-            <a:ext cx="9418320" cy="548640"/>
+            <a:off x="1097280" y="2834640"/>
+            <a:ext cx="4572000" cy="365760"/>
+          </a:xfrm>
+          <a:prstGeom prst="rect">
+            <a:avLst/>
+          </a:prstGeom>
+          <a:noFill/>
+        </p:spPr>
+        <p:txBody>
+          <a:bodyPr wrap="square">
+            <a:spAutoFit/>
+          </a:bodyPr>
+          <a:lstStyle/>
+          <a:p>
+            <a:pPr algn="l">
+              <a:defRPr sz="1200" b="0" i="0">
+                <a:solidFill>
+                  <a:srgbClr val="8F95A3"/>
+                </a:solidFill>
+                <a:latin typeface="Calibri"/>
+              </a:defRPr>
+            </a:pPr>
+            <a:r>
+              <a:t>OKRs checked daily</a:t>
+            </a:r>
+          </a:p>
+        </p:txBody>
+      </p:sp>
+      <p:sp>
+        <p:nvSpPr>
+          <p:cNvPr id="7" name="TextBox 6"/>
+          <p:cNvSpPr txBox="1"/>
+          <p:nvPr/>
+        </p:nvSpPr>
+        <p:spPr>
+          <a:xfrm>
+            <a:off x="1097280" y="3291840"/>
+            <a:ext cx="9966960" cy="365760"/>
           </a:xfrm>
           <a:prstGeom prst="rect">
             <a:avLst/>
@@ -7613,7 +7866,328 @@
               </a:defRPr>
             </a:pPr>
             <a:r>
-              <a:t>What will you build today?</a:t>
+              <a:t>by AI Development Team</a:t>
+            </a:r>
+          </a:p>
+        </p:txBody>
+      </p:sp>
+      <p:sp>
+        <p:nvSpPr>
+          <p:cNvPr id="8" name="TextBox 7"/>
+          <p:cNvSpPr txBox="1"/>
+          <p:nvPr/>
+        </p:nvSpPr>
+        <p:spPr>
+          <a:xfrm>
+            <a:off x="1097280" y="3840480"/>
+            <a:ext cx="9966960" cy="457200"/>
+          </a:xfrm>
+          <a:prstGeom prst="rect">
+            <a:avLst/>
+          </a:prstGeom>
+          <a:noFill/>
+        </p:spPr>
+        <p:txBody>
+          <a:bodyPr wrap="square">
+            <a:spAutoFit/>
+          </a:bodyPr>
+          <a:lstStyle/>
+          <a:p>
+            <a:pPr algn="l">
+              <a:defRPr sz="1800" b="1" i="0">
+                <a:solidFill>
+                  <a:srgbClr val="FFFFFF"/>
+                </a:solidFill>
+                <a:latin typeface="Calibri"/>
+              </a:defRPr>
+            </a:pPr>
+            <a:r>
+              <a:t>OKR Auditor AI Excellence</a:t>
+            </a:r>
+          </a:p>
+        </p:txBody>
+      </p:sp>
+      <p:sp>
+        <p:nvSpPr>
+          <p:cNvPr id="9" name="TextBox 8"/>
+          <p:cNvSpPr txBox="1"/>
+          <p:nvPr/>
+        </p:nvSpPr>
+        <p:spPr>
+          <a:xfrm>
+            <a:off x="1097280" y="4389120"/>
+            <a:ext cx="9966960" cy="914400"/>
+          </a:xfrm>
+          <a:prstGeom prst="rect">
+            <a:avLst/>
+          </a:prstGeom>
+          <a:noFill/>
+        </p:spPr>
+        <p:txBody>
+          <a:bodyPr wrap="square">
+            <a:spAutoFit/>
+          </a:bodyPr>
+          <a:lstStyle/>
+          <a:p>
+            <a:pPr algn="l">
+              <a:defRPr sz="1400" b="0" i="0">
+                <a:solidFill>
+                  <a:srgbClr val="E2E2EA"/>
+                </a:solidFill>
+                <a:latin typeface="Calibri"/>
+              </a:defRPr>
+            </a:pPr>
+            <a:r>
+              <a:t>Our AI-powered OKR Auditor now checks over 1,000 individual OKRs daily, ensuring alignment and progress tracking across the entire organization.</a:t>
+            </a:r>
+          </a:p>
+        </p:txBody>
+      </p:sp>
+      <p:sp>
+        <p:nvSpPr>
+          <p:cNvPr id="10" name="TextBox 9"/>
+          <p:cNvSpPr txBox="1"/>
+          <p:nvPr/>
+        </p:nvSpPr>
+        <p:spPr>
+          <a:xfrm>
+            <a:off x="1097280" y="5486400"/>
+            <a:ext cx="9966960" cy="457200"/>
+          </a:xfrm>
+          <a:prstGeom prst="rect">
+            <a:avLst/>
+          </a:prstGeom>
+          <a:noFill/>
+        </p:spPr>
+        <p:txBody>
+          <a:bodyPr wrap="square">
+            <a:spAutoFit/>
+          </a:bodyPr>
+          <a:lstStyle/>
+          <a:p>
+            <a:pPr algn="l">
+              <a:defRPr sz="1300" b="0" i="1">
+                <a:solidFill>
+                  <a:srgbClr val="8F95A3"/>
+                </a:solidFill>
+                <a:latin typeface="Calibri"/>
+              </a:defRPr>
+            </a:pPr>
+            <a:r>
+              <a:t>💬 "AI is transforming how we maintain organizational focus and accountability"</a:t>
+            </a:r>
+          </a:p>
+        </p:txBody>
+      </p:sp>
+    </p:spTree>
+  </p:cSld>
+  <p:clrMapOvr>
+    <a:masterClrMapping/>
+  </p:clrMapOvr>
+</p:sld>
+</file>
+
+<file path=ppt/slides/slide24.xml><?xml version="1.0" encoding="utf-8"?>
+<p:sld xmlns:a="http://schemas.openxmlformats.org/drawingml/2006/main" xmlns:p="http://schemas.openxmlformats.org/presentationml/2006/main" xmlns:r="http://schemas.openxmlformats.org/officeDocument/2006/relationships">
+  <p:cSld>
+    <p:bg>
+      <p:bgPr>
+        <a:solidFill>
+          <a:srgbClr val="08080C"/>
+        </a:solidFill>
+        <a:effectLst/>
+      </p:bgPr>
+    </p:bg>
+    <p:spTree>
+      <p:nvGrpSpPr>
+        <p:cNvPr id="1" name=""/>
+        <p:cNvGrpSpPr/>
+        <p:nvPr/>
+      </p:nvGrpSpPr>
+      <p:grpSpPr/>
+      <p:sp>
+        <p:nvSpPr>
+          <p:cNvPr id="2" name="Rectangle 1"/>
+          <p:cNvSpPr/>
+          <p:nvPr/>
+        </p:nvSpPr>
+        <p:spPr>
+          <a:xfrm>
+            <a:off x="0" y="365760"/>
+            <a:ext cx="12191695" cy="54864"/>
+          </a:xfrm>
+          <a:prstGeom prst="rect">
+            <a:avLst/>
+          </a:prstGeom>
+          <a:solidFill>
+            <a:srgbClr val="4CAF50"/>
+          </a:solidFill>
+          <a:ln>
+            <a:noFill/>
+          </a:ln>
+        </p:spPr>
+        <p:style>
+          <a:lnRef idx="1">
+            <a:schemeClr val="accent1"/>
+          </a:lnRef>
+          <a:fillRef idx="3">
+            <a:schemeClr val="accent1"/>
+          </a:fillRef>
+          <a:effectRef idx="2">
+            <a:schemeClr val="accent1"/>
+          </a:effectRef>
+          <a:fontRef idx="minor">
+            <a:schemeClr val="lt1"/>
+          </a:fontRef>
+        </p:style>
+        <p:txBody>
+          <a:bodyPr rtlCol="0" anchor="ctr"/>
+          <a:lstStyle/>
+          <a:p>
+            <a:pPr algn="ctr"/>
+          </a:p>
+        </p:txBody>
+      </p:sp>
+      <p:sp>
+        <p:nvSpPr>
+          <p:cNvPr id="3" name="TextBox 2"/>
+          <p:cNvSpPr txBox="1"/>
+          <p:nvPr/>
+        </p:nvSpPr>
+        <p:spPr>
+          <a:xfrm>
+            <a:off x="1097280" y="731520"/>
+            <a:ext cx="3657600" cy="365760"/>
+          </a:xfrm>
+          <a:prstGeom prst="rect">
+            <a:avLst/>
+          </a:prstGeom>
+          <a:noFill/>
+        </p:spPr>
+        <p:txBody>
+          <a:bodyPr wrap="none">
+            <a:spAutoFit/>
+          </a:bodyPr>
+          <a:lstStyle/>
+          <a:p>
+            <a:pPr algn="l">
+              <a:defRPr sz="1000" b="1">
+                <a:solidFill>
+                  <a:srgbClr val="4CAF50"/>
+                </a:solidFill>
+                <a:latin typeface="Calibri"/>
+              </a:defRPr>
+            </a:pPr>
+            <a:r>
+              <a:t>🎮  MILESTONE</a:t>
+            </a:r>
+          </a:p>
+        </p:txBody>
+      </p:sp>
+      <p:sp>
+        <p:nvSpPr>
+          <p:cNvPr id="4" name="TextBox 3"/>
+          <p:cNvSpPr txBox="1"/>
+          <p:nvPr/>
+        </p:nvSpPr>
+        <p:spPr>
+          <a:xfrm>
+            <a:off x="1097280" y="1188720"/>
+            <a:ext cx="9966960" cy="731520"/>
+          </a:xfrm>
+          <a:prstGeom prst="rect">
+            <a:avLst/>
+          </a:prstGeom>
+          <a:noFill/>
+        </p:spPr>
+        <p:txBody>
+          <a:bodyPr wrap="square">
+            <a:spAutoFit/>
+          </a:bodyPr>
+          <a:lstStyle/>
+          <a:p>
+            <a:pPr algn="l">
+              <a:defRPr sz="3200" b="1" i="0">
+                <a:solidFill>
+                  <a:srgbClr val="4CAF50"/>
+                </a:solidFill>
+                <a:latin typeface="Calibri"/>
+              </a:defRPr>
+            </a:pPr>
+            <a:r>
+              <a:t>Gaming Profitability</a:t>
+            </a:r>
+          </a:p>
+        </p:txBody>
+      </p:sp>
+      <p:sp>
+        <p:nvSpPr>
+          <p:cNvPr id="5" name="TextBox 4"/>
+          <p:cNvSpPr txBox="1"/>
+          <p:nvPr/>
+        </p:nvSpPr>
+        <p:spPr>
+          <a:xfrm>
+            <a:off x="1097280" y="2103120"/>
+            <a:ext cx="4572000" cy="822960"/>
+          </a:xfrm>
+          <a:prstGeom prst="rect">
+            <a:avLst/>
+          </a:prstGeom>
+          <a:noFill/>
+        </p:spPr>
+        <p:txBody>
+          <a:bodyPr wrap="square">
+            <a:spAutoFit/>
+          </a:bodyPr>
+          <a:lstStyle/>
+          <a:p>
+            <a:pPr algn="l">
+              <a:defRPr sz="5200" b="1" i="0">
+                <a:solidFill>
+                  <a:srgbClr val="4CAF50"/>
+                </a:solidFill>
+                <a:latin typeface="Calibri"/>
+              </a:defRPr>
+            </a:pPr>
+            <a:r>
+              <a:t>Profitable</a:t>
+            </a:r>
+          </a:p>
+        </p:txBody>
+      </p:sp>
+      <p:sp>
+        <p:nvSpPr>
+          <p:cNvPr id="6" name="TextBox 5"/>
+          <p:cNvSpPr txBox="1"/>
+          <p:nvPr/>
+        </p:nvSpPr>
+        <p:spPr>
+          <a:xfrm>
+            <a:off x="1097280" y="2926080"/>
+            <a:ext cx="4572000" cy="365760"/>
+          </a:xfrm>
+          <a:prstGeom prst="rect">
+            <a:avLst/>
+          </a:prstGeom>
+          <a:noFill/>
+        </p:spPr>
+        <p:txBody>
+          <a:bodyPr wrap="square">
+            <a:spAutoFit/>
+          </a:bodyPr>
+          <a:lstStyle/>
+          <a:p>
+            <a:pPr algn="l">
+              <a:defRPr sz="1100" b="0" i="0">
+                <a:solidFill>
+                  <a:srgbClr val="8F95A3"/>
+                </a:solidFill>
+                <a:latin typeface="Calibri"/>
+              </a:defRPr>
+            </a:pPr>
+            <a:r>
+              <a:t>gaming division in 2025</a:t>
             </a:r>
           </a:p>
         </p:txBody>
@@ -7626,8 +8200,293 @@
         </p:nvSpPr>
         <p:spPr>
           <a:xfrm>
-            <a:off x="1371600" y="3657600"/>
-            <a:ext cx="9418320" cy="548640"/>
+            <a:off x="1097280" y="3566160"/>
+            <a:ext cx="9966960" cy="457200"/>
+          </a:xfrm>
+          <a:prstGeom prst="rect">
+            <a:avLst/>
+          </a:prstGeom>
+          <a:noFill/>
+        </p:spPr>
+        <p:txBody>
+          <a:bodyPr wrap="square">
+            <a:spAutoFit/>
+          </a:bodyPr>
+          <a:lstStyle/>
+          <a:p>
+            <a:pPr algn="l">
+              <a:defRPr sz="1800" b="1" i="0">
+                <a:solidFill>
+                  <a:srgbClr val="FFFFFF"/>
+                </a:solidFill>
+                <a:latin typeface="Calibri"/>
+              </a:defRPr>
+            </a:pPr>
+            <a:r>
+              <a:t>Gaming Division Turns Profitable</a:t>
+            </a:r>
+          </a:p>
+        </p:txBody>
+      </p:sp>
+      <p:sp>
+        <p:nvSpPr>
+          <p:cNvPr id="8" name="TextBox 7"/>
+          <p:cNvSpPr txBox="1"/>
+          <p:nvPr/>
+        </p:nvSpPr>
+        <p:spPr>
+          <a:xfrm>
+            <a:off x="1097280" y="4206240"/>
+            <a:ext cx="9966960" cy="1371600"/>
+          </a:xfrm>
+          <a:prstGeom prst="rect">
+            <a:avLst/>
+          </a:prstGeom>
+          <a:noFill/>
+        </p:spPr>
+        <p:txBody>
+          <a:bodyPr wrap="square">
+            <a:spAutoFit/>
+          </a:bodyPr>
+          <a:lstStyle/>
+          <a:p>
+            <a:pPr algn="l">
+              <a:defRPr sz="1500" b="0" i="0">
+                <a:solidFill>
+                  <a:srgbClr val="E2E2EA"/>
+                </a:solidFill>
+                <a:latin typeface="Calibri"/>
+              </a:defRPr>
+            </a:pPr>
+            <a:r>
+              <a:t>Gaming achieved profitability in 2025 with Infinite Minesweeper reaching 61% retention and Crossword exceeding 200% ROAS, marking a major milestone in our diversification strategy.</a:t>
+            </a:r>
+          </a:p>
+        </p:txBody>
+      </p:sp>
+    </p:spTree>
+  </p:cSld>
+  <p:clrMapOvr>
+    <a:masterClrMapping/>
+  </p:clrMapOvr>
+</p:sld>
+</file>
+
+<file path=ppt/slides/slide25.xml><?xml version="1.0" encoding="utf-8"?>
+<p:sld xmlns:a="http://schemas.openxmlformats.org/drawingml/2006/main" xmlns:p="http://schemas.openxmlformats.org/presentationml/2006/main" xmlns:r="http://schemas.openxmlformats.org/officeDocument/2006/relationships">
+  <p:cSld>
+    <p:bg>
+      <p:bgPr>
+        <a:solidFill>
+          <a:srgbClr val="08080C"/>
+        </a:solidFill>
+        <a:effectLst/>
+      </p:bgPr>
+    </p:bg>
+    <p:spTree>
+      <p:nvGrpSpPr>
+        <p:cNvPr id="1" name=""/>
+        <p:cNvGrpSpPr/>
+        <p:nvPr/>
+      </p:nvGrpSpPr>
+      <p:grpSpPr/>
+      <p:sp>
+        <p:nvSpPr>
+          <p:cNvPr id="2" name="Rectangle 1"/>
+          <p:cNvSpPr/>
+          <p:nvPr/>
+        </p:nvSpPr>
+        <p:spPr>
+          <a:xfrm>
+            <a:off x="0" y="365760"/>
+            <a:ext cx="12191695" cy="54864"/>
+          </a:xfrm>
+          <a:prstGeom prst="rect">
+            <a:avLst/>
+          </a:prstGeom>
+          <a:solidFill>
+            <a:srgbClr val="FF5722"/>
+          </a:solidFill>
+          <a:ln>
+            <a:noFill/>
+          </a:ln>
+        </p:spPr>
+        <p:style>
+          <a:lnRef idx="1">
+            <a:schemeClr val="accent1"/>
+          </a:lnRef>
+          <a:fillRef idx="3">
+            <a:schemeClr val="accent1"/>
+          </a:fillRef>
+          <a:effectRef idx="2">
+            <a:schemeClr val="accent1"/>
+          </a:effectRef>
+          <a:fontRef idx="minor">
+            <a:schemeClr val="lt1"/>
+          </a:fontRef>
+        </p:style>
+        <p:txBody>
+          <a:bodyPr rtlCol="0" anchor="ctr"/>
+          <a:lstStyle/>
+          <a:p>
+            <a:pPr algn="ctr"/>
+          </a:p>
+        </p:txBody>
+      </p:sp>
+      <p:sp>
+        <p:nvSpPr>
+          <p:cNvPr id="3" name="TextBox 2"/>
+          <p:cNvSpPr txBox="1"/>
+          <p:nvPr/>
+        </p:nvSpPr>
+        <p:spPr>
+          <a:xfrm>
+            <a:off x="1097280" y="731520"/>
+            <a:ext cx="3657600" cy="365760"/>
+          </a:xfrm>
+          <a:prstGeom prst="rect">
+            <a:avLst/>
+          </a:prstGeom>
+          <a:noFill/>
+        </p:spPr>
+        <p:txBody>
+          <a:bodyPr wrap="none">
+            <a:spAutoFit/>
+          </a:bodyPr>
+          <a:lstStyle/>
+          <a:p>
+            <a:pPr algn="l">
+              <a:defRPr sz="1000" b="1">
+                <a:solidFill>
+                  <a:srgbClr val="FF5722"/>
+                </a:solidFill>
+                <a:latin typeface="Calibri"/>
+              </a:defRPr>
+            </a:pPr>
+            <a:r>
+              <a:t>🛡️  WIN</a:t>
+            </a:r>
+          </a:p>
+        </p:txBody>
+      </p:sp>
+      <p:sp>
+        <p:nvSpPr>
+          <p:cNvPr id="4" name="TextBox 3"/>
+          <p:cNvSpPr txBox="1"/>
+          <p:nvPr/>
+        </p:nvSpPr>
+        <p:spPr>
+          <a:xfrm>
+            <a:off x="1097280" y="1188720"/>
+            <a:ext cx="9966960" cy="731520"/>
+          </a:xfrm>
+          <a:prstGeom prst="rect">
+            <a:avLst/>
+          </a:prstGeom>
+          <a:noFill/>
+        </p:spPr>
+        <p:txBody>
+          <a:bodyPr wrap="square">
+            <a:spAutoFit/>
+          </a:bodyPr>
+          <a:lstStyle/>
+          <a:p>
+            <a:pPr algn="l">
+              <a:defRPr sz="3200" b="1" i="0">
+                <a:solidFill>
+                  <a:srgbClr val="FF5722"/>
+                </a:solidFill>
+                <a:latin typeface="Calibri"/>
+              </a:defRPr>
+            </a:pPr>
+            <a:r>
+              <a:t>Security Excellence</a:t>
+            </a:r>
+          </a:p>
+        </p:txBody>
+      </p:sp>
+      <p:sp>
+        <p:nvSpPr>
+          <p:cNvPr id="5" name="TextBox 4"/>
+          <p:cNvSpPr txBox="1"/>
+          <p:nvPr/>
+        </p:nvSpPr>
+        <p:spPr>
+          <a:xfrm>
+            <a:off x="1097280" y="2103120"/>
+            <a:ext cx="4572000" cy="822960"/>
+          </a:xfrm>
+          <a:prstGeom prst="rect">
+            <a:avLst/>
+          </a:prstGeom>
+          <a:noFill/>
+        </p:spPr>
+        <p:txBody>
+          <a:bodyPr wrap="square">
+            <a:spAutoFit/>
+          </a:bodyPr>
+          <a:lstStyle/>
+          <a:p>
+            <a:pPr algn="l">
+              <a:defRPr sz="4800" b="1" i="0">
+                <a:solidFill>
+                  <a:srgbClr val="FF5722"/>
+                </a:solidFill>
+                <a:latin typeface="Calibri"/>
+              </a:defRPr>
+            </a:pPr>
+            <a:r>
+              <a:t>22% to 4%</a:t>
+            </a:r>
+          </a:p>
+        </p:txBody>
+      </p:sp>
+      <p:sp>
+        <p:nvSpPr>
+          <p:cNvPr id="6" name="TextBox 5"/>
+          <p:cNvSpPr txBox="1"/>
+          <p:nvPr/>
+        </p:nvSpPr>
+        <p:spPr>
+          <a:xfrm>
+            <a:off x="1097280" y="2834640"/>
+            <a:ext cx="4572000" cy="365760"/>
+          </a:xfrm>
+          <a:prstGeom prst="rect">
+            <a:avLst/>
+          </a:prstGeom>
+          <a:noFill/>
+        </p:spPr>
+        <p:txBody>
+          <a:bodyPr wrap="square">
+            <a:spAutoFit/>
+          </a:bodyPr>
+          <a:lstStyle/>
+          <a:p>
+            <a:pPr algn="l">
+              <a:defRPr sz="1200" b="0" i="0">
+                <a:solidFill>
+                  <a:srgbClr val="8F95A3"/>
+                </a:solidFill>
+                <a:latin typeface="Calibri"/>
+              </a:defRPr>
+            </a:pPr>
+            <a:r>
+              <a:t>fraud reduction</a:t>
+            </a:r>
+          </a:p>
+        </p:txBody>
+      </p:sp>
+      <p:sp>
+        <p:nvSpPr>
+          <p:cNvPr id="7" name="TextBox 6"/>
+          <p:cNvSpPr txBox="1"/>
+          <p:nvPr/>
+        </p:nvSpPr>
+        <p:spPr>
+          <a:xfrm>
+            <a:off x="1097280" y="3291840"/>
+            <a:ext cx="9966960" cy="365760"/>
           </a:xfrm>
           <a:prstGeom prst="rect">
             <a:avLst/>
@@ -7649,7 +8508,7 @@
               </a:defRPr>
             </a:pPr>
             <a:r>
-              <a:t>How will you turn ideas into pull requests?</a:t>
+              <a:t>by Security Team</a:t>
             </a:r>
           </a:p>
         </p:txBody>
@@ -7662,7 +8521,220 @@
         </p:nvSpPr>
         <p:spPr>
           <a:xfrm>
-            <a:off x="1097280" y="4754880"/>
+            <a:off x="1097280" y="3840480"/>
+            <a:ext cx="9966960" cy="457200"/>
+          </a:xfrm>
+          <a:prstGeom prst="rect">
+            <a:avLst/>
+          </a:prstGeom>
+          <a:noFill/>
+        </p:spPr>
+        <p:txBody>
+          <a:bodyPr wrap="square">
+            <a:spAutoFit/>
+          </a:bodyPr>
+          <a:lstStyle/>
+          <a:p>
+            <a:pPr algn="l">
+              <a:defRPr sz="1800" b="1" i="0">
+                <a:solidFill>
+                  <a:srgbClr val="FFFFFF"/>
+                </a:solidFill>
+                <a:latin typeface="Calibri"/>
+              </a:defRPr>
+            </a:pPr>
+            <a:r>
+              <a:t>Fraud Prevention Breakthrough</a:t>
+            </a:r>
+          </a:p>
+        </p:txBody>
+      </p:sp>
+      <p:sp>
+        <p:nvSpPr>
+          <p:cNvPr id="9" name="TextBox 8"/>
+          <p:cNvSpPr txBox="1"/>
+          <p:nvPr/>
+        </p:nvSpPr>
+        <p:spPr>
+          <a:xfrm>
+            <a:off x="1097280" y="4389120"/>
+            <a:ext cx="9966960" cy="914400"/>
+          </a:xfrm>
+          <a:prstGeom prst="rect">
+            <a:avLst/>
+          </a:prstGeom>
+          <a:noFill/>
+        </p:spPr>
+        <p:txBody>
+          <a:bodyPr wrap="square">
+            <a:spAutoFit/>
+          </a:bodyPr>
+          <a:lstStyle/>
+          <a:p>
+            <a:pPr algn="l">
+              <a:defRPr sz="1400" b="0" i="0">
+                <a:solidFill>
+                  <a:srgbClr val="E2E2EA"/>
+                </a:solidFill>
+                <a:latin typeface="Calibri"/>
+              </a:defRPr>
+            </a:pPr>
+            <a:r>
+              <a:t>Fraud reduced from 22% to under 4% with dynamic SDK signatures, dramatically improving platform security and user trust.</a:t>
+            </a:r>
+          </a:p>
+        </p:txBody>
+      </p:sp>
+      <p:sp>
+        <p:nvSpPr>
+          <p:cNvPr id="10" name="TextBox 9"/>
+          <p:cNvSpPr txBox="1"/>
+          <p:nvPr/>
+        </p:nvSpPr>
+        <p:spPr>
+          <a:xfrm>
+            <a:off x="1097280" y="5486400"/>
+            <a:ext cx="9966960" cy="457200"/>
+          </a:xfrm>
+          <a:prstGeom prst="rect">
+            <a:avLst/>
+          </a:prstGeom>
+          <a:noFill/>
+        </p:spPr>
+        <p:txBody>
+          <a:bodyPr wrap="square">
+            <a:spAutoFit/>
+          </a:bodyPr>
+          <a:lstStyle/>
+          <a:p>
+            <a:pPr algn="l">
+              <a:defRPr sz="1300" b="0" i="1">
+                <a:solidFill>
+                  <a:srgbClr val="8F95A3"/>
+                </a:solidFill>
+                <a:latin typeface="Calibri"/>
+              </a:defRPr>
+            </a:pPr>
+            <a:r>
+              <a:t>💬 "Our innovative security measures are setting new industry standards"</a:t>
+            </a:r>
+          </a:p>
+        </p:txBody>
+      </p:sp>
+    </p:spTree>
+  </p:cSld>
+  <p:clrMapOvr>
+    <a:masterClrMapping/>
+  </p:clrMapOvr>
+</p:sld>
+</file>
+
+<file path=ppt/slides/slide26.xml><?xml version="1.0" encoding="utf-8"?>
+<p:sld xmlns:a="http://schemas.openxmlformats.org/drawingml/2006/main" xmlns:p="http://schemas.openxmlformats.org/presentationml/2006/main" xmlns:r="http://schemas.openxmlformats.org/officeDocument/2006/relationships">
+  <p:cSld>
+    <p:bg>
+      <p:bgPr>
+        <a:solidFill>
+          <a:srgbClr val="08080C"/>
+        </a:solidFill>
+        <a:effectLst/>
+      </p:bgPr>
+    </p:bg>
+    <p:spTree>
+      <p:nvGrpSpPr>
+        <p:cNvPr id="1" name=""/>
+        <p:cNvGrpSpPr/>
+        <p:nvPr/>
+      </p:nvGrpSpPr>
+      <p:grpSpPr/>
+      <p:sp>
+        <p:nvSpPr>
+          <p:cNvPr id="2" name="Rectangle 1"/>
+          <p:cNvSpPr/>
+          <p:nvPr/>
+        </p:nvSpPr>
+        <p:spPr>
+          <a:xfrm>
+            <a:off x="0" y="365760"/>
+            <a:ext cx="12191695" cy="54864"/>
+          </a:xfrm>
+          <a:prstGeom prst="rect">
+            <a:avLst/>
+          </a:prstGeom>
+          <a:solidFill>
+            <a:srgbClr val="607D8B"/>
+          </a:solidFill>
+          <a:ln>
+            <a:noFill/>
+          </a:ln>
+        </p:spPr>
+        <p:style>
+          <a:lnRef idx="1">
+            <a:schemeClr val="accent1"/>
+          </a:lnRef>
+          <a:fillRef idx="3">
+            <a:schemeClr val="accent1"/>
+          </a:fillRef>
+          <a:effectRef idx="2">
+            <a:schemeClr val="accent1"/>
+          </a:effectRef>
+          <a:fontRef idx="minor">
+            <a:schemeClr val="lt1"/>
+          </a:fontRef>
+        </p:style>
+        <p:txBody>
+          <a:bodyPr rtlCol="0" anchor="ctr"/>
+          <a:lstStyle/>
+          <a:p>
+            <a:pPr algn="ctr"/>
+          </a:p>
+        </p:txBody>
+      </p:sp>
+      <p:sp>
+        <p:nvSpPr>
+          <p:cNvPr id="3" name="TextBox 2"/>
+          <p:cNvSpPr txBox="1"/>
+          <p:nvPr/>
+        </p:nvSpPr>
+        <p:spPr>
+          <a:xfrm>
+            <a:off x="1097280" y="731520"/>
+            <a:ext cx="3657600" cy="365760"/>
+          </a:xfrm>
+          <a:prstGeom prst="rect">
+            <a:avLst/>
+          </a:prstGeom>
+          <a:noFill/>
+        </p:spPr>
+        <p:txBody>
+          <a:bodyPr wrap="none">
+            <a:spAutoFit/>
+          </a:bodyPr>
+          <a:lstStyle/>
+          <a:p>
+            <a:pPr algn="l">
+              <a:defRPr sz="1000" b="1">
+                <a:solidFill>
+                  <a:srgbClr val="607D8B"/>
+                </a:solidFill>
+                <a:latin typeface="Calibri"/>
+              </a:defRPr>
+            </a:pPr>
+            <a:r>
+              <a:t>💼  MILESTONE</a:t>
+            </a:r>
+          </a:p>
+        </p:txBody>
+      </p:sp>
+      <p:sp>
+        <p:nvSpPr>
+          <p:cNvPr id="4" name="TextBox 3"/>
+          <p:cNvSpPr txBox="1"/>
+          <p:nvPr/>
+        </p:nvSpPr>
+        <p:spPr>
+          <a:xfrm>
+            <a:off x="1097280" y="1188720"/>
             <a:ext cx="9966960" cy="731520"/>
           </a:xfrm>
           <a:prstGeom prst="rect">
@@ -7677,7 +8749,151 @@
           <a:lstStyle/>
           <a:p>
             <a:pPr algn="l">
-              <a:defRPr sz="1500" b="0" i="1">
+              <a:defRPr sz="3200" b="1" i="0">
+                <a:solidFill>
+                  <a:srgbClr val="607D8B"/>
+                </a:solidFill>
+                <a:latin typeface="Calibri"/>
+              </a:defRPr>
+            </a:pPr>
+            <a:r>
+              <a:t>Sales Performance</a:t>
+            </a:r>
+          </a:p>
+        </p:txBody>
+      </p:sp>
+      <p:sp>
+        <p:nvSpPr>
+          <p:cNvPr id="5" name="TextBox 4"/>
+          <p:cNvSpPr txBox="1"/>
+          <p:nvPr/>
+        </p:nvSpPr>
+        <p:spPr>
+          <a:xfrm>
+            <a:off x="1097280" y="2103120"/>
+            <a:ext cx="4572000" cy="822960"/>
+          </a:xfrm>
+          <a:prstGeom prst="rect">
+            <a:avLst/>
+          </a:prstGeom>
+          <a:noFill/>
+        </p:spPr>
+        <p:txBody>
+          <a:bodyPr wrap="square">
+            <a:spAutoFit/>
+          </a:bodyPr>
+          <a:lstStyle/>
+          <a:p>
+            <a:pPr algn="l">
+              <a:defRPr sz="5200" b="1" i="0">
+                <a:solidFill>
+                  <a:srgbClr val="607D8B"/>
+                </a:solidFill>
+                <a:latin typeface="Calibri"/>
+              </a:defRPr>
+            </a:pPr>
+            <a:r>
+              <a:t>$390k</a:t>
+            </a:r>
+          </a:p>
+        </p:txBody>
+      </p:sp>
+      <p:sp>
+        <p:nvSpPr>
+          <p:cNvPr id="6" name="TextBox 5"/>
+          <p:cNvSpPr txBox="1"/>
+          <p:nvPr/>
+        </p:nvSpPr>
+        <p:spPr>
+          <a:xfrm>
+            <a:off x="1097280" y="2926080"/>
+            <a:ext cx="4572000" cy="365760"/>
+          </a:xfrm>
+          <a:prstGeom prst="rect">
+            <a:avLst/>
+          </a:prstGeom>
+          <a:noFill/>
+        </p:spPr>
+        <p:txBody>
+          <a:bodyPr wrap="square">
+            <a:spAutoFit/>
+          </a:bodyPr>
+          <a:lstStyle/>
+          <a:p>
+            <a:pPr algn="l">
+              <a:defRPr sz="1100" b="0" i="0">
+                <a:solidFill>
+                  <a:srgbClr val="8F95A3"/>
+                </a:solidFill>
+                <a:latin typeface="Calibri"/>
+              </a:defRPr>
+            </a:pPr>
+            <a:r>
+              <a:t>net revenue in one week</a:t>
+            </a:r>
+          </a:p>
+        </p:txBody>
+      </p:sp>
+      <p:sp>
+        <p:nvSpPr>
+          <p:cNvPr id="7" name="TextBox 6"/>
+          <p:cNvSpPr txBox="1"/>
+          <p:nvPr/>
+        </p:nvSpPr>
+        <p:spPr>
+          <a:xfrm>
+            <a:off x="1097280" y="3566160"/>
+            <a:ext cx="9966960" cy="457200"/>
+          </a:xfrm>
+          <a:prstGeom prst="rect">
+            <a:avLst/>
+          </a:prstGeom>
+          <a:noFill/>
+        </p:spPr>
+        <p:txBody>
+          <a:bodyPr wrap="square">
+            <a:spAutoFit/>
+          </a:bodyPr>
+          <a:lstStyle/>
+          <a:p>
+            <a:pPr algn="l">
+              <a:defRPr sz="1800" b="1" i="0">
+                <a:solidFill>
+                  <a:srgbClr val="FFFFFF"/>
+                </a:solidFill>
+                <a:latin typeface="Calibri"/>
+              </a:defRPr>
+            </a:pPr>
+            <a:r>
+              <a:t>Record Sales Week</a:t>
+            </a:r>
+          </a:p>
+        </p:txBody>
+      </p:sp>
+      <p:sp>
+        <p:nvSpPr>
+          <p:cNvPr id="8" name="TextBox 7"/>
+          <p:cNvSpPr txBox="1"/>
+          <p:nvPr/>
+        </p:nvSpPr>
+        <p:spPr>
+          <a:xfrm>
+            <a:off x="1097280" y="4206240"/>
+            <a:ext cx="9966960" cy="1371600"/>
+          </a:xfrm>
+          <a:prstGeom prst="rect">
+            <a:avLst/>
+          </a:prstGeom>
+          <a:noFill/>
+        </p:spPr>
+        <p:txBody>
+          <a:bodyPr wrap="square">
+            <a:spAutoFit/>
+          </a:bodyPr>
+          <a:lstStyle/>
+          <a:p>
+            <a:pPr algn="l">
+              <a:defRPr sz="1500" b="0" i="0">
                 <a:solidFill>
                   <a:srgbClr val="E2E2EA"/>
                 </a:solidFill>
@@ -7685,43 +8901,7 @@
               </a:defRPr>
             </a:pPr>
             <a:r>
-              <a:t>Innovation mindset drives everything we do</a:t>
-            </a:r>
-          </a:p>
-        </p:txBody>
-      </p:sp>
-      <p:sp>
-        <p:nvSpPr>
-          <p:cNvPr id="9" name="TextBox 8"/>
-          <p:cNvSpPr txBox="1"/>
-          <p:nvPr/>
-        </p:nvSpPr>
-        <p:spPr>
-          <a:xfrm>
-            <a:off x="1097280" y="5760720"/>
-            <a:ext cx="9966960" cy="274320"/>
-          </a:xfrm>
-          <a:prstGeom prst="rect">
-            <a:avLst/>
-          </a:prstGeom>
-          <a:noFill/>
-        </p:spPr>
-        <p:txBody>
-          <a:bodyPr wrap="square">
-            <a:spAutoFit/>
-          </a:bodyPr>
-          <a:lstStyle/>
-          <a:p>
-            <a:pPr algn="l">
-              <a:defRPr sz="1100" b="0" i="0">
-                <a:solidFill>
-                  <a:srgbClr val="5C6270"/>
-                </a:solidFill>
-                <a:latin typeface="Calibri"/>
-              </a:defRPr>
-            </a:pPr>
-            <a:r>
-              <a:t>#general</a:t>
+              <a:t>Sales team closed 8 deals generating $390k net revenue in a single week, demonstrating strong market momentum and effective sales strategies.</a:t>
             </a:r>
           </a:p>
         </p:txBody>
@@ -7767,7 +8947,7 @@
             <a:avLst/>
           </a:prstGeom>
           <a:solidFill>
-            <a:srgbClr val="EC4899"/>
+            <a:srgbClr val="4CAF50"/>
           </a:solidFill>
           <a:ln>
             <a:noFill/>
@@ -7820,13 +9000,13 @@
             <a:pPr algn="l">
               <a:defRPr sz="1000" b="1">
                 <a:solidFill>
-                  <a:srgbClr val="EC4899"/>
-                </a:solidFill>
-                <a:latin typeface="Calibri"/>
-              </a:defRPr>
-            </a:pPr>
-            <a:r>
-              <a:t>🎈  CELEBRATION</a:t>
+                  <a:srgbClr val="4CAF50"/>
+                </a:solidFill>
+                <a:latin typeface="Calibri"/>
+              </a:defRPr>
+            </a:pPr>
+            <a:r>
+              <a:t>🚀  MILESTONE</a:t>
             </a:r>
           </a:p>
         </p:txBody>
@@ -7856,13 +9036,13 @@
             <a:pPr algn="l">
               <a:defRPr sz="3200" b="1" i="0">
                 <a:solidFill>
-                  <a:srgbClr val="EC4899"/>
-                </a:solidFill>
-                <a:latin typeface="Calibri"/>
-              </a:defRPr>
-            </a:pPr>
-            <a:r>
-              <a:t>Birthday Celebration</a:t>
+                  <a:srgbClr val="4CAF50"/>
+                </a:solidFill>
+                <a:latin typeface="Calibri"/>
+              </a:defRPr>
+            </a:pPr>
+            <a:r>
+              <a:t>Engineering Excellence</a:t>
             </a:r>
           </a:p>
         </p:txBody>
@@ -7876,21 +9056,93 @@
         <p:spPr>
           <a:xfrm>
             <a:off x="1097280" y="2103120"/>
-            <a:ext cx="9966960" cy="640080"/>
-          </a:xfrm>
-          <a:prstGeom prst="rect">
-            <a:avLst/>
-          </a:prstGeom>
-          <a:noFill/>
-        </p:spPr>
-        <p:txBody>
-          <a:bodyPr wrap="square">
-            <a:spAutoFit/>
-          </a:bodyPr>
-          <a:lstStyle/>
-          <a:p>
-            <a:pPr algn="l">
-              <a:defRPr sz="2800" b="1" i="0">
+            <a:ext cx="4572000" cy="822960"/>
+          </a:xfrm>
+          <a:prstGeom prst="rect">
+            <a:avLst/>
+          </a:prstGeom>
+          <a:noFill/>
+        </p:spPr>
+        <p:txBody>
+          <a:bodyPr wrap="square">
+            <a:spAutoFit/>
+          </a:bodyPr>
+          <a:lstStyle/>
+          <a:p>
+            <a:pPr algn="l">
+              <a:defRPr sz="5200" b="1" i="0">
+                <a:solidFill>
+                  <a:srgbClr val="4CAF50"/>
+                </a:solidFill>
+                <a:latin typeface="Calibri"/>
+              </a:defRPr>
+            </a:pPr>
+            <a:r>
+              <a:t>8</a:t>
+            </a:r>
+          </a:p>
+        </p:txBody>
+      </p:sp>
+      <p:sp>
+        <p:nvSpPr>
+          <p:cNvPr id="6" name="TextBox 5"/>
+          <p:cNvSpPr txBox="1"/>
+          <p:nvPr/>
+        </p:nvSpPr>
+        <p:spPr>
+          <a:xfrm>
+            <a:off x="1097280" y="2926080"/>
+            <a:ext cx="4572000" cy="365760"/>
+          </a:xfrm>
+          <a:prstGeom prst="rect">
+            <a:avLst/>
+          </a:prstGeom>
+          <a:noFill/>
+        </p:spPr>
+        <p:txBody>
+          <a:bodyPr wrap="square">
+            <a:spAutoFit/>
+          </a:bodyPr>
+          <a:lstStyle/>
+          <a:p>
+            <a:pPr algn="l">
+              <a:defRPr sz="1100" b="0" i="0">
+                <a:solidFill>
+                  <a:srgbClr val="8F95A3"/>
+                </a:solidFill>
+                <a:latin typeface="Calibri"/>
+              </a:defRPr>
+            </a:pPr>
+            <a:r>
+              <a:t>scorecards being automated</a:t>
+            </a:r>
+          </a:p>
+        </p:txBody>
+      </p:sp>
+      <p:sp>
+        <p:nvSpPr>
+          <p:cNvPr id="7" name="TextBox 6"/>
+          <p:cNvSpPr txBox="1"/>
+          <p:nvPr/>
+        </p:nvSpPr>
+        <p:spPr>
+          <a:xfrm>
+            <a:off x="1097280" y="3566160"/>
+            <a:ext cx="9966960" cy="457200"/>
+          </a:xfrm>
+          <a:prstGeom prst="rect">
+            <a:avLst/>
+          </a:prstGeom>
+          <a:noFill/>
+        </p:spPr>
+        <p:txBody>
+          <a:bodyPr wrap="square">
+            <a:spAutoFit/>
+          </a:bodyPr>
+          <a:lstStyle/>
+          <a:p>
+            <a:pPr algn="l">
+              <a:defRPr sz="1800" b="1" i="0">
                 <a:solidFill>
                   <a:srgbClr val="FFFFFF"/>
                 </a:solidFill>
@@ -7898,71 +9150,35 @@
               </a:defRPr>
             </a:pPr>
             <a:r>
-              <a:t>Anna Kolyada</a:t>
-            </a:r>
-          </a:p>
-        </p:txBody>
-      </p:sp>
-      <p:sp>
-        <p:nvSpPr>
-          <p:cNvPr id="6" name="TextBox 5"/>
-          <p:cNvSpPr txBox="1"/>
-          <p:nvPr/>
-        </p:nvSpPr>
-        <p:spPr>
-          <a:xfrm>
-            <a:off x="1097280" y="2743200"/>
-            <a:ext cx="9966960" cy="365760"/>
-          </a:xfrm>
-          <a:prstGeom prst="rect">
-            <a:avLst/>
-          </a:prstGeom>
-          <a:noFill/>
-        </p:spPr>
-        <p:txBody>
-          <a:bodyPr wrap="square">
-            <a:spAutoFit/>
-          </a:bodyPr>
-          <a:lstStyle/>
-          <a:p>
-            <a:pPr algn="l">
-              <a:defRPr sz="1400" b="0" i="0">
-                <a:solidFill>
-                  <a:srgbClr val="8F95A3"/>
-                </a:solidFill>
-                <a:latin typeface="Calibri"/>
-              </a:defRPr>
-            </a:pPr>
-            <a:r>
-              <a:t>Happy Birthday!</a:t>
-            </a:r>
-          </a:p>
-        </p:txBody>
-      </p:sp>
-      <p:sp>
-        <p:nvSpPr>
-          <p:cNvPr id="7" name="TextBox 6"/>
-          <p:cNvSpPr txBox="1"/>
-          <p:nvPr/>
-        </p:nvSpPr>
-        <p:spPr>
-          <a:xfrm>
-            <a:off x="1097280" y="3291840"/>
-            <a:ext cx="9966960" cy="914400"/>
-          </a:xfrm>
-          <a:prstGeom prst="rect">
-            <a:avLst/>
-          </a:prstGeom>
-          <a:noFill/>
-        </p:spPr>
-        <p:txBody>
-          <a:bodyPr wrap="square">
-            <a:spAutoFit/>
-          </a:bodyPr>
-          <a:lstStyle/>
-          <a:p>
-            <a:pPr algn="l">
-              <a:defRPr sz="1600" b="0" i="0">
+              <a:t>Scorecard Automation Breakthrough</a:t>
+            </a:r>
+          </a:p>
+        </p:txBody>
+      </p:sp>
+      <p:sp>
+        <p:nvSpPr>
+          <p:cNvPr id="8" name="TextBox 7"/>
+          <p:cNvSpPr txBox="1"/>
+          <p:nvPr/>
+        </p:nvSpPr>
+        <p:spPr>
+          <a:xfrm>
+            <a:off x="1097280" y="4206240"/>
+            <a:ext cx="9966960" cy="1371600"/>
+          </a:xfrm>
+          <a:prstGeom prst="rect">
+            <a:avLst/>
+          </a:prstGeom>
+          <a:noFill/>
+        </p:spPr>
+        <p:txBody>
+          <a:bodyPr wrap="square">
+            <a:spAutoFit/>
+          </a:bodyPr>
+          <a:lstStyle/>
+          <a:p>
+            <a:pPr algn="l">
+              <a:defRPr sz="1500" b="0" i="0">
                 <a:solidFill>
                   <a:srgbClr val="E2E2EA"/>
                 </a:solidFill>
@@ -7970,43 +9186,7 @@
               </a:defRPr>
             </a:pPr>
             <a:r>
-              <a:t>Grateful for all the birthday love from the team! Looking forward to what this new year brings.</a:t>
-            </a:r>
-          </a:p>
-        </p:txBody>
-      </p:sp>
-      <p:sp>
-        <p:nvSpPr>
-          <p:cNvPr id="8" name="TextBox 7"/>
-          <p:cNvSpPr txBox="1"/>
-          <p:nvPr/>
-        </p:nvSpPr>
-        <p:spPr>
-          <a:xfrm>
-            <a:off x="1097280" y="4572000"/>
-            <a:ext cx="9966960" cy="457200"/>
-          </a:xfrm>
-          <a:prstGeom prst="rect">
-            <a:avLst/>
-          </a:prstGeom>
-          <a:noFill/>
-        </p:spPr>
-        <p:txBody>
-          <a:bodyPr wrap="square">
-            <a:spAutoFit/>
-          </a:bodyPr>
-          <a:lstStyle/>
-          <a:p>
-            <a:pPr algn="l">
-              <a:defRPr sz="1400" b="0" i="1">
-                <a:solidFill>
-                  <a:srgbClr val="EC4899"/>
-                </a:solidFill>
-                <a:latin typeface="Calibri"/>
-              </a:defRPr>
-            </a:pPr>
-            <a:r>
-              <a:t>Operations Team</a:t>
+              <a:t>Engineering metrics scorecards are being finalized across key teams, with automation targeting completion by end of day. This shift from manual tracking to AI-driven insights represents a major step toward data-driven performance management.</a:t>
             </a:r>
           </a:p>
         </p:txBody>
@@ -8052,7 +9232,7 @@
             <a:avLst/>
           </a:prstGeom>
           <a:solidFill>
-            <a:srgbClr val="8B5CF6"/>
+            <a:srgbClr val="2196F3"/>
           </a:solidFill>
           <a:ln>
             <a:noFill/>
@@ -8105,13 +9285,13 @@
             <a:pPr algn="l">
               <a:defRPr sz="1000" b="1">
                 <a:solidFill>
-                  <a:srgbClr val="8B5CF6"/>
-                </a:solidFill>
-                <a:latin typeface="Calibri"/>
-              </a:defRPr>
-            </a:pPr>
-            <a:r>
-              <a:t>🎉  CELEBRATION</a:t>
+                  <a:srgbClr val="2196F3"/>
+                </a:solidFill>
+                <a:latin typeface="Calibri"/>
+              </a:defRPr>
+            </a:pPr>
+            <a:r>
+              <a:t>📊  WIN</a:t>
             </a:r>
           </a:p>
         </p:txBody>
@@ -8141,13 +9321,13 @@
             <a:pPr algn="l">
               <a:defRPr sz="3200" b="1" i="0">
                 <a:solidFill>
-                  <a:srgbClr val="8B5CF6"/>
-                </a:solidFill>
-                <a:latin typeface="Calibri"/>
-              </a:defRPr>
-            </a:pPr>
-            <a:r>
-              <a:t>Birthday Celebration</a:t>
+                  <a:srgbClr val="2196F3"/>
+                </a:solidFill>
+                <a:latin typeface="Calibri"/>
+              </a:defRPr>
+            </a:pPr>
+            <a:r>
+              <a:t>Data Precision Victory</a:t>
             </a:r>
           </a:p>
         </p:txBody>
@@ -8161,21 +9341,129 @@
         <p:spPr>
           <a:xfrm>
             <a:off x="1097280" y="2103120"/>
-            <a:ext cx="9966960" cy="640080"/>
-          </a:xfrm>
-          <a:prstGeom prst="rect">
-            <a:avLst/>
-          </a:prstGeom>
-          <a:noFill/>
-        </p:spPr>
-        <p:txBody>
-          <a:bodyPr wrap="square">
-            <a:spAutoFit/>
-          </a:bodyPr>
-          <a:lstStyle/>
-          <a:p>
-            <a:pPr algn="l">
-              <a:defRPr sz="2800" b="1" i="0">
+            <a:ext cx="4572000" cy="822960"/>
+          </a:xfrm>
+          <a:prstGeom prst="rect">
+            <a:avLst/>
+          </a:prstGeom>
+          <a:noFill/>
+        </p:spPr>
+        <p:txBody>
+          <a:bodyPr wrap="square">
+            <a:spAutoFit/>
+          </a:bodyPr>
+          <a:lstStyle/>
+          <a:p>
+            <a:pPr algn="l">
+              <a:defRPr sz="4800" b="1" i="0">
+                <a:solidFill>
+                  <a:srgbClr val="2196F3"/>
+                </a:solidFill>
+                <a:latin typeface="Calibri"/>
+              </a:defRPr>
+            </a:pPr>
+            <a:r>
+              <a:t>Record Low</a:t>
+            </a:r>
+          </a:p>
+        </p:txBody>
+      </p:sp>
+      <p:sp>
+        <p:nvSpPr>
+          <p:cNvPr id="6" name="TextBox 5"/>
+          <p:cNvSpPr txBox="1"/>
+          <p:nvPr/>
+        </p:nvSpPr>
+        <p:spPr>
+          <a:xfrm>
+            <a:off x="1097280" y="2834640"/>
+            <a:ext cx="4572000" cy="365760"/>
+          </a:xfrm>
+          <a:prstGeom prst="rect">
+            <a:avLst/>
+          </a:prstGeom>
+          <a:noFill/>
+        </p:spPr>
+        <p:txBody>
+          <a:bodyPr wrap="square">
+            <a:spAutoFit/>
+          </a:bodyPr>
+          <a:lstStyle/>
+          <a:p>
+            <a:pPr algn="l">
+              <a:defRPr sz="1200" b="0" i="0">
+                <a:solidFill>
+                  <a:srgbClr val="8F95A3"/>
+                </a:solidFill>
+                <a:latin typeface="Calibri"/>
+              </a:defRPr>
+            </a:pPr>
+            <a:r>
+              <a:t>spend discrepancies</a:t>
+            </a:r>
+          </a:p>
+        </p:txBody>
+      </p:sp>
+      <p:sp>
+        <p:nvSpPr>
+          <p:cNvPr id="7" name="TextBox 6"/>
+          <p:cNvSpPr txBox="1"/>
+          <p:nvPr/>
+        </p:nvSpPr>
+        <p:spPr>
+          <a:xfrm>
+            <a:off x="1097280" y="3291840"/>
+            <a:ext cx="9966960" cy="365760"/>
+          </a:xfrm>
+          <a:prstGeom prst="rect">
+            <a:avLst/>
+          </a:prstGeom>
+          <a:noFill/>
+        </p:spPr>
+        <p:txBody>
+          <a:bodyPr wrap="square">
+            <a:spAutoFit/>
+          </a:bodyPr>
+          <a:lstStyle/>
+          <a:p>
+            <a:pPr algn="l">
+              <a:defRPr sz="1400" b="0" i="0">
+                <a:solidFill>
+                  <a:srgbClr val="E2E2EA"/>
+                </a:solidFill>
+                <a:latin typeface="Calibri"/>
+              </a:defRPr>
+            </a:pPr>
+            <a:r>
+              <a:t>by Chardonnay Team</a:t>
+            </a:r>
+          </a:p>
+        </p:txBody>
+      </p:sp>
+      <p:sp>
+        <p:nvSpPr>
+          <p:cNvPr id="8" name="TextBox 7"/>
+          <p:cNvSpPr txBox="1"/>
+          <p:nvPr/>
+        </p:nvSpPr>
+        <p:spPr>
+          <a:xfrm>
+            <a:off x="1097280" y="3840480"/>
+            <a:ext cx="9966960" cy="457200"/>
+          </a:xfrm>
+          <a:prstGeom prst="rect">
+            <a:avLst/>
+          </a:prstGeom>
+          <a:noFill/>
+        </p:spPr>
+        <p:txBody>
+          <a:bodyPr wrap="square">
+            <a:spAutoFit/>
+          </a:bodyPr>
+          <a:lstStyle/>
+          <a:p>
+            <a:pPr algn="l">
+              <a:defRPr sz="1800" b="1" i="0">
                 <a:solidFill>
                   <a:srgbClr val="FFFFFF"/>
                 </a:solidFill>
@@ -8183,21 +9471,21 @@
               </a:defRPr>
             </a:pPr>
             <a:r>
-              <a:t>Mikhail Ladutko</a:t>
-            </a:r>
-          </a:p>
-        </p:txBody>
-      </p:sp>
-      <p:sp>
-        <p:nvSpPr>
-          <p:cNvPr id="6" name="TextBox 5"/>
-          <p:cNvSpPr txBox="1"/>
-          <p:nvPr/>
-        </p:nvSpPr>
-        <p:spPr>
-          <a:xfrm>
-            <a:off x="1097280" y="2743200"/>
-            <a:ext cx="9966960" cy="365760"/>
+              <a:t>January Marks Historic Data Accuracy</a:t>
+            </a:r>
+          </a:p>
+        </p:txBody>
+      </p:sp>
+      <p:sp>
+        <p:nvSpPr>
+          <p:cNvPr id="9" name="TextBox 8"/>
+          <p:cNvSpPr txBox="1"/>
+          <p:nvPr/>
+        </p:nvSpPr>
+        <p:spPr>
+          <a:xfrm>
+            <a:off x="1097280" y="4389120"/>
+            <a:ext cx="9966960" cy="914400"/>
           </a:xfrm>
           <a:prstGeom prst="rect">
             <a:avLst/>
@@ -8213,82 +9501,49 @@
             <a:pPr algn="l">
               <a:defRPr sz="1400" b="0" i="0">
                 <a:solidFill>
+                  <a:srgbClr val="E2E2EA"/>
+                </a:solidFill>
+                <a:latin typeface="Calibri"/>
+              </a:defRPr>
+            </a:pPr>
+            <a:r>
+              <a:t>Achieved historically minimal spend discrepancies in January, with automated LTV system launch planned in 12 weeks.</a:t>
+            </a:r>
+          </a:p>
+        </p:txBody>
+      </p:sp>
+      <p:sp>
+        <p:nvSpPr>
+          <p:cNvPr id="10" name="TextBox 9"/>
+          <p:cNvSpPr txBox="1"/>
+          <p:nvPr/>
+        </p:nvSpPr>
+        <p:spPr>
+          <a:xfrm>
+            <a:off x="1097280" y="5486400"/>
+            <a:ext cx="9966960" cy="457200"/>
+          </a:xfrm>
+          <a:prstGeom prst="rect">
+            <a:avLst/>
+          </a:prstGeom>
+          <a:noFill/>
+        </p:spPr>
+        <p:txBody>
+          <a:bodyPr wrap="square">
+            <a:spAutoFit/>
+          </a:bodyPr>
+          <a:lstStyle/>
+          <a:p>
+            <a:pPr algn="l">
+              <a:defRPr sz="1300" b="0" i="1">
+                <a:solidFill>
                   <a:srgbClr val="8F95A3"/>
                 </a:solidFill>
                 <a:latin typeface="Calibri"/>
               </a:defRPr>
             </a:pPr>
             <a:r>
-              <a:t>Happy Birthday!</a:t>
-            </a:r>
-          </a:p>
-        </p:txBody>
-      </p:sp>
-      <p:sp>
-        <p:nvSpPr>
-          <p:cNvPr id="7" name="TextBox 6"/>
-          <p:cNvSpPr txBox="1"/>
-          <p:nvPr/>
-        </p:nvSpPr>
-        <p:spPr>
-          <a:xfrm>
-            <a:off x="1097280" y="3291840"/>
-            <a:ext cx="9966960" cy="914400"/>
-          </a:xfrm>
-          <a:prstGeom prst="rect">
-            <a:avLst/>
-          </a:prstGeom>
-          <a:noFill/>
-        </p:spPr>
-        <p:txBody>
-          <a:bodyPr wrap="square">
-            <a:spAutoFit/>
-          </a:bodyPr>
-          <a:lstStyle/>
-          <a:p>
-            <a:pPr algn="l">
-              <a:defRPr sz="1600" b="0" i="0">
-                <a:solidFill>
-                  <a:srgbClr val="E2E2EA"/>
-                </a:solidFill>
-                <a:latin typeface="Calibri"/>
-              </a:defRPr>
-            </a:pPr>
-          </a:p>
-        </p:txBody>
-      </p:sp>
-      <p:sp>
-        <p:nvSpPr>
-          <p:cNvPr id="8" name="TextBox 7"/>
-          <p:cNvSpPr txBox="1"/>
-          <p:nvPr/>
-        </p:nvSpPr>
-        <p:spPr>
-          <a:xfrm>
-            <a:off x="1097280" y="4572000"/>
-            <a:ext cx="9966960" cy="457200"/>
-          </a:xfrm>
-          <a:prstGeom prst="rect">
-            <a:avLst/>
-          </a:prstGeom>
-          <a:noFill/>
-        </p:spPr>
-        <p:txBody>
-          <a:bodyPr wrap="square">
-            <a:spAutoFit/>
-          </a:bodyPr>
-          <a:lstStyle/>
-          <a:p>
-            <a:pPr algn="l">
-              <a:defRPr sz="1400" b="0" i="1">
-                <a:solidFill>
-                  <a:srgbClr val="8B5CF6"/>
-                </a:solidFill>
-                <a:latin typeface="Calibri"/>
-              </a:defRPr>
-            </a:pPr>
-            <a:r>
-              <a:t>Engineering Team</a:t>
+              <a:t>💬 "Our relentless focus on data precision is paying off with unprecedented accuracy levels"</a:t>
             </a:r>
           </a:p>
         </p:txBody>
@@ -8334,7 +9589,7 @@
             <a:avLst/>
           </a:prstGeom>
           <a:solidFill>
-            <a:srgbClr val="10B981"/>
+            <a:srgbClr val="FF9800"/>
           </a:solidFill>
           <a:ln>
             <a:noFill/>
@@ -8387,13 +9642,13 @@
             <a:pPr algn="l">
               <a:defRPr sz="1000" b="1">
                 <a:solidFill>
-                  <a:srgbClr val="10B981"/>
-                </a:solidFill>
-                <a:latin typeface="Calibri"/>
-              </a:defRPr>
-            </a:pPr>
-            <a:r>
-              <a:t>🚀  WIN</a:t>
+                  <a:srgbClr val="FF9800"/>
+                </a:solidFill>
+                <a:latin typeface="Calibri"/>
+              </a:defRPr>
+            </a:pPr>
+            <a:r>
+              <a:t>🎯  MILESTONE</a:t>
             </a:r>
           </a:p>
         </p:txBody>
@@ -8423,13 +9678,13 @@
             <a:pPr algn="l">
               <a:defRPr sz="3200" b="1" i="0">
                 <a:solidFill>
-                  <a:srgbClr val="10B981"/>
-                </a:solidFill>
-                <a:latin typeface="Calibri"/>
-              </a:defRPr>
-            </a:pPr>
-            <a:r>
-              <a:t>Innovation Mindset</a:t>
+                  <a:srgbClr val="FF9800"/>
+                </a:solidFill>
+                <a:latin typeface="Calibri"/>
+              </a:defRPr>
+            </a:pPr>
+            <a:r>
+              <a:t>Strategic Pivot</a:t>
             </a:r>
           </a:p>
         </p:txBody>
@@ -8457,15 +9712,15 @@
           <a:lstStyle/>
           <a:p>
             <a:pPr algn="l">
-              <a:defRPr sz="4800" b="1" i="0">
-                <a:solidFill>
-                  <a:srgbClr val="10B981"/>
-                </a:solidFill>
-                <a:latin typeface="Calibri"/>
-              </a:defRPr>
-            </a:pPr>
-            <a:r>
-              <a:t>Fast</a:t>
+              <a:defRPr sz="5200" b="1" i="0">
+                <a:solidFill>
+                  <a:srgbClr val="FF9800"/>
+                </a:solidFill>
+                <a:latin typeface="Calibri"/>
+              </a:defRPr>
+            </a:pPr>
+            <a:r>
+              <a:t>Business Empire</a:t>
             </a:r>
           </a:p>
         </p:txBody>
@@ -8478,7 +9733,7 @@
         </p:nvSpPr>
         <p:spPr>
           <a:xfrm>
-            <a:off x="1097280" y="2834640"/>
+            <a:off x="1097280" y="2926080"/>
             <a:ext cx="4572000" cy="365760"/>
           </a:xfrm>
           <a:prstGeom prst="rect">
@@ -8493,7 +9748,7 @@
           <a:lstStyle/>
           <a:p>
             <a:pPr algn="l">
-              <a:defRPr sz="1200" b="0" i="0">
+              <a:defRPr sz="1100" b="0" i="0">
                 <a:solidFill>
                   <a:srgbClr val="8F95A3"/>
                 </a:solidFill>
@@ -8501,7 +9756,7 @@
               </a:defRPr>
             </a:pPr>
             <a:r>
-              <a:t>Progress</a:t>
+              <a:t>new testing focus</a:t>
             </a:r>
           </a:p>
         </p:txBody>
@@ -8514,22 +9769,58 @@
         </p:nvSpPr>
         <p:spPr>
           <a:xfrm>
-            <a:off x="1097280" y="3291840"/>
-            <a:ext cx="9966960" cy="365760"/>
-          </a:xfrm>
-          <a:prstGeom prst="rect">
-            <a:avLst/>
-          </a:prstGeom>
-          <a:noFill/>
-        </p:spPr>
-        <p:txBody>
-          <a:bodyPr wrap="square">
-            <a:spAutoFit/>
-          </a:bodyPr>
-          <a:lstStyle/>
-          <a:p>
-            <a:pPr algn="l">
-              <a:defRPr sz="1400" b="0" i="0">
+            <a:off x="1097280" y="3566160"/>
+            <a:ext cx="9966960" cy="457200"/>
+          </a:xfrm>
+          <a:prstGeom prst="rect">
+            <a:avLst/>
+          </a:prstGeom>
+          <a:noFill/>
+        </p:spPr>
+        <p:txBody>
+          <a:bodyPr wrap="square">
+            <a:spAutoFit/>
+          </a:bodyPr>
+          <a:lstStyle/>
+          <a:p>
+            <a:pPr algn="l">
+              <a:defRPr sz="1800" b="1" i="0">
+                <a:solidFill>
+                  <a:srgbClr val="FFFFFF"/>
+                </a:solidFill>
+                <a:latin typeface="Calibri"/>
+              </a:defRPr>
+            </a:pPr>
+            <a:r>
+              <a:t>Margin Testing Optimization</a:t>
+            </a:r>
+          </a:p>
+        </p:txBody>
+      </p:sp>
+      <p:sp>
+        <p:nvSpPr>
+          <p:cNvPr id="8" name="TextBox 7"/>
+          <p:cNvSpPr txBox="1"/>
+          <p:nvPr/>
+        </p:nvSpPr>
+        <p:spPr>
+          <a:xfrm>
+            <a:off x="1097280" y="4206240"/>
+            <a:ext cx="9966960" cy="1371600"/>
+          </a:xfrm>
+          <a:prstGeom prst="rect">
+            <a:avLst/>
+          </a:prstGeom>
+          <a:noFill/>
+        </p:spPr>
+        <p:txBody>
+          <a:bodyPr wrap="square">
+            <a:spAutoFit/>
+          </a:bodyPr>
+          <a:lstStyle/>
+          <a:p>
+            <a:pPr algn="l">
+              <a:defRPr sz="1500" b="0" i="0">
                 <a:solidFill>
                   <a:srgbClr val="E2E2EA"/>
                 </a:solidFill>
@@ -8537,115 +9828,7 @@
               </a:defRPr>
             </a:pPr>
             <a:r>
-              <a:t>by All Teams</a:t>
-            </a:r>
-          </a:p>
-        </p:txBody>
-      </p:sp>
-      <p:sp>
-        <p:nvSpPr>
-          <p:cNvPr id="8" name="TextBox 7"/>
-          <p:cNvSpPr txBox="1"/>
-          <p:nvPr/>
-        </p:nvSpPr>
-        <p:spPr>
-          <a:xfrm>
-            <a:off x="1097280" y="3840480"/>
-            <a:ext cx="9966960" cy="457200"/>
-          </a:xfrm>
-          <a:prstGeom prst="rect">
-            <a:avLst/>
-          </a:prstGeom>
-          <a:noFill/>
-        </p:spPr>
-        <p:txBody>
-          <a:bodyPr wrap="square">
-            <a:spAutoFit/>
-          </a:bodyPr>
-          <a:lstStyle/>
-          <a:p>
-            <a:pPr algn="l">
-              <a:defRPr sz="1800" b="1" i="0">
-                <a:solidFill>
-                  <a:srgbClr val="FFFFFF"/>
-                </a:solidFill>
-                <a:latin typeface="Calibri"/>
-              </a:defRPr>
-            </a:pPr>
-            <a:r>
-              <a:t>Building Tools at Lightning Speed</a:t>
-            </a:r>
-          </a:p>
-        </p:txBody>
-      </p:sp>
-      <p:sp>
-        <p:nvSpPr>
-          <p:cNvPr id="9" name="TextBox 8"/>
-          <p:cNvSpPr txBox="1"/>
-          <p:nvPr/>
-        </p:nvSpPr>
-        <p:spPr>
-          <a:xfrm>
-            <a:off x="1097280" y="4389120"/>
-            <a:ext cx="9966960" cy="914400"/>
-          </a:xfrm>
-          <a:prstGeom prst="rect">
-            <a:avLst/>
-          </a:prstGeom>
-          <a:noFill/>
-        </p:spPr>
-        <p:txBody>
-          <a:bodyPr wrap="square">
-            <a:spAutoFit/>
-          </a:bodyPr>
-          <a:lstStyle/>
-          <a:p>
-            <a:pPr algn="l">
-              <a:defRPr sz="1400" b="0" i="0">
-                <a:solidFill>
-                  <a:srgbClr val="E2E2EA"/>
-                </a:solidFill>
-                <a:latin typeface="Calibri"/>
-              </a:defRPr>
-            </a:pPr>
-            <a:r>
-              <a:t>Non-engineering teams are creating useful tools incredibly quickly, showing we're learning fast and moving in the right direction. This innovation mindset across all departments is driving our rapid growth.</a:t>
-            </a:r>
-          </a:p>
-        </p:txBody>
-      </p:sp>
-      <p:sp>
-        <p:nvSpPr>
-          <p:cNvPr id="10" name="TextBox 9"/>
-          <p:cNvSpPr txBox="1"/>
-          <p:nvPr/>
-        </p:nvSpPr>
-        <p:spPr>
-          <a:xfrm>
-            <a:off x="1097280" y="5486400"/>
-            <a:ext cx="9966960" cy="457200"/>
-          </a:xfrm>
-          <a:prstGeom prst="rect">
-            <a:avLst/>
-          </a:prstGeom>
-          <a:noFill/>
-        </p:spPr>
-        <p:txBody>
-          <a:bodyPr wrap="square">
-            <a:spAutoFit/>
-          </a:bodyPr>
-          <a:lstStyle/>
-          <a:p>
-            <a:pPr algn="l">
-              <a:defRPr sz="1300" b="0" i="1">
-                <a:solidFill>
-                  <a:srgbClr val="8F95A3"/>
-                </a:solidFill>
-                <a:latin typeface="Calibri"/>
-              </a:defRPr>
-            </a:pPr>
-            <a:r>
-              <a:t>💬 "When everyone becomes a builder, magic happens"</a:t>
+              <a:t>Teams are shifting focus to higher-performing segments like Business Empire for better advertiser ROAS, while creating comprehensive documentation frameworks for future learning.</a:t>
             </a:r>
           </a:p>
         </p:txBody>
@@ -8691,7 +9874,7 @@
             <a:avLst/>
           </a:prstGeom>
           <a:solidFill>
-            <a:srgbClr val="DC2626"/>
+            <a:srgbClr val="4CAF50"/>
           </a:solidFill>
           <a:ln>
             <a:noFill/>
@@ -8744,13 +9927,13 @@
             <a:pPr algn="l">
               <a:defRPr sz="1000" b="1">
                 <a:solidFill>
-                  <a:srgbClr val="DC2626"/>
-                </a:solidFill>
-                <a:latin typeface="Calibri"/>
-              </a:defRPr>
-            </a:pPr>
-            <a:r>
-              <a:t>🔒  EVENT</a:t>
+                  <a:srgbClr val="4CAF50"/>
+                </a:solidFill>
+                <a:latin typeface="Calibri"/>
+              </a:defRPr>
+            </a:pPr>
+            <a:r>
+              <a:t>💰  WIN</a:t>
             </a:r>
           </a:p>
         </p:txBody>
@@ -8780,13 +9963,13 @@
             <a:pPr algn="l">
               <a:defRPr sz="3200" b="1" i="0">
                 <a:solidFill>
-                  <a:srgbClr val="DC2626"/>
-                </a:solidFill>
-                <a:latin typeface="Calibri"/>
-              </a:defRPr>
-            </a:pPr>
-            <a:r>
-              <a:t>Security &amp; Best Practices</a:t>
+                  <a:srgbClr val="4CAF50"/>
+                </a:solidFill>
+                <a:latin typeface="Calibri"/>
+              </a:defRPr>
+            </a:pPr>
+            <a:r>
+              <a:t>Revenue Acceleration</a:t>
             </a:r>
           </a:p>
         </p:txBody>
@@ -8800,21 +9983,129 @@
         <p:spPr>
           <a:xfrm>
             <a:off x="1097280" y="2103120"/>
-            <a:ext cx="9966960" cy="548640"/>
-          </a:xfrm>
-          <a:prstGeom prst="rect">
-            <a:avLst/>
-          </a:prstGeom>
-          <a:noFill/>
-        </p:spPr>
-        <p:txBody>
-          <a:bodyPr wrap="square">
-            <a:spAutoFit/>
-          </a:bodyPr>
-          <a:lstStyle/>
-          <a:p>
-            <a:pPr algn="l">
-              <a:defRPr sz="2200" b="1" i="0">
+            <a:ext cx="4572000" cy="822960"/>
+          </a:xfrm>
+          <a:prstGeom prst="rect">
+            <a:avLst/>
+          </a:prstGeom>
+          <a:noFill/>
+        </p:spPr>
+        <p:txBody>
+          <a:bodyPr wrap="square">
+            <a:spAutoFit/>
+          </a:bodyPr>
+          <a:lstStyle/>
+          <a:p>
+            <a:pPr algn="l">
+              <a:defRPr sz="4800" b="1" i="0">
+                <a:solidFill>
+                  <a:srgbClr val="4CAF50"/>
+                </a:solidFill>
+                <a:latin typeface="Calibri"/>
+              </a:defRPr>
+            </a:pPr>
+            <a:r>
+              <a:t>€10k</a:t>
+            </a:r>
+          </a:p>
+        </p:txBody>
+      </p:sp>
+      <p:sp>
+        <p:nvSpPr>
+          <p:cNvPr id="6" name="TextBox 5"/>
+          <p:cNvSpPr txBox="1"/>
+          <p:nvPr/>
+        </p:nvSpPr>
+        <p:spPr>
+          <a:xfrm>
+            <a:off x="1097280" y="2834640"/>
+            <a:ext cx="4572000" cy="365760"/>
+          </a:xfrm>
+          <a:prstGeom prst="rect">
+            <a:avLst/>
+          </a:prstGeom>
+          <a:noFill/>
+        </p:spPr>
+        <p:txBody>
+          <a:bodyPr wrap="square">
+            <a:spAutoFit/>
+          </a:bodyPr>
+          <a:lstStyle/>
+          <a:p>
+            <a:pPr algn="l">
+              <a:defRPr sz="1200" b="0" i="0">
+                <a:solidFill>
+                  <a:srgbClr val="8F95A3"/>
+                </a:solidFill>
+                <a:latin typeface="Calibri"/>
+              </a:defRPr>
+            </a:pPr>
+            <a:r>
+              <a:t>daily ad spend</a:t>
+            </a:r>
+          </a:p>
+        </p:txBody>
+      </p:sp>
+      <p:sp>
+        <p:nvSpPr>
+          <p:cNvPr id="7" name="TextBox 6"/>
+          <p:cNvSpPr txBox="1"/>
+          <p:nvPr/>
+        </p:nvSpPr>
+        <p:spPr>
+          <a:xfrm>
+            <a:off x="1097280" y="3291840"/>
+            <a:ext cx="9966960" cy="365760"/>
+          </a:xfrm>
+          <a:prstGeom prst="rect">
+            <a:avLst/>
+          </a:prstGeom>
+          <a:noFill/>
+        </p:spPr>
+        <p:txBody>
+          <a:bodyPr wrap="square">
+            <a:spAutoFit/>
+          </a:bodyPr>
+          <a:lstStyle/>
+          <a:p>
+            <a:pPr algn="l">
+              <a:defRPr sz="1400" b="0" i="0">
+                <a:solidFill>
+                  <a:srgbClr val="E2E2EA"/>
+                </a:solidFill>
+                <a:latin typeface="Calibri"/>
+              </a:defRPr>
+            </a:pPr>
+            <a:r>
+              <a:t>by Jointhis Team</a:t>
+            </a:r>
+          </a:p>
+        </p:txBody>
+      </p:sp>
+      <p:sp>
+        <p:nvSpPr>
+          <p:cNvPr id="8" name="TextBox 7"/>
+          <p:cNvSpPr txBox="1"/>
+          <p:nvPr/>
+        </p:nvSpPr>
+        <p:spPr>
+          <a:xfrm>
+            <a:off x="1097280" y="3840480"/>
+            <a:ext cx="9966960" cy="457200"/>
+          </a:xfrm>
+          <a:prstGeom prst="rect">
+            <a:avLst/>
+          </a:prstGeom>
+          <a:noFill/>
+        </p:spPr>
+        <p:txBody>
+          <a:bodyPr wrap="square">
+            <a:spAutoFit/>
+          </a:bodyPr>
+          <a:lstStyle/>
+          <a:p>
+            <a:pPr algn="l">
+              <a:defRPr sz="1800" b="1" i="0">
                 <a:solidFill>
                   <a:srgbClr val="FFFFFF"/>
                 </a:solidFill>
@@ -8822,71 +10113,35 @@
               </a:defRPr>
             </a:pPr>
             <a:r>
-              <a:t>Engineering Standards Update</a:t>
-            </a:r>
-          </a:p>
-        </p:txBody>
-      </p:sp>
-      <p:sp>
-        <p:nvSpPr>
-          <p:cNvPr id="6" name="TextBox 5"/>
-          <p:cNvSpPr txBox="1"/>
-          <p:nvPr/>
-        </p:nvSpPr>
-        <p:spPr>
-          <a:xfrm>
-            <a:off x="1097280" y="2743200"/>
-            <a:ext cx="9966960" cy="365760"/>
-          </a:xfrm>
-          <a:prstGeom prst="rect">
-            <a:avLst/>
-          </a:prstGeom>
-          <a:noFill/>
-        </p:spPr>
-        <p:txBody>
-          <a:bodyPr wrap="square">
-            <a:spAutoFit/>
-          </a:bodyPr>
-          <a:lstStyle/>
-          <a:p>
-            <a:pPr algn="l">
-              <a:defRPr sz="1400" b="1" i="0">
-                <a:solidFill>
-                  <a:srgbClr val="DC2626"/>
-                </a:solidFill>
-                <a:latin typeface="Calibri"/>
-              </a:defRPr>
-            </a:pPr>
-            <a:r>
-              <a:t>Now Active</a:t>
-            </a:r>
-          </a:p>
-        </p:txBody>
-      </p:sp>
-      <p:sp>
-        <p:nvSpPr>
-          <p:cNvPr id="7" name="TextBox 6"/>
-          <p:cNvSpPr txBox="1"/>
-          <p:nvPr/>
-        </p:nvSpPr>
-        <p:spPr>
-          <a:xfrm>
-            <a:off x="1097280" y="3291840"/>
-            <a:ext cx="9966960" cy="1371600"/>
-          </a:xfrm>
-          <a:prstGeom prst="rect">
-            <a:avLst/>
-          </a:prstGeom>
-          <a:noFill/>
-        </p:spPr>
-        <p:txBody>
-          <a:bodyPr wrap="square">
-            <a:spAutoFit/>
-          </a:bodyPr>
-          <a:lstStyle/>
-          <a:p>
-            <a:pPr algn="l">
-              <a:defRPr sz="1500" b="0" i="0">
+              <a:t>Aggressive Growth Strategy Deployed</a:t>
+            </a:r>
+          </a:p>
+        </p:txBody>
+      </p:sp>
+      <p:sp>
+        <p:nvSpPr>
+          <p:cNvPr id="9" name="TextBox 8"/>
+          <p:cNvSpPr txBox="1"/>
+          <p:nvPr/>
+        </p:nvSpPr>
+        <p:spPr>
+          <a:xfrm>
+            <a:off x="1097280" y="4389120"/>
+            <a:ext cx="9966960" cy="914400"/>
+          </a:xfrm>
+          <a:prstGeom prst="rect">
+            <a:avLst/>
+          </a:prstGeom>
+          <a:noFill/>
+        </p:spPr>
+        <p:txBody>
+          <a:bodyPr wrap="square">
+            <a:spAutoFit/>
+          </a:bodyPr>
+          <a:lstStyle/>
+          <a:p>
+            <a:pPr algn="l">
+              <a:defRPr sz="1400" b="0" i="0">
                 <a:solidFill>
                   <a:srgbClr val="E2E2EA"/>
                 </a:solidFill>
@@ -8894,35 +10149,35 @@
               </a:defRPr>
             </a:pPr>
             <a:r>
-              <a:t>As we scale rapidly, we're implementing proper engineering and security practices. All teams should migrate to managed deployments for better security and reliability.</a:t>
-            </a:r>
-          </a:p>
-        </p:txBody>
-      </p:sp>
-      <p:sp>
-        <p:nvSpPr>
-          <p:cNvPr id="8" name="TextBox 7"/>
-          <p:cNvSpPr txBox="1"/>
-          <p:nvPr/>
-        </p:nvSpPr>
-        <p:spPr>
-          <a:xfrm>
-            <a:off x="1097280" y="5029200"/>
-            <a:ext cx="9966960" cy="365760"/>
-          </a:xfrm>
-          <a:prstGeom prst="rect">
-            <a:avLst/>
-          </a:prstGeom>
-          <a:noFill/>
-        </p:spPr>
-        <p:txBody>
-          <a:bodyPr wrap="square">
-            <a:spAutoFit/>
-          </a:bodyPr>
-          <a:lstStyle/>
-          <a:p>
-            <a:pPr algn="l">
-              <a:defRPr sz="1300" b="0" i="0">
+              <a:t>Daily ad spend jumped from €2k to €10k to close a €25k profit gap, with Minesweeper achieving stable 256% ROAS on Android.</a:t>
+            </a:r>
+          </a:p>
+        </p:txBody>
+      </p:sp>
+      <p:sp>
+        <p:nvSpPr>
+          <p:cNvPr id="10" name="TextBox 9"/>
+          <p:cNvSpPr txBox="1"/>
+          <p:nvPr/>
+        </p:nvSpPr>
+        <p:spPr>
+          <a:xfrm>
+            <a:off x="1097280" y="5486400"/>
+            <a:ext cx="9966960" cy="457200"/>
+          </a:xfrm>
+          <a:prstGeom prst="rect">
+            <a:avLst/>
+          </a:prstGeom>
+          <a:noFill/>
+        </p:spPr>
+        <p:txBody>
+          <a:bodyPr wrap="square">
+            <a:spAutoFit/>
+          </a:bodyPr>
+          <a:lstStyle/>
+          <a:p>
+            <a:pPr algn="l">
+              <a:defRPr sz="1300" b="0" i="1">
                 <a:solidFill>
                   <a:srgbClr val="8F95A3"/>
                 </a:solidFill>
@@ -8930,7 +10185,7 @@
               </a:defRPr>
             </a:pPr>
             <a:r>
-              <a:t>Organized by Engineering Leadership</a:t>
+              <a:t>💬 "Bold moves in advertising are delivering strong returns and closing profit gaps fast"</a:t>
             </a:r>
           </a:p>
         </p:txBody>
@@ -8976,7 +10231,7 @@
             <a:avLst/>
           </a:prstGeom>
           <a:solidFill>
-            <a:srgbClr val="3B82F6"/>
+            <a:srgbClr val="9C27B0"/>
           </a:solidFill>
           <a:ln>
             <a:noFill/>
@@ -9029,13 +10284,13 @@
             <a:pPr algn="l">
               <a:defRPr sz="1000" b="1">
                 <a:solidFill>
-                  <a:srgbClr val="3B82F6"/>
-                </a:solidFill>
-                <a:latin typeface="Calibri"/>
-              </a:defRPr>
-            </a:pPr>
-            <a:r>
-              <a:t>💙  OFFICE LIFE</a:t>
+                  <a:srgbClr val="9C27B0"/>
+                </a:solidFill>
+                <a:latin typeface="Calibri"/>
+              </a:defRPr>
+            </a:pPr>
+            <a:r>
+              <a:t>👏  CLAPS</a:t>
             </a:r>
           </a:p>
         </p:txBody>
@@ -9065,13 +10320,13 @@
             <a:pPr algn="l">
               <a:defRPr sz="3200" b="1" i="0">
                 <a:solidFill>
-                  <a:srgbClr val="3B82F6"/>
-                </a:solidFill>
-                <a:latin typeface="Calibri"/>
-              </a:defRPr>
-            </a:pPr>
-            <a:r>
-              <a:t>Family First</a:t>
+                  <a:srgbClr val="9C27B0"/>
+                </a:solidFill>
+                <a:latin typeface="Calibri"/>
+              </a:defRPr>
+            </a:pPr>
+            <a:r>
+              <a:t>Team Recognition</a:t>
             </a:r>
           </a:p>
         </p:txBody>
@@ -9085,6 +10340,150 @@
         <p:spPr>
           <a:xfrm>
             <a:off x="1097280" y="2103120"/>
+            <a:ext cx="2743200" cy="548640"/>
+          </a:xfrm>
+          <a:prstGeom prst="rect">
+            <a:avLst/>
+          </a:prstGeom>
+          <a:noFill/>
+        </p:spPr>
+        <p:txBody>
+          <a:bodyPr wrap="square">
+            <a:spAutoFit/>
+          </a:bodyPr>
+          <a:lstStyle/>
+          <a:p>
+            <a:pPr algn="l">
+              <a:defRPr sz="2800" b="1" i="0">
+                <a:solidFill>
+                  <a:srgbClr val="9C27B0"/>
+                </a:solidFill>
+                <a:latin typeface="Calibri"/>
+              </a:defRPr>
+            </a:pPr>
+            <a:r>
+              <a:t>50</a:t>
+            </a:r>
+          </a:p>
+        </p:txBody>
+      </p:sp>
+      <p:sp>
+        <p:nvSpPr>
+          <p:cNvPr id="6" name="TextBox 5"/>
+          <p:cNvSpPr txBox="1"/>
+          <p:nvPr/>
+        </p:nvSpPr>
+        <p:spPr>
+          <a:xfrm>
+            <a:off x="1097280" y="2651760"/>
+            <a:ext cx="9966960" cy="365760"/>
+          </a:xfrm>
+          <a:prstGeom prst="rect">
+            <a:avLst/>
+          </a:prstGeom>
+          <a:noFill/>
+        </p:spPr>
+        <p:txBody>
+          <a:bodyPr wrap="square">
+            <a:spAutoFit/>
+          </a:bodyPr>
+          <a:lstStyle/>
+          <a:p>
+            <a:pPr algn="l">
+              <a:defRPr sz="1400" b="0" i="0">
+                <a:solidFill>
+                  <a:srgbClr val="E2E2EA"/>
+                </a:solidFill>
+                <a:latin typeface="Calibri"/>
+              </a:defRPr>
+            </a:pPr>
+            <a:r>
+              <a:t>from Mykhailo Kukharskyi</a:t>
+            </a:r>
+          </a:p>
+        </p:txBody>
+      </p:sp>
+      <p:sp>
+        <p:nvSpPr>
+          <p:cNvPr id="7" name="TextBox 6"/>
+          <p:cNvSpPr txBox="1"/>
+          <p:nvPr/>
+        </p:nvSpPr>
+        <p:spPr>
+          <a:xfrm>
+            <a:off x="1097280" y="3108960"/>
+            <a:ext cx="9966960" cy="365760"/>
+          </a:xfrm>
+          <a:prstGeom prst="rect">
+            <a:avLst/>
+          </a:prstGeom>
+          <a:noFill/>
+        </p:spPr>
+        <p:txBody>
+          <a:bodyPr wrap="square">
+            <a:spAutoFit/>
+          </a:bodyPr>
+          <a:lstStyle/>
+          <a:p>
+            <a:pPr algn="l">
+              <a:defRPr sz="1400" b="1" i="0">
+                <a:solidFill>
+                  <a:srgbClr val="FFFFFF"/>
+                </a:solidFill>
+                <a:latin typeface="Calibri"/>
+              </a:defRPr>
+            </a:pPr>
+            <a:r>
+              <a:t>to: Gleb Krahotkin</a:t>
+            </a:r>
+          </a:p>
+        </p:txBody>
+      </p:sp>
+      <p:sp>
+        <p:nvSpPr>
+          <p:cNvPr id="8" name="TextBox 7"/>
+          <p:cNvSpPr txBox="1"/>
+          <p:nvPr/>
+        </p:nvSpPr>
+        <p:spPr>
+          <a:xfrm>
+            <a:off x="1097280" y="3749039"/>
+            <a:ext cx="9966960" cy="1097280"/>
+          </a:xfrm>
+          <a:prstGeom prst="rect">
+            <a:avLst/>
+          </a:prstGeom>
+          <a:noFill/>
+        </p:spPr>
+        <p:txBody>
+          <a:bodyPr wrap="square">
+            <a:spAutoFit/>
+          </a:bodyPr>
+          <a:lstStyle/>
+          <a:p>
+            <a:pPr algn="l">
+              <a:defRPr sz="1500" b="0" i="1">
+                <a:solidFill>
+                  <a:srgbClr val="E2E2EA"/>
+                </a:solidFill>
+                <a:latin typeface="Calibri"/>
+              </a:defRPr>
+            </a:pPr>
+            <a:r>
+              <a:t>"Outstanding technical contributions and problem-solving"</a:t>
+            </a:r>
+          </a:p>
+        </p:txBody>
+      </p:sp>
+      <p:sp>
+        <p:nvSpPr>
+          <p:cNvPr id="9" name="TextBox 8"/>
+          <p:cNvSpPr txBox="1"/>
+          <p:nvPr/>
+        </p:nvSpPr>
+        <p:spPr>
+          <a:xfrm>
+            <a:off x="1097280" y="5120640"/>
             <a:ext cx="9966960" cy="457200"/>
           </a:xfrm>
           <a:prstGeom prst="rect">
@@ -9099,159 +10498,15 @@
           <a:lstStyle/>
           <a:p>
             <a:pPr algn="l">
-              <a:defRPr sz="1800" b="1" i="0">
-                <a:solidFill>
-                  <a:srgbClr val="FFFFFF"/>
-                </a:solidFill>
-                <a:latin typeface="Calibri"/>
-              </a:defRPr>
-            </a:pPr>
-            <a:r>
-              <a:t>Supporting Our Team During Difficult Times</a:t>
-            </a:r>
-          </a:p>
-        </p:txBody>
-      </p:sp>
-      <p:sp>
-        <p:nvSpPr>
-          <p:cNvPr id="6" name="TextBox 5"/>
-          <p:cNvSpPr txBox="1"/>
-          <p:nvPr/>
-        </p:nvSpPr>
-        <p:spPr>
-          <a:xfrm>
-            <a:off x="1371600" y="2743200"/>
-            <a:ext cx="9692640" cy="1828800"/>
-          </a:xfrm>
-          <a:prstGeom prst="rect">
-            <a:avLst/>
-          </a:prstGeom>
-          <a:noFill/>
-        </p:spPr>
-        <p:txBody>
-          <a:bodyPr wrap="square">
-            <a:spAutoFit/>
-          </a:bodyPr>
-          <a:lstStyle/>
-          <a:p>
-            <a:pPr algn="l">
-              <a:defRPr sz="1500" b="0" i="1">
-                <a:solidFill>
-                  <a:srgbClr val="E2E2EA"/>
-                </a:solidFill>
-                <a:latin typeface="Calibri"/>
-              </a:defRPr>
-            </a:pPr>
-            <a:r>
-              <a:t>"Taking time off for a family emergency — the team has my back"</a:t>
-            </a:r>
-          </a:p>
-        </p:txBody>
-      </p:sp>
-      <p:sp>
-        <p:nvSpPr>
-          <p:cNvPr id="7" name="TextBox 6"/>
-          <p:cNvSpPr txBox="1"/>
-          <p:nvPr/>
-        </p:nvSpPr>
-        <p:spPr>
-          <a:xfrm>
-            <a:off x="1097280" y="4754880"/>
-            <a:ext cx="9966960" cy="365760"/>
-          </a:xfrm>
-          <a:prstGeom prst="rect">
-            <a:avLst/>
-          </a:prstGeom>
-          <a:noFill/>
-        </p:spPr>
-        <p:txBody>
-          <a:bodyPr wrap="square">
-            <a:spAutoFit/>
-          </a:bodyPr>
-          <a:lstStyle/>
-          <a:p>
-            <a:pPr algn="l">
-              <a:defRPr sz="1400" b="0" i="0">
-                <a:solidFill>
-                  <a:srgbClr val="8F95A3"/>
-                </a:solidFill>
-                <a:latin typeface="Calibri"/>
-              </a:defRPr>
-            </a:pPr>
-            <a:r>
-              <a:t>— Pavel Golubev</a:t>
-            </a:r>
-          </a:p>
-        </p:txBody>
-      </p:sp>
-      <p:sp>
-        <p:nvSpPr>
-          <p:cNvPr id="8" name="TextBox 7"/>
-          <p:cNvSpPr txBox="1"/>
-          <p:nvPr/>
-        </p:nvSpPr>
-        <p:spPr>
-          <a:xfrm>
-            <a:off x="1097280" y="5212080"/>
-            <a:ext cx="9966960" cy="365760"/>
-          </a:xfrm>
-          <a:prstGeom prst="rect">
-            <a:avLst/>
-          </a:prstGeom>
-          <a:noFill/>
-        </p:spPr>
-        <p:txBody>
-          <a:bodyPr wrap="square">
-            <a:spAutoFit/>
-          </a:bodyPr>
-          <a:lstStyle/>
-          <a:p>
-            <a:pPr algn="l">
-              <a:defRPr sz="1400" b="1" i="0">
-                <a:solidFill>
-                  <a:srgbClr val="3B82F6"/>
-                </a:solidFill>
-                <a:latin typeface="Calibri"/>
-              </a:defRPr>
-            </a:pPr>
-            <a:r>
-              <a:t>❤️ 39, 🙏 15, 🤍 5</a:t>
-            </a:r>
-          </a:p>
-        </p:txBody>
-      </p:sp>
-      <p:sp>
-        <p:nvSpPr>
-          <p:cNvPr id="9" name="TextBox 8"/>
-          <p:cNvSpPr txBox="1"/>
-          <p:nvPr/>
-        </p:nvSpPr>
-        <p:spPr>
-          <a:xfrm>
-            <a:off x="1097280" y="5760720"/>
-            <a:ext cx="9966960" cy="274320"/>
-          </a:xfrm>
-          <a:prstGeom prst="rect">
-            <a:avLst/>
-          </a:prstGeom>
-          <a:noFill/>
-        </p:spPr>
-        <p:txBody>
-          <a:bodyPr wrap="square">
-            <a:spAutoFit/>
-          </a:bodyPr>
-          <a:lstStyle/>
-          <a:p>
-            <a:pPr algn="l">
-              <a:defRPr sz="1100" b="0" i="0">
-                <a:solidFill>
-                  <a:srgbClr val="5C6270"/>
-                </a:solidFill>
-                <a:latin typeface="Calibri"/>
-              </a:defRPr>
-            </a:pPr>
-            <a:r>
-              <a:t>#general</a:t>
+              <a:defRPr sz="1200" b="1" i="0">
+                <a:solidFill>
+                  <a:srgbClr val="9C27B0"/>
+                </a:solidFill>
+                <a:latin typeface="Calibri"/>
+              </a:defRPr>
+            </a:pPr>
+            <a:r>
+              <a:t>Excellence · Innovation</a:t>
             </a:r>
           </a:p>
         </p:txBody>
@@ -9297,7 +10552,7 @@
             <a:avLst/>
           </a:prstGeom>
           <a:solidFill>
-            <a:srgbClr val="F59E0B"/>
+            <a:srgbClr val="FF5722"/>
           </a:solidFill>
           <a:ln>
             <a:noFill/>
@@ -9350,13 +10605,13 @@
             <a:pPr algn="l">
               <a:defRPr sz="1000" b="1">
                 <a:solidFill>
-                  <a:srgbClr val="F59E0B"/>
-                </a:solidFill>
-                <a:latin typeface="Calibri"/>
-              </a:defRPr>
-            </a:pPr>
-            <a:r>
-              <a:t>📊  EVENT</a:t>
+                  <a:srgbClr val="FF5722"/>
+                </a:solidFill>
+                <a:latin typeface="Calibri"/>
+              </a:defRPr>
+            </a:pPr>
+            <a:r>
+              <a:t>🙌  CLAPS</a:t>
             </a:r>
           </a:p>
         </p:txBody>
@@ -9386,13 +10641,13 @@
             <a:pPr algn="l">
               <a:defRPr sz="3200" b="1" i="0">
                 <a:solidFill>
-                  <a:srgbClr val="F59E0B"/>
-                </a:solidFill>
-                <a:latin typeface="Calibri"/>
-              </a:defRPr>
-            </a:pPr>
-            <a:r>
-              <a:t>Performance Review Season</a:t>
+                  <a:srgbClr val="FF5722"/>
+                </a:solidFill>
+                <a:latin typeface="Calibri"/>
+              </a:defRPr>
+            </a:pPr>
+            <a:r>
+              <a:t>Peer Appreciation</a:t>
             </a:r>
           </a:p>
         </p:txBody>
@@ -9406,21 +10661,93 @@
         <p:spPr>
           <a:xfrm>
             <a:off x="1097280" y="2103120"/>
-            <a:ext cx="9966960" cy="548640"/>
-          </a:xfrm>
-          <a:prstGeom prst="rect">
-            <a:avLst/>
-          </a:prstGeom>
-          <a:noFill/>
-        </p:spPr>
-        <p:txBody>
-          <a:bodyPr wrap="square">
-            <a:spAutoFit/>
-          </a:bodyPr>
-          <a:lstStyle/>
-          <a:p>
-            <a:pPr algn="l">
-              <a:defRPr sz="2200" b="1" i="0">
+            <a:ext cx="2743200" cy="548640"/>
+          </a:xfrm>
+          <a:prstGeom prst="rect">
+            <a:avLst/>
+          </a:prstGeom>
+          <a:noFill/>
+        </p:spPr>
+        <p:txBody>
+          <a:bodyPr wrap="square">
+            <a:spAutoFit/>
+          </a:bodyPr>
+          <a:lstStyle/>
+          <a:p>
+            <a:pPr algn="l">
+              <a:defRPr sz="2800" b="1" i="0">
+                <a:solidFill>
+                  <a:srgbClr val="FF5722"/>
+                </a:solidFill>
+                <a:latin typeface="Calibri"/>
+              </a:defRPr>
+            </a:pPr>
+            <a:r>
+              <a:t>50</a:t>
+            </a:r>
+          </a:p>
+        </p:txBody>
+      </p:sp>
+      <p:sp>
+        <p:nvSpPr>
+          <p:cNvPr id="6" name="TextBox 5"/>
+          <p:cNvSpPr txBox="1"/>
+          <p:nvPr/>
+        </p:nvSpPr>
+        <p:spPr>
+          <a:xfrm>
+            <a:off x="1097280" y="2651760"/>
+            <a:ext cx="9966960" cy="365760"/>
+          </a:xfrm>
+          <a:prstGeom prst="rect">
+            <a:avLst/>
+          </a:prstGeom>
+          <a:noFill/>
+        </p:spPr>
+        <p:txBody>
+          <a:bodyPr wrap="square">
+            <a:spAutoFit/>
+          </a:bodyPr>
+          <a:lstStyle/>
+          <a:p>
+            <a:pPr algn="l">
+              <a:defRPr sz="1400" b="0" i="0">
+                <a:solidFill>
+                  <a:srgbClr val="E2E2EA"/>
+                </a:solidFill>
+                <a:latin typeface="Calibri"/>
+              </a:defRPr>
+            </a:pPr>
+            <a:r>
+              <a:t>from Viktor Trykolenko</a:t>
+            </a:r>
+          </a:p>
+        </p:txBody>
+      </p:sp>
+      <p:sp>
+        <p:nvSpPr>
+          <p:cNvPr id="7" name="TextBox 6"/>
+          <p:cNvSpPr txBox="1"/>
+          <p:nvPr/>
+        </p:nvSpPr>
+        <p:spPr>
+          <a:xfrm>
+            <a:off x="1097280" y="3108960"/>
+            <a:ext cx="9966960" cy="365760"/>
+          </a:xfrm>
+          <a:prstGeom prst="rect">
+            <a:avLst/>
+          </a:prstGeom>
+          <a:noFill/>
+        </p:spPr>
+        <p:txBody>
+          <a:bodyPr wrap="square">
+            <a:spAutoFit/>
+          </a:bodyPr>
+          <a:lstStyle/>
+          <a:p>
+            <a:pPr algn="l">
+              <a:defRPr sz="1400" b="1" i="0">
                 <a:solidFill>
                   <a:srgbClr val="FFFFFF"/>
                 </a:solidFill>
@@ -9428,71 +10755,35 @@
               </a:defRPr>
             </a:pPr>
             <a:r>
-              <a:t>Q1 Performance Reviews</a:t>
-            </a:r>
-          </a:p>
-        </p:txBody>
-      </p:sp>
-      <p:sp>
-        <p:nvSpPr>
-          <p:cNvPr id="6" name="TextBox 5"/>
-          <p:cNvSpPr txBox="1"/>
-          <p:nvPr/>
-        </p:nvSpPr>
-        <p:spPr>
-          <a:xfrm>
-            <a:off x="1097280" y="2743200"/>
-            <a:ext cx="9966960" cy="365760"/>
-          </a:xfrm>
-          <a:prstGeom prst="rect">
-            <a:avLst/>
-          </a:prstGeom>
-          <a:noFill/>
-        </p:spPr>
-        <p:txBody>
-          <a:bodyPr wrap="square">
-            <a:spAutoFit/>
-          </a:bodyPr>
-          <a:lstStyle/>
-          <a:p>
-            <a:pPr algn="l">
-              <a:defRPr sz="1400" b="1" i="0">
-                <a:solidFill>
-                  <a:srgbClr val="F59E0B"/>
-                </a:solidFill>
-                <a:latin typeface="Calibri"/>
-              </a:defRPr>
-            </a:pPr>
-            <a:r>
-              <a:t>Starting Today</a:t>
-            </a:r>
-          </a:p>
-        </p:txBody>
-      </p:sp>
-      <p:sp>
-        <p:nvSpPr>
-          <p:cNvPr id="7" name="TextBox 6"/>
-          <p:cNvSpPr txBox="1"/>
-          <p:nvPr/>
-        </p:nvSpPr>
-        <p:spPr>
-          <a:xfrm>
-            <a:off x="1097280" y="3291840"/>
-            <a:ext cx="9966960" cy="1371600"/>
-          </a:xfrm>
-          <a:prstGeom prst="rect">
-            <a:avLst/>
-          </a:prstGeom>
-          <a:noFill/>
-        </p:spPr>
-        <p:txBody>
-          <a:bodyPr wrap="square">
-            <a:spAutoFit/>
-          </a:bodyPr>
-          <a:lstStyle/>
-          <a:p>
-            <a:pPr algn="l">
-              <a:defRPr sz="1500" b="0" i="0">
+              <a:t>to: Iurii Kotov</a:t>
+            </a:r>
+          </a:p>
+        </p:txBody>
+      </p:sp>
+      <p:sp>
+        <p:nvSpPr>
+          <p:cNvPr id="8" name="TextBox 7"/>
+          <p:cNvSpPr txBox="1"/>
+          <p:nvPr/>
+        </p:nvSpPr>
+        <p:spPr>
+          <a:xfrm>
+            <a:off x="1097280" y="3749039"/>
+            <a:ext cx="9966960" cy="1097280"/>
+          </a:xfrm>
+          <a:prstGeom prst="rect">
+            <a:avLst/>
+          </a:prstGeom>
+          <a:noFill/>
+        </p:spPr>
+        <p:txBody>
+          <a:bodyPr wrap="square">
+            <a:spAutoFit/>
+          </a:bodyPr>
+          <a:lstStyle/>
+          <a:p>
+            <a:pPr algn="l">
+              <a:defRPr sz="1500" b="0" i="1">
                 <a:solidFill>
                   <a:srgbClr val="E2E2EA"/>
                 </a:solidFill>
@@ -9500,43 +10791,43 @@
               </a:defRPr>
             </a:pPr>
             <a:r>
-              <a:t>Keeping it light and focused this quarter! Managers answer 3 key questions, everyone completes self-assessments covering performance, culture, and psychological safety.</a:t>
-            </a:r>
-          </a:p>
-        </p:txBody>
-      </p:sp>
-      <p:sp>
-        <p:nvSpPr>
-          <p:cNvPr id="8" name="TextBox 7"/>
-          <p:cNvSpPr txBox="1"/>
-          <p:nvPr/>
-        </p:nvSpPr>
-        <p:spPr>
-          <a:xfrm>
-            <a:off x="1097280" y="5029200"/>
-            <a:ext cx="9966960" cy="365760"/>
-          </a:xfrm>
-          <a:prstGeom prst="rect">
-            <a:avLst/>
-          </a:prstGeom>
-          <a:noFill/>
-        </p:spPr>
-        <p:txBody>
-          <a:bodyPr wrap="square">
-            <a:spAutoFit/>
-          </a:bodyPr>
-          <a:lstStyle/>
-          <a:p>
-            <a:pPr algn="l">
-              <a:defRPr sz="1300" b="0" i="0">
-                <a:solidFill>
-                  <a:srgbClr val="8F95A3"/>
-                </a:solidFill>
-                <a:latin typeface="Calibri"/>
-              </a:defRPr>
-            </a:pPr>
-            <a:r>
-              <a:t>Organized by HR Team</a:t>
+              <a:t>"Exceptional teamwork and dedication to quality"</a:t>
+            </a:r>
+          </a:p>
+        </p:txBody>
+      </p:sp>
+      <p:sp>
+        <p:nvSpPr>
+          <p:cNvPr id="9" name="TextBox 8"/>
+          <p:cNvSpPr txBox="1"/>
+          <p:nvPr/>
+        </p:nvSpPr>
+        <p:spPr>
+          <a:xfrm>
+            <a:off x="1097280" y="5120640"/>
+            <a:ext cx="9966960" cy="457200"/>
+          </a:xfrm>
+          <a:prstGeom prst="rect">
+            <a:avLst/>
+          </a:prstGeom>
+          <a:noFill/>
+        </p:spPr>
+        <p:txBody>
+          <a:bodyPr wrap="square">
+            <a:spAutoFit/>
+          </a:bodyPr>
+          <a:lstStyle/>
+          <a:p>
+            <a:pPr algn="l">
+              <a:defRPr sz="1200" b="1" i="0">
+                <a:solidFill>
+                  <a:srgbClr val="FF5722"/>
+                </a:solidFill>
+                <a:latin typeface="Calibri"/>
+              </a:defRPr>
+            </a:pPr>
+            <a:r>
+              <a:t>Collaboration · Quality</a:t>
             </a:r>
           </a:p>
         </p:txBody>
@@ -9582,7 +10873,7 @@
             <a:avLst/>
           </a:prstGeom>
           <a:solidFill>
-            <a:srgbClr val="10B981"/>
+            <a:srgbClr val="E91E63"/>
           </a:solidFill>
           <a:ln>
             <a:noFill/>
@@ -9635,13 +10926,13 @@
             <a:pPr algn="l">
               <a:defRPr sz="1000" b="1">
                 <a:solidFill>
-                  <a:srgbClr val="10B981"/>
-                </a:solidFill>
-                <a:latin typeface="Calibri"/>
-              </a:defRPr>
-            </a:pPr>
-            <a:r>
-              <a:t>👏  CLAPS</a:t>
+                  <a:srgbClr val="E91E63"/>
+                </a:solidFill>
+                <a:latin typeface="Calibri"/>
+              </a:defRPr>
+            </a:pPr>
+            <a:r>
+              <a:t>🔥  CLAPS</a:t>
             </a:r>
           </a:p>
         </p:txBody>
@@ -9671,13 +10962,13 @@
             <a:pPr algn="l">
               <a:defRPr sz="3200" b="1" i="0">
                 <a:solidFill>
-                  <a:srgbClr val="10B981"/>
-                </a:solidFill>
-                <a:latin typeface="Calibri"/>
-              </a:defRPr>
-            </a:pPr>
-            <a:r>
-              <a:t>Team Recognition</a:t>
+                  <a:srgbClr val="E91E63"/>
+                </a:solidFill>
+                <a:latin typeface="Calibri"/>
+              </a:defRPr>
+            </a:pPr>
+            <a:r>
+              <a:t>Recognition Wave</a:t>
             </a:r>
           </a:p>
         </p:txBody>
@@ -9707,13 +10998,13 @@
             <a:pPr algn="l">
               <a:defRPr sz="2800" b="1" i="0">
                 <a:solidFill>
-                  <a:srgbClr val="10B981"/>
-                </a:solidFill>
-                <a:latin typeface="Calibri"/>
-              </a:defRPr>
-            </a:pPr>
-            <a:r>
-              <a:t>90</a:t>
+                  <a:srgbClr val="E91E63"/>
+                </a:solidFill>
+                <a:latin typeface="Calibri"/>
+              </a:defRPr>
+            </a:pPr>
+            <a:r>
+              <a:t>50</a:t>
             </a:r>
           </a:p>
         </p:txBody>
@@ -9749,7 +11040,7 @@
               </a:defRPr>
             </a:pPr>
             <a:r>
-              <a:t>from Mykhailo Kukharskyi</a:t>
+              <a:t>from Jasmine Nunez</a:t>
             </a:r>
           </a:p>
         </p:txBody>
@@ -9785,7 +11076,7 @@
               </a:defRPr>
             </a:pPr>
             <a:r>
-              <a:t>to: Gleb Krahotkin</a:t>
+              <a:t>to: Michelle Walter</a:t>
             </a:r>
           </a:p>
         </p:txBody>
@@ -9821,7 +11112,7 @@
               </a:defRPr>
             </a:pPr>
             <a:r>
-              <a:t>"Outstanding technical leadership and problem-solving skills that drive our platform forward"</a:t>
+              <a:t>"Incredible leadership and cross-team coordination"</a:t>
             </a:r>
           </a:p>
         </p:txBody>
@@ -9851,13 +11142,13 @@
             <a:pPr algn="l">
               <a:defRPr sz="1200" b="1" i="0">
                 <a:solidFill>
-                  <a:srgbClr val="10B981"/>
-                </a:solidFill>
-                <a:latin typeface="Calibri"/>
-              </a:defRPr>
-            </a:pPr>
-            <a:r>
-              <a:t>Excellence · Innovation</a:t>
+                  <a:srgbClr val="E91E63"/>
+                </a:solidFill>
+                <a:latin typeface="Calibri"/>
+              </a:defRPr>
+            </a:pPr>
+            <a:r>
+              <a:t>Leadership · Teamwork</a:t>
             </a:r>
           </a:p>
         </p:txBody>

--- a/data/archive/pulse_2026-03-16.pptx
+++ b/data/archive/pulse_2026-03-16.pptx
@@ -24,13 +24,6 @@
     <p:sldId id="272" r:id="rId23"/>
     <p:sldId id="273" r:id="rId24"/>
     <p:sldId id="274" r:id="rId25"/>
-    <p:sldId id="275" r:id="rId26"/>
-    <p:sldId id="276" r:id="rId27"/>
-    <p:sldId id="277" r:id="rId28"/>
-    <p:sldId id="278" r:id="rId29"/>
-    <p:sldId id="279" r:id="rId30"/>
-    <p:sldId id="280" r:id="rId31"/>
-    <p:sldId id="281" r:id="rId32"/>
   </p:sldIdLst>
   <p:sldSz cx="12191695" cy="6858000" type="screen4x3"/>
   <p:notesSz cx="6858000" cy="9144000"/>
@@ -3313,7 +3306,7 @@
             <a:avLst/>
           </a:prstGeom>
           <a:solidFill>
-            <a:srgbClr val="607D8B"/>
+            <a:srgbClr val="10B981"/>
           </a:solidFill>
           <a:ln>
             <a:noFill/>
@@ -3366,13 +3359,13 @@
             <a:pPr algn="l">
               <a:defRPr sz="1000" b="1">
                 <a:solidFill>
-                  <a:srgbClr val="607D8B"/>
-                </a:solidFill>
-                <a:latin typeface="Calibri"/>
-              </a:defRPr>
-            </a:pPr>
-            <a:r>
-              <a:t>🏠  EVENT</a:t>
+                  <a:srgbClr val="10B981"/>
+                </a:solidFill>
+                <a:latin typeface="Calibri"/>
+              </a:defRPr>
+            </a:pPr>
+            <a:r>
+              <a:t>📈  WIN</a:t>
             </a:r>
           </a:p>
         </p:txBody>
@@ -3402,13 +3395,13 @@
             <a:pPr algn="l">
               <a:defRPr sz="3200" b="1" i="0">
                 <a:solidFill>
-                  <a:srgbClr val="607D8B"/>
-                </a:solidFill>
-                <a:latin typeface="Calibri"/>
-              </a:defRPr>
-            </a:pPr>
-            <a:r>
-              <a:t>Global Operations</a:t>
+                  <a:srgbClr val="10B981"/>
+                </a:solidFill>
+                <a:latin typeface="Calibri"/>
+              </a:defRPr>
+            </a:pPr>
+            <a:r>
+              <a:t>UA Playbook Success</a:t>
             </a:r>
           </a:p>
         </p:txBody>
@@ -3422,21 +3415,129 @@
         <p:spPr>
           <a:xfrm>
             <a:off x="1097280" y="2103120"/>
-            <a:ext cx="9966960" cy="548640"/>
-          </a:xfrm>
-          <a:prstGeom prst="rect">
-            <a:avLst/>
-          </a:prstGeom>
-          <a:noFill/>
-        </p:spPr>
-        <p:txBody>
-          <a:bodyPr wrap="square">
-            <a:spAutoFit/>
-          </a:bodyPr>
-          <a:lstStyle/>
-          <a:p>
-            <a:pPr algn="l">
-              <a:defRPr sz="2200" b="1" i="0">
+            <a:ext cx="4572000" cy="822960"/>
+          </a:xfrm>
+          <a:prstGeom prst="rect">
+            <a:avLst/>
+          </a:prstGeom>
+          <a:noFill/>
+        </p:spPr>
+        <p:txBody>
+          <a:bodyPr wrap="square">
+            <a:spAutoFit/>
+          </a:bodyPr>
+          <a:lstStyle/>
+          <a:p>
+            <a:pPr algn="l">
+              <a:defRPr sz="4800" b="1" i="0">
+                <a:solidFill>
+                  <a:srgbClr val="10B981"/>
+                </a:solidFill>
+                <a:latin typeface="Calibri"/>
+              </a:defRPr>
+            </a:pPr>
+            <a:r>
+              <a:t>New Metrics</a:t>
+            </a:r>
+          </a:p>
+        </p:txBody>
+      </p:sp>
+      <p:sp>
+        <p:nvSpPr>
+          <p:cNvPr id="6" name="TextBox 5"/>
+          <p:cNvSpPr txBox="1"/>
+          <p:nvPr/>
+        </p:nvSpPr>
+        <p:spPr>
+          <a:xfrm>
+            <a:off x="1097280" y="2834640"/>
+            <a:ext cx="4572000" cy="365760"/>
+          </a:xfrm>
+          <a:prstGeom prst="rect">
+            <a:avLst/>
+          </a:prstGeom>
+          <a:noFill/>
+        </p:spPr>
+        <p:txBody>
+          <a:bodyPr wrap="square">
+            <a:spAutoFit/>
+          </a:bodyPr>
+          <a:lstStyle/>
+          <a:p>
+            <a:pPr algn="l">
+              <a:defRPr sz="1200" b="0" i="0">
+                <a:solidFill>
+                  <a:srgbClr val="8F95A3"/>
+                </a:solidFill>
+                <a:latin typeface="Calibri"/>
+              </a:defRPr>
+            </a:pPr>
+            <a:r>
+              <a:t>system</a:t>
+            </a:r>
+          </a:p>
+        </p:txBody>
+      </p:sp>
+      <p:sp>
+        <p:nvSpPr>
+          <p:cNvPr id="7" name="TextBox 6"/>
+          <p:cNvSpPr txBox="1"/>
+          <p:nvPr/>
+        </p:nvSpPr>
+        <p:spPr>
+          <a:xfrm>
+            <a:off x="1097280" y="3291840"/>
+            <a:ext cx="9966960" cy="365760"/>
+          </a:xfrm>
+          <a:prstGeom prst="rect">
+            <a:avLst/>
+          </a:prstGeom>
+          <a:noFill/>
+        </p:spPr>
+        <p:txBody>
+          <a:bodyPr wrap="square">
+            <a:spAutoFit/>
+          </a:bodyPr>
+          <a:lstStyle/>
+          <a:p>
+            <a:pPr algn="l">
+              <a:defRPr sz="1400" b="0" i="0">
+                <a:solidFill>
+                  <a:srgbClr val="E2E2EA"/>
+                </a:solidFill>
+                <a:latin typeface="Calibri"/>
+              </a:defRPr>
+            </a:pPr>
+            <a:r>
+              <a:t>by Acquisition Team</a:t>
+            </a:r>
+          </a:p>
+        </p:txBody>
+      </p:sp>
+      <p:sp>
+        <p:nvSpPr>
+          <p:cNvPr id="8" name="TextBox 7"/>
+          <p:cNvSpPr txBox="1"/>
+          <p:nvPr/>
+        </p:nvSpPr>
+        <p:spPr>
+          <a:xfrm>
+            <a:off x="1097280" y="3840480"/>
+            <a:ext cx="9966960" cy="457200"/>
+          </a:xfrm>
+          <a:prstGeom prst="rect">
+            <a:avLst/>
+          </a:prstGeom>
+          <a:noFill/>
+        </p:spPr>
+        <p:txBody>
+          <a:bodyPr wrap="square">
+            <a:spAutoFit/>
+          </a:bodyPr>
+          <a:lstStyle/>
+          <a:p>
+            <a:pPr algn="l">
+              <a:defRPr sz="1800" b="1" i="0">
                 <a:solidFill>
                   <a:srgbClr val="FFFFFF"/>
                 </a:solidFill>
@@ -3444,71 +3545,35 @@
               </a:defRPr>
             </a:pPr>
             <a:r>
-              <a:t>PerchPeek Relocation Partnership</a:t>
-            </a:r>
-          </a:p>
-        </p:txBody>
-      </p:sp>
-      <p:sp>
-        <p:nvSpPr>
-          <p:cNvPr id="6" name="TextBox 5"/>
-          <p:cNvSpPr txBox="1"/>
-          <p:nvPr/>
-        </p:nvSpPr>
-        <p:spPr>
-          <a:xfrm>
-            <a:off x="1097280" y="2743200"/>
-            <a:ext cx="9966960" cy="365760"/>
-          </a:xfrm>
-          <a:prstGeom prst="rect">
-            <a:avLst/>
-          </a:prstGeom>
-          <a:noFill/>
-        </p:spPr>
-        <p:txBody>
-          <a:bodyPr wrap="square">
-            <a:spAutoFit/>
-          </a:bodyPr>
-          <a:lstStyle/>
-          <a:p>
-            <a:pPr algn="l">
-              <a:defRPr sz="1400" b="1" i="0">
-                <a:solidFill>
-                  <a:srgbClr val="607D8B"/>
-                </a:solidFill>
-                <a:latin typeface="Calibri"/>
-              </a:defRPr>
-            </a:pPr>
-            <a:r>
-              <a:t>Implementation Starting</a:t>
-            </a:r>
-          </a:p>
-        </p:txBody>
-      </p:sp>
-      <p:sp>
-        <p:nvSpPr>
-          <p:cNvPr id="7" name="TextBox 6"/>
-          <p:cNvSpPr txBox="1"/>
-          <p:nvPr/>
-        </p:nvSpPr>
-        <p:spPr>
-          <a:xfrm>
-            <a:off x="1097280" y="3291840"/>
-            <a:ext cx="9966960" cy="1371600"/>
-          </a:xfrm>
-          <a:prstGeom prst="rect">
-            <a:avLst/>
-          </a:prstGeom>
-          <a:noFill/>
-        </p:spPr>
-        <p:txBody>
-          <a:bodyPr wrap="square">
-            <a:spAutoFit/>
-          </a:bodyPr>
-          <a:lstStyle/>
-          <a:p>
-            <a:pPr algn="l">
-              <a:defRPr sz="1500" b="0" i="0">
+              <a:t>Health Rate System Deployed</a:t>
+            </a:r>
+          </a:p>
+        </p:txBody>
+      </p:sp>
+      <p:sp>
+        <p:nvSpPr>
+          <p:cNvPr id="9" name="TextBox 8"/>
+          <p:cNvSpPr txBox="1"/>
+          <p:nvPr/>
+        </p:nvSpPr>
+        <p:spPr>
+          <a:xfrm>
+            <a:off x="1097280" y="4389120"/>
+            <a:ext cx="9966960" cy="914400"/>
+          </a:xfrm>
+          <a:prstGeom prst="rect">
+            <a:avLst/>
+          </a:prstGeom>
+          <a:noFill/>
+        </p:spPr>
+        <p:txBody>
+          <a:bodyPr wrap="square">
+            <a:spAutoFit/>
+          </a:bodyPr>
+          <a:lstStyle/>
+          <a:p>
+            <a:pPr algn="l">
+              <a:defRPr sz="1400" b="0" i="0">
                 <a:solidFill>
                   <a:srgbClr val="E2E2EA"/>
                 </a:solidFill>
@@ -3516,35 +3581,35 @@
               </a:defRPr>
             </a:pPr>
             <a:r>
-              <a:t>New end-to-end relocation platform being introduced to streamline employee relocations globally, especially to Barcelona. Focus on improving timing and employee experience.</a:t>
-            </a:r>
-          </a:p>
-        </p:txBody>
-      </p:sp>
-      <p:sp>
-        <p:nvSpPr>
-          <p:cNvPr id="8" name="TextBox 7"/>
-          <p:cNvSpPr txBox="1"/>
-          <p:nvPr/>
-        </p:nvSpPr>
-        <p:spPr>
-          <a:xfrm>
-            <a:off x="1097280" y="5029200"/>
-            <a:ext cx="9966960" cy="365760"/>
-          </a:xfrm>
-          <a:prstGeom prst="rect">
-            <a:avLst/>
-          </a:prstGeom>
-          <a:noFill/>
-        </p:spPr>
-        <p:txBody>
-          <a:bodyPr wrap="square">
-            <a:spAutoFit/>
-          </a:bodyPr>
-          <a:lstStyle/>
-          <a:p>
-            <a:pPr algn="l">
-              <a:defRPr sz="1300" b="0" i="0">
+              <a:t>New health rate metric for UA activities developed with automated scorecards. The system includes lagging and leading indicators with mandatory CVLP tracking for improved acquisition efficiency.</a:t>
+            </a:r>
+          </a:p>
+        </p:txBody>
+      </p:sp>
+      <p:sp>
+        <p:nvSpPr>
+          <p:cNvPr id="10" name="TextBox 9"/>
+          <p:cNvSpPr txBox="1"/>
+          <p:nvPr/>
+        </p:nvSpPr>
+        <p:spPr>
+          <a:xfrm>
+            <a:off x="1097280" y="5486400"/>
+            <a:ext cx="9966960" cy="457200"/>
+          </a:xfrm>
+          <a:prstGeom prst="rect">
+            <a:avLst/>
+          </a:prstGeom>
+          <a:noFill/>
+        </p:spPr>
+        <p:txBody>
+          <a:bodyPr wrap="square">
+            <a:spAutoFit/>
+          </a:bodyPr>
+          <a:lstStyle/>
+          <a:p>
+            <a:pPr algn="l">
+              <a:defRPr sz="1300" b="0" i="1">
                 <a:solidFill>
                   <a:srgbClr val="8F95A3"/>
                 </a:solidFill>
@@ -3552,7 +3617,7 @@
               </a:defRPr>
             </a:pPr>
             <a:r>
-              <a:t>Organized by HR &amp; Operations Teams</a:t>
+              <a:t>💬 "Smart automation combined with precise metrics creates sustainable growth advantages."</a:t>
             </a:r>
           </a:p>
         </p:txBody>
@@ -3598,7 +3663,7 @@
             <a:avLst/>
           </a:prstGeom>
           <a:solidFill>
-            <a:srgbClr val="3F51B5"/>
+            <a:srgbClr val="F97316"/>
           </a:solidFill>
           <a:ln>
             <a:noFill/>
@@ -3651,13 +3716,13 @@
             <a:pPr algn="l">
               <a:defRPr sz="1000" b="1">
                 <a:solidFill>
-                  <a:srgbClr val="3F51B5"/>
-                </a:solidFill>
-                <a:latin typeface="Calibri"/>
-              </a:defRPr>
-            </a:pPr>
-            <a:r>
-              <a:t>🤖  MILESTONE</a:t>
+                  <a:srgbClr val="F97316"/>
+                </a:solidFill>
+                <a:latin typeface="Calibri"/>
+              </a:defRPr>
+            </a:pPr>
+            <a:r>
+              <a:t>🚀  MILESTONE</a:t>
             </a:r>
           </a:p>
         </p:txBody>
@@ -3687,13 +3752,13 @@
             <a:pPr algn="l">
               <a:defRPr sz="3200" b="1" i="0">
                 <a:solidFill>
-                  <a:srgbClr val="3F51B5"/>
-                </a:solidFill>
-                <a:latin typeface="Calibri"/>
-              </a:defRPr>
-            </a:pPr>
-            <a:r>
-              <a:t>AI Revolution</a:t>
+                  <a:srgbClr val="F97316"/>
+                </a:solidFill>
+                <a:latin typeface="Calibri"/>
+              </a:defRPr>
+            </a:pPr>
+            <a:r>
+              <a:t>Gaming Division Breakthrough</a:t>
             </a:r>
           </a:p>
         </p:txBody>
@@ -3723,13 +3788,13 @@
             <a:pPr algn="l">
               <a:defRPr sz="5200" b="1" i="0">
                 <a:solidFill>
-                  <a:srgbClr val="3F51B5"/>
-                </a:solidFill>
-                <a:latin typeface="Calibri"/>
-              </a:defRPr>
-            </a:pPr>
-            <a:r>
-              <a:t>AI-Enhanced</a:t>
+                  <a:srgbClr val="F97316"/>
+                </a:solidFill>
+                <a:latin typeface="Calibri"/>
+              </a:defRPr>
+            </a:pPr>
+            <a:r>
+              <a:t>Profitable</a:t>
             </a:r>
           </a:p>
         </p:txBody>
@@ -3765,7 +3830,7 @@
               </a:defRPr>
             </a:pPr>
             <a:r>
-              <a:t>performance evaluations</a:t>
+              <a:t>Gaming Division 2025</a:t>
             </a:r>
           </a:p>
         </p:txBody>
@@ -3801,7 +3866,7 @@
               </a:defRPr>
             </a:pPr>
             <a:r>
-              <a:t>AI-Powered Performance Reviews</a:t>
+              <a:t>Gaming Achieved Profitability</a:t>
             </a:r>
           </a:p>
         </p:txBody>
@@ -3837,7 +3902,7 @@
               </a:defRPr>
             </a:pPr>
             <a:r>
-              <a:t>Transitioning from formal calibrations to manager-led evaluations supported by AI insights, ensuring fairness and accuracy in performance assessments across all teams.</a:t>
+              <a:t>Our gaming division turned profitable in 2025, marking a major milestone in our diversification strategy. This success validates our long-term vision and investment in interactive entertainment.</a:t>
             </a:r>
           </a:p>
         </p:txBody>
@@ -3883,7 +3948,7 @@
             <a:avLst/>
           </a:prstGeom>
           <a:solidFill>
-            <a:srgbClr val="009688"/>
+            <a:srgbClr val="8B5CF6"/>
           </a:solidFill>
           <a:ln>
             <a:noFill/>
@@ -3936,13 +4001,13 @@
             <a:pPr algn="l">
               <a:defRPr sz="1000" b="1">
                 <a:solidFill>
-                  <a:srgbClr val="009688"/>
-                </a:solidFill>
-                <a:latin typeface="Calibri"/>
-              </a:defRPr>
-            </a:pPr>
-            <a:r>
-              <a:t>📱  WIN</a:t>
+                  <a:srgbClr val="8B5CF6"/>
+                </a:solidFill>
+                <a:latin typeface="Calibri"/>
+              </a:defRPr>
+            </a:pPr>
+            <a:r>
+              <a:t>🎮  WIN</a:t>
             </a:r>
           </a:p>
         </p:txBody>
@@ -3972,13 +4037,13 @@
             <a:pPr algn="l">
               <a:defRPr sz="3200" b="1" i="0">
                 <a:solidFill>
-                  <a:srgbClr val="009688"/>
-                </a:solidFill>
-                <a:latin typeface="Calibri"/>
-              </a:defRPr>
-            </a:pPr>
-            <a:r>
-              <a:t>Product Innovation</a:t>
+                  <a:srgbClr val="8B5CF6"/>
+                </a:solidFill>
+                <a:latin typeface="Calibri"/>
+              </a:defRPr>
+            </a:pPr>
+            <a:r>
+              <a:t>Retention Champions</a:t>
             </a:r>
           </a:p>
         </p:txBody>
@@ -4008,13 +4073,13 @@
             <a:pPr algn="l">
               <a:defRPr sz="4800" b="1" i="0">
                 <a:solidFill>
-                  <a:srgbClr val="009688"/>
-                </a:solidFill>
-                <a:latin typeface="Calibri"/>
-              </a:defRPr>
-            </a:pPr>
-            <a:r>
-              <a:t>v5.5.0</a:t>
+                  <a:srgbClr val="8B5CF6"/>
+                </a:solidFill>
+                <a:latin typeface="Calibri"/>
+              </a:defRPr>
+            </a:pPr>
+            <a:r>
+              <a:t>61%</a:t>
             </a:r>
           </a:p>
         </p:txBody>
@@ -4050,7 +4115,7 @@
               </a:defRPr>
             </a:pPr>
             <a:r>
-              <a:t>successful launch</a:t>
+              <a:t>retention</a:t>
             </a:r>
           </a:p>
         </p:txBody>
@@ -4086,7 +4151,7 @@
               </a:defRPr>
             </a:pPr>
             <a:r>
-              <a:t>by Solitaire Team</a:t>
+              <a:t>by Product Teams</a:t>
             </a:r>
           </a:p>
         </p:txBody>
@@ -4122,7 +4187,7 @@
               </a:defRPr>
             </a:pPr>
             <a:r>
-              <a:t>Version 5.5.0 Rollout Success</a:t>
+              <a:t>Infinite Minesweeper Exceeds Benchmarks</a:t>
             </a:r>
           </a:p>
         </p:txBody>
@@ -4158,7 +4223,7 @@
               </a:defRPr>
             </a:pPr>
             <a:r>
-              <a:t>Successfully rolled out to 10% of users with version 5.6.0 targeted for March 27, featuring key improvements and optimizations.</a:t>
+              <a:t>Achieved 61% retention rate, surpassing Apple's ERA benchmark of 151-160%. Solitaire v540 delivered +21.67% D7 retention improvement, while Crossword exceeded 200% ROAS.</a:t>
             </a:r>
           </a:p>
         </p:txBody>
@@ -4194,7 +4259,7 @@
               </a:defRPr>
             </a:pPr>
             <a:r>
-              <a:t>💬 "Consistent product iterations are driving user experience improvements"</a:t>
+              <a:t>💬 "When we focus on user experience and data-driven optimization, exceptional results follow."</a:t>
             </a:r>
           </a:p>
         </p:txBody>
@@ -4240,7 +4305,7 @@
             <a:avLst/>
           </a:prstGeom>
           <a:solidFill>
-            <a:srgbClr val="795548"/>
+            <a:srgbClr val="6366F1"/>
           </a:solidFill>
           <a:ln>
             <a:noFill/>
@@ -4293,13 +4358,13 @@
             <a:pPr algn="l">
               <a:defRPr sz="1000" b="1">
                 <a:solidFill>
-                  <a:srgbClr val="795548"/>
-                </a:solidFill>
-                <a:latin typeface="Calibri"/>
-              </a:defRPr>
-            </a:pPr>
-            <a:r>
-              <a:t>🧪  EVENT</a:t>
+                  <a:srgbClr val="6366F1"/>
+                </a:solidFill>
+                <a:latin typeface="Calibri"/>
+              </a:defRPr>
+            </a:pPr>
+            <a:r>
+              <a:t>🤖  MILESTONE</a:t>
             </a:r>
           </a:p>
         </p:txBody>
@@ -4329,13 +4394,13 @@
             <a:pPr algn="l">
               <a:defRPr sz="3200" b="1" i="0">
                 <a:solidFill>
-                  <a:srgbClr val="795548"/>
-                </a:solidFill>
-                <a:latin typeface="Calibri"/>
-              </a:defRPr>
-            </a:pPr>
-            <a:r>
-              <a:t>Technical Architecture</a:t>
+                  <a:srgbClr val="6366F1"/>
+                </a:solidFill>
+                <a:latin typeface="Calibri"/>
+              </a:defRPr>
+            </a:pPr>
+            <a:r>
+              <a:t>AI Revolution in Progress</a:t>
             </a:r>
           </a:p>
         </p:txBody>
@@ -4349,21 +4414,93 @@
         <p:spPr>
           <a:xfrm>
             <a:off x="1097280" y="2103120"/>
-            <a:ext cx="9966960" cy="548640"/>
-          </a:xfrm>
-          <a:prstGeom prst="rect">
-            <a:avLst/>
-          </a:prstGeom>
-          <a:noFill/>
-        </p:spPr>
-        <p:txBody>
-          <a:bodyPr wrap="square">
-            <a:spAutoFit/>
-          </a:bodyPr>
-          <a:lstStyle/>
-          <a:p>
-            <a:pPr algn="l">
-              <a:defRPr sz="2200" b="1" i="0">
+            <a:ext cx="4572000" cy="822960"/>
+          </a:xfrm>
+          <a:prstGeom prst="rect">
+            <a:avLst/>
+          </a:prstGeom>
+          <a:noFill/>
+        </p:spPr>
+        <p:txBody>
+          <a:bodyPr wrap="square">
+            <a:spAutoFit/>
+          </a:bodyPr>
+          <a:lstStyle/>
+          <a:p>
+            <a:pPr algn="l">
+              <a:defRPr sz="5200" b="1" i="0">
+                <a:solidFill>
+                  <a:srgbClr val="6366F1"/>
+                </a:solidFill>
+                <a:latin typeface="Calibri"/>
+              </a:defRPr>
+            </a:pPr>
+            <a:r>
+              <a:t>1,000+</a:t>
+            </a:r>
+          </a:p>
+        </p:txBody>
+      </p:sp>
+      <p:sp>
+        <p:nvSpPr>
+          <p:cNvPr id="6" name="TextBox 5"/>
+          <p:cNvSpPr txBox="1"/>
+          <p:nvPr/>
+        </p:nvSpPr>
+        <p:spPr>
+          <a:xfrm>
+            <a:off x="1097280" y="2926080"/>
+            <a:ext cx="4572000" cy="365760"/>
+          </a:xfrm>
+          <a:prstGeom prst="rect">
+            <a:avLst/>
+          </a:prstGeom>
+          <a:noFill/>
+        </p:spPr>
+        <p:txBody>
+          <a:bodyPr wrap="square">
+            <a:spAutoFit/>
+          </a:bodyPr>
+          <a:lstStyle/>
+          <a:p>
+            <a:pPr algn="l">
+              <a:defRPr sz="1100" b="0" i="0">
+                <a:solidFill>
+                  <a:srgbClr val="8F95A3"/>
+                </a:solidFill>
+                <a:latin typeface="Calibri"/>
+              </a:defRPr>
+            </a:pPr>
+            <a:r>
+              <a:t>Daily OKR Audits</a:t>
+            </a:r>
+          </a:p>
+        </p:txBody>
+      </p:sp>
+      <p:sp>
+        <p:nvSpPr>
+          <p:cNvPr id="7" name="TextBox 6"/>
+          <p:cNvSpPr txBox="1"/>
+          <p:nvPr/>
+        </p:nvSpPr>
+        <p:spPr>
+          <a:xfrm>
+            <a:off x="1097280" y="3566160"/>
+            <a:ext cx="9966960" cy="457200"/>
+          </a:xfrm>
+          <a:prstGeom prst="rect">
+            <a:avLst/>
+          </a:prstGeom>
+          <a:noFill/>
+        </p:spPr>
+        <p:txBody>
+          <a:bodyPr wrap="square">
+            <a:spAutoFit/>
+          </a:bodyPr>
+          <a:lstStyle/>
+          <a:p>
+            <a:pPr algn="l">
+              <a:defRPr sz="1800" b="1" i="0">
                 <a:solidFill>
                   <a:srgbClr val="FFFFFF"/>
                 </a:solidFill>
@@ -4371,56 +4508,20 @@
               </a:defRPr>
             </a:pPr>
             <a:r>
-              <a:t>Experimentation Platform Integration</a:t>
-            </a:r>
-          </a:p>
-        </p:txBody>
-      </p:sp>
-      <p:sp>
-        <p:nvSpPr>
-          <p:cNvPr id="6" name="TextBox 5"/>
-          <p:cNvSpPr txBox="1"/>
-          <p:nvPr/>
-        </p:nvSpPr>
-        <p:spPr>
-          <a:xfrm>
-            <a:off x="1097280" y="2743200"/>
-            <a:ext cx="9966960" cy="365760"/>
-          </a:xfrm>
-          <a:prstGeom prst="rect">
-            <a:avLst/>
-          </a:prstGeom>
-          <a:noFill/>
-        </p:spPr>
-        <p:txBody>
-          <a:bodyPr wrap="square">
-            <a:spAutoFit/>
-          </a:bodyPr>
-          <a:lstStyle/>
-          <a:p>
-            <a:pPr algn="l">
-              <a:defRPr sz="1400" b="1" i="0">
-                <a:solidFill>
-                  <a:srgbClr val="795548"/>
-                </a:solidFill>
-                <a:latin typeface="Calibri"/>
-              </a:defRPr>
-            </a:pPr>
-            <a:r>
-              <a:t>Q2 Implementation</a:t>
-            </a:r>
-          </a:p>
-        </p:txBody>
-      </p:sp>
-      <p:sp>
-        <p:nvSpPr>
-          <p:cNvPr id="7" name="TextBox 6"/>
-          <p:cNvSpPr txBox="1"/>
-          <p:nvPr/>
-        </p:nvSpPr>
-        <p:spPr>
-          <a:xfrm>
-            <a:off x="1097280" y="3291840"/>
+              <a:t>Every Employee to Manage 5-10 AI Agents</a:t>
+            </a:r>
+          </a:p>
+        </p:txBody>
+      </p:sp>
+      <p:sp>
+        <p:nvSpPr>
+          <p:cNvPr id="8" name="TextBox 7"/>
+          <p:cNvSpPr txBox="1"/>
+          <p:nvPr/>
+        </p:nvSpPr>
+        <p:spPr>
+          <a:xfrm>
+            <a:off x="1097280" y="4206240"/>
             <a:ext cx="9966960" cy="1371600"/>
           </a:xfrm>
           <a:prstGeom prst="rect">
@@ -4443,43 +4544,7 @@
               </a:defRPr>
             </a:pPr>
             <a:r>
-              <a:t>Integrating experimentation platform while Rust rewrite progresses, with solution design document guiding decisions for smoother migration later.</a:t>
-            </a:r>
-          </a:p>
-        </p:txBody>
-      </p:sp>
-      <p:sp>
-        <p:nvSpPr>
-          <p:cNvPr id="8" name="TextBox 7"/>
-          <p:cNvSpPr txBox="1"/>
-          <p:nvPr/>
-        </p:nvSpPr>
-        <p:spPr>
-          <a:xfrm>
-            <a:off x="1097280" y="5029200"/>
-            <a:ext cx="9966960" cy="365760"/>
-          </a:xfrm>
-          <a:prstGeom prst="rect">
-            <a:avLst/>
-          </a:prstGeom>
-          <a:noFill/>
-        </p:spPr>
-        <p:txBody>
-          <a:bodyPr wrap="square">
-            <a:spAutoFit/>
-          </a:bodyPr>
-          <a:lstStyle/>
-          <a:p>
-            <a:pPr algn="l">
-              <a:defRPr sz="1300" b="0" i="0">
-                <a:solidFill>
-                  <a:srgbClr val="8F95A3"/>
-                </a:solidFill>
-                <a:latin typeface="Calibri"/>
-              </a:defRPr>
-            </a:pPr>
-            <a:r>
-              <a:t>Organized by Engineering Team</a:t>
+              <a:t>Within 3-6 months, every team member will manage 5-10 AI agents. Our OKR Auditor already checks 1,000+ individual OKRs daily, and Daria AI Bot saves $4k weekly analyzing app reviews.</a:t>
             </a:r>
           </a:p>
         </p:txBody>
@@ -4525,7 +4590,7 @@
             <a:avLst/>
           </a:prstGeom>
           <a:solidFill>
-            <a:srgbClr val="FF9800"/>
+            <a:srgbClr val="DC2626"/>
           </a:solidFill>
           <a:ln>
             <a:noFill/>
@@ -4578,13 +4643,13 @@
             <a:pPr algn="l">
               <a:defRPr sz="1000" b="1">
                 <a:solidFill>
-                  <a:srgbClr val="FF9800"/>
-                </a:solidFill>
-                <a:latin typeface="Calibri"/>
-              </a:defRPr>
-            </a:pPr>
-            <a:r>
-              <a:t>🎯  OFFICE LIFE</a:t>
+                  <a:srgbClr val="DC2626"/>
+                </a:solidFill>
+                <a:latin typeface="Calibri"/>
+              </a:defRPr>
+            </a:pPr>
+            <a:r>
+              <a:t>🔒  WIN</a:t>
             </a:r>
           </a:p>
         </p:txBody>
@@ -4614,13 +4679,13 @@
             <a:pPr algn="l">
               <a:defRPr sz="3200" b="1" i="0">
                 <a:solidFill>
-                  <a:srgbClr val="FF9800"/>
-                </a:solidFill>
-                <a:latin typeface="Calibri"/>
-              </a:defRPr>
-            </a:pPr>
-            <a:r>
-              <a:t>Leadership Focus</a:t>
+                  <a:srgbClr val="DC2626"/>
+                </a:solidFill>
+                <a:latin typeface="Calibri"/>
+              </a:defRPr>
+            </a:pPr>
+            <a:r>
+              <a:t>Security Excellence</a:t>
             </a:r>
           </a:p>
         </p:txBody>
@@ -4634,6 +4699,114 @@
         <p:spPr>
           <a:xfrm>
             <a:off x="1097280" y="2103120"/>
+            <a:ext cx="4572000" cy="822960"/>
+          </a:xfrm>
+          <a:prstGeom prst="rect">
+            <a:avLst/>
+          </a:prstGeom>
+          <a:noFill/>
+        </p:spPr>
+        <p:txBody>
+          <a:bodyPr wrap="square">
+            <a:spAutoFit/>
+          </a:bodyPr>
+          <a:lstStyle/>
+          <a:p>
+            <a:pPr algn="l">
+              <a:defRPr sz="4800" b="1" i="0">
+                <a:solidFill>
+                  <a:srgbClr val="DC2626"/>
+                </a:solidFill>
+                <a:latin typeface="Calibri"/>
+              </a:defRPr>
+            </a:pPr>
+            <a:r>
+              <a:t>4%</a:t>
+            </a:r>
+          </a:p>
+        </p:txBody>
+      </p:sp>
+      <p:sp>
+        <p:nvSpPr>
+          <p:cNvPr id="6" name="TextBox 5"/>
+          <p:cNvSpPr txBox="1"/>
+          <p:nvPr/>
+        </p:nvSpPr>
+        <p:spPr>
+          <a:xfrm>
+            <a:off x="1097280" y="2834640"/>
+            <a:ext cx="4572000" cy="365760"/>
+          </a:xfrm>
+          <a:prstGeom prst="rect">
+            <a:avLst/>
+          </a:prstGeom>
+          <a:noFill/>
+        </p:spPr>
+        <p:txBody>
+          <a:bodyPr wrap="square">
+            <a:spAutoFit/>
+          </a:bodyPr>
+          <a:lstStyle/>
+          <a:p>
+            <a:pPr algn="l">
+              <a:defRPr sz="1200" b="0" i="0">
+                <a:solidFill>
+                  <a:srgbClr val="8F95A3"/>
+                </a:solidFill>
+                <a:latin typeface="Calibri"/>
+              </a:defRPr>
+            </a:pPr>
+            <a:r>
+              <a:t>fraud rate</a:t>
+            </a:r>
+          </a:p>
+        </p:txBody>
+      </p:sp>
+      <p:sp>
+        <p:nvSpPr>
+          <p:cNvPr id="7" name="TextBox 6"/>
+          <p:cNvSpPr txBox="1"/>
+          <p:nvPr/>
+        </p:nvSpPr>
+        <p:spPr>
+          <a:xfrm>
+            <a:off x="1097280" y="3291840"/>
+            <a:ext cx="9966960" cy="365760"/>
+          </a:xfrm>
+          <a:prstGeom prst="rect">
+            <a:avLst/>
+          </a:prstGeom>
+          <a:noFill/>
+        </p:spPr>
+        <p:txBody>
+          <a:bodyPr wrap="square">
+            <a:spAutoFit/>
+          </a:bodyPr>
+          <a:lstStyle/>
+          <a:p>
+            <a:pPr algn="l">
+              <a:defRPr sz="1400" b="0" i="0">
+                <a:solidFill>
+                  <a:srgbClr val="E2E2EA"/>
+                </a:solidFill>
+                <a:latin typeface="Calibri"/>
+              </a:defRPr>
+            </a:pPr>
+            <a:r>
+              <a:t>by Security Team</a:t>
+            </a:r>
+          </a:p>
+        </p:txBody>
+      </p:sp>
+      <p:sp>
+        <p:nvSpPr>
+          <p:cNvPr id="8" name="TextBox 7"/>
+          <p:cNvSpPr txBox="1"/>
+          <p:nvPr/>
+        </p:nvSpPr>
+        <p:spPr>
+          <a:xfrm>
+            <a:off x="1097280" y="3840480"/>
             <a:ext cx="9966960" cy="457200"/>
           </a:xfrm>
           <a:prstGeom prst="rect">
@@ -4656,35 +4829,35 @@
               </a:defRPr>
             </a:pPr>
             <a:r>
-              <a:t>Performance Review Kickoff</a:t>
-            </a:r>
-          </a:p>
-        </p:txBody>
-      </p:sp>
-      <p:sp>
-        <p:nvSpPr>
-          <p:cNvPr id="6" name="TextBox 5"/>
-          <p:cNvSpPr txBox="1"/>
-          <p:nvPr/>
-        </p:nvSpPr>
-        <p:spPr>
-          <a:xfrm>
-            <a:off x="1371600" y="2743200"/>
-            <a:ext cx="9692640" cy="1828800"/>
-          </a:xfrm>
-          <a:prstGeom prst="rect">
-            <a:avLst/>
-          </a:prstGeom>
-          <a:noFill/>
-        </p:spPr>
-        <p:txBody>
-          <a:bodyPr wrap="square">
-            <a:spAutoFit/>
-          </a:bodyPr>
-          <a:lstStyle/>
-          <a:p>
-            <a:pPr algn="l">
-              <a:defRPr sz="1500" b="0" i="1">
+              <a:t>Fraud Slashed with Dynamic SDK</a:t>
+            </a:r>
+          </a:p>
+        </p:txBody>
+      </p:sp>
+      <p:sp>
+        <p:nvSpPr>
+          <p:cNvPr id="9" name="TextBox 8"/>
+          <p:cNvSpPr txBox="1"/>
+          <p:nvPr/>
+        </p:nvSpPr>
+        <p:spPr>
+          <a:xfrm>
+            <a:off x="1097280" y="4389120"/>
+            <a:ext cx="9966960" cy="914400"/>
+          </a:xfrm>
+          <a:prstGeom prst="rect">
+            <a:avLst/>
+          </a:prstGeom>
+          <a:noFill/>
+        </p:spPr>
+        <p:txBody>
+          <a:bodyPr wrap="square">
+            <a:spAutoFit/>
+          </a:bodyPr>
+          <a:lstStyle/>
+          <a:p>
+            <a:pPr algn="l">
+              <a:defRPr sz="1400" b="0" i="0">
                 <a:solidFill>
                   <a:srgbClr val="E2E2EA"/>
                 </a:solidFill>
@@ -4692,35 +4865,35 @@
               </a:defRPr>
             </a:pPr>
             <a:r>
-              <a:t>"Performance review kicks off today! We're keeping things light and focused with just 3 manager questions and self-assessments covering performance, culture, and psychological safety."</a:t>
-            </a:r>
-          </a:p>
-        </p:txBody>
-      </p:sp>
-      <p:sp>
-        <p:nvSpPr>
-          <p:cNvPr id="7" name="TextBox 6"/>
-          <p:cNvSpPr txBox="1"/>
-          <p:nvPr/>
-        </p:nvSpPr>
-        <p:spPr>
-          <a:xfrm>
-            <a:off x="1097280" y="4754880"/>
-            <a:ext cx="9966960" cy="365760"/>
-          </a:xfrm>
-          <a:prstGeom prst="rect">
-            <a:avLst/>
-          </a:prstGeom>
-          <a:noFill/>
-        </p:spPr>
-        <p:txBody>
-          <a:bodyPr wrap="square">
-            <a:spAutoFit/>
-          </a:bodyPr>
-          <a:lstStyle/>
-          <a:p>
-            <a:pPr algn="l">
-              <a:defRPr sz="1400" b="0" i="0">
+              <a:t>Fraud reduced from 22% to under 4% using dynamic SDK signatures. This dramatic improvement protects our revenue and maintains trust with partners and users.</a:t>
+            </a:r>
+          </a:p>
+        </p:txBody>
+      </p:sp>
+      <p:sp>
+        <p:nvSpPr>
+          <p:cNvPr id="10" name="TextBox 9"/>
+          <p:cNvSpPr txBox="1"/>
+          <p:nvPr/>
+        </p:nvSpPr>
+        <p:spPr>
+          <a:xfrm>
+            <a:off x="1097280" y="5486400"/>
+            <a:ext cx="9966960" cy="457200"/>
+          </a:xfrm>
+          <a:prstGeom prst="rect">
+            <a:avLst/>
+          </a:prstGeom>
+          <a:noFill/>
+        </p:spPr>
+        <p:txBody>
+          <a:bodyPr wrap="square">
+            <a:spAutoFit/>
+          </a:bodyPr>
+          <a:lstStyle/>
+          <a:p>
+            <a:pPr algn="l">
+              <a:defRPr sz="1300" b="0" i="1">
                 <a:solidFill>
                   <a:srgbClr val="8F95A3"/>
                 </a:solidFill>
@@ -4728,79 +4901,7 @@
               </a:defRPr>
             </a:pPr>
             <a:r>
-              <a:t>— Lise Brandely</a:t>
-            </a:r>
-          </a:p>
-        </p:txBody>
-      </p:sp>
-      <p:sp>
-        <p:nvSpPr>
-          <p:cNvPr id="8" name="TextBox 7"/>
-          <p:cNvSpPr txBox="1"/>
-          <p:nvPr/>
-        </p:nvSpPr>
-        <p:spPr>
-          <a:xfrm>
-            <a:off x="1097280" y="5212080"/>
-            <a:ext cx="9966960" cy="365760"/>
-          </a:xfrm>
-          <a:prstGeom prst="rect">
-            <a:avLst/>
-          </a:prstGeom>
-          <a:noFill/>
-        </p:spPr>
-        <p:txBody>
-          <a:bodyPr wrap="square">
-            <a:spAutoFit/>
-          </a:bodyPr>
-          <a:lstStyle/>
-          <a:p>
-            <a:pPr algn="l">
-              <a:defRPr sz="1400" b="1" i="0">
-                <a:solidFill>
-                  <a:srgbClr val="FF9800"/>
-                </a:solidFill>
-                <a:latin typeface="Calibri"/>
-              </a:defRPr>
-            </a:pPr>
-            <a:r>
-              <a:t>👀 × 3, 🐱‍💻 × 3</a:t>
-            </a:r>
-          </a:p>
-        </p:txBody>
-      </p:sp>
-      <p:sp>
-        <p:nvSpPr>
-          <p:cNvPr id="9" name="TextBox 8"/>
-          <p:cNvSpPr txBox="1"/>
-          <p:nvPr/>
-        </p:nvSpPr>
-        <p:spPr>
-          <a:xfrm>
-            <a:off x="1097280" y="5760720"/>
-            <a:ext cx="9966960" cy="274320"/>
-          </a:xfrm>
-          <a:prstGeom prst="rect">
-            <a:avLst/>
-          </a:prstGeom>
-          <a:noFill/>
-        </p:spPr>
-        <p:txBody>
-          <a:bodyPr wrap="square">
-            <a:spAutoFit/>
-          </a:bodyPr>
-          <a:lstStyle/>
-          <a:p>
-            <a:pPr algn="l">
-              <a:defRPr sz="1100" b="0" i="0">
-                <a:solidFill>
-                  <a:srgbClr val="5C6270"/>
-                </a:solidFill>
-                <a:latin typeface="Calibri"/>
-              </a:defRPr>
-            </a:pPr>
-            <a:r>
-              <a:t>#general</a:t>
+              <a:t>💬 "Proactive security measures create sustainable competitive advantages and protect long-term growth."</a:t>
             </a:r>
           </a:p>
         </p:txBody>
@@ -4846,7 +4947,7 @@
             <a:avLst/>
           </a:prstGeom>
           <a:solidFill>
-            <a:srgbClr val="607D8B"/>
+            <a:srgbClr val="059669"/>
           </a:solidFill>
           <a:ln>
             <a:noFill/>
@@ -4899,13 +5000,13 @@
             <a:pPr algn="l">
               <a:defRPr sz="1000" b="1">
                 <a:solidFill>
-                  <a:srgbClr val="607D8B"/>
-                </a:solidFill>
-                <a:latin typeface="Calibri"/>
-              </a:defRPr>
-            </a:pPr>
-            <a:r>
-              <a:t>🔧  MILESTONE</a:t>
+                  <a:srgbClr val="059669"/>
+                </a:solidFill>
+                <a:latin typeface="Calibri"/>
+              </a:defRPr>
+            </a:pPr>
+            <a:r>
+              <a:t>💼  WIN</a:t>
             </a:r>
           </a:p>
         </p:txBody>
@@ -4935,13 +5036,13 @@
             <a:pPr algn="l">
               <a:defRPr sz="3200" b="1" i="0">
                 <a:solidFill>
-                  <a:srgbClr val="607D8B"/>
-                </a:solidFill>
-                <a:latin typeface="Calibri"/>
-              </a:defRPr>
-            </a:pPr>
-            <a:r>
-              <a:t>Engineering Standards</a:t>
+                  <a:srgbClr val="059669"/>
+                </a:solidFill>
+                <a:latin typeface="Calibri"/>
+              </a:defRPr>
+            </a:pPr>
+            <a:r>
+              <a:t>Sales Performance</a:t>
             </a:r>
           </a:p>
         </p:txBody>
@@ -4969,15 +5070,15 @@
           <a:lstStyle/>
           <a:p>
             <a:pPr algn="l">
-              <a:defRPr sz="5200" b="1" i="0">
-                <a:solidFill>
-                  <a:srgbClr val="607D8B"/>
-                </a:solidFill>
-                <a:latin typeface="Calibri"/>
-              </a:defRPr>
-            </a:pPr>
-            <a:r>
-              <a:t>Managed</a:t>
+              <a:defRPr sz="4800" b="1" i="0">
+                <a:solidFill>
+                  <a:srgbClr val="059669"/>
+                </a:solidFill>
+                <a:latin typeface="Calibri"/>
+              </a:defRPr>
+            </a:pPr>
+            <a:r>
+              <a:t>$390K</a:t>
             </a:r>
           </a:p>
         </p:txBody>
@@ -4990,7 +5091,7 @@
         </p:nvSpPr>
         <p:spPr>
           <a:xfrm>
-            <a:off x="1097280" y="2926080"/>
+            <a:off x="1097280" y="2834640"/>
             <a:ext cx="4572000" cy="365760"/>
           </a:xfrm>
           <a:prstGeom prst="rect">
@@ -5005,7 +5106,7 @@
           <a:lstStyle/>
           <a:p>
             <a:pPr algn="l">
-              <a:defRPr sz="1100" b="0" i="0">
+              <a:defRPr sz="1200" b="0" i="0">
                 <a:solidFill>
                   <a:srgbClr val="8F95A3"/>
                 </a:solidFill>
@@ -5013,7 +5114,7 @@
               </a:defRPr>
             </a:pPr>
             <a:r>
-              <a:t>deployment standards</a:t>
+              <a:t>net revenue</a:t>
             </a:r>
           </a:p>
         </p:txBody>
@@ -5026,7 +5127,43 @@
         </p:nvSpPr>
         <p:spPr>
           <a:xfrm>
-            <a:off x="1097280" y="3566160"/>
+            <a:off x="1097280" y="3291840"/>
+            <a:ext cx="9966960" cy="365760"/>
+          </a:xfrm>
+          <a:prstGeom prst="rect">
+            <a:avLst/>
+          </a:prstGeom>
+          <a:noFill/>
+        </p:spPr>
+        <p:txBody>
+          <a:bodyPr wrap="square">
+            <a:spAutoFit/>
+          </a:bodyPr>
+          <a:lstStyle/>
+          <a:p>
+            <a:pPr algn="l">
+              <a:defRPr sz="1400" b="0" i="0">
+                <a:solidFill>
+                  <a:srgbClr val="E2E2EA"/>
+                </a:solidFill>
+                <a:latin typeface="Calibri"/>
+              </a:defRPr>
+            </a:pPr>
+            <a:r>
+              <a:t>by Sales Team</a:t>
+            </a:r>
+          </a:p>
+        </p:txBody>
+      </p:sp>
+      <p:sp>
+        <p:nvSpPr>
+          <p:cNvPr id="8" name="TextBox 7"/>
+          <p:cNvSpPr txBox="1"/>
+          <p:nvPr/>
+        </p:nvSpPr>
+        <p:spPr>
+          <a:xfrm>
+            <a:off x="1097280" y="3840480"/>
             <a:ext cx="9966960" cy="457200"/>
           </a:xfrm>
           <a:prstGeom prst="rect">
@@ -5049,35 +5186,35 @@
               </a:defRPr>
             </a:pPr>
             <a:r>
-              <a:t>Security &amp; Deployment Excellence</a:t>
-            </a:r>
-          </a:p>
-        </p:txBody>
-      </p:sp>
-      <p:sp>
-        <p:nvSpPr>
-          <p:cNvPr id="8" name="TextBox 7"/>
-          <p:cNvSpPr txBox="1"/>
-          <p:nvPr/>
-        </p:nvSpPr>
-        <p:spPr>
-          <a:xfrm>
-            <a:off x="1097280" y="4206240"/>
-            <a:ext cx="9966960" cy="1371600"/>
-          </a:xfrm>
-          <a:prstGeom prst="rect">
-            <a:avLst/>
-          </a:prstGeom>
-          <a:noFill/>
-        </p:spPr>
-        <p:txBody>
-          <a:bodyPr wrap="square">
-            <a:spAutoFit/>
-          </a:bodyPr>
-          <a:lstStyle/>
-          <a:p>
-            <a:pPr algn="l">
-              <a:defRPr sz="1500" b="0" i="0">
+              <a:t>Exceptional Week Closes 8 Deals</a:t>
+            </a:r>
+          </a:p>
+        </p:txBody>
+      </p:sp>
+      <p:sp>
+        <p:nvSpPr>
+          <p:cNvPr id="9" name="TextBox 8"/>
+          <p:cNvSpPr txBox="1"/>
+          <p:nvPr/>
+        </p:nvSpPr>
+        <p:spPr>
+          <a:xfrm>
+            <a:off x="1097280" y="4389120"/>
+            <a:ext cx="9966960" cy="914400"/>
+          </a:xfrm>
+          <a:prstGeom prst="rect">
+            <a:avLst/>
+          </a:prstGeom>
+          <a:noFill/>
+        </p:spPr>
+        <p:txBody>
+          <a:bodyPr wrap="square">
+            <a:spAutoFit/>
+          </a:bodyPr>
+          <a:lstStyle/>
+          <a:p>
+            <a:pPr algn="l">
+              <a:defRPr sz="1400" b="0" i="0">
                 <a:solidFill>
                   <a:srgbClr val="E2E2EA"/>
                 </a:solidFill>
@@ -5085,7 +5222,43 @@
               </a:defRPr>
             </a:pPr>
             <a:r>
-              <a:t>Teams are making great progress building products and tools, especially non-engineering teams creating useful solutions. Now focusing on proper engineering and security practices as we scale, moving to managed deployments for better reliability.</a:t>
+              <a:t>Sales team delivered outstanding results with 8 deals closed generating $390k net revenue in one week. This performance demonstrates our strong market position and effective sales processes.</a:t>
+            </a:r>
+          </a:p>
+        </p:txBody>
+      </p:sp>
+      <p:sp>
+        <p:nvSpPr>
+          <p:cNvPr id="10" name="TextBox 9"/>
+          <p:cNvSpPr txBox="1"/>
+          <p:nvPr/>
+        </p:nvSpPr>
+        <p:spPr>
+          <a:xfrm>
+            <a:off x="1097280" y="5486400"/>
+            <a:ext cx="9966960" cy="457200"/>
+          </a:xfrm>
+          <a:prstGeom prst="rect">
+            <a:avLst/>
+          </a:prstGeom>
+          <a:noFill/>
+        </p:spPr>
+        <p:txBody>
+          <a:bodyPr wrap="square">
+            <a:spAutoFit/>
+          </a:bodyPr>
+          <a:lstStyle/>
+          <a:p>
+            <a:pPr algn="l">
+              <a:defRPr sz="1300" b="0" i="1">
+                <a:solidFill>
+                  <a:srgbClr val="8F95A3"/>
+                </a:solidFill>
+                <a:latin typeface="Calibri"/>
+              </a:defRPr>
+            </a:pPr>
+            <a:r>
+              <a:t>💬 "Consistent execution and relationship building drive remarkable business outcomes."</a:t>
             </a:r>
           </a:p>
         </p:txBody>
@@ -5131,7 +5304,7 @@
             <a:avLst/>
           </a:prstGeom>
           <a:solidFill>
-            <a:srgbClr val="8BC34A"/>
+            <a:srgbClr val="84CC16"/>
           </a:solidFill>
           <a:ln>
             <a:noFill/>
@@ -5184,13 +5357,13 @@
             <a:pPr algn="l">
               <a:defRPr sz="1000" b="1">
                 <a:solidFill>
-                  <a:srgbClr val="8BC34A"/>
-                </a:solidFill>
-                <a:latin typeface="Calibri"/>
-              </a:defRPr>
-            </a:pPr>
-            <a:r>
-              <a:t>🎮  WIN</a:t>
+                  <a:srgbClr val="84CC16"/>
+                </a:solidFill>
+                <a:latin typeface="Calibri"/>
+              </a:defRPr>
+            </a:pPr>
+            <a:r>
+              <a:t>🧘  EVENT</a:t>
             </a:r>
           </a:p>
         </p:txBody>
@@ -5220,13 +5393,13 @@
             <a:pPr algn="l">
               <a:defRPr sz="3200" b="1" i="0">
                 <a:solidFill>
-                  <a:srgbClr val="8BC34A"/>
-                </a:solidFill>
-                <a:latin typeface="Calibri"/>
-              </a:defRPr>
-            </a:pPr>
-            <a:r>
-              <a:t>Gaming Success</a:t>
+                  <a:srgbClr val="84CC16"/>
+                </a:solidFill>
+                <a:latin typeface="Calibri"/>
+              </a:defRPr>
+            </a:pPr>
+            <a:r>
+              <a:t>Daily Wellness</a:t>
             </a:r>
           </a:p>
         </p:txBody>
@@ -5240,29 +5413,29 @@
         <p:spPr>
           <a:xfrm>
             <a:off x="1097280" y="2103120"/>
-            <a:ext cx="4572000" cy="822960"/>
-          </a:xfrm>
-          <a:prstGeom prst="rect">
-            <a:avLst/>
-          </a:prstGeom>
-          <a:noFill/>
-        </p:spPr>
-        <p:txBody>
-          <a:bodyPr wrap="square">
-            <a:spAutoFit/>
-          </a:bodyPr>
-          <a:lstStyle/>
-          <a:p>
-            <a:pPr algn="l">
-              <a:defRPr sz="4800" b="1" i="0">
-                <a:solidFill>
-                  <a:srgbClr val="8BC34A"/>
-                </a:solidFill>
-                <a:latin typeface="Calibri"/>
-              </a:defRPr>
-            </a:pPr>
-            <a:r>
-              <a:t>30%</a:t>
+            <a:ext cx="9966960" cy="548640"/>
+          </a:xfrm>
+          <a:prstGeom prst="rect">
+            <a:avLst/>
+          </a:prstGeom>
+          <a:noFill/>
+        </p:spPr>
+        <p:txBody>
+          <a:bodyPr wrap="square">
+            <a:spAutoFit/>
+          </a:bodyPr>
+          <a:lstStyle/>
+          <a:p>
+            <a:pPr algn="l">
+              <a:defRPr sz="2200" b="1" i="0">
+                <a:solidFill>
+                  <a:srgbClr val="FFFFFF"/>
+                </a:solidFill>
+                <a:latin typeface="Calibri"/>
+              </a:defRPr>
+            </a:pPr>
+            <a:r>
+              <a:t>Office Yoga Sessions</a:t>
             </a:r>
           </a:p>
         </p:txBody>
@@ -5275,22 +5448,94 @@
         </p:nvSpPr>
         <p:spPr>
           <a:xfrm>
-            <a:off x="1097280" y="2834640"/>
-            <a:ext cx="4572000" cy="365760"/>
-          </a:xfrm>
-          <a:prstGeom prst="rect">
-            <a:avLst/>
-          </a:prstGeom>
-          <a:noFill/>
-        </p:spPr>
-        <p:txBody>
-          <a:bodyPr wrap="square">
-            <a:spAutoFit/>
-          </a:bodyPr>
-          <a:lstStyle/>
-          <a:p>
-            <a:pPr algn="l">
-              <a:defRPr sz="1200" b="0" i="0">
+            <a:off x="1097280" y="2743200"/>
+            <a:ext cx="9966960" cy="365760"/>
+          </a:xfrm>
+          <a:prstGeom prst="rect">
+            <a:avLst/>
+          </a:prstGeom>
+          <a:noFill/>
+        </p:spPr>
+        <p:txBody>
+          <a:bodyPr wrap="square">
+            <a:spAutoFit/>
+          </a:bodyPr>
+          <a:lstStyle/>
+          <a:p>
+            <a:pPr algn="l">
+              <a:defRPr sz="1400" b="1" i="0">
+                <a:solidFill>
+                  <a:srgbClr val="84CC16"/>
+                </a:solidFill>
+                <a:latin typeface="Calibri"/>
+              </a:defRPr>
+            </a:pPr>
+            <a:r>
+              <a:t>Daily at 13:10 CET</a:t>
+            </a:r>
+          </a:p>
+        </p:txBody>
+      </p:sp>
+      <p:sp>
+        <p:nvSpPr>
+          <p:cNvPr id="7" name="TextBox 6"/>
+          <p:cNvSpPr txBox="1"/>
+          <p:nvPr/>
+        </p:nvSpPr>
+        <p:spPr>
+          <a:xfrm>
+            <a:off x="1097280" y="3291840"/>
+            <a:ext cx="9966960" cy="1371600"/>
+          </a:xfrm>
+          <a:prstGeom prst="rect">
+            <a:avLst/>
+          </a:prstGeom>
+          <a:noFill/>
+        </p:spPr>
+        <p:txBody>
+          <a:bodyPr wrap="square">
+            <a:spAutoFit/>
+          </a:bodyPr>
+          <a:lstStyle/>
+          <a:p>
+            <a:pPr algn="l">
+              <a:defRPr sz="1500" b="0" i="0">
+                <a:solidFill>
+                  <a:srgbClr val="E2E2EA"/>
+                </a:solidFill>
+                <a:latin typeface="Calibri"/>
+              </a:defRPr>
+            </a:pPr>
+            <a:r>
+              <a:t>Join Anna Kolyada for daily yoga sessions, available both in office and online streaming. A perfect way to recharge and maintain well-being during busy workdays.</a:t>
+            </a:r>
+          </a:p>
+        </p:txBody>
+      </p:sp>
+      <p:sp>
+        <p:nvSpPr>
+          <p:cNvPr id="8" name="TextBox 7"/>
+          <p:cNvSpPr txBox="1"/>
+          <p:nvPr/>
+        </p:nvSpPr>
+        <p:spPr>
+          <a:xfrm>
+            <a:off x="1097280" y="5029200"/>
+            <a:ext cx="9966960" cy="365760"/>
+          </a:xfrm>
+          <a:prstGeom prst="rect">
+            <a:avLst/>
+          </a:prstGeom>
+          <a:noFill/>
+        </p:spPr>
+        <p:txBody>
+          <a:bodyPr wrap="square">
+            <a:spAutoFit/>
+          </a:bodyPr>
+          <a:lstStyle/>
+          <a:p>
+            <a:pPr algn="l">
+              <a:defRPr sz="1300" b="0" i="0">
                 <a:solidFill>
                   <a:srgbClr val="8F95A3"/>
                 </a:solidFill>
@@ -5298,151 +5543,7 @@
               </a:defRPr>
             </a:pPr>
             <a:r>
-              <a:t>ARPDAU increase</a:t>
-            </a:r>
-          </a:p>
-        </p:txBody>
-      </p:sp>
-      <p:sp>
-        <p:nvSpPr>
-          <p:cNvPr id="7" name="TextBox 6"/>
-          <p:cNvSpPr txBox="1"/>
-          <p:nvPr/>
-        </p:nvSpPr>
-        <p:spPr>
-          <a:xfrm>
-            <a:off x="1097280" y="3291840"/>
-            <a:ext cx="9966960" cy="365760"/>
-          </a:xfrm>
-          <a:prstGeom prst="rect">
-            <a:avLst/>
-          </a:prstGeom>
-          <a:noFill/>
-        </p:spPr>
-        <p:txBody>
-          <a:bodyPr wrap="square">
-            <a:spAutoFit/>
-          </a:bodyPr>
-          <a:lstStyle/>
-          <a:p>
-            <a:pPr algn="l">
-              <a:defRPr sz="1400" b="0" i="0">
-                <a:solidFill>
-                  <a:srgbClr val="E2E2EA"/>
-                </a:solidFill>
-                <a:latin typeface="Calibri"/>
-              </a:defRPr>
-            </a:pPr>
-            <a:r>
-              <a:t>by Game Development Teams</a:t>
-            </a:r>
-          </a:p>
-        </p:txBody>
-      </p:sp>
-      <p:sp>
-        <p:nvSpPr>
-          <p:cNvPr id="8" name="TextBox 7"/>
-          <p:cNvSpPr txBox="1"/>
-          <p:nvPr/>
-        </p:nvSpPr>
-        <p:spPr>
-          <a:xfrm>
-            <a:off x="1097280" y="3840480"/>
-            <a:ext cx="9966960" cy="457200"/>
-          </a:xfrm>
-          <a:prstGeom prst="rect">
-            <a:avLst/>
-          </a:prstGeom>
-          <a:noFill/>
-        </p:spPr>
-        <p:txBody>
-          <a:bodyPr wrap="square">
-            <a:spAutoFit/>
-          </a:bodyPr>
-          <a:lstStyle/>
-          <a:p>
-            <a:pPr algn="l">
-              <a:defRPr sz="1800" b="1" i="0">
-                <a:solidFill>
-                  <a:srgbClr val="FFFFFF"/>
-                </a:solidFill>
-                <a:latin typeface="Calibri"/>
-              </a:defRPr>
-            </a:pPr>
-            <a:r>
-              <a:t>Screw Twist Performance Boost</a:t>
-            </a:r>
-          </a:p>
-        </p:txBody>
-      </p:sp>
-      <p:sp>
-        <p:nvSpPr>
-          <p:cNvPr id="9" name="TextBox 8"/>
-          <p:cNvSpPr txBox="1"/>
-          <p:nvPr/>
-        </p:nvSpPr>
-        <p:spPr>
-          <a:xfrm>
-            <a:off x="1097280" y="4389120"/>
-            <a:ext cx="9966960" cy="914400"/>
-          </a:xfrm>
-          <a:prstGeom prst="rect">
-            <a:avLst/>
-          </a:prstGeom>
-          <a:noFill/>
-        </p:spPr>
-        <p:txBody>
-          <a:bodyPr wrap="square">
-            <a:spAutoFit/>
-          </a:bodyPr>
-          <a:lstStyle/>
-          <a:p>
-            <a:pPr algn="l">
-              <a:defRPr sz="1400" b="0" i="0">
-                <a:solidFill>
-                  <a:srgbClr val="E2E2EA"/>
-                </a:solidFill>
-                <a:latin typeface="Calibri"/>
-              </a:defRPr>
-            </a:pPr>
-            <a:r>
-              <a:t>Version 1.3.5 launched with new onboarding levels and increased interstitial ad frequency, targeting improved retention and reduced churn.</a:t>
-            </a:r>
-          </a:p>
-        </p:txBody>
-      </p:sp>
-      <p:sp>
-        <p:nvSpPr>
-          <p:cNvPr id="10" name="TextBox 9"/>
-          <p:cNvSpPr txBox="1"/>
-          <p:nvPr/>
-        </p:nvSpPr>
-        <p:spPr>
-          <a:xfrm>
-            <a:off x="1097280" y="5486400"/>
-            <a:ext cx="9966960" cy="457200"/>
-          </a:xfrm>
-          <a:prstGeom prst="rect">
-            <a:avLst/>
-          </a:prstGeom>
-          <a:noFill/>
-        </p:spPr>
-        <p:txBody>
-          <a:bodyPr wrap="square">
-            <a:spAutoFit/>
-          </a:bodyPr>
-          <a:lstStyle/>
-          <a:p>
-            <a:pPr algn="l">
-              <a:defRPr sz="1300" b="0" i="1">
-                <a:solidFill>
-                  <a:srgbClr val="8F95A3"/>
-                </a:solidFill>
-                <a:latin typeface="Calibri"/>
-              </a:defRPr>
-            </a:pPr>
-            <a:r>
-              <a:t>💬 "Strategic product updates are directly translating to revenue growth"</a:t>
+              <a:t>Organized by Anna Kolyada</a:t>
             </a:r>
           </a:p>
         </p:txBody>
@@ -5488,7 +5589,7 @@
             <a:avLst/>
           </a:prstGeom>
           <a:solidFill>
-            <a:srgbClr val="FF9800"/>
+            <a:srgbClr val="7C3AED"/>
           </a:solidFill>
           <a:ln>
             <a:noFill/>
@@ -5541,13 +5642,13 @@
             <a:pPr algn="l">
               <a:defRPr sz="1000" b="1">
                 <a:solidFill>
-                  <a:srgbClr val="FF9800"/>
-                </a:solidFill>
-                <a:latin typeface="Calibri"/>
-              </a:defRPr>
-            </a:pPr>
-            <a:r>
-              <a:t>💪  CLAPS</a:t>
+                  <a:srgbClr val="7C3AED"/>
+                </a:solidFill>
+                <a:latin typeface="Calibri"/>
+              </a:defRPr>
+            </a:pPr>
+            <a:r>
+              <a:t>📚  EVENT</a:t>
             </a:r>
           </a:p>
         </p:txBody>
@@ -5577,13 +5678,13 @@
             <a:pPr algn="l">
               <a:defRPr sz="3200" b="1" i="0">
                 <a:solidFill>
-                  <a:srgbClr val="FF9800"/>
-                </a:solidFill>
-                <a:latin typeface="Calibri"/>
-              </a:defRPr>
-            </a:pPr>
-            <a:r>
-              <a:t>Cross-Team Excellence</a:t>
+                  <a:srgbClr val="7C3AED"/>
+                </a:solidFill>
+                <a:latin typeface="Calibri"/>
+              </a:defRPr>
+            </a:pPr>
+            <a:r>
+              <a:t>Book Club Thriving</a:t>
             </a:r>
           </a:p>
         </p:txBody>
@@ -5597,29 +5698,29 @@
         <p:spPr>
           <a:xfrm>
             <a:off x="1097280" y="2103120"/>
-            <a:ext cx="2743200" cy="548640"/>
-          </a:xfrm>
-          <a:prstGeom prst="rect">
-            <a:avLst/>
-          </a:prstGeom>
-          <a:noFill/>
-        </p:spPr>
-        <p:txBody>
-          <a:bodyPr wrap="square">
-            <a:spAutoFit/>
-          </a:bodyPr>
-          <a:lstStyle/>
-          <a:p>
-            <a:pPr algn="l">
-              <a:defRPr sz="2800" b="1" i="0">
-                <a:solidFill>
-                  <a:srgbClr val="FF9800"/>
-                </a:solidFill>
-                <a:latin typeface="Calibri"/>
-              </a:defRPr>
-            </a:pPr>
-            <a:r>
-              <a:t>25</a:t>
+            <a:ext cx="9966960" cy="548640"/>
+          </a:xfrm>
+          <a:prstGeom prst="rect">
+            <a:avLst/>
+          </a:prstGeom>
+          <a:noFill/>
+        </p:spPr>
+        <p:txBody>
+          <a:bodyPr wrap="square">
+            <a:spAutoFit/>
+          </a:bodyPr>
+          <a:lstStyle/>
+          <a:p>
+            <a:pPr algn="l">
+              <a:defRPr sz="2200" b="1" i="0">
+                <a:solidFill>
+                  <a:srgbClr val="FFFFFF"/>
+                </a:solidFill>
+                <a:latin typeface="Calibri"/>
+              </a:defRPr>
+            </a:pPr>
+            <a:r>
+              <a:t>Passionate Curiosity Book Club</a:t>
             </a:r>
           </a:p>
         </p:txBody>
@@ -5632,7 +5733,7 @@
         </p:nvSpPr>
         <p:spPr>
           <a:xfrm>
-            <a:off x="1097280" y="2651760"/>
+            <a:off x="1097280" y="2743200"/>
             <a:ext cx="9966960" cy="365760"/>
           </a:xfrm>
           <a:prstGeom prst="rect">
@@ -5647,7 +5748,43 @@
           <a:lstStyle/>
           <a:p>
             <a:pPr algn="l">
-              <a:defRPr sz="1400" b="0" i="0">
+              <a:defRPr sz="1400" b="1" i="0">
+                <a:solidFill>
+                  <a:srgbClr val="7C3AED"/>
+                </a:solidFill>
+                <a:latin typeface="Calibri"/>
+              </a:defRPr>
+            </a:pPr>
+            <a:r>
+              <a:t>Ongoing</a:t>
+            </a:r>
+          </a:p>
+        </p:txBody>
+      </p:sp>
+      <p:sp>
+        <p:nvSpPr>
+          <p:cNvPr id="7" name="TextBox 6"/>
+          <p:cNvSpPr txBox="1"/>
+          <p:nvPr/>
+        </p:nvSpPr>
+        <p:spPr>
+          <a:xfrm>
+            <a:off x="1097280" y="3291840"/>
+            <a:ext cx="9966960" cy="1371600"/>
+          </a:xfrm>
+          <a:prstGeom prst="rect">
+            <a:avLst/>
+          </a:prstGeom>
+          <a:noFill/>
+        </p:spPr>
+        <p:txBody>
+          <a:bodyPr wrap="square">
+            <a:spAutoFit/>
+          </a:bodyPr>
+          <a:lstStyle/>
+          <a:p>
+            <a:pPr algn="l">
+              <a:defRPr sz="1500" b="0" i="0">
                 <a:solidFill>
                   <a:srgbClr val="E2E2EA"/>
                 </a:solidFill>
@@ -5655,20 +5792,20 @@
               </a:defRPr>
             </a:pPr>
             <a:r>
-              <a:t>from Sergey Orlov</a:t>
-            </a:r>
-          </a:p>
-        </p:txBody>
-      </p:sp>
-      <p:sp>
-        <p:nvSpPr>
-          <p:cNvPr id="7" name="TextBox 6"/>
-          <p:cNvSpPr txBox="1"/>
-          <p:nvPr/>
-        </p:nvSpPr>
-        <p:spPr>
-          <a:xfrm>
-            <a:off x="1097280" y="3108960"/>
+              <a:t>Our company book club 'Passionate Curiosity' has grown to 140+ participants, fostering learning and intellectual growth across all departments. Join us for engaging discussions and shared insights.</a:t>
+            </a:r>
+          </a:p>
+        </p:txBody>
+      </p:sp>
+      <p:sp>
+        <p:nvSpPr>
+          <p:cNvPr id="8" name="TextBox 7"/>
+          <p:cNvSpPr txBox="1"/>
+          <p:nvPr/>
+        </p:nvSpPr>
+        <p:spPr>
+          <a:xfrm>
+            <a:off x="1097280" y="5029200"/>
             <a:ext cx="9966960" cy="365760"/>
           </a:xfrm>
           <a:prstGeom prst="rect">
@@ -5683,87 +5820,15 @@
           <a:lstStyle/>
           <a:p>
             <a:pPr algn="l">
-              <a:defRPr sz="1400" b="1" i="0">
-                <a:solidFill>
-                  <a:srgbClr val="FFFFFF"/>
-                </a:solidFill>
-                <a:latin typeface="Calibri"/>
-              </a:defRPr>
-            </a:pPr>
-            <a:r>
-              <a:t>to: Roman de las Heras</a:t>
-            </a:r>
-          </a:p>
-        </p:txBody>
-      </p:sp>
-      <p:sp>
-        <p:nvSpPr>
-          <p:cNvPr id="8" name="TextBox 7"/>
-          <p:cNvSpPr txBox="1"/>
-          <p:nvPr/>
-        </p:nvSpPr>
-        <p:spPr>
-          <a:xfrm>
-            <a:off x="1097280" y="3749039"/>
-            <a:ext cx="9966960" cy="1097280"/>
-          </a:xfrm>
-          <a:prstGeom prst="rect">
-            <a:avLst/>
-          </a:prstGeom>
-          <a:noFill/>
-        </p:spPr>
-        <p:txBody>
-          <a:bodyPr wrap="square">
-            <a:spAutoFit/>
-          </a:bodyPr>
-          <a:lstStyle/>
-          <a:p>
-            <a:pPr algn="l">
-              <a:defRPr sz="1500" b="0" i="1">
-                <a:solidFill>
-                  <a:srgbClr val="E2E2EA"/>
-                </a:solidFill>
-                <a:latin typeface="Calibri"/>
-              </a:defRPr>
-            </a:pPr>
-            <a:r>
-              <a:t>"Outstanding project delivery and team collaboration"</a:t>
-            </a:r>
-          </a:p>
-        </p:txBody>
-      </p:sp>
-      <p:sp>
-        <p:nvSpPr>
-          <p:cNvPr id="9" name="TextBox 8"/>
-          <p:cNvSpPr txBox="1"/>
-          <p:nvPr/>
-        </p:nvSpPr>
-        <p:spPr>
-          <a:xfrm>
-            <a:off x="1097280" y="5120640"/>
-            <a:ext cx="9966960" cy="457200"/>
-          </a:xfrm>
-          <a:prstGeom prst="rect">
-            <a:avLst/>
-          </a:prstGeom>
-          <a:noFill/>
-        </p:spPr>
-        <p:txBody>
-          <a:bodyPr wrap="square">
-            <a:spAutoFit/>
-          </a:bodyPr>
-          <a:lstStyle/>
-          <a:p>
-            <a:pPr algn="l">
-              <a:defRPr sz="1200" b="1" i="0">
-                <a:solidFill>
-                  <a:srgbClr val="FF9800"/>
-                </a:solidFill>
-                <a:latin typeface="Calibri"/>
-              </a:defRPr>
-            </a:pPr>
-            <a:r>
-              <a:t>Excellence · Teamwork</a:t>
+              <a:defRPr sz="1300" b="0" i="0">
+                <a:solidFill>
+                  <a:srgbClr val="8F95A3"/>
+                </a:solidFill>
+                <a:latin typeface="Calibri"/>
+              </a:defRPr>
+            </a:pPr>
+            <a:r>
+              <a:t>Organized by Book Club Community</a:t>
             </a:r>
           </a:p>
         </p:txBody>
@@ -5809,7 +5874,7 @@
             <a:avLst/>
           </a:prstGeom>
           <a:solidFill>
-            <a:srgbClr val="4CAF50"/>
+            <a:srgbClr val="F59E0B"/>
           </a:solidFill>
           <a:ln>
             <a:noFill/>
@@ -5862,13 +5927,13 @@
             <a:pPr algn="l">
               <a:defRPr sz="1000" b="1">
                 <a:solidFill>
-                  <a:srgbClr val="4CAF50"/>
-                </a:solidFill>
-                <a:latin typeface="Calibri"/>
-              </a:defRPr>
-            </a:pPr>
-            <a:r>
-              <a:t>🏆  MILESTONE</a:t>
+                  <a:srgbClr val="F59E0B"/>
+                </a:solidFill>
+                <a:latin typeface="Calibri"/>
+              </a:defRPr>
+            </a:pPr>
+            <a:r>
+              <a:t>🎨  OFFICE LIFE</a:t>
             </a:r>
           </a:p>
         </p:txBody>
@@ -5898,13 +5963,13 @@
             <a:pPr algn="l">
               <a:defRPr sz="3200" b="1" i="0">
                 <a:solidFill>
-                  <a:srgbClr val="4CAF50"/>
-                </a:solidFill>
-                <a:latin typeface="Calibri"/>
-              </a:defRPr>
-            </a:pPr>
-            <a:r>
-              <a:t>Product Excellence</a:t>
+                  <a:srgbClr val="F59E0B"/>
+                </a:solidFill>
+                <a:latin typeface="Calibri"/>
+              </a:defRPr>
+            </a:pPr>
+            <a:r>
+              <a:t>Creative Corner</a:t>
             </a:r>
           </a:p>
         </p:txBody>
@@ -5918,29 +5983,29 @@
         <p:spPr>
           <a:xfrm>
             <a:off x="1097280" y="2103120"/>
-            <a:ext cx="4572000" cy="822960"/>
-          </a:xfrm>
-          <a:prstGeom prst="rect">
-            <a:avLst/>
-          </a:prstGeom>
-          <a:noFill/>
-        </p:spPr>
-        <p:txBody>
-          <a:bodyPr wrap="square">
-            <a:spAutoFit/>
-          </a:bodyPr>
-          <a:lstStyle/>
-          <a:p>
-            <a:pPr algn="l">
-              <a:defRPr sz="5200" b="1" i="0">
-                <a:solidFill>
-                  <a:srgbClr val="4CAF50"/>
-                </a:solidFill>
-                <a:latin typeface="Calibri"/>
-              </a:defRPr>
-            </a:pPr>
-            <a:r>
-              <a:t>Precision Testing</a:t>
+            <a:ext cx="9966960" cy="457200"/>
+          </a:xfrm>
+          <a:prstGeom prst="rect">
+            <a:avLst/>
+          </a:prstGeom>
+          <a:noFill/>
+        </p:spPr>
+        <p:txBody>
+          <a:bodyPr wrap="square">
+            <a:spAutoFit/>
+          </a:bodyPr>
+          <a:lstStyle/>
+          <a:p>
+            <a:pPr algn="l">
+              <a:defRPr sz="1800" b="1" i="0">
+                <a:solidFill>
+                  <a:srgbClr val="FFFFFF"/>
+                </a:solidFill>
+                <a:latin typeface="Calibri"/>
+              </a:defRPr>
+            </a:pPr>
+            <a:r>
+              <a:t>BidMachine Merch in Design</a:t>
             </a:r>
           </a:p>
         </p:txBody>
@@ -5953,8 +6018,116 @@
         </p:nvSpPr>
         <p:spPr>
           <a:xfrm>
-            <a:off x="1097280" y="2926080"/>
-            <a:ext cx="4572000" cy="365760"/>
+            <a:off x="1371600" y="2743200"/>
+            <a:ext cx="9692640" cy="1828800"/>
+          </a:xfrm>
+          <a:prstGeom prst="rect">
+            <a:avLst/>
+          </a:prstGeom>
+          <a:noFill/>
+        </p:spPr>
+        <p:txBody>
+          <a:bodyPr wrap="square">
+            <a:spAutoFit/>
+          </a:bodyPr>
+          <a:lstStyle/>
+          <a:p>
+            <a:pPr algn="l">
+              <a:defRPr sz="1500" b="0" i="1">
+                <a:solidFill>
+                  <a:srgbClr val="E2E2EA"/>
+                </a:solidFill>
+                <a:latin typeface="Calibri"/>
+              </a:defRPr>
+            </a:pPr>
+            <a:r>
+              <a:t>"New sweatshirt designs are being crafted to celebrate our BidMachine team!"</a:t>
+            </a:r>
+          </a:p>
+        </p:txBody>
+      </p:sp>
+      <p:sp>
+        <p:nvSpPr>
+          <p:cNvPr id="7" name="TextBox 6"/>
+          <p:cNvSpPr txBox="1"/>
+          <p:nvPr/>
+        </p:nvSpPr>
+        <p:spPr>
+          <a:xfrm>
+            <a:off x="1097280" y="4754880"/>
+            <a:ext cx="9966960" cy="365760"/>
+          </a:xfrm>
+          <a:prstGeom prst="rect">
+            <a:avLst/>
+          </a:prstGeom>
+          <a:noFill/>
+        </p:spPr>
+        <p:txBody>
+          <a:bodyPr wrap="square">
+            <a:spAutoFit/>
+          </a:bodyPr>
+          <a:lstStyle/>
+          <a:p>
+            <a:pPr algn="l">
+              <a:defRPr sz="1400" b="0" i="0">
+                <a:solidFill>
+                  <a:srgbClr val="8F95A3"/>
+                </a:solidFill>
+                <a:latin typeface="Calibri"/>
+              </a:defRPr>
+            </a:pPr>
+            <a:r>
+              <a:t>— Design Team</a:t>
+            </a:r>
+          </a:p>
+        </p:txBody>
+      </p:sp>
+      <p:sp>
+        <p:nvSpPr>
+          <p:cNvPr id="8" name="TextBox 7"/>
+          <p:cNvSpPr txBox="1"/>
+          <p:nvPr/>
+        </p:nvSpPr>
+        <p:spPr>
+          <a:xfrm>
+            <a:off x="1097280" y="5212080"/>
+            <a:ext cx="9966960" cy="365760"/>
+          </a:xfrm>
+          <a:prstGeom prst="rect">
+            <a:avLst/>
+          </a:prstGeom>
+          <a:noFill/>
+        </p:spPr>
+        <p:txBody>
+          <a:bodyPr wrap="square">
+            <a:spAutoFit/>
+          </a:bodyPr>
+          <a:lstStyle/>
+          <a:p>
+            <a:pPr algn="l">
+              <a:defRPr sz="1400" b="1" i="0">
+                <a:solidFill>
+                  <a:srgbClr val="F59E0B"/>
+                </a:solidFill>
+                <a:latin typeface="Calibri"/>
+              </a:defRPr>
+            </a:pPr>
+            <a:r>
+              <a:t>excitement</a:t>
+            </a:r>
+          </a:p>
+        </p:txBody>
+      </p:sp>
+      <p:sp>
+        <p:nvSpPr>
+          <p:cNvPr id="9" name="TextBox 8"/>
+          <p:cNvSpPr txBox="1"/>
+          <p:nvPr/>
+        </p:nvSpPr>
+        <p:spPr>
+          <a:xfrm>
+            <a:off x="1097280" y="5760720"/>
+            <a:ext cx="9966960" cy="274320"/>
           </a:xfrm>
           <a:prstGeom prst="rect">
             <a:avLst/>
@@ -5970,85 +6143,13 @@
             <a:pPr algn="l">
               <a:defRPr sz="1100" b="0" i="0">
                 <a:solidFill>
-                  <a:srgbClr val="8F95A3"/>
-                </a:solidFill>
-                <a:latin typeface="Calibri"/>
-              </a:defRPr>
-            </a:pPr>
-            <a:r>
-              <a:t>capability launched</a:t>
-            </a:r>
-          </a:p>
-        </p:txBody>
-      </p:sp>
-      <p:sp>
-        <p:nvSpPr>
-          <p:cNvPr id="7" name="TextBox 6"/>
-          <p:cNvSpPr txBox="1"/>
-          <p:nvPr/>
-        </p:nvSpPr>
-        <p:spPr>
-          <a:xfrm>
-            <a:off x="1097280" y="3566160"/>
-            <a:ext cx="9966960" cy="457200"/>
-          </a:xfrm>
-          <a:prstGeom prst="rect">
-            <a:avLst/>
-          </a:prstGeom>
-          <a:noFill/>
-        </p:spPr>
-        <p:txBody>
-          <a:bodyPr wrap="square">
-            <a:spAutoFit/>
-          </a:bodyPr>
-          <a:lstStyle/>
-          <a:p>
-            <a:pPr algn="l">
-              <a:defRPr sz="1800" b="1" i="0">
-                <a:solidFill>
-                  <a:srgbClr val="FFFFFF"/>
-                </a:solidFill>
-                <a:latin typeface="Calibri"/>
-              </a:defRPr>
-            </a:pPr>
-            <a:r>
-              <a:t>TV Monkey Model Deployed</a:t>
-            </a:r>
-          </a:p>
-        </p:txBody>
-      </p:sp>
-      <p:sp>
-        <p:nvSpPr>
-          <p:cNvPr id="8" name="TextBox 7"/>
-          <p:cNvSpPr txBox="1"/>
-          <p:nvPr/>
-        </p:nvSpPr>
-        <p:spPr>
-          <a:xfrm>
-            <a:off x="1097280" y="4206240"/>
-            <a:ext cx="9966960" cy="1371600"/>
-          </a:xfrm>
-          <a:prstGeom prst="rect">
-            <a:avLst/>
-          </a:prstGeom>
-          <a:noFill/>
-        </p:spPr>
-        <p:txBody>
-          <a:bodyPr wrap="square">
-            <a:spAutoFit/>
-          </a:bodyPr>
-          <a:lstStyle/>
-          <a:p>
-            <a:pPr algn="l">
-              <a:defRPr sz="1500" b="0" i="0">
-                <a:solidFill>
-                  <a:srgbClr val="E2E2EA"/>
-                </a:solidFill>
-                <a:latin typeface="Calibri"/>
-              </a:defRPr>
-            </a:pPr>
-            <a:r>
-              <a:t>Forecast model successfully integrated with acquisition team, including bundle ID, network, and country data for future precision testing and improved campaign optimization.</a:t>
+                  <a:srgbClr val="5C6270"/>
+                </a:solidFill>
+                <a:latin typeface="Calibri"/>
+              </a:defRPr>
+            </a:pPr>
+            <a:r>
+              <a:t>company-updates</a:t>
             </a:r>
           </a:p>
         </p:txBody>
@@ -6094,7 +6195,7 @@
             <a:avLst/>
           </a:prstGeom>
           <a:solidFill>
-            <a:srgbClr val="9C27B0"/>
+            <a:srgbClr val="6B7280"/>
           </a:solidFill>
           <a:ln>
             <a:noFill/>
@@ -6147,13 +6248,13 @@
             <a:pPr algn="l">
               <a:defRPr sz="1000" b="1">
                 <a:solidFill>
-                  <a:srgbClr val="9C27B0"/>
-                </a:solidFill>
-                <a:latin typeface="Calibri"/>
-              </a:defRPr>
-            </a:pPr>
-            <a:r>
-              <a:t>🌟  OFFICE LIFE</a:t>
+                  <a:srgbClr val="6B7280"/>
+                </a:solidFill>
+                <a:latin typeface="Calibri"/>
+              </a:defRPr>
+            </a:pPr>
+            <a:r>
+              <a:t>🏗️  MILESTONE</a:t>
             </a:r>
           </a:p>
         </p:txBody>
@@ -6183,13 +6284,13 @@
             <a:pPr algn="l">
               <a:defRPr sz="3200" b="1" i="0">
                 <a:solidFill>
-                  <a:srgbClr val="9C27B0"/>
-                </a:solidFill>
-                <a:latin typeface="Calibri"/>
-              </a:defRPr>
-            </a:pPr>
-            <a:r>
-              <a:t>Innovation Mindset</a:t>
+                  <a:srgbClr val="6B7280"/>
+                </a:solidFill>
+                <a:latin typeface="Calibri"/>
+              </a:defRPr>
+            </a:pPr>
+            <a:r>
+              <a:t>Engineering Excellence</a:t>
             </a:r>
           </a:p>
         </p:txBody>
@@ -6203,6 +6304,78 @@
         <p:spPr>
           <a:xfrm>
             <a:off x="1097280" y="2103120"/>
+            <a:ext cx="4572000" cy="822960"/>
+          </a:xfrm>
+          <a:prstGeom prst="rect">
+            <a:avLst/>
+          </a:prstGeom>
+          <a:noFill/>
+        </p:spPr>
+        <p:txBody>
+          <a:bodyPr wrap="square">
+            <a:spAutoFit/>
+          </a:bodyPr>
+          <a:lstStyle/>
+          <a:p>
+            <a:pPr algn="l">
+              <a:defRPr sz="5200" b="1" i="0">
+                <a:solidFill>
+                  <a:srgbClr val="6B7280"/>
+                </a:solidFill>
+                <a:latin typeface="Calibri"/>
+              </a:defRPr>
+            </a:pPr>
+            <a:r>
+              <a:t>8</a:t>
+            </a:r>
+          </a:p>
+        </p:txBody>
+      </p:sp>
+      <p:sp>
+        <p:nvSpPr>
+          <p:cNvPr id="6" name="TextBox 5"/>
+          <p:cNvSpPr txBox="1"/>
+          <p:nvPr/>
+        </p:nvSpPr>
+        <p:spPr>
+          <a:xfrm>
+            <a:off x="1097280" y="2926080"/>
+            <a:ext cx="4572000" cy="365760"/>
+          </a:xfrm>
+          <a:prstGeom prst="rect">
+            <a:avLst/>
+          </a:prstGeom>
+          <a:noFill/>
+        </p:spPr>
+        <p:txBody>
+          <a:bodyPr wrap="square">
+            <a:spAutoFit/>
+          </a:bodyPr>
+          <a:lstStyle/>
+          <a:p>
+            <a:pPr algn="l">
+              <a:defRPr sz="1100" b="0" i="0">
+                <a:solidFill>
+                  <a:srgbClr val="8F95A3"/>
+                </a:solidFill>
+                <a:latin typeface="Calibri"/>
+              </a:defRPr>
+            </a:pPr>
+            <a:r>
+              <a:t>Automated Scorecards</a:t>
+            </a:r>
+          </a:p>
+        </p:txBody>
+      </p:sp>
+      <p:sp>
+        <p:nvSpPr>
+          <p:cNvPr id="7" name="TextBox 6"/>
+          <p:cNvSpPr txBox="1"/>
+          <p:nvPr/>
+        </p:nvSpPr>
+        <p:spPr>
+          <a:xfrm>
+            <a:off x="1097280" y="3566160"/>
             <a:ext cx="9966960" cy="457200"/>
           </a:xfrm>
           <a:prstGeom prst="rect">
@@ -6225,35 +6398,35 @@
               </a:defRPr>
             </a:pPr>
             <a:r>
-              <a:t>Build, Ship, Improve Culture</a:t>
-            </a:r>
-          </a:p>
-        </p:txBody>
-      </p:sp>
-      <p:sp>
-        <p:nvSpPr>
-          <p:cNvPr id="6" name="TextBox 5"/>
-          <p:cNvSpPr txBox="1"/>
-          <p:nvPr/>
-        </p:nvSpPr>
-        <p:spPr>
-          <a:xfrm>
-            <a:off x="1371600" y="2743200"/>
-            <a:ext cx="9692640" cy="1828800"/>
-          </a:xfrm>
-          <a:prstGeom prst="rect">
-            <a:avLst/>
-          </a:prstGeom>
-          <a:noFill/>
-        </p:spPr>
-        <p:txBody>
-          <a:bodyPr wrap="square">
-            <a:spAutoFit/>
-          </a:bodyPr>
-          <a:lstStyle/>
-          <a:p>
-            <a:pPr algn="l">
-              <a:defRPr sz="1500" b="0" i="1">
+              <a:t>Build. Ship. Improve. Mentality</a:t>
+            </a:r>
+          </a:p>
+        </p:txBody>
+      </p:sp>
+      <p:sp>
+        <p:nvSpPr>
+          <p:cNvPr id="8" name="TextBox 7"/>
+          <p:cNvSpPr txBox="1"/>
+          <p:nvPr/>
+        </p:nvSpPr>
+        <p:spPr>
+          <a:xfrm>
+            <a:off x="1097280" y="4206240"/>
+            <a:ext cx="9966960" cy="1371600"/>
+          </a:xfrm>
+          <a:prstGeom prst="rect">
+            <a:avLst/>
+          </a:prstGeom>
+          <a:noFill/>
+        </p:spPr>
+        <p:txBody>
+          <a:bodyPr wrap="square">
+            <a:spAutoFit/>
+          </a:bodyPr>
+          <a:lstStyle/>
+          <a:p>
+            <a:pPr algn="l">
+              <a:defRPr sz="1500" b="0" i="0">
                 <a:solidFill>
                   <a:srgbClr val="E2E2EA"/>
                 </a:solidFill>
@@ -6261,115 +6434,7 @@
               </a:defRPr>
             </a:pPr>
             <a:r>
-              <a:t>"It's especially exciting to see how quickly non-engineering teams have created so many useful tools. This is a strong sign that we're learning fast and moving in the right direction."</a:t>
-            </a:r>
-          </a:p>
-        </p:txBody>
-      </p:sp>
-      <p:sp>
-        <p:nvSpPr>
-          <p:cNvPr id="7" name="TextBox 6"/>
-          <p:cNvSpPr txBox="1"/>
-          <p:nvPr/>
-        </p:nvSpPr>
-        <p:spPr>
-          <a:xfrm>
-            <a:off x="1097280" y="4754880"/>
-            <a:ext cx="9966960" cy="365760"/>
-          </a:xfrm>
-          <a:prstGeom prst="rect">
-            <a:avLst/>
-          </a:prstGeom>
-          <a:noFill/>
-        </p:spPr>
-        <p:txBody>
-          <a:bodyPr wrap="square">
-            <a:spAutoFit/>
-          </a:bodyPr>
-          <a:lstStyle/>
-          <a:p>
-            <a:pPr algn="l">
-              <a:defRPr sz="1400" b="0" i="0">
-                <a:solidFill>
-                  <a:srgbClr val="8F95A3"/>
-                </a:solidFill>
-                <a:latin typeface="Calibri"/>
-              </a:defRPr>
-            </a:pPr>
-            <a:r>
-              <a:t>— Leadership Team</a:t>
-            </a:r>
-          </a:p>
-        </p:txBody>
-      </p:sp>
-      <p:sp>
-        <p:nvSpPr>
-          <p:cNvPr id="8" name="TextBox 7"/>
-          <p:cNvSpPr txBox="1"/>
-          <p:nvPr/>
-        </p:nvSpPr>
-        <p:spPr>
-          <a:xfrm>
-            <a:off x="1097280" y="5212080"/>
-            <a:ext cx="9966960" cy="365760"/>
-          </a:xfrm>
-          <a:prstGeom prst="rect">
-            <a:avLst/>
-          </a:prstGeom>
-          <a:noFill/>
-        </p:spPr>
-        <p:txBody>
-          <a:bodyPr wrap="square">
-            <a:spAutoFit/>
-          </a:bodyPr>
-          <a:lstStyle/>
-          <a:p>
-            <a:pPr algn="l">
-              <a:defRPr sz="1400" b="1" i="0">
-                <a:solidFill>
-                  <a:srgbClr val="9C27B0"/>
-                </a:solidFill>
-                <a:latin typeface="Calibri"/>
-              </a:defRPr>
-            </a:pPr>
-            <a:r>
-              <a:t>🐱‍💻 × 11, 👏 × 15, 🔥 × 16</a:t>
-            </a:r>
-          </a:p>
-        </p:txBody>
-      </p:sp>
-      <p:sp>
-        <p:nvSpPr>
-          <p:cNvPr id="9" name="TextBox 8"/>
-          <p:cNvSpPr txBox="1"/>
-          <p:nvPr/>
-        </p:nvSpPr>
-        <p:spPr>
-          <a:xfrm>
-            <a:off x="1097280" y="5760720"/>
-            <a:ext cx="9966960" cy="274320"/>
-          </a:xfrm>
-          <a:prstGeom prst="rect">
-            <a:avLst/>
-          </a:prstGeom>
-          <a:noFill/>
-        </p:spPr>
-        <p:txBody>
-          <a:bodyPr wrap="square">
-            <a:spAutoFit/>
-          </a:bodyPr>
-          <a:lstStyle/>
-          <a:p>
-            <a:pPr algn="l">
-              <a:defRPr sz="1100" b="0" i="0">
-                <a:solidFill>
-                  <a:srgbClr val="5C6270"/>
-                </a:solidFill>
-                <a:latin typeface="Calibri"/>
-              </a:defRPr>
-            </a:pPr>
-            <a:r>
-              <a:t>#general</a:t>
+              <a:t>CEO mandate drives cultural shift from requirements-heavy processes to pull request mentality. Engineering scorecards automated for key teams, with focus on lagging and leading indicators for continuous improvement.</a:t>
             </a:r>
           </a:p>
         </p:txBody>
@@ -6415,7 +6480,7 @@
             <a:avLst/>
           </a:prstGeom>
           <a:solidFill>
-            <a:srgbClr val="E91E63"/>
+            <a:srgbClr val="FFD700"/>
           </a:solidFill>
           <a:ln>
             <a:noFill/>
@@ -6468,7 +6533,7 @@
             <a:pPr algn="l">
               <a:defRPr sz="1000" b="1">
                 <a:solidFill>
-                  <a:srgbClr val="E91E63"/>
+                  <a:srgbClr val="FFD700"/>
                 </a:solidFill>
                 <a:latin typeface="Calibri"/>
               </a:defRPr>
@@ -6504,13 +6569,13 @@
             <a:pPr algn="l">
               <a:defRPr sz="3200" b="1" i="0">
                 <a:solidFill>
-                  <a:srgbClr val="E91E63"/>
-                </a:solidFill>
-                <a:latin typeface="Calibri"/>
-              </a:defRPr>
-            </a:pPr>
-            <a:r>
-              <a:t>Birthday Celebrations</a:t>
+                  <a:srgbClr val="FFD700"/>
+                </a:solidFill>
+                <a:latin typeface="Calibri"/>
+              </a:defRPr>
+            </a:pPr>
+            <a:r>
+              <a:t>Happy Birthday!</a:t>
             </a:r>
           </a:p>
         </p:txBody>
@@ -6546,7 +6611,7 @@
               </a:defRPr>
             </a:pPr>
             <a:r>
-              <a:t>Anna Kolyada, Mikhail Ladutko &amp; Armaan Pandher</a:t>
+              <a:t>Anna Kolyada</a:t>
             </a:r>
           </a:p>
         </p:txBody>
@@ -6618,7 +6683,7 @@
               </a:defRPr>
             </a:pPr>
             <a:r>
-              <a:t>The whole team is sending warm wishes and celebrating these amazing colleagues today!</a:t>
+              <a:t>Thanks all!! 💖</a:t>
             </a:r>
           </a:p>
         </p:txBody>
@@ -6648,2260 +6713,13 @@
             <a:pPr algn="l">
               <a:defRPr sz="1400" b="0" i="1">
                 <a:solidFill>
-                  <a:srgbClr val="E91E63"/>
-                </a:solidFill>
-                <a:latin typeface="Calibri"/>
-              </a:defRPr>
-            </a:pPr>
-            <a:r>
-              <a:t>Anna leads our daily yoga sessions, Mikhail brings technical excellence, and Armaan adds fresh energy to the team</a:t>
-            </a:r>
-          </a:p>
-        </p:txBody>
-      </p:sp>
-    </p:spTree>
-  </p:cSld>
-  <p:clrMapOvr>
-    <a:masterClrMapping/>
-  </p:clrMapOvr>
-</p:sld>
-</file>
-
-<file path=ppt/slides/slide20.xml><?xml version="1.0" encoding="utf-8"?>
-<p:sld xmlns:a="http://schemas.openxmlformats.org/drawingml/2006/main" xmlns:p="http://schemas.openxmlformats.org/presentationml/2006/main" xmlns:r="http://schemas.openxmlformats.org/officeDocument/2006/relationships">
-  <p:cSld>
-    <p:bg>
-      <p:bgPr>
-        <a:solidFill>
-          <a:srgbClr val="08080C"/>
-        </a:solidFill>
-        <a:effectLst/>
-      </p:bgPr>
-    </p:bg>
-    <p:spTree>
-      <p:nvGrpSpPr>
-        <p:cNvPr id="1" name=""/>
-        <p:cNvGrpSpPr/>
-        <p:nvPr/>
-      </p:nvGrpSpPr>
-      <p:grpSpPr/>
-      <p:sp>
-        <p:nvSpPr>
-          <p:cNvPr id="2" name="Rectangle 1"/>
-          <p:cNvSpPr/>
-          <p:nvPr/>
-        </p:nvSpPr>
-        <p:spPr>
-          <a:xfrm>
-            <a:off x="0" y="365760"/>
-            <a:ext cx="12191695" cy="54864"/>
-          </a:xfrm>
-          <a:prstGeom prst="rect">
-            <a:avLst/>
-          </a:prstGeom>
-          <a:solidFill>
-            <a:srgbClr val="2196F3"/>
-          </a:solidFill>
-          <a:ln>
-            <a:noFill/>
-          </a:ln>
-        </p:spPr>
-        <p:style>
-          <a:lnRef idx="1">
-            <a:schemeClr val="accent1"/>
-          </a:lnRef>
-          <a:fillRef idx="3">
-            <a:schemeClr val="accent1"/>
-          </a:fillRef>
-          <a:effectRef idx="2">
-            <a:schemeClr val="accent1"/>
-          </a:effectRef>
-          <a:fontRef idx="minor">
-            <a:schemeClr val="lt1"/>
-          </a:fontRef>
-        </p:style>
-        <p:txBody>
-          <a:bodyPr rtlCol="0" anchor="ctr"/>
-          <a:lstStyle/>
-          <a:p>
-            <a:pPr algn="ctr"/>
-          </a:p>
-        </p:txBody>
-      </p:sp>
-      <p:sp>
-        <p:nvSpPr>
-          <p:cNvPr id="3" name="TextBox 2"/>
-          <p:cNvSpPr txBox="1"/>
-          <p:nvPr/>
-        </p:nvSpPr>
-        <p:spPr>
-          <a:xfrm>
-            <a:off x="1097280" y="731520"/>
-            <a:ext cx="3657600" cy="365760"/>
-          </a:xfrm>
-          <a:prstGeom prst="rect">
-            <a:avLst/>
-          </a:prstGeom>
-          <a:noFill/>
-        </p:spPr>
-        <p:txBody>
-          <a:bodyPr wrap="none">
-            <a:spAutoFit/>
-          </a:bodyPr>
-          <a:lstStyle/>
-          <a:p>
-            <a:pPr algn="l">
-              <a:defRPr sz="1000" b="1">
-                <a:solidFill>
-                  <a:srgbClr val="2196F3"/>
-                </a:solidFill>
-                <a:latin typeface="Calibri"/>
-              </a:defRPr>
-            </a:pPr>
-            <a:r>
-              <a:t>🎯  WIN</a:t>
-            </a:r>
-          </a:p>
-        </p:txBody>
-      </p:sp>
-      <p:sp>
-        <p:nvSpPr>
-          <p:cNvPr id="4" name="TextBox 3"/>
-          <p:cNvSpPr txBox="1"/>
-          <p:nvPr/>
-        </p:nvSpPr>
-        <p:spPr>
-          <a:xfrm>
-            <a:off x="1097280" y="1188720"/>
-            <a:ext cx="9966960" cy="731520"/>
-          </a:xfrm>
-          <a:prstGeom prst="rect">
-            <a:avLst/>
-          </a:prstGeom>
-          <a:noFill/>
-        </p:spPr>
-        <p:txBody>
-          <a:bodyPr wrap="square">
-            <a:spAutoFit/>
-          </a:bodyPr>
-          <a:lstStyle/>
-          <a:p>
-            <a:pPr algn="l">
-              <a:defRPr sz="3200" b="1" i="0">
-                <a:solidFill>
-                  <a:srgbClr val="2196F3"/>
-                </a:solidFill>
-                <a:latin typeface="Calibri"/>
-              </a:defRPr>
-            </a:pPr>
-            <a:r>
-              <a:t>UA Excellence</a:t>
-            </a:r>
-          </a:p>
-        </p:txBody>
-      </p:sp>
-      <p:sp>
-        <p:nvSpPr>
-          <p:cNvPr id="5" name="TextBox 4"/>
-          <p:cNvSpPr txBox="1"/>
-          <p:nvPr/>
-        </p:nvSpPr>
-        <p:spPr>
-          <a:xfrm>
-            <a:off x="1097280" y="2103120"/>
-            <a:ext cx="4572000" cy="822960"/>
-          </a:xfrm>
-          <a:prstGeom prst="rect">
-            <a:avLst/>
-          </a:prstGeom>
-          <a:noFill/>
-        </p:spPr>
-        <p:txBody>
-          <a:bodyPr wrap="square">
-            <a:spAutoFit/>
-          </a:bodyPr>
-          <a:lstStyle/>
-          <a:p>
-            <a:pPr algn="l">
-              <a:defRPr sz="4800" b="1" i="0">
-                <a:solidFill>
-                  <a:srgbClr val="2196F3"/>
-                </a:solidFill>
-                <a:latin typeface="Calibri"/>
-              </a:defRPr>
-            </a:pPr>
-            <a:r>
-              <a:t>Health Rate</a:t>
-            </a:r>
-          </a:p>
-        </p:txBody>
-      </p:sp>
-      <p:sp>
-        <p:nvSpPr>
-          <p:cNvPr id="6" name="TextBox 5"/>
-          <p:cNvSpPr txBox="1"/>
-          <p:nvPr/>
-        </p:nvSpPr>
-        <p:spPr>
-          <a:xfrm>
-            <a:off x="1097280" y="2834640"/>
-            <a:ext cx="4572000" cy="365760"/>
-          </a:xfrm>
-          <a:prstGeom prst="rect">
-            <a:avLst/>
-          </a:prstGeom>
-          <a:noFill/>
-        </p:spPr>
-        <p:txBody>
-          <a:bodyPr wrap="square">
-            <a:spAutoFit/>
-          </a:bodyPr>
-          <a:lstStyle/>
-          <a:p>
-            <a:pPr algn="l">
-              <a:defRPr sz="1200" b="0" i="0">
-                <a:solidFill>
-                  <a:srgbClr val="8F95A3"/>
-                </a:solidFill>
-                <a:latin typeface="Calibri"/>
-              </a:defRPr>
-            </a:pPr>
-            <a:r>
-              <a:t>metrics introduced</a:t>
-            </a:r>
-          </a:p>
-        </p:txBody>
-      </p:sp>
-      <p:sp>
-        <p:nvSpPr>
-          <p:cNvPr id="7" name="TextBox 6"/>
-          <p:cNvSpPr txBox="1"/>
-          <p:nvPr/>
-        </p:nvSpPr>
-        <p:spPr>
-          <a:xfrm>
-            <a:off x="1097280" y="3291840"/>
-            <a:ext cx="9966960" cy="365760"/>
-          </a:xfrm>
-          <a:prstGeom prst="rect">
-            <a:avLst/>
-          </a:prstGeom>
-          <a:noFill/>
-        </p:spPr>
-        <p:txBody>
-          <a:bodyPr wrap="square">
-            <a:spAutoFit/>
-          </a:bodyPr>
-          <a:lstStyle/>
-          <a:p>
-            <a:pPr algn="l">
-              <a:defRPr sz="1400" b="0" i="0">
-                <a:solidFill>
-                  <a:srgbClr val="E2E2EA"/>
-                </a:solidFill>
-                <a:latin typeface="Calibri"/>
-              </a:defRPr>
-            </a:pPr>
-            <a:r>
-              <a:t>by User Acquisition Team</a:t>
-            </a:r>
-          </a:p>
-        </p:txBody>
-      </p:sp>
-      <p:sp>
-        <p:nvSpPr>
-          <p:cNvPr id="8" name="TextBox 7"/>
-          <p:cNvSpPr txBox="1"/>
-          <p:nvPr/>
-        </p:nvSpPr>
-        <p:spPr>
-          <a:xfrm>
-            <a:off x="1097280" y="3840480"/>
-            <a:ext cx="9966960" cy="457200"/>
-          </a:xfrm>
-          <a:prstGeom prst="rect">
-            <a:avLst/>
-          </a:prstGeom>
-          <a:noFill/>
-        </p:spPr>
-        <p:txBody>
-          <a:bodyPr wrap="square">
-            <a:spAutoFit/>
-          </a:bodyPr>
-          <a:lstStyle/>
-          <a:p>
-            <a:pPr algn="l">
-              <a:defRPr sz="1800" b="1" i="0">
-                <a:solidFill>
-                  <a:srgbClr val="FFFFFF"/>
-                </a:solidFill>
-                <a:latin typeface="Calibri"/>
-              </a:defRPr>
-            </a:pPr>
-            <a:r>
-              <a:t>UA Playbook Optimization</a:t>
-            </a:r>
-          </a:p>
-        </p:txBody>
-      </p:sp>
-      <p:sp>
-        <p:nvSpPr>
-          <p:cNvPr id="9" name="TextBox 8"/>
-          <p:cNvSpPr txBox="1"/>
-          <p:nvPr/>
-        </p:nvSpPr>
-        <p:spPr>
-          <a:xfrm>
-            <a:off x="1097280" y="4389120"/>
-            <a:ext cx="9966960" cy="914400"/>
-          </a:xfrm>
-          <a:prstGeom prst="rect">
-            <a:avLst/>
-          </a:prstGeom>
-          <a:noFill/>
-        </p:spPr>
-        <p:txBody>
-          <a:bodyPr wrap="square">
-            <a:spAutoFit/>
-          </a:bodyPr>
-          <a:lstStyle/>
-          <a:p>
-            <a:pPr algn="l">
-              <a:defRPr sz="1400" b="0" i="0">
-                <a:solidFill>
-                  <a:srgbClr val="E2E2EA"/>
-                </a:solidFill>
-                <a:latin typeface="Calibri"/>
-              </a:defRPr>
-            </a:pPr>
-            <a:r>
-              <a:t>New health rate metric for UA activities developed with revisions aimed at optimizing user acquisition and improving accuracy across campaigns.</a:t>
-            </a:r>
-          </a:p>
-        </p:txBody>
-      </p:sp>
-      <p:sp>
-        <p:nvSpPr>
-          <p:cNvPr id="10" name="TextBox 9"/>
-          <p:cNvSpPr txBox="1"/>
-          <p:nvPr/>
-        </p:nvSpPr>
-        <p:spPr>
-          <a:xfrm>
-            <a:off x="1097280" y="5486400"/>
-            <a:ext cx="9966960" cy="457200"/>
-          </a:xfrm>
-          <a:prstGeom prst="rect">
-            <a:avLst/>
-          </a:prstGeom>
-          <a:noFill/>
-        </p:spPr>
-        <p:txBody>
-          <a:bodyPr wrap="square">
-            <a:spAutoFit/>
-          </a:bodyPr>
-          <a:lstStyle/>
-          <a:p>
-            <a:pPr algn="l">
-              <a:defRPr sz="1300" b="0" i="1">
-                <a:solidFill>
-                  <a:srgbClr val="8F95A3"/>
-                </a:solidFill>
-                <a:latin typeface="Calibri"/>
-              </a:defRPr>
-            </a:pPr>
-            <a:r>
-              <a:t>💬 "Data-driven approaches to user acquisition are becoming more sophisticated"</a:t>
-            </a:r>
-          </a:p>
-        </p:txBody>
-      </p:sp>
-    </p:spTree>
-  </p:cSld>
-  <p:clrMapOvr>
-    <a:masterClrMapping/>
-  </p:clrMapOvr>
-</p:sld>
-</file>
-
-<file path=ppt/slides/slide21.xml><?xml version="1.0" encoding="utf-8"?>
-<p:sld xmlns:a="http://schemas.openxmlformats.org/drawingml/2006/main" xmlns:p="http://schemas.openxmlformats.org/presentationml/2006/main" xmlns:r="http://schemas.openxmlformats.org/officeDocument/2006/relationships">
-  <p:cSld>
-    <p:bg>
-      <p:bgPr>
-        <a:solidFill>
-          <a:srgbClr val="08080C"/>
-        </a:solidFill>
-        <a:effectLst/>
-      </p:bgPr>
-    </p:bg>
-    <p:spTree>
-      <p:nvGrpSpPr>
-        <p:cNvPr id="1" name=""/>
-        <p:cNvGrpSpPr/>
-        <p:nvPr/>
-      </p:nvGrpSpPr>
-      <p:grpSpPr/>
-      <p:sp>
-        <p:nvSpPr>
-          <p:cNvPr id="2" name="Rectangle 1"/>
-          <p:cNvSpPr/>
-          <p:nvPr/>
-        </p:nvSpPr>
-        <p:spPr>
-          <a:xfrm>
-            <a:off x="0" y="365760"/>
-            <a:ext cx="12191695" cy="54864"/>
-          </a:xfrm>
-          <a:prstGeom prst="rect">
-            <a:avLst/>
-          </a:prstGeom>
-          <a:solidFill>
-            <a:srgbClr val="E91E63"/>
-          </a:solidFill>
-          <a:ln>
-            <a:noFill/>
-          </a:ln>
-        </p:spPr>
-        <p:style>
-          <a:lnRef idx="1">
-            <a:schemeClr val="accent1"/>
-          </a:lnRef>
-          <a:fillRef idx="3">
-            <a:schemeClr val="accent1"/>
-          </a:fillRef>
-          <a:effectRef idx="2">
-            <a:schemeClr val="accent1"/>
-          </a:effectRef>
-          <a:fontRef idx="minor">
-            <a:schemeClr val="lt1"/>
-          </a:fontRef>
-        </p:style>
-        <p:txBody>
-          <a:bodyPr rtlCol="0" anchor="ctr"/>
-          <a:lstStyle/>
-          <a:p>
-            <a:pPr algn="ctr"/>
-          </a:p>
-        </p:txBody>
-      </p:sp>
-      <p:sp>
-        <p:nvSpPr>
-          <p:cNvPr id="3" name="TextBox 2"/>
-          <p:cNvSpPr txBox="1"/>
-          <p:nvPr/>
-        </p:nvSpPr>
-        <p:spPr>
-          <a:xfrm>
-            <a:off x="1097280" y="731520"/>
-            <a:ext cx="3657600" cy="365760"/>
-          </a:xfrm>
-          <a:prstGeom prst="rect">
-            <a:avLst/>
-          </a:prstGeom>
-          <a:noFill/>
-        </p:spPr>
-        <p:txBody>
-          <a:bodyPr wrap="none">
-            <a:spAutoFit/>
-          </a:bodyPr>
-          <a:lstStyle/>
-          <a:p>
-            <a:pPr algn="l">
-              <a:defRPr sz="1000" b="1">
-                <a:solidFill>
-                  <a:srgbClr val="E91E63"/>
-                </a:solidFill>
-                <a:latin typeface="Calibri"/>
-              </a:defRPr>
-            </a:pPr>
-            <a:r>
-              <a:t>🎊  WEEKLY RITUAL</a:t>
-            </a:r>
-          </a:p>
-        </p:txBody>
-      </p:sp>
-      <p:sp>
-        <p:nvSpPr>
-          <p:cNvPr id="4" name="TextBox 3"/>
-          <p:cNvSpPr txBox="1"/>
-          <p:nvPr/>
-        </p:nvSpPr>
-        <p:spPr>
-          <a:xfrm>
-            <a:off x="1097280" y="1188720"/>
-            <a:ext cx="9966960" cy="731520"/>
-          </a:xfrm>
-          <a:prstGeom prst="rect">
-            <a:avLst/>
-          </a:prstGeom>
-          <a:noFill/>
-        </p:spPr>
-        <p:txBody>
-          <a:bodyPr wrap="square">
-            <a:spAutoFit/>
-          </a:bodyPr>
-          <a:lstStyle/>
-          <a:p>
-            <a:pPr algn="l">
-              <a:defRPr sz="3200" b="1" i="0">
-                <a:solidFill>
-                  <a:srgbClr val="E91E63"/>
-                </a:solidFill>
-                <a:latin typeface="Calibri"/>
-              </a:defRPr>
-            </a:pPr>
-            <a:r>
-              <a:t>Team Spirit</a:t>
-            </a:r>
-          </a:p>
-        </p:txBody>
-      </p:sp>
-      <p:sp>
-        <p:nvSpPr>
-          <p:cNvPr id="5" name="TextBox 4"/>
-          <p:cNvSpPr txBox="1"/>
-          <p:nvPr/>
-        </p:nvSpPr>
-        <p:spPr>
-          <a:xfrm>
-            <a:off x="1097280" y="2103120"/>
-            <a:ext cx="9966960" cy="457200"/>
-          </a:xfrm>
-          <a:prstGeom prst="rect">
-            <a:avLst/>
-          </a:prstGeom>
-          <a:noFill/>
-        </p:spPr>
-        <p:txBody>
-          <a:bodyPr wrap="square">
-            <a:spAutoFit/>
-          </a:bodyPr>
-          <a:lstStyle/>
-          <a:p>
-            <a:pPr algn="l">
-              <a:defRPr sz="1800" b="1" i="0">
-                <a:solidFill>
-                  <a:srgbClr val="FFFFFF"/>
-                </a:solidFill>
-                <a:latin typeface="Calibri"/>
-              </a:defRPr>
-            </a:pPr>
-            <a:r>
-              <a:t>March Birthday Celebration</a:t>
-            </a:r>
-          </a:p>
-        </p:txBody>
-      </p:sp>
-      <p:sp>
-        <p:nvSpPr>
-          <p:cNvPr id="6" name="TextBox 5"/>
-          <p:cNvSpPr txBox="1"/>
-          <p:nvPr/>
-        </p:nvSpPr>
-        <p:spPr>
-          <a:xfrm>
-            <a:off x="1371600" y="2926080"/>
-            <a:ext cx="9418320" cy="548640"/>
-          </a:xfrm>
-          <a:prstGeom prst="rect">
-            <a:avLst/>
-          </a:prstGeom>
-          <a:noFill/>
-        </p:spPr>
-        <p:txBody>
-          <a:bodyPr wrap="square">
-            <a:spAutoFit/>
-          </a:bodyPr>
-          <a:lstStyle/>
-          <a:p>
-            <a:pPr algn="l">
-              <a:defRPr sz="1400" b="0" i="0">
-                <a:solidFill>
-                  <a:srgbClr val="E2E2EA"/>
-                </a:solidFill>
-                <a:latin typeface="Calibri"/>
-              </a:defRPr>
-            </a:pPr>
-            <a:r>
-              <a:t>What's your favorite way to celebrate team milestones?</a:t>
-            </a:r>
-          </a:p>
-        </p:txBody>
-      </p:sp>
-      <p:sp>
-        <p:nvSpPr>
-          <p:cNvPr id="7" name="TextBox 6"/>
-          <p:cNvSpPr txBox="1"/>
-          <p:nvPr/>
-        </p:nvSpPr>
-        <p:spPr>
-          <a:xfrm>
-            <a:off x="1371600" y="3657600"/>
-            <a:ext cx="9418320" cy="548640"/>
-          </a:xfrm>
-          <a:prstGeom prst="rect">
-            <a:avLst/>
-          </a:prstGeom>
-          <a:noFill/>
-        </p:spPr>
-        <p:txBody>
-          <a:bodyPr wrap="square">
-            <a:spAutoFit/>
-          </a:bodyPr>
-          <a:lstStyle/>
-          <a:p>
-            <a:pPr algn="l">
-              <a:defRPr sz="1400" b="0" i="0">
-                <a:solidFill>
-                  <a:srgbClr val="E2E2EA"/>
-                </a:solidFill>
-                <a:latin typeface="Calibri"/>
-              </a:defRPr>
-            </a:pPr>
-            <a:r>
-              <a:t>How do you make remote colleagues feel included in office celebrations?</a:t>
-            </a:r>
-          </a:p>
-        </p:txBody>
-      </p:sp>
-      <p:sp>
-        <p:nvSpPr>
-          <p:cNvPr id="8" name="TextBox 7"/>
-          <p:cNvSpPr txBox="1"/>
-          <p:nvPr/>
-        </p:nvSpPr>
-        <p:spPr>
-          <a:xfrm>
-            <a:off x="1097280" y="4754880"/>
-            <a:ext cx="9966960" cy="731520"/>
-          </a:xfrm>
-          <a:prstGeom prst="rect">
-            <a:avLst/>
-          </a:prstGeom>
-          <a:noFill/>
-        </p:spPr>
-        <p:txBody>
-          <a:bodyPr wrap="square">
-            <a:spAutoFit/>
-          </a:bodyPr>
-          <a:lstStyle/>
-          <a:p>
-            <a:pPr algn="l">
-              <a:defRPr sz="1500" b="0" i="1">
-                <a:solidFill>
-                  <a:srgbClr val="E2E2EA"/>
-                </a:solidFill>
-                <a:latin typeface="Calibri"/>
-              </a:defRPr>
-            </a:pPr>
-            <a:r>
-              <a:t>We work TOGETHER to serve others</a:t>
-            </a:r>
-          </a:p>
-        </p:txBody>
-      </p:sp>
-      <p:sp>
-        <p:nvSpPr>
-          <p:cNvPr id="9" name="TextBox 8"/>
-          <p:cNvSpPr txBox="1"/>
-          <p:nvPr/>
-        </p:nvSpPr>
-        <p:spPr>
-          <a:xfrm>
-            <a:off x="1097280" y="5760720"/>
-            <a:ext cx="9966960" cy="274320"/>
-          </a:xfrm>
-          <a:prstGeom prst="rect">
-            <a:avLst/>
-          </a:prstGeom>
-          <a:noFill/>
-        </p:spPr>
-        <p:txBody>
-          <a:bodyPr wrap="square">
-            <a:spAutoFit/>
-          </a:bodyPr>
-          <a:lstStyle/>
-          <a:p>
-            <a:pPr algn="l">
-              <a:defRPr sz="1100" b="0" i="0">
-                <a:solidFill>
-                  <a:srgbClr val="5C6270"/>
-                </a:solidFill>
-                <a:latin typeface="Calibri"/>
-              </a:defRPr>
-            </a:pPr>
-            <a:r>
-              <a:t>#birthdays</a:t>
-            </a:r>
-          </a:p>
-        </p:txBody>
-      </p:sp>
-    </p:spTree>
-  </p:cSld>
-  <p:clrMapOvr>
-    <a:masterClrMapping/>
-  </p:clrMapOvr>
-</p:sld>
-</file>
-
-<file path=ppt/slides/slide22.xml><?xml version="1.0" encoding="utf-8"?>
-<p:sld xmlns:a="http://schemas.openxmlformats.org/drawingml/2006/main" xmlns:p="http://schemas.openxmlformats.org/presentationml/2006/main" xmlns:r="http://schemas.openxmlformats.org/officeDocument/2006/relationships">
-  <p:cSld>
-    <p:bg>
-      <p:bgPr>
-        <a:solidFill>
-          <a:srgbClr val="08080C"/>
-        </a:solidFill>
-        <a:effectLst/>
-      </p:bgPr>
-    </p:bg>
-    <p:spTree>
-      <p:nvGrpSpPr>
-        <p:cNvPr id="1" name=""/>
-        <p:cNvGrpSpPr/>
-        <p:nvPr/>
-      </p:nvGrpSpPr>
-      <p:grpSpPr/>
-      <p:sp>
-        <p:nvSpPr>
-          <p:cNvPr id="2" name="Rectangle 1"/>
-          <p:cNvSpPr/>
-          <p:nvPr/>
-        </p:nvSpPr>
-        <p:spPr>
-          <a:xfrm>
-            <a:off x="0" y="365760"/>
-            <a:ext cx="12191695" cy="54864"/>
-          </a:xfrm>
-          <a:prstGeom prst="rect">
-            <a:avLst/>
-          </a:prstGeom>
-          <a:solidFill>
-            <a:srgbClr val="673AB7"/>
-          </a:solidFill>
-          <a:ln>
-            <a:noFill/>
-          </a:ln>
-        </p:spPr>
-        <p:style>
-          <a:lnRef idx="1">
-            <a:schemeClr val="accent1"/>
-          </a:lnRef>
-          <a:fillRef idx="3">
-            <a:schemeClr val="accent1"/>
-          </a:fillRef>
-          <a:effectRef idx="2">
-            <a:schemeClr val="accent1"/>
-          </a:effectRef>
-          <a:fontRef idx="minor">
-            <a:schemeClr val="lt1"/>
-          </a:fontRef>
-        </p:style>
-        <p:txBody>
-          <a:bodyPr rtlCol="0" anchor="ctr"/>
-          <a:lstStyle/>
-          <a:p>
-            <a:pPr algn="ctr"/>
-          </a:p>
-        </p:txBody>
-      </p:sp>
-      <p:sp>
-        <p:nvSpPr>
-          <p:cNvPr id="3" name="TextBox 2"/>
-          <p:cNvSpPr txBox="1"/>
-          <p:nvPr/>
-        </p:nvSpPr>
-        <p:spPr>
-          <a:xfrm>
-            <a:off x="1097280" y="731520"/>
-            <a:ext cx="3657600" cy="365760"/>
-          </a:xfrm>
-          <a:prstGeom prst="rect">
-            <a:avLst/>
-          </a:prstGeom>
-          <a:noFill/>
-        </p:spPr>
-        <p:txBody>
-          <a:bodyPr wrap="none">
-            <a:spAutoFit/>
-          </a:bodyPr>
-          <a:lstStyle/>
-          <a:p>
-            <a:pPr algn="l">
-              <a:defRPr sz="1000" b="1">
-                <a:solidFill>
-                  <a:srgbClr val="673AB7"/>
-                </a:solidFill>
-                <a:latin typeface="Calibri"/>
-              </a:defRPr>
-            </a:pPr>
-            <a:r>
-              <a:t>🔮  MILESTONE</a:t>
-            </a:r>
-          </a:p>
-        </p:txBody>
-      </p:sp>
-      <p:sp>
-        <p:nvSpPr>
-          <p:cNvPr id="4" name="TextBox 3"/>
-          <p:cNvSpPr txBox="1"/>
-          <p:nvPr/>
-        </p:nvSpPr>
-        <p:spPr>
-          <a:xfrm>
-            <a:off x="1097280" y="1188720"/>
-            <a:ext cx="9966960" cy="731520"/>
-          </a:xfrm>
-          <a:prstGeom prst="rect">
-            <a:avLst/>
-          </a:prstGeom>
-          <a:noFill/>
-        </p:spPr>
-        <p:txBody>
-          <a:bodyPr wrap="square">
-            <a:spAutoFit/>
-          </a:bodyPr>
-          <a:lstStyle/>
-          <a:p>
-            <a:pPr algn="l">
-              <a:defRPr sz="3200" b="1" i="0">
-                <a:solidFill>
-                  <a:srgbClr val="673AB7"/>
-                </a:solidFill>
-                <a:latin typeface="Calibri"/>
-              </a:defRPr>
-            </a:pPr>
-            <a:r>
-              <a:t>AI Integration</a:t>
-            </a:r>
-          </a:p>
-        </p:txBody>
-      </p:sp>
-      <p:sp>
-        <p:nvSpPr>
-          <p:cNvPr id="5" name="TextBox 4"/>
-          <p:cNvSpPr txBox="1"/>
-          <p:nvPr/>
-        </p:nvSpPr>
-        <p:spPr>
-          <a:xfrm>
-            <a:off x="1097280" y="2103120"/>
-            <a:ext cx="4572000" cy="822960"/>
-          </a:xfrm>
-          <a:prstGeom prst="rect">
-            <a:avLst/>
-          </a:prstGeom>
-          <a:noFill/>
-        </p:spPr>
-        <p:txBody>
-          <a:bodyPr wrap="square">
-            <a:spAutoFit/>
-          </a:bodyPr>
-          <a:lstStyle/>
-          <a:p>
-            <a:pPr algn="l">
-              <a:defRPr sz="5200" b="1" i="0">
-                <a:solidFill>
-                  <a:srgbClr val="673AB7"/>
-                </a:solidFill>
-                <a:latin typeface="Calibri"/>
-              </a:defRPr>
-            </a:pPr>
-            <a:r>
-              <a:t>5-10</a:t>
-            </a:r>
-          </a:p>
-        </p:txBody>
-      </p:sp>
-      <p:sp>
-        <p:nvSpPr>
-          <p:cNvPr id="6" name="TextBox 5"/>
-          <p:cNvSpPr txBox="1"/>
-          <p:nvPr/>
-        </p:nvSpPr>
-        <p:spPr>
-          <a:xfrm>
-            <a:off x="1097280" y="2926080"/>
-            <a:ext cx="4572000" cy="365760"/>
-          </a:xfrm>
-          <a:prstGeom prst="rect">
-            <a:avLst/>
-          </a:prstGeom>
-          <a:noFill/>
-        </p:spPr>
-        <p:txBody>
-          <a:bodyPr wrap="square">
-            <a:spAutoFit/>
-          </a:bodyPr>
-          <a:lstStyle/>
-          <a:p>
-            <a:pPr algn="l">
-              <a:defRPr sz="1100" b="0" i="0">
-                <a:solidFill>
-                  <a:srgbClr val="8F95A3"/>
-                </a:solidFill>
-                <a:latin typeface="Calibri"/>
-              </a:defRPr>
-            </a:pPr>
-            <a:r>
-              <a:t>AI agents per employee</a:t>
-            </a:r>
-          </a:p>
-        </p:txBody>
-      </p:sp>
-      <p:sp>
-        <p:nvSpPr>
-          <p:cNvPr id="7" name="TextBox 6"/>
-          <p:cNvSpPr txBox="1"/>
-          <p:nvPr/>
-        </p:nvSpPr>
-        <p:spPr>
-          <a:xfrm>
-            <a:off x="1097280" y="3566160"/>
-            <a:ext cx="9966960" cy="457200"/>
-          </a:xfrm>
-          <a:prstGeom prst="rect">
-            <a:avLst/>
-          </a:prstGeom>
-          <a:noFill/>
-        </p:spPr>
-        <p:txBody>
-          <a:bodyPr wrap="square">
-            <a:spAutoFit/>
-          </a:bodyPr>
-          <a:lstStyle/>
-          <a:p>
-            <a:pPr algn="l">
-              <a:defRPr sz="1800" b="1" i="0">
-                <a:solidFill>
-                  <a:srgbClr val="FFFFFF"/>
-                </a:solidFill>
-                <a:latin typeface="Calibri"/>
-              </a:defRPr>
-            </a:pPr>
-            <a:r>
-              <a:t>AI-Powered Company Growth</a:t>
-            </a:r>
-          </a:p>
-        </p:txBody>
-      </p:sp>
-      <p:sp>
-        <p:nvSpPr>
-          <p:cNvPr id="8" name="TextBox 7"/>
-          <p:cNvSpPr txBox="1"/>
-          <p:nvPr/>
-        </p:nvSpPr>
-        <p:spPr>
-          <a:xfrm>
-            <a:off x="1097280" y="4206240"/>
-            <a:ext cx="9966960" cy="1371600"/>
-          </a:xfrm>
-          <a:prstGeom prst="rect">
-            <a:avLst/>
-          </a:prstGeom>
-          <a:noFill/>
-        </p:spPr>
-        <p:txBody>
-          <a:bodyPr wrap="square">
-            <a:spAutoFit/>
-          </a:bodyPr>
-          <a:lstStyle/>
-          <a:p>
-            <a:pPr algn="l">
-              <a:defRPr sz="1500" b="0" i="0">
-                <a:solidFill>
-                  <a:srgbClr val="E2E2EA"/>
-                </a:solidFill>
-                <a:latin typeface="Calibri"/>
-              </a:defRPr>
-            </a:pPr>
-            <a:r>
-              <a:t>Every employee will manage 5-10 AI agents within 3-6 months as part of our vision to build toward a $50B company with 1,500 employees and 100 studios.</a:t>
-            </a:r>
-          </a:p>
-        </p:txBody>
-      </p:sp>
-    </p:spTree>
-  </p:cSld>
-  <p:clrMapOvr>
-    <a:masterClrMapping/>
-  </p:clrMapOvr>
-</p:sld>
-</file>
-
-<file path=ppt/slides/slide23.xml><?xml version="1.0" encoding="utf-8"?>
-<p:sld xmlns:a="http://schemas.openxmlformats.org/drawingml/2006/main" xmlns:p="http://schemas.openxmlformats.org/presentationml/2006/main" xmlns:r="http://schemas.openxmlformats.org/officeDocument/2006/relationships">
-  <p:cSld>
-    <p:bg>
-      <p:bgPr>
-        <a:solidFill>
-          <a:srgbClr val="08080C"/>
-        </a:solidFill>
-        <a:effectLst/>
-      </p:bgPr>
-    </p:bg>
-    <p:spTree>
-      <p:nvGrpSpPr>
-        <p:cNvPr id="1" name=""/>
-        <p:cNvGrpSpPr/>
-        <p:nvPr/>
-      </p:nvGrpSpPr>
-      <p:grpSpPr/>
-      <p:sp>
-        <p:nvSpPr>
-          <p:cNvPr id="2" name="Rectangle 1"/>
-          <p:cNvSpPr/>
-          <p:nvPr/>
-        </p:nvSpPr>
-        <p:spPr>
-          <a:xfrm>
-            <a:off x="0" y="365760"/>
-            <a:ext cx="12191695" cy="54864"/>
-          </a:xfrm>
-          <a:prstGeom prst="rect">
-            <a:avLst/>
-          </a:prstGeom>
-          <a:solidFill>
-            <a:srgbClr val="009688"/>
-          </a:solidFill>
-          <a:ln>
-            <a:noFill/>
-          </a:ln>
-        </p:spPr>
-        <p:style>
-          <a:lnRef idx="1">
-            <a:schemeClr val="accent1"/>
-          </a:lnRef>
-          <a:fillRef idx="3">
-            <a:schemeClr val="accent1"/>
-          </a:fillRef>
-          <a:effectRef idx="2">
-            <a:schemeClr val="accent1"/>
-          </a:effectRef>
-          <a:fontRef idx="minor">
-            <a:schemeClr val="lt1"/>
-          </a:fontRef>
-        </p:style>
-        <p:txBody>
-          <a:bodyPr rtlCol="0" anchor="ctr"/>
-          <a:lstStyle/>
-          <a:p>
-            <a:pPr algn="ctr"/>
-          </a:p>
-        </p:txBody>
-      </p:sp>
-      <p:sp>
-        <p:nvSpPr>
-          <p:cNvPr id="3" name="TextBox 2"/>
-          <p:cNvSpPr txBox="1"/>
-          <p:nvPr/>
-        </p:nvSpPr>
-        <p:spPr>
-          <a:xfrm>
-            <a:off x="1097280" y="731520"/>
-            <a:ext cx="3657600" cy="365760"/>
-          </a:xfrm>
-          <a:prstGeom prst="rect">
-            <a:avLst/>
-          </a:prstGeom>
-          <a:noFill/>
-        </p:spPr>
-        <p:txBody>
-          <a:bodyPr wrap="none">
-            <a:spAutoFit/>
-          </a:bodyPr>
-          <a:lstStyle/>
-          <a:p>
-            <a:pPr algn="l">
-              <a:defRPr sz="1000" b="1">
-                <a:solidFill>
-                  <a:srgbClr val="009688"/>
-                </a:solidFill>
-                <a:latin typeface="Calibri"/>
-              </a:defRPr>
-            </a:pPr>
-            <a:r>
-              <a:t>🤖  WIN</a:t>
-            </a:r>
-          </a:p>
-        </p:txBody>
-      </p:sp>
-      <p:sp>
-        <p:nvSpPr>
-          <p:cNvPr id="4" name="TextBox 3"/>
-          <p:cNvSpPr txBox="1"/>
-          <p:nvPr/>
-        </p:nvSpPr>
-        <p:spPr>
-          <a:xfrm>
-            <a:off x="1097280" y="1188720"/>
-            <a:ext cx="9966960" cy="731520"/>
-          </a:xfrm>
-          <a:prstGeom prst="rect">
-            <a:avLst/>
-          </a:prstGeom>
-          <a:noFill/>
-        </p:spPr>
-        <p:txBody>
-          <a:bodyPr wrap="square">
-            <a:spAutoFit/>
-          </a:bodyPr>
-          <a:lstStyle/>
-          <a:p>
-            <a:pPr algn="l">
-              <a:defRPr sz="3200" b="1" i="0">
-                <a:solidFill>
-                  <a:srgbClr val="009688"/>
-                </a:solidFill>
-                <a:latin typeface="Calibri"/>
-              </a:defRPr>
-            </a:pPr>
-            <a:r>
-              <a:t>Automation Success</a:t>
-            </a:r>
-          </a:p>
-        </p:txBody>
-      </p:sp>
-      <p:sp>
-        <p:nvSpPr>
-          <p:cNvPr id="5" name="TextBox 4"/>
-          <p:cNvSpPr txBox="1"/>
-          <p:nvPr/>
-        </p:nvSpPr>
-        <p:spPr>
-          <a:xfrm>
-            <a:off x="1097280" y="2103120"/>
-            <a:ext cx="4572000" cy="822960"/>
-          </a:xfrm>
-          <a:prstGeom prst="rect">
-            <a:avLst/>
-          </a:prstGeom>
-          <a:noFill/>
-        </p:spPr>
-        <p:txBody>
-          <a:bodyPr wrap="square">
-            <a:spAutoFit/>
-          </a:bodyPr>
-          <a:lstStyle/>
-          <a:p>
-            <a:pPr algn="l">
-              <a:defRPr sz="4800" b="1" i="0">
-                <a:solidFill>
-                  <a:srgbClr val="009688"/>
-                </a:solidFill>
-                <a:latin typeface="Calibri"/>
-              </a:defRPr>
-            </a:pPr>
-            <a:r>
-              <a:t>1,000+</a:t>
-            </a:r>
-          </a:p>
-        </p:txBody>
-      </p:sp>
-      <p:sp>
-        <p:nvSpPr>
-          <p:cNvPr id="6" name="TextBox 5"/>
-          <p:cNvSpPr txBox="1"/>
-          <p:nvPr/>
-        </p:nvSpPr>
-        <p:spPr>
-          <a:xfrm>
-            <a:off x="1097280" y="2834640"/>
-            <a:ext cx="4572000" cy="365760"/>
-          </a:xfrm>
-          <a:prstGeom prst="rect">
-            <a:avLst/>
-          </a:prstGeom>
-          <a:noFill/>
-        </p:spPr>
-        <p:txBody>
-          <a:bodyPr wrap="square">
-            <a:spAutoFit/>
-          </a:bodyPr>
-          <a:lstStyle/>
-          <a:p>
-            <a:pPr algn="l">
-              <a:defRPr sz="1200" b="0" i="0">
-                <a:solidFill>
-                  <a:srgbClr val="8F95A3"/>
-                </a:solidFill>
-                <a:latin typeface="Calibri"/>
-              </a:defRPr>
-            </a:pPr>
-            <a:r>
-              <a:t>OKRs checked daily</a:t>
-            </a:r>
-          </a:p>
-        </p:txBody>
-      </p:sp>
-      <p:sp>
-        <p:nvSpPr>
-          <p:cNvPr id="7" name="TextBox 6"/>
-          <p:cNvSpPr txBox="1"/>
-          <p:nvPr/>
-        </p:nvSpPr>
-        <p:spPr>
-          <a:xfrm>
-            <a:off x="1097280" y="3291840"/>
-            <a:ext cx="9966960" cy="365760"/>
-          </a:xfrm>
-          <a:prstGeom prst="rect">
-            <a:avLst/>
-          </a:prstGeom>
-          <a:noFill/>
-        </p:spPr>
-        <p:txBody>
-          <a:bodyPr wrap="square">
-            <a:spAutoFit/>
-          </a:bodyPr>
-          <a:lstStyle/>
-          <a:p>
-            <a:pPr algn="l">
-              <a:defRPr sz="1400" b="0" i="0">
-                <a:solidFill>
-                  <a:srgbClr val="E2E2EA"/>
-                </a:solidFill>
-                <a:latin typeface="Calibri"/>
-              </a:defRPr>
-            </a:pPr>
-            <a:r>
-              <a:t>by AI Development Team</a:t>
-            </a:r>
-          </a:p>
-        </p:txBody>
-      </p:sp>
-      <p:sp>
-        <p:nvSpPr>
-          <p:cNvPr id="8" name="TextBox 7"/>
-          <p:cNvSpPr txBox="1"/>
-          <p:nvPr/>
-        </p:nvSpPr>
-        <p:spPr>
-          <a:xfrm>
-            <a:off x="1097280" y="3840480"/>
-            <a:ext cx="9966960" cy="457200"/>
-          </a:xfrm>
-          <a:prstGeom prst="rect">
-            <a:avLst/>
-          </a:prstGeom>
-          <a:noFill/>
-        </p:spPr>
-        <p:txBody>
-          <a:bodyPr wrap="square">
-            <a:spAutoFit/>
-          </a:bodyPr>
-          <a:lstStyle/>
-          <a:p>
-            <a:pPr algn="l">
-              <a:defRPr sz="1800" b="1" i="0">
-                <a:solidFill>
-                  <a:srgbClr val="FFFFFF"/>
-                </a:solidFill>
-                <a:latin typeface="Calibri"/>
-              </a:defRPr>
-            </a:pPr>
-            <a:r>
-              <a:t>OKR Auditor AI Excellence</a:t>
-            </a:r>
-          </a:p>
-        </p:txBody>
-      </p:sp>
-      <p:sp>
-        <p:nvSpPr>
-          <p:cNvPr id="9" name="TextBox 8"/>
-          <p:cNvSpPr txBox="1"/>
-          <p:nvPr/>
-        </p:nvSpPr>
-        <p:spPr>
-          <a:xfrm>
-            <a:off x="1097280" y="4389120"/>
-            <a:ext cx="9966960" cy="914400"/>
-          </a:xfrm>
-          <a:prstGeom prst="rect">
-            <a:avLst/>
-          </a:prstGeom>
-          <a:noFill/>
-        </p:spPr>
-        <p:txBody>
-          <a:bodyPr wrap="square">
-            <a:spAutoFit/>
-          </a:bodyPr>
-          <a:lstStyle/>
-          <a:p>
-            <a:pPr algn="l">
-              <a:defRPr sz="1400" b="0" i="0">
-                <a:solidFill>
-                  <a:srgbClr val="E2E2EA"/>
-                </a:solidFill>
-                <a:latin typeface="Calibri"/>
-              </a:defRPr>
-            </a:pPr>
-            <a:r>
-              <a:t>Our AI-powered OKR Auditor now checks over 1,000 individual OKRs daily, ensuring alignment and progress tracking across the entire organization.</a:t>
-            </a:r>
-          </a:p>
-        </p:txBody>
-      </p:sp>
-      <p:sp>
-        <p:nvSpPr>
-          <p:cNvPr id="10" name="TextBox 9"/>
-          <p:cNvSpPr txBox="1"/>
-          <p:nvPr/>
-        </p:nvSpPr>
-        <p:spPr>
-          <a:xfrm>
-            <a:off x="1097280" y="5486400"/>
-            <a:ext cx="9966960" cy="457200"/>
-          </a:xfrm>
-          <a:prstGeom prst="rect">
-            <a:avLst/>
-          </a:prstGeom>
-          <a:noFill/>
-        </p:spPr>
-        <p:txBody>
-          <a:bodyPr wrap="square">
-            <a:spAutoFit/>
-          </a:bodyPr>
-          <a:lstStyle/>
-          <a:p>
-            <a:pPr algn="l">
-              <a:defRPr sz="1300" b="0" i="1">
-                <a:solidFill>
-                  <a:srgbClr val="8F95A3"/>
-                </a:solidFill>
-                <a:latin typeface="Calibri"/>
-              </a:defRPr>
-            </a:pPr>
-            <a:r>
-              <a:t>💬 "AI is transforming how we maintain organizational focus and accountability"</a:t>
-            </a:r>
-          </a:p>
-        </p:txBody>
-      </p:sp>
-    </p:spTree>
-  </p:cSld>
-  <p:clrMapOvr>
-    <a:masterClrMapping/>
-  </p:clrMapOvr>
-</p:sld>
-</file>
-
-<file path=ppt/slides/slide24.xml><?xml version="1.0" encoding="utf-8"?>
-<p:sld xmlns:a="http://schemas.openxmlformats.org/drawingml/2006/main" xmlns:p="http://schemas.openxmlformats.org/presentationml/2006/main" xmlns:r="http://schemas.openxmlformats.org/officeDocument/2006/relationships">
-  <p:cSld>
-    <p:bg>
-      <p:bgPr>
-        <a:solidFill>
-          <a:srgbClr val="08080C"/>
-        </a:solidFill>
-        <a:effectLst/>
-      </p:bgPr>
-    </p:bg>
-    <p:spTree>
-      <p:nvGrpSpPr>
-        <p:cNvPr id="1" name=""/>
-        <p:cNvGrpSpPr/>
-        <p:nvPr/>
-      </p:nvGrpSpPr>
-      <p:grpSpPr/>
-      <p:sp>
-        <p:nvSpPr>
-          <p:cNvPr id="2" name="Rectangle 1"/>
-          <p:cNvSpPr/>
-          <p:nvPr/>
-        </p:nvSpPr>
-        <p:spPr>
-          <a:xfrm>
-            <a:off x="0" y="365760"/>
-            <a:ext cx="12191695" cy="54864"/>
-          </a:xfrm>
-          <a:prstGeom prst="rect">
-            <a:avLst/>
-          </a:prstGeom>
-          <a:solidFill>
-            <a:srgbClr val="4CAF50"/>
-          </a:solidFill>
-          <a:ln>
-            <a:noFill/>
-          </a:ln>
-        </p:spPr>
-        <p:style>
-          <a:lnRef idx="1">
-            <a:schemeClr val="accent1"/>
-          </a:lnRef>
-          <a:fillRef idx="3">
-            <a:schemeClr val="accent1"/>
-          </a:fillRef>
-          <a:effectRef idx="2">
-            <a:schemeClr val="accent1"/>
-          </a:effectRef>
-          <a:fontRef idx="minor">
-            <a:schemeClr val="lt1"/>
-          </a:fontRef>
-        </p:style>
-        <p:txBody>
-          <a:bodyPr rtlCol="0" anchor="ctr"/>
-          <a:lstStyle/>
-          <a:p>
-            <a:pPr algn="ctr"/>
-          </a:p>
-        </p:txBody>
-      </p:sp>
-      <p:sp>
-        <p:nvSpPr>
-          <p:cNvPr id="3" name="TextBox 2"/>
-          <p:cNvSpPr txBox="1"/>
-          <p:nvPr/>
-        </p:nvSpPr>
-        <p:spPr>
-          <a:xfrm>
-            <a:off x="1097280" y="731520"/>
-            <a:ext cx="3657600" cy="365760"/>
-          </a:xfrm>
-          <a:prstGeom prst="rect">
-            <a:avLst/>
-          </a:prstGeom>
-          <a:noFill/>
-        </p:spPr>
-        <p:txBody>
-          <a:bodyPr wrap="none">
-            <a:spAutoFit/>
-          </a:bodyPr>
-          <a:lstStyle/>
-          <a:p>
-            <a:pPr algn="l">
-              <a:defRPr sz="1000" b="1">
-                <a:solidFill>
-                  <a:srgbClr val="4CAF50"/>
-                </a:solidFill>
-                <a:latin typeface="Calibri"/>
-              </a:defRPr>
-            </a:pPr>
-            <a:r>
-              <a:t>🎮  MILESTONE</a:t>
-            </a:r>
-          </a:p>
-        </p:txBody>
-      </p:sp>
-      <p:sp>
-        <p:nvSpPr>
-          <p:cNvPr id="4" name="TextBox 3"/>
-          <p:cNvSpPr txBox="1"/>
-          <p:nvPr/>
-        </p:nvSpPr>
-        <p:spPr>
-          <a:xfrm>
-            <a:off x="1097280" y="1188720"/>
-            <a:ext cx="9966960" cy="731520"/>
-          </a:xfrm>
-          <a:prstGeom prst="rect">
-            <a:avLst/>
-          </a:prstGeom>
-          <a:noFill/>
-        </p:spPr>
-        <p:txBody>
-          <a:bodyPr wrap="square">
-            <a:spAutoFit/>
-          </a:bodyPr>
-          <a:lstStyle/>
-          <a:p>
-            <a:pPr algn="l">
-              <a:defRPr sz="3200" b="1" i="0">
-                <a:solidFill>
-                  <a:srgbClr val="4CAF50"/>
-                </a:solidFill>
-                <a:latin typeface="Calibri"/>
-              </a:defRPr>
-            </a:pPr>
-            <a:r>
-              <a:t>Gaming Profitability</a:t>
-            </a:r>
-          </a:p>
-        </p:txBody>
-      </p:sp>
-      <p:sp>
-        <p:nvSpPr>
-          <p:cNvPr id="5" name="TextBox 4"/>
-          <p:cNvSpPr txBox="1"/>
-          <p:nvPr/>
-        </p:nvSpPr>
-        <p:spPr>
-          <a:xfrm>
-            <a:off x="1097280" y="2103120"/>
-            <a:ext cx="4572000" cy="822960"/>
-          </a:xfrm>
-          <a:prstGeom prst="rect">
-            <a:avLst/>
-          </a:prstGeom>
-          <a:noFill/>
-        </p:spPr>
-        <p:txBody>
-          <a:bodyPr wrap="square">
-            <a:spAutoFit/>
-          </a:bodyPr>
-          <a:lstStyle/>
-          <a:p>
-            <a:pPr algn="l">
-              <a:defRPr sz="5200" b="1" i="0">
-                <a:solidFill>
-                  <a:srgbClr val="4CAF50"/>
-                </a:solidFill>
-                <a:latin typeface="Calibri"/>
-              </a:defRPr>
-            </a:pPr>
-            <a:r>
-              <a:t>Profitable</a:t>
-            </a:r>
-          </a:p>
-        </p:txBody>
-      </p:sp>
-      <p:sp>
-        <p:nvSpPr>
-          <p:cNvPr id="6" name="TextBox 5"/>
-          <p:cNvSpPr txBox="1"/>
-          <p:nvPr/>
-        </p:nvSpPr>
-        <p:spPr>
-          <a:xfrm>
-            <a:off x="1097280" y="2926080"/>
-            <a:ext cx="4572000" cy="365760"/>
-          </a:xfrm>
-          <a:prstGeom prst="rect">
-            <a:avLst/>
-          </a:prstGeom>
-          <a:noFill/>
-        </p:spPr>
-        <p:txBody>
-          <a:bodyPr wrap="square">
-            <a:spAutoFit/>
-          </a:bodyPr>
-          <a:lstStyle/>
-          <a:p>
-            <a:pPr algn="l">
-              <a:defRPr sz="1100" b="0" i="0">
-                <a:solidFill>
-                  <a:srgbClr val="8F95A3"/>
-                </a:solidFill>
-                <a:latin typeface="Calibri"/>
-              </a:defRPr>
-            </a:pPr>
-            <a:r>
-              <a:t>gaming division in 2025</a:t>
-            </a:r>
-          </a:p>
-        </p:txBody>
-      </p:sp>
-      <p:sp>
-        <p:nvSpPr>
-          <p:cNvPr id="7" name="TextBox 6"/>
-          <p:cNvSpPr txBox="1"/>
-          <p:nvPr/>
-        </p:nvSpPr>
-        <p:spPr>
-          <a:xfrm>
-            <a:off x="1097280" y="3566160"/>
-            <a:ext cx="9966960" cy="457200"/>
-          </a:xfrm>
-          <a:prstGeom prst="rect">
-            <a:avLst/>
-          </a:prstGeom>
-          <a:noFill/>
-        </p:spPr>
-        <p:txBody>
-          <a:bodyPr wrap="square">
-            <a:spAutoFit/>
-          </a:bodyPr>
-          <a:lstStyle/>
-          <a:p>
-            <a:pPr algn="l">
-              <a:defRPr sz="1800" b="1" i="0">
-                <a:solidFill>
-                  <a:srgbClr val="FFFFFF"/>
-                </a:solidFill>
-                <a:latin typeface="Calibri"/>
-              </a:defRPr>
-            </a:pPr>
-            <a:r>
-              <a:t>Gaming Division Turns Profitable</a:t>
-            </a:r>
-          </a:p>
-        </p:txBody>
-      </p:sp>
-      <p:sp>
-        <p:nvSpPr>
-          <p:cNvPr id="8" name="TextBox 7"/>
-          <p:cNvSpPr txBox="1"/>
-          <p:nvPr/>
-        </p:nvSpPr>
-        <p:spPr>
-          <a:xfrm>
-            <a:off x="1097280" y="4206240"/>
-            <a:ext cx="9966960" cy="1371600"/>
-          </a:xfrm>
-          <a:prstGeom prst="rect">
-            <a:avLst/>
-          </a:prstGeom>
-          <a:noFill/>
-        </p:spPr>
-        <p:txBody>
-          <a:bodyPr wrap="square">
-            <a:spAutoFit/>
-          </a:bodyPr>
-          <a:lstStyle/>
-          <a:p>
-            <a:pPr algn="l">
-              <a:defRPr sz="1500" b="0" i="0">
-                <a:solidFill>
-                  <a:srgbClr val="E2E2EA"/>
-                </a:solidFill>
-                <a:latin typeface="Calibri"/>
-              </a:defRPr>
-            </a:pPr>
-            <a:r>
-              <a:t>Gaming achieved profitability in 2025 with Infinite Minesweeper reaching 61% retention and Crossword exceeding 200% ROAS, marking a major milestone in our diversification strategy.</a:t>
-            </a:r>
-          </a:p>
-        </p:txBody>
-      </p:sp>
-    </p:spTree>
-  </p:cSld>
-  <p:clrMapOvr>
-    <a:masterClrMapping/>
-  </p:clrMapOvr>
-</p:sld>
-</file>
-
-<file path=ppt/slides/slide25.xml><?xml version="1.0" encoding="utf-8"?>
-<p:sld xmlns:a="http://schemas.openxmlformats.org/drawingml/2006/main" xmlns:p="http://schemas.openxmlformats.org/presentationml/2006/main" xmlns:r="http://schemas.openxmlformats.org/officeDocument/2006/relationships">
-  <p:cSld>
-    <p:bg>
-      <p:bgPr>
-        <a:solidFill>
-          <a:srgbClr val="08080C"/>
-        </a:solidFill>
-        <a:effectLst/>
-      </p:bgPr>
-    </p:bg>
-    <p:spTree>
-      <p:nvGrpSpPr>
-        <p:cNvPr id="1" name=""/>
-        <p:cNvGrpSpPr/>
-        <p:nvPr/>
-      </p:nvGrpSpPr>
-      <p:grpSpPr/>
-      <p:sp>
-        <p:nvSpPr>
-          <p:cNvPr id="2" name="Rectangle 1"/>
-          <p:cNvSpPr/>
-          <p:nvPr/>
-        </p:nvSpPr>
-        <p:spPr>
-          <a:xfrm>
-            <a:off x="0" y="365760"/>
-            <a:ext cx="12191695" cy="54864"/>
-          </a:xfrm>
-          <a:prstGeom prst="rect">
-            <a:avLst/>
-          </a:prstGeom>
-          <a:solidFill>
-            <a:srgbClr val="FF5722"/>
-          </a:solidFill>
-          <a:ln>
-            <a:noFill/>
-          </a:ln>
-        </p:spPr>
-        <p:style>
-          <a:lnRef idx="1">
-            <a:schemeClr val="accent1"/>
-          </a:lnRef>
-          <a:fillRef idx="3">
-            <a:schemeClr val="accent1"/>
-          </a:fillRef>
-          <a:effectRef idx="2">
-            <a:schemeClr val="accent1"/>
-          </a:effectRef>
-          <a:fontRef idx="minor">
-            <a:schemeClr val="lt1"/>
-          </a:fontRef>
-        </p:style>
-        <p:txBody>
-          <a:bodyPr rtlCol="0" anchor="ctr"/>
-          <a:lstStyle/>
-          <a:p>
-            <a:pPr algn="ctr"/>
-          </a:p>
-        </p:txBody>
-      </p:sp>
-      <p:sp>
-        <p:nvSpPr>
-          <p:cNvPr id="3" name="TextBox 2"/>
-          <p:cNvSpPr txBox="1"/>
-          <p:nvPr/>
-        </p:nvSpPr>
-        <p:spPr>
-          <a:xfrm>
-            <a:off x="1097280" y="731520"/>
-            <a:ext cx="3657600" cy="365760"/>
-          </a:xfrm>
-          <a:prstGeom prst="rect">
-            <a:avLst/>
-          </a:prstGeom>
-          <a:noFill/>
-        </p:spPr>
-        <p:txBody>
-          <a:bodyPr wrap="none">
-            <a:spAutoFit/>
-          </a:bodyPr>
-          <a:lstStyle/>
-          <a:p>
-            <a:pPr algn="l">
-              <a:defRPr sz="1000" b="1">
-                <a:solidFill>
-                  <a:srgbClr val="FF5722"/>
-                </a:solidFill>
-                <a:latin typeface="Calibri"/>
-              </a:defRPr>
-            </a:pPr>
-            <a:r>
-              <a:t>🛡️  WIN</a:t>
-            </a:r>
-          </a:p>
-        </p:txBody>
-      </p:sp>
-      <p:sp>
-        <p:nvSpPr>
-          <p:cNvPr id="4" name="TextBox 3"/>
-          <p:cNvSpPr txBox="1"/>
-          <p:nvPr/>
-        </p:nvSpPr>
-        <p:spPr>
-          <a:xfrm>
-            <a:off x="1097280" y="1188720"/>
-            <a:ext cx="9966960" cy="731520"/>
-          </a:xfrm>
-          <a:prstGeom prst="rect">
-            <a:avLst/>
-          </a:prstGeom>
-          <a:noFill/>
-        </p:spPr>
-        <p:txBody>
-          <a:bodyPr wrap="square">
-            <a:spAutoFit/>
-          </a:bodyPr>
-          <a:lstStyle/>
-          <a:p>
-            <a:pPr algn="l">
-              <a:defRPr sz="3200" b="1" i="0">
-                <a:solidFill>
-                  <a:srgbClr val="FF5722"/>
-                </a:solidFill>
-                <a:latin typeface="Calibri"/>
-              </a:defRPr>
-            </a:pPr>
-            <a:r>
-              <a:t>Security Excellence</a:t>
-            </a:r>
-          </a:p>
-        </p:txBody>
-      </p:sp>
-      <p:sp>
-        <p:nvSpPr>
-          <p:cNvPr id="5" name="TextBox 4"/>
-          <p:cNvSpPr txBox="1"/>
-          <p:nvPr/>
-        </p:nvSpPr>
-        <p:spPr>
-          <a:xfrm>
-            <a:off x="1097280" y="2103120"/>
-            <a:ext cx="4572000" cy="822960"/>
-          </a:xfrm>
-          <a:prstGeom prst="rect">
-            <a:avLst/>
-          </a:prstGeom>
-          <a:noFill/>
-        </p:spPr>
-        <p:txBody>
-          <a:bodyPr wrap="square">
-            <a:spAutoFit/>
-          </a:bodyPr>
-          <a:lstStyle/>
-          <a:p>
-            <a:pPr algn="l">
-              <a:defRPr sz="4800" b="1" i="0">
-                <a:solidFill>
-                  <a:srgbClr val="FF5722"/>
-                </a:solidFill>
-                <a:latin typeface="Calibri"/>
-              </a:defRPr>
-            </a:pPr>
-            <a:r>
-              <a:t>22% to 4%</a:t>
-            </a:r>
-          </a:p>
-        </p:txBody>
-      </p:sp>
-      <p:sp>
-        <p:nvSpPr>
-          <p:cNvPr id="6" name="TextBox 5"/>
-          <p:cNvSpPr txBox="1"/>
-          <p:nvPr/>
-        </p:nvSpPr>
-        <p:spPr>
-          <a:xfrm>
-            <a:off x="1097280" y="2834640"/>
-            <a:ext cx="4572000" cy="365760"/>
-          </a:xfrm>
-          <a:prstGeom prst="rect">
-            <a:avLst/>
-          </a:prstGeom>
-          <a:noFill/>
-        </p:spPr>
-        <p:txBody>
-          <a:bodyPr wrap="square">
-            <a:spAutoFit/>
-          </a:bodyPr>
-          <a:lstStyle/>
-          <a:p>
-            <a:pPr algn="l">
-              <a:defRPr sz="1200" b="0" i="0">
-                <a:solidFill>
-                  <a:srgbClr val="8F95A3"/>
-                </a:solidFill>
-                <a:latin typeface="Calibri"/>
-              </a:defRPr>
-            </a:pPr>
-            <a:r>
-              <a:t>fraud reduction</a:t>
-            </a:r>
-          </a:p>
-        </p:txBody>
-      </p:sp>
-      <p:sp>
-        <p:nvSpPr>
-          <p:cNvPr id="7" name="TextBox 6"/>
-          <p:cNvSpPr txBox="1"/>
-          <p:nvPr/>
-        </p:nvSpPr>
-        <p:spPr>
-          <a:xfrm>
-            <a:off x="1097280" y="3291840"/>
-            <a:ext cx="9966960" cy="365760"/>
-          </a:xfrm>
-          <a:prstGeom prst="rect">
-            <a:avLst/>
-          </a:prstGeom>
-          <a:noFill/>
-        </p:spPr>
-        <p:txBody>
-          <a:bodyPr wrap="square">
-            <a:spAutoFit/>
-          </a:bodyPr>
-          <a:lstStyle/>
-          <a:p>
-            <a:pPr algn="l">
-              <a:defRPr sz="1400" b="0" i="0">
-                <a:solidFill>
-                  <a:srgbClr val="E2E2EA"/>
-                </a:solidFill>
-                <a:latin typeface="Calibri"/>
-              </a:defRPr>
-            </a:pPr>
-            <a:r>
-              <a:t>by Security Team</a:t>
-            </a:r>
-          </a:p>
-        </p:txBody>
-      </p:sp>
-      <p:sp>
-        <p:nvSpPr>
-          <p:cNvPr id="8" name="TextBox 7"/>
-          <p:cNvSpPr txBox="1"/>
-          <p:nvPr/>
-        </p:nvSpPr>
-        <p:spPr>
-          <a:xfrm>
-            <a:off x="1097280" y="3840480"/>
-            <a:ext cx="9966960" cy="457200"/>
-          </a:xfrm>
-          <a:prstGeom prst="rect">
-            <a:avLst/>
-          </a:prstGeom>
-          <a:noFill/>
-        </p:spPr>
-        <p:txBody>
-          <a:bodyPr wrap="square">
-            <a:spAutoFit/>
-          </a:bodyPr>
-          <a:lstStyle/>
-          <a:p>
-            <a:pPr algn="l">
-              <a:defRPr sz="1800" b="1" i="0">
-                <a:solidFill>
-                  <a:srgbClr val="FFFFFF"/>
-                </a:solidFill>
-                <a:latin typeface="Calibri"/>
-              </a:defRPr>
-            </a:pPr>
-            <a:r>
-              <a:t>Fraud Prevention Breakthrough</a:t>
-            </a:r>
-          </a:p>
-        </p:txBody>
-      </p:sp>
-      <p:sp>
-        <p:nvSpPr>
-          <p:cNvPr id="9" name="TextBox 8"/>
-          <p:cNvSpPr txBox="1"/>
-          <p:nvPr/>
-        </p:nvSpPr>
-        <p:spPr>
-          <a:xfrm>
-            <a:off x="1097280" y="4389120"/>
-            <a:ext cx="9966960" cy="914400"/>
-          </a:xfrm>
-          <a:prstGeom prst="rect">
-            <a:avLst/>
-          </a:prstGeom>
-          <a:noFill/>
-        </p:spPr>
-        <p:txBody>
-          <a:bodyPr wrap="square">
-            <a:spAutoFit/>
-          </a:bodyPr>
-          <a:lstStyle/>
-          <a:p>
-            <a:pPr algn="l">
-              <a:defRPr sz="1400" b="0" i="0">
-                <a:solidFill>
-                  <a:srgbClr val="E2E2EA"/>
-                </a:solidFill>
-                <a:latin typeface="Calibri"/>
-              </a:defRPr>
-            </a:pPr>
-            <a:r>
-              <a:t>Fraud reduced from 22% to under 4% with dynamic SDK signatures, dramatically improving platform security and user trust.</a:t>
-            </a:r>
-          </a:p>
-        </p:txBody>
-      </p:sp>
-      <p:sp>
-        <p:nvSpPr>
-          <p:cNvPr id="10" name="TextBox 9"/>
-          <p:cNvSpPr txBox="1"/>
-          <p:nvPr/>
-        </p:nvSpPr>
-        <p:spPr>
-          <a:xfrm>
-            <a:off x="1097280" y="5486400"/>
-            <a:ext cx="9966960" cy="457200"/>
-          </a:xfrm>
-          <a:prstGeom prst="rect">
-            <a:avLst/>
-          </a:prstGeom>
-          <a:noFill/>
-        </p:spPr>
-        <p:txBody>
-          <a:bodyPr wrap="square">
-            <a:spAutoFit/>
-          </a:bodyPr>
-          <a:lstStyle/>
-          <a:p>
-            <a:pPr algn="l">
-              <a:defRPr sz="1300" b="0" i="1">
-                <a:solidFill>
-                  <a:srgbClr val="8F95A3"/>
-                </a:solidFill>
-                <a:latin typeface="Calibri"/>
-              </a:defRPr>
-            </a:pPr>
-            <a:r>
-              <a:t>💬 "Our innovative security measures are setting new industry standards"</a:t>
-            </a:r>
-          </a:p>
-        </p:txBody>
-      </p:sp>
-    </p:spTree>
-  </p:cSld>
-  <p:clrMapOvr>
-    <a:masterClrMapping/>
-  </p:clrMapOvr>
-</p:sld>
-</file>
-
-<file path=ppt/slides/slide26.xml><?xml version="1.0" encoding="utf-8"?>
-<p:sld xmlns:a="http://schemas.openxmlformats.org/drawingml/2006/main" xmlns:p="http://schemas.openxmlformats.org/presentationml/2006/main" xmlns:r="http://schemas.openxmlformats.org/officeDocument/2006/relationships">
-  <p:cSld>
-    <p:bg>
-      <p:bgPr>
-        <a:solidFill>
-          <a:srgbClr val="08080C"/>
-        </a:solidFill>
-        <a:effectLst/>
-      </p:bgPr>
-    </p:bg>
-    <p:spTree>
-      <p:nvGrpSpPr>
-        <p:cNvPr id="1" name=""/>
-        <p:cNvGrpSpPr/>
-        <p:nvPr/>
-      </p:nvGrpSpPr>
-      <p:grpSpPr/>
-      <p:sp>
-        <p:nvSpPr>
-          <p:cNvPr id="2" name="Rectangle 1"/>
-          <p:cNvSpPr/>
-          <p:nvPr/>
-        </p:nvSpPr>
-        <p:spPr>
-          <a:xfrm>
-            <a:off x="0" y="365760"/>
-            <a:ext cx="12191695" cy="54864"/>
-          </a:xfrm>
-          <a:prstGeom prst="rect">
-            <a:avLst/>
-          </a:prstGeom>
-          <a:solidFill>
-            <a:srgbClr val="607D8B"/>
-          </a:solidFill>
-          <a:ln>
-            <a:noFill/>
-          </a:ln>
-        </p:spPr>
-        <p:style>
-          <a:lnRef idx="1">
-            <a:schemeClr val="accent1"/>
-          </a:lnRef>
-          <a:fillRef idx="3">
-            <a:schemeClr val="accent1"/>
-          </a:fillRef>
-          <a:effectRef idx="2">
-            <a:schemeClr val="accent1"/>
-          </a:effectRef>
-          <a:fontRef idx="minor">
-            <a:schemeClr val="lt1"/>
-          </a:fontRef>
-        </p:style>
-        <p:txBody>
-          <a:bodyPr rtlCol="0" anchor="ctr"/>
-          <a:lstStyle/>
-          <a:p>
-            <a:pPr algn="ctr"/>
-          </a:p>
-        </p:txBody>
-      </p:sp>
-      <p:sp>
-        <p:nvSpPr>
-          <p:cNvPr id="3" name="TextBox 2"/>
-          <p:cNvSpPr txBox="1"/>
-          <p:nvPr/>
-        </p:nvSpPr>
-        <p:spPr>
-          <a:xfrm>
-            <a:off x="1097280" y="731520"/>
-            <a:ext cx="3657600" cy="365760"/>
-          </a:xfrm>
-          <a:prstGeom prst="rect">
-            <a:avLst/>
-          </a:prstGeom>
-          <a:noFill/>
-        </p:spPr>
-        <p:txBody>
-          <a:bodyPr wrap="none">
-            <a:spAutoFit/>
-          </a:bodyPr>
-          <a:lstStyle/>
-          <a:p>
-            <a:pPr algn="l">
-              <a:defRPr sz="1000" b="1">
-                <a:solidFill>
-                  <a:srgbClr val="607D8B"/>
-                </a:solidFill>
-                <a:latin typeface="Calibri"/>
-              </a:defRPr>
-            </a:pPr>
-            <a:r>
-              <a:t>💼  MILESTONE</a:t>
-            </a:r>
-          </a:p>
-        </p:txBody>
-      </p:sp>
-      <p:sp>
-        <p:nvSpPr>
-          <p:cNvPr id="4" name="TextBox 3"/>
-          <p:cNvSpPr txBox="1"/>
-          <p:nvPr/>
-        </p:nvSpPr>
-        <p:spPr>
-          <a:xfrm>
-            <a:off x="1097280" y="1188720"/>
-            <a:ext cx="9966960" cy="731520"/>
-          </a:xfrm>
-          <a:prstGeom prst="rect">
-            <a:avLst/>
-          </a:prstGeom>
-          <a:noFill/>
-        </p:spPr>
-        <p:txBody>
-          <a:bodyPr wrap="square">
-            <a:spAutoFit/>
-          </a:bodyPr>
-          <a:lstStyle/>
-          <a:p>
-            <a:pPr algn="l">
-              <a:defRPr sz="3200" b="1" i="0">
-                <a:solidFill>
-                  <a:srgbClr val="607D8B"/>
-                </a:solidFill>
-                <a:latin typeface="Calibri"/>
-              </a:defRPr>
-            </a:pPr>
-            <a:r>
-              <a:t>Sales Performance</a:t>
-            </a:r>
-          </a:p>
-        </p:txBody>
-      </p:sp>
-      <p:sp>
-        <p:nvSpPr>
-          <p:cNvPr id="5" name="TextBox 4"/>
-          <p:cNvSpPr txBox="1"/>
-          <p:nvPr/>
-        </p:nvSpPr>
-        <p:spPr>
-          <a:xfrm>
-            <a:off x="1097280" y="2103120"/>
-            <a:ext cx="4572000" cy="822960"/>
-          </a:xfrm>
-          <a:prstGeom prst="rect">
-            <a:avLst/>
-          </a:prstGeom>
-          <a:noFill/>
-        </p:spPr>
-        <p:txBody>
-          <a:bodyPr wrap="square">
-            <a:spAutoFit/>
-          </a:bodyPr>
-          <a:lstStyle/>
-          <a:p>
-            <a:pPr algn="l">
-              <a:defRPr sz="5200" b="1" i="0">
-                <a:solidFill>
-                  <a:srgbClr val="607D8B"/>
-                </a:solidFill>
-                <a:latin typeface="Calibri"/>
-              </a:defRPr>
-            </a:pPr>
-            <a:r>
-              <a:t>$390k</a:t>
-            </a:r>
-          </a:p>
-        </p:txBody>
-      </p:sp>
-      <p:sp>
-        <p:nvSpPr>
-          <p:cNvPr id="6" name="TextBox 5"/>
-          <p:cNvSpPr txBox="1"/>
-          <p:nvPr/>
-        </p:nvSpPr>
-        <p:spPr>
-          <a:xfrm>
-            <a:off x="1097280" y="2926080"/>
-            <a:ext cx="4572000" cy="365760"/>
-          </a:xfrm>
-          <a:prstGeom prst="rect">
-            <a:avLst/>
-          </a:prstGeom>
-          <a:noFill/>
-        </p:spPr>
-        <p:txBody>
-          <a:bodyPr wrap="square">
-            <a:spAutoFit/>
-          </a:bodyPr>
-          <a:lstStyle/>
-          <a:p>
-            <a:pPr algn="l">
-              <a:defRPr sz="1100" b="0" i="0">
-                <a:solidFill>
-                  <a:srgbClr val="8F95A3"/>
-                </a:solidFill>
-                <a:latin typeface="Calibri"/>
-              </a:defRPr>
-            </a:pPr>
-            <a:r>
-              <a:t>net revenue in one week</a:t>
-            </a:r>
-          </a:p>
-        </p:txBody>
-      </p:sp>
-      <p:sp>
-        <p:nvSpPr>
-          <p:cNvPr id="7" name="TextBox 6"/>
-          <p:cNvSpPr txBox="1"/>
-          <p:nvPr/>
-        </p:nvSpPr>
-        <p:spPr>
-          <a:xfrm>
-            <a:off x="1097280" y="3566160"/>
-            <a:ext cx="9966960" cy="457200"/>
-          </a:xfrm>
-          <a:prstGeom prst="rect">
-            <a:avLst/>
-          </a:prstGeom>
-          <a:noFill/>
-        </p:spPr>
-        <p:txBody>
-          <a:bodyPr wrap="square">
-            <a:spAutoFit/>
-          </a:bodyPr>
-          <a:lstStyle/>
-          <a:p>
-            <a:pPr algn="l">
-              <a:defRPr sz="1800" b="1" i="0">
-                <a:solidFill>
-                  <a:srgbClr val="FFFFFF"/>
-                </a:solidFill>
-                <a:latin typeface="Calibri"/>
-              </a:defRPr>
-            </a:pPr>
-            <a:r>
-              <a:t>Record Sales Week</a:t>
-            </a:r>
-          </a:p>
-        </p:txBody>
-      </p:sp>
-      <p:sp>
-        <p:nvSpPr>
-          <p:cNvPr id="8" name="TextBox 7"/>
-          <p:cNvSpPr txBox="1"/>
-          <p:nvPr/>
-        </p:nvSpPr>
-        <p:spPr>
-          <a:xfrm>
-            <a:off x="1097280" y="4206240"/>
-            <a:ext cx="9966960" cy="1371600"/>
-          </a:xfrm>
-          <a:prstGeom prst="rect">
-            <a:avLst/>
-          </a:prstGeom>
-          <a:noFill/>
-        </p:spPr>
-        <p:txBody>
-          <a:bodyPr wrap="square">
-            <a:spAutoFit/>
-          </a:bodyPr>
-          <a:lstStyle/>
-          <a:p>
-            <a:pPr algn="l">
-              <a:defRPr sz="1500" b="0" i="0">
-                <a:solidFill>
-                  <a:srgbClr val="E2E2EA"/>
-                </a:solidFill>
-                <a:latin typeface="Calibri"/>
-              </a:defRPr>
-            </a:pPr>
-            <a:r>
-              <a:t>Sales team closed 8 deals generating $390k net revenue in a single week, demonstrating strong market momentum and effective sales strategies.</a:t>
+                  <a:srgbClr val="FFD700"/>
+                </a:solidFill>
+                <a:latin typeface="Calibri"/>
+              </a:defRPr>
+            </a:pPr>
+            <a:r>
+              <a:t>Wishing you a wonderful day filled with joy and celebration!</a:t>
             </a:r>
           </a:p>
         </p:txBody>
@@ -8947,7 +6765,7 @@
             <a:avLst/>
           </a:prstGeom>
           <a:solidFill>
-            <a:srgbClr val="4CAF50"/>
+            <a:srgbClr val="FF6B6B"/>
           </a:solidFill>
           <a:ln>
             <a:noFill/>
@@ -9000,13 +6818,13 @@
             <a:pPr algn="l">
               <a:defRPr sz="1000" b="1">
                 <a:solidFill>
-                  <a:srgbClr val="4CAF50"/>
-                </a:solidFill>
-                <a:latin typeface="Calibri"/>
-              </a:defRPr>
-            </a:pPr>
-            <a:r>
-              <a:t>🚀  MILESTONE</a:t>
+                  <a:srgbClr val="FF6B6B"/>
+                </a:solidFill>
+                <a:latin typeface="Calibri"/>
+              </a:defRPr>
+            </a:pPr>
+            <a:r>
+              <a:t>🎉  CELEBRATION</a:t>
             </a:r>
           </a:p>
         </p:txBody>
@@ -9036,13 +6854,13 @@
             <a:pPr algn="l">
               <a:defRPr sz="3200" b="1" i="0">
                 <a:solidFill>
-                  <a:srgbClr val="4CAF50"/>
-                </a:solidFill>
-                <a:latin typeface="Calibri"/>
-              </a:defRPr>
-            </a:pPr>
-            <a:r>
-              <a:t>Engineering Excellence</a:t>
+                  <a:srgbClr val="FF6B6B"/>
+                </a:solidFill>
+                <a:latin typeface="Calibri"/>
+              </a:defRPr>
+            </a:pPr>
+            <a:r>
+              <a:t>Happy Birthday!</a:t>
             </a:r>
           </a:p>
         </p:txBody>
@@ -9056,29 +6874,29 @@
         <p:spPr>
           <a:xfrm>
             <a:off x="1097280" y="2103120"/>
-            <a:ext cx="4572000" cy="822960"/>
-          </a:xfrm>
-          <a:prstGeom prst="rect">
-            <a:avLst/>
-          </a:prstGeom>
-          <a:noFill/>
-        </p:spPr>
-        <p:txBody>
-          <a:bodyPr wrap="square">
-            <a:spAutoFit/>
-          </a:bodyPr>
-          <a:lstStyle/>
-          <a:p>
-            <a:pPr algn="l">
-              <a:defRPr sz="5200" b="1" i="0">
-                <a:solidFill>
-                  <a:srgbClr val="4CAF50"/>
-                </a:solidFill>
-                <a:latin typeface="Calibri"/>
-              </a:defRPr>
-            </a:pPr>
-            <a:r>
-              <a:t>8</a:t>
+            <a:ext cx="9966960" cy="640080"/>
+          </a:xfrm>
+          <a:prstGeom prst="rect">
+            <a:avLst/>
+          </a:prstGeom>
+          <a:noFill/>
+        </p:spPr>
+        <p:txBody>
+          <a:bodyPr wrap="square">
+            <a:spAutoFit/>
+          </a:bodyPr>
+          <a:lstStyle/>
+          <a:p>
+            <a:pPr algn="l">
+              <a:defRPr sz="2800" b="1" i="0">
+                <a:solidFill>
+                  <a:srgbClr val="FFFFFF"/>
+                </a:solidFill>
+                <a:latin typeface="Calibri"/>
+              </a:defRPr>
+            </a:pPr>
+            <a:r>
+              <a:t>Mikhail Ladutko</a:t>
             </a:r>
           </a:p>
         </p:txBody>
@@ -9091,22 +6909,22 @@
         </p:nvSpPr>
         <p:spPr>
           <a:xfrm>
-            <a:off x="1097280" y="2926080"/>
-            <a:ext cx="4572000" cy="365760"/>
-          </a:xfrm>
-          <a:prstGeom prst="rect">
-            <a:avLst/>
-          </a:prstGeom>
-          <a:noFill/>
-        </p:spPr>
-        <p:txBody>
-          <a:bodyPr wrap="square">
-            <a:spAutoFit/>
-          </a:bodyPr>
-          <a:lstStyle/>
-          <a:p>
-            <a:pPr algn="l">
-              <a:defRPr sz="1100" b="0" i="0">
+            <a:off x="1097280" y="2743200"/>
+            <a:ext cx="9966960" cy="365760"/>
+          </a:xfrm>
+          <a:prstGeom prst="rect">
+            <a:avLst/>
+          </a:prstGeom>
+          <a:noFill/>
+        </p:spPr>
+        <p:txBody>
+          <a:bodyPr wrap="square">
+            <a:spAutoFit/>
+          </a:bodyPr>
+          <a:lstStyle/>
+          <a:p>
+            <a:pPr algn="l">
+              <a:defRPr sz="1400" b="0" i="0">
                 <a:solidFill>
                   <a:srgbClr val="8F95A3"/>
                 </a:solidFill>
@@ -9114,7 +6932,7 @@
               </a:defRPr>
             </a:pPr>
             <a:r>
-              <a:t>scorecards being automated</a:t>
+              <a:t>Happy Birthday!</a:t>
             </a:r>
           </a:p>
         </p:txBody>
@@ -9127,7 +6945,43 @@
         </p:nvSpPr>
         <p:spPr>
           <a:xfrm>
-            <a:off x="1097280" y="3566160"/>
+            <a:off x="1097280" y="3291840"/>
+            <a:ext cx="9966960" cy="914400"/>
+          </a:xfrm>
+          <a:prstGeom prst="rect">
+            <a:avLst/>
+          </a:prstGeom>
+          <a:noFill/>
+        </p:spPr>
+        <p:txBody>
+          <a:bodyPr wrap="square">
+            <a:spAutoFit/>
+          </a:bodyPr>
+          <a:lstStyle/>
+          <a:p>
+            <a:pPr algn="l">
+              <a:defRPr sz="1600" b="0" i="0">
+                <a:solidFill>
+                  <a:srgbClr val="E2E2EA"/>
+                </a:solidFill>
+                <a:latin typeface="Calibri"/>
+              </a:defRPr>
+            </a:pPr>
+            <a:r>
+              <a:t>The team celebrates your special day with warm wishes!</a:t>
+            </a:r>
+          </a:p>
+        </p:txBody>
+      </p:sp>
+      <p:sp>
+        <p:nvSpPr>
+          <p:cNvPr id="8" name="TextBox 7"/>
+          <p:cNvSpPr txBox="1"/>
+          <p:nvPr/>
+        </p:nvSpPr>
+        <p:spPr>
+          <a:xfrm>
+            <a:off x="1097280" y="4572000"/>
             <a:ext cx="9966960" cy="457200"/>
           </a:xfrm>
           <a:prstGeom prst="rect">
@@ -9142,51 +6996,15 @@
           <a:lstStyle/>
           <a:p>
             <a:pPr algn="l">
-              <a:defRPr sz="1800" b="1" i="0">
-                <a:solidFill>
-                  <a:srgbClr val="FFFFFF"/>
-                </a:solidFill>
-                <a:latin typeface="Calibri"/>
-              </a:defRPr>
-            </a:pPr>
-            <a:r>
-              <a:t>Scorecard Automation Breakthrough</a:t>
-            </a:r>
-          </a:p>
-        </p:txBody>
-      </p:sp>
-      <p:sp>
-        <p:nvSpPr>
-          <p:cNvPr id="8" name="TextBox 7"/>
-          <p:cNvSpPr txBox="1"/>
-          <p:nvPr/>
-        </p:nvSpPr>
-        <p:spPr>
-          <a:xfrm>
-            <a:off x="1097280" y="4206240"/>
-            <a:ext cx="9966960" cy="1371600"/>
-          </a:xfrm>
-          <a:prstGeom prst="rect">
-            <a:avLst/>
-          </a:prstGeom>
-          <a:noFill/>
-        </p:spPr>
-        <p:txBody>
-          <a:bodyPr wrap="square">
-            <a:spAutoFit/>
-          </a:bodyPr>
-          <a:lstStyle/>
-          <a:p>
-            <a:pPr algn="l">
-              <a:defRPr sz="1500" b="0" i="0">
-                <a:solidFill>
-                  <a:srgbClr val="E2E2EA"/>
-                </a:solidFill>
-                <a:latin typeface="Calibri"/>
-              </a:defRPr>
-            </a:pPr>
-            <a:r>
-              <a:t>Engineering metrics scorecards are being finalized across key teams, with automation targeting completion by end of day. This shift from manual tracking to AI-driven insights represents a major step toward data-driven performance management.</a:t>
+              <a:defRPr sz="1400" b="0" i="1">
+                <a:solidFill>
+                  <a:srgbClr val="FF6B6B"/>
+                </a:solidFill>
+                <a:latin typeface="Calibri"/>
+              </a:defRPr>
+            </a:pPr>
+            <a:r>
+              <a:t>Hope your birthday is filled with happiness and amazing moments!</a:t>
             </a:r>
           </a:p>
         </p:txBody>
@@ -9232,7 +7050,7 @@
             <a:avLst/>
           </a:prstGeom>
           <a:solidFill>
-            <a:srgbClr val="2196F3"/>
+            <a:srgbClr val="4ECDC4"/>
           </a:solidFill>
           <a:ln>
             <a:noFill/>
@@ -9285,13 +7103,13 @@
             <a:pPr algn="l">
               <a:defRPr sz="1000" b="1">
                 <a:solidFill>
-                  <a:srgbClr val="2196F3"/>
-                </a:solidFill>
-                <a:latin typeface="Calibri"/>
-              </a:defRPr>
-            </a:pPr>
-            <a:r>
-              <a:t>📊  WIN</a:t>
+                  <a:srgbClr val="4ECDC4"/>
+                </a:solidFill>
+                <a:latin typeface="Calibri"/>
+              </a:defRPr>
+            </a:pPr>
+            <a:r>
+              <a:t>🎈  CELEBRATION</a:t>
             </a:r>
           </a:p>
         </p:txBody>
@@ -9321,13 +7139,13 @@
             <a:pPr algn="l">
               <a:defRPr sz="3200" b="1" i="0">
                 <a:solidFill>
-                  <a:srgbClr val="2196F3"/>
-                </a:solidFill>
-                <a:latin typeface="Calibri"/>
-              </a:defRPr>
-            </a:pPr>
-            <a:r>
-              <a:t>Data Precision Victory</a:t>
+                  <a:srgbClr val="4ECDC4"/>
+                </a:solidFill>
+                <a:latin typeface="Calibri"/>
+              </a:defRPr>
+            </a:pPr>
+            <a:r>
+              <a:t>Happy Birthday!</a:t>
             </a:r>
           </a:p>
         </p:txBody>
@@ -9341,29 +7159,29 @@
         <p:spPr>
           <a:xfrm>
             <a:off x="1097280" y="2103120"/>
-            <a:ext cx="4572000" cy="822960"/>
-          </a:xfrm>
-          <a:prstGeom prst="rect">
-            <a:avLst/>
-          </a:prstGeom>
-          <a:noFill/>
-        </p:spPr>
-        <p:txBody>
-          <a:bodyPr wrap="square">
-            <a:spAutoFit/>
-          </a:bodyPr>
-          <a:lstStyle/>
-          <a:p>
-            <a:pPr algn="l">
-              <a:defRPr sz="4800" b="1" i="0">
-                <a:solidFill>
-                  <a:srgbClr val="2196F3"/>
-                </a:solidFill>
-                <a:latin typeface="Calibri"/>
-              </a:defRPr>
-            </a:pPr>
-            <a:r>
-              <a:t>Record Low</a:t>
+            <a:ext cx="9966960" cy="640080"/>
+          </a:xfrm>
+          <a:prstGeom prst="rect">
+            <a:avLst/>
+          </a:prstGeom>
+          <a:noFill/>
+        </p:spPr>
+        <p:txBody>
+          <a:bodyPr wrap="square">
+            <a:spAutoFit/>
+          </a:bodyPr>
+          <a:lstStyle/>
+          <a:p>
+            <a:pPr algn="l">
+              <a:defRPr sz="2800" b="1" i="0">
+                <a:solidFill>
+                  <a:srgbClr val="FFFFFF"/>
+                </a:solidFill>
+                <a:latin typeface="Calibri"/>
+              </a:defRPr>
+            </a:pPr>
+            <a:r>
+              <a:t>Armaan Pandher</a:t>
             </a:r>
           </a:p>
         </p:txBody>
@@ -9376,22 +7194,22 @@
         </p:nvSpPr>
         <p:spPr>
           <a:xfrm>
-            <a:off x="1097280" y="2834640"/>
-            <a:ext cx="4572000" cy="365760"/>
-          </a:xfrm>
-          <a:prstGeom prst="rect">
-            <a:avLst/>
-          </a:prstGeom>
-          <a:noFill/>
-        </p:spPr>
-        <p:txBody>
-          <a:bodyPr wrap="square">
-            <a:spAutoFit/>
-          </a:bodyPr>
-          <a:lstStyle/>
-          <a:p>
-            <a:pPr algn="l">
-              <a:defRPr sz="1200" b="0" i="0">
+            <a:off x="1097280" y="2743200"/>
+            <a:ext cx="9966960" cy="365760"/>
+          </a:xfrm>
+          <a:prstGeom prst="rect">
+            <a:avLst/>
+          </a:prstGeom>
+          <a:noFill/>
+        </p:spPr>
+        <p:txBody>
+          <a:bodyPr wrap="square">
+            <a:spAutoFit/>
+          </a:bodyPr>
+          <a:lstStyle/>
+          <a:p>
+            <a:pPr algn="l">
+              <a:defRPr sz="1400" b="0" i="0">
                 <a:solidFill>
                   <a:srgbClr val="8F95A3"/>
                 </a:solidFill>
@@ -9399,7 +7217,7 @@
               </a:defRPr>
             </a:pPr>
             <a:r>
-              <a:t>spend discrepancies</a:t>
+              <a:t>Happy Birthday!</a:t>
             </a:r>
           </a:p>
         </p:txBody>
@@ -9413,21 +7231,21 @@
         <p:spPr>
           <a:xfrm>
             <a:off x="1097280" y="3291840"/>
-            <a:ext cx="9966960" cy="365760"/>
-          </a:xfrm>
-          <a:prstGeom prst="rect">
-            <a:avLst/>
-          </a:prstGeom>
-          <a:noFill/>
-        </p:spPr>
-        <p:txBody>
-          <a:bodyPr wrap="square">
-            <a:spAutoFit/>
-          </a:bodyPr>
-          <a:lstStyle/>
-          <a:p>
-            <a:pPr algn="l">
-              <a:defRPr sz="1400" b="0" i="0">
+            <a:ext cx="9966960" cy="914400"/>
+          </a:xfrm>
+          <a:prstGeom prst="rect">
+            <a:avLst/>
+          </a:prstGeom>
+          <a:noFill/>
+        </p:spPr>
+        <p:txBody>
+          <a:bodyPr wrap="square">
+            <a:spAutoFit/>
+          </a:bodyPr>
+          <a:lstStyle/>
+          <a:p>
+            <a:pPr algn="l">
+              <a:defRPr sz="1600" b="0" i="0">
                 <a:solidFill>
                   <a:srgbClr val="E2E2EA"/>
                 </a:solidFill>
@@ -9435,7 +7253,7 @@
               </a:defRPr>
             </a:pPr>
             <a:r>
-              <a:t>by Chardonnay Team</a:t>
+              <a:t>Let's pause the busy schedule, grab a slice of cake, and take a moment to appreciate how awesome you are. You bring so much light to our work with your ideas, humor, and dedication!</a:t>
             </a:r>
           </a:p>
         </p:txBody>
@@ -9448,7 +7266,7 @@
         </p:nvSpPr>
         <p:spPr>
           <a:xfrm>
-            <a:off x="1097280" y="3840480"/>
+            <a:off x="1097280" y="4572000"/>
             <a:ext cx="9966960" cy="457200"/>
           </a:xfrm>
           <a:prstGeom prst="rect">
@@ -9463,87 +7281,15 @@
           <a:lstStyle/>
           <a:p>
             <a:pPr algn="l">
-              <a:defRPr sz="1800" b="1" i="0">
-                <a:solidFill>
-                  <a:srgbClr val="FFFFFF"/>
-                </a:solidFill>
-                <a:latin typeface="Calibri"/>
-              </a:defRPr>
-            </a:pPr>
-            <a:r>
-              <a:t>January Marks Historic Data Accuracy</a:t>
-            </a:r>
-          </a:p>
-        </p:txBody>
-      </p:sp>
-      <p:sp>
-        <p:nvSpPr>
-          <p:cNvPr id="9" name="TextBox 8"/>
-          <p:cNvSpPr txBox="1"/>
-          <p:nvPr/>
-        </p:nvSpPr>
-        <p:spPr>
-          <a:xfrm>
-            <a:off x="1097280" y="4389120"/>
-            <a:ext cx="9966960" cy="914400"/>
-          </a:xfrm>
-          <a:prstGeom prst="rect">
-            <a:avLst/>
-          </a:prstGeom>
-          <a:noFill/>
-        </p:spPr>
-        <p:txBody>
-          <a:bodyPr wrap="square">
-            <a:spAutoFit/>
-          </a:bodyPr>
-          <a:lstStyle/>
-          <a:p>
-            <a:pPr algn="l">
-              <a:defRPr sz="1400" b="0" i="0">
-                <a:solidFill>
-                  <a:srgbClr val="E2E2EA"/>
-                </a:solidFill>
-                <a:latin typeface="Calibri"/>
-              </a:defRPr>
-            </a:pPr>
-            <a:r>
-              <a:t>Achieved historically minimal spend discrepancies in January, with automated LTV system launch planned in 12 weeks.</a:t>
-            </a:r>
-          </a:p>
-        </p:txBody>
-      </p:sp>
-      <p:sp>
-        <p:nvSpPr>
-          <p:cNvPr id="10" name="TextBox 9"/>
-          <p:cNvSpPr txBox="1"/>
-          <p:nvPr/>
-        </p:nvSpPr>
-        <p:spPr>
-          <a:xfrm>
-            <a:off x="1097280" y="5486400"/>
-            <a:ext cx="9966960" cy="457200"/>
-          </a:xfrm>
-          <a:prstGeom prst="rect">
-            <a:avLst/>
-          </a:prstGeom>
-          <a:noFill/>
-        </p:spPr>
-        <p:txBody>
-          <a:bodyPr wrap="square">
-            <a:spAutoFit/>
-          </a:bodyPr>
-          <a:lstStyle/>
-          <a:p>
-            <a:pPr algn="l">
-              <a:defRPr sz="1300" b="0" i="1">
-                <a:solidFill>
-                  <a:srgbClr val="8F95A3"/>
-                </a:solidFill>
-                <a:latin typeface="Calibri"/>
-              </a:defRPr>
-            </a:pPr>
-            <a:r>
-              <a:t>💬 "Our relentless focus on data precision is paying off with unprecedented accuracy levels"</a:t>
+              <a:defRPr sz="1400" b="0" i="1">
+                <a:solidFill>
+                  <a:srgbClr val="4ECDC4"/>
+                </a:solidFill>
+                <a:latin typeface="Calibri"/>
+              </a:defRPr>
+            </a:pPr>
+            <a:r>
+              <a:t>We're truly lucky to have you on the team. Here's to another year of success and adventures!</a:t>
             </a:r>
           </a:p>
         </p:txBody>
@@ -9589,7 +7335,7 @@
             <a:avLst/>
           </a:prstGeom>
           <a:solidFill>
-            <a:srgbClr val="FF9800"/>
+            <a:srgbClr val="22C55E"/>
           </a:solidFill>
           <a:ln>
             <a:noFill/>
@@ -9642,13 +7388,13 @@
             <a:pPr algn="l">
               <a:defRPr sz="1000" b="1">
                 <a:solidFill>
-                  <a:srgbClr val="FF9800"/>
-                </a:solidFill>
-                <a:latin typeface="Calibri"/>
-              </a:defRPr>
-            </a:pPr>
-            <a:r>
-              <a:t>🎯  MILESTONE</a:t>
+                  <a:srgbClr val="22C55E"/>
+                </a:solidFill>
+                <a:latin typeface="Calibri"/>
+              </a:defRPr>
+            </a:pPr>
+            <a:r>
+              <a:t>🏆  WIN</a:t>
             </a:r>
           </a:p>
         </p:txBody>
@@ -9678,13 +7424,13 @@
             <a:pPr algn="l">
               <a:defRPr sz="3200" b="1" i="0">
                 <a:solidFill>
-                  <a:srgbClr val="FF9800"/>
-                </a:solidFill>
-                <a:latin typeface="Calibri"/>
-              </a:defRPr>
-            </a:pPr>
-            <a:r>
-              <a:t>Strategic Pivot</a:t>
+                  <a:srgbClr val="22C55E"/>
+                </a:solidFill>
+                <a:latin typeface="Calibri"/>
+              </a:defRPr>
+            </a:pPr>
+            <a:r>
+              <a:t>Innovation Excellence</a:t>
             </a:r>
           </a:p>
         </p:txBody>
@@ -9712,15 +7458,15 @@
           <a:lstStyle/>
           <a:p>
             <a:pPr algn="l">
-              <a:defRPr sz="5200" b="1" i="0">
-                <a:solidFill>
-                  <a:srgbClr val="FF9800"/>
-                </a:solidFill>
-                <a:latin typeface="Calibri"/>
-              </a:defRPr>
-            </a:pPr>
-            <a:r>
-              <a:t>Business Empire</a:t>
+              <a:defRPr sz="4800" b="1" i="0">
+                <a:solidFill>
+                  <a:srgbClr val="22C55E"/>
+                </a:solidFill>
+                <a:latin typeface="Calibri"/>
+              </a:defRPr>
+            </a:pPr>
+            <a:r>
+              <a:t>Amazing</a:t>
             </a:r>
           </a:p>
         </p:txBody>
@@ -9733,7 +7479,7 @@
         </p:nvSpPr>
         <p:spPr>
           <a:xfrm>
-            <a:off x="1097280" y="2926080"/>
+            <a:off x="1097280" y="2834640"/>
             <a:ext cx="4572000" cy="365760"/>
           </a:xfrm>
           <a:prstGeom prst="rect">
@@ -9748,7 +7494,7 @@
           <a:lstStyle/>
           <a:p>
             <a:pPr algn="l">
-              <a:defRPr sz="1100" b="0" i="0">
+              <a:defRPr sz="1200" b="0" i="0">
                 <a:solidFill>
                   <a:srgbClr val="8F95A3"/>
                 </a:solidFill>
@@ -9756,7 +7502,7 @@
               </a:defRPr>
             </a:pPr>
             <a:r>
-              <a:t>new testing focus</a:t>
+              <a:t>progress</a:t>
             </a:r>
           </a:p>
         </p:txBody>
@@ -9769,7 +7515,43 @@
         </p:nvSpPr>
         <p:spPr>
           <a:xfrm>
-            <a:off x="1097280" y="3566160"/>
+            <a:off x="1097280" y="3291840"/>
+            <a:ext cx="9966960" cy="365760"/>
+          </a:xfrm>
+          <a:prstGeom prst="rect">
+            <a:avLst/>
+          </a:prstGeom>
+          <a:noFill/>
+        </p:spPr>
+        <p:txBody>
+          <a:bodyPr wrap="square">
+            <a:spAutoFit/>
+          </a:bodyPr>
+          <a:lstStyle/>
+          <a:p>
+            <a:pPr algn="l">
+              <a:defRPr sz="1400" b="0" i="0">
+                <a:solidFill>
+                  <a:srgbClr val="E2E2EA"/>
+                </a:solidFill>
+                <a:latin typeface="Calibri"/>
+              </a:defRPr>
+            </a:pPr>
+            <a:r>
+              <a:t>by Non-engineering teams</a:t>
+            </a:r>
+          </a:p>
+        </p:txBody>
+      </p:sp>
+      <p:sp>
+        <p:nvSpPr>
+          <p:cNvPr id="8" name="TextBox 7"/>
+          <p:cNvSpPr txBox="1"/>
+          <p:nvPr/>
+        </p:nvSpPr>
+        <p:spPr>
+          <a:xfrm>
+            <a:off x="1097280" y="3840480"/>
             <a:ext cx="9966960" cy="457200"/>
           </a:xfrm>
           <a:prstGeom prst="rect">
@@ -9792,35 +7574,35 @@
               </a:defRPr>
             </a:pPr>
             <a:r>
-              <a:t>Margin Testing Optimization</a:t>
-            </a:r>
-          </a:p>
-        </p:txBody>
-      </p:sp>
-      <p:sp>
-        <p:nvSpPr>
-          <p:cNvPr id="8" name="TextBox 7"/>
-          <p:cNvSpPr txBox="1"/>
-          <p:nvPr/>
-        </p:nvSpPr>
-        <p:spPr>
-          <a:xfrm>
-            <a:off x="1097280" y="4206240"/>
-            <a:ext cx="9966960" cy="1371600"/>
-          </a:xfrm>
-          <a:prstGeom prst="rect">
-            <a:avLst/>
-          </a:prstGeom>
-          <a:noFill/>
-        </p:spPr>
-        <p:txBody>
-          <a:bodyPr wrap="square">
-            <a:spAutoFit/>
-          </a:bodyPr>
-          <a:lstStyle/>
-          <a:p>
-            <a:pPr algn="l">
-              <a:defRPr sz="1500" b="0" i="0">
+              <a:t>Building Products at Lightning Speed</a:t>
+            </a:r>
+          </a:p>
+        </p:txBody>
+      </p:sp>
+      <p:sp>
+        <p:nvSpPr>
+          <p:cNvPr id="9" name="TextBox 8"/>
+          <p:cNvSpPr txBox="1"/>
+          <p:nvPr/>
+        </p:nvSpPr>
+        <p:spPr>
+          <a:xfrm>
+            <a:off x="1097280" y="4389120"/>
+            <a:ext cx="9966960" cy="914400"/>
+          </a:xfrm>
+          <a:prstGeom prst="rect">
+            <a:avLst/>
+          </a:prstGeom>
+          <a:noFill/>
+        </p:spPr>
+        <p:txBody>
+          <a:bodyPr wrap="square">
+            <a:spAutoFit/>
+          </a:bodyPr>
+          <a:lstStyle/>
+          <a:p>
+            <a:pPr algn="l">
+              <a:defRPr sz="1400" b="0" i="0">
                 <a:solidFill>
                   <a:srgbClr val="E2E2EA"/>
                 </a:solidFill>
@@ -9828,7 +7610,43 @@
               </a:defRPr>
             </a:pPr>
             <a:r>
-              <a:t>Teams are shifting focus to higher-performing segments like Business Empire for better advertiser ROAS, while creating comprehensive documentation frameworks for future learning.</a:t>
+              <a:t>Non-engineering teams have created so many useful tools, showing we're learning fast and moving in the right direction. This rapid innovation demonstrates our team's adaptability and creative problem-solving skills.</a:t>
+            </a:r>
+          </a:p>
+        </p:txBody>
+      </p:sp>
+      <p:sp>
+        <p:nvSpPr>
+          <p:cNvPr id="10" name="TextBox 9"/>
+          <p:cNvSpPr txBox="1"/>
+          <p:nvPr/>
+        </p:nvSpPr>
+        <p:spPr>
+          <a:xfrm>
+            <a:off x="1097280" y="5486400"/>
+            <a:ext cx="9966960" cy="457200"/>
+          </a:xfrm>
+          <a:prstGeom prst="rect">
+            <a:avLst/>
+          </a:prstGeom>
+          <a:noFill/>
+        </p:spPr>
+        <p:txBody>
+          <a:bodyPr wrap="square">
+            <a:spAutoFit/>
+          </a:bodyPr>
+          <a:lstStyle/>
+          <a:p>
+            <a:pPr algn="l">
+              <a:defRPr sz="1300" b="0" i="1">
+                <a:solidFill>
+                  <a:srgbClr val="8F95A3"/>
+                </a:solidFill>
+                <a:latin typeface="Calibri"/>
+              </a:defRPr>
+            </a:pPr>
+            <a:r>
+              <a:t>💬 "When we combine speed with smart engineering practices, we unlock incredible potential for growth and efficiency."</a:t>
             </a:r>
           </a:p>
         </p:txBody>
@@ -9874,7 +7692,7 @@
             <a:avLst/>
           </a:prstGeom>
           <a:solidFill>
-            <a:srgbClr val="4CAF50"/>
+            <a:srgbClr val="8B5CF6"/>
           </a:solidFill>
           <a:ln>
             <a:noFill/>
@@ -9927,13 +7745,13 @@
             <a:pPr algn="l">
               <a:defRPr sz="1000" b="1">
                 <a:solidFill>
-                  <a:srgbClr val="4CAF50"/>
-                </a:solidFill>
-                <a:latin typeface="Calibri"/>
-              </a:defRPr>
-            </a:pPr>
-            <a:r>
-              <a:t>💰  WIN</a:t>
+                  <a:srgbClr val="8B5CF6"/>
+                </a:solidFill>
+                <a:latin typeface="Calibri"/>
+              </a:defRPr>
+            </a:pPr>
+            <a:r>
+              <a:t>👏  CLAPS</a:t>
             </a:r>
           </a:p>
         </p:txBody>
@@ -9963,13 +7781,13 @@
             <a:pPr algn="l">
               <a:defRPr sz="3200" b="1" i="0">
                 <a:solidFill>
-                  <a:srgbClr val="4CAF50"/>
-                </a:solidFill>
-                <a:latin typeface="Calibri"/>
-              </a:defRPr>
-            </a:pPr>
-            <a:r>
-              <a:t>Revenue Acceleration</a:t>
+                  <a:srgbClr val="8B5CF6"/>
+                </a:solidFill>
+                <a:latin typeface="Calibri"/>
+              </a:defRPr>
+            </a:pPr>
+            <a:r>
+              <a:t>Team Recognition</a:t>
             </a:r>
           </a:p>
         </p:txBody>
@@ -9983,29 +7801,29 @@
         <p:spPr>
           <a:xfrm>
             <a:off x="1097280" y="2103120"/>
-            <a:ext cx="4572000" cy="822960"/>
-          </a:xfrm>
-          <a:prstGeom prst="rect">
-            <a:avLst/>
-          </a:prstGeom>
-          <a:noFill/>
-        </p:spPr>
-        <p:txBody>
-          <a:bodyPr wrap="square">
-            <a:spAutoFit/>
-          </a:bodyPr>
-          <a:lstStyle/>
-          <a:p>
-            <a:pPr algn="l">
-              <a:defRPr sz="4800" b="1" i="0">
-                <a:solidFill>
-                  <a:srgbClr val="4CAF50"/>
-                </a:solidFill>
-                <a:latin typeface="Calibri"/>
-              </a:defRPr>
-            </a:pPr>
-            <a:r>
-              <a:t>€10k</a:t>
+            <a:ext cx="2743200" cy="548640"/>
+          </a:xfrm>
+          <a:prstGeom prst="rect">
+            <a:avLst/>
+          </a:prstGeom>
+          <a:noFill/>
+        </p:spPr>
+        <p:txBody>
+          <a:bodyPr wrap="square">
+            <a:spAutoFit/>
+          </a:bodyPr>
+          <a:lstStyle/>
+          <a:p>
+            <a:pPr algn="l">
+              <a:defRPr sz="2800" b="1" i="0">
+                <a:solidFill>
+                  <a:srgbClr val="8B5CF6"/>
+                </a:solidFill>
+                <a:latin typeface="Calibri"/>
+              </a:defRPr>
+            </a:pPr>
+            <a:r>
+              <a:t>100</a:t>
             </a:r>
           </a:p>
         </p:txBody>
@@ -10018,30 +7836,30 @@
         </p:nvSpPr>
         <p:spPr>
           <a:xfrm>
-            <a:off x="1097280" y="2834640"/>
-            <a:ext cx="4572000" cy="365760"/>
-          </a:xfrm>
-          <a:prstGeom prst="rect">
-            <a:avLst/>
-          </a:prstGeom>
-          <a:noFill/>
-        </p:spPr>
-        <p:txBody>
-          <a:bodyPr wrap="square">
-            <a:spAutoFit/>
-          </a:bodyPr>
-          <a:lstStyle/>
-          <a:p>
-            <a:pPr algn="l">
-              <a:defRPr sz="1200" b="0" i="0">
-                <a:solidFill>
-                  <a:srgbClr val="8F95A3"/>
-                </a:solidFill>
-                <a:latin typeface="Calibri"/>
-              </a:defRPr>
-            </a:pPr>
-            <a:r>
-              <a:t>daily ad spend</a:t>
+            <a:off x="1097280" y="2651760"/>
+            <a:ext cx="9966960" cy="365760"/>
+          </a:xfrm>
+          <a:prstGeom prst="rect">
+            <a:avLst/>
+          </a:prstGeom>
+          <a:noFill/>
+        </p:spPr>
+        <p:txBody>
+          <a:bodyPr wrap="square">
+            <a:spAutoFit/>
+          </a:bodyPr>
+          <a:lstStyle/>
+          <a:p>
+            <a:pPr algn="l">
+              <a:defRPr sz="1400" b="0" i="0">
+                <a:solidFill>
+                  <a:srgbClr val="E2E2EA"/>
+                </a:solidFill>
+                <a:latin typeface="Calibri"/>
+              </a:defRPr>
+            </a:pPr>
+            <a:r>
+              <a:t>from Gleb Krahotkin</a:t>
             </a:r>
           </a:p>
         </p:txBody>
@@ -10054,7 +7872,7 @@
         </p:nvSpPr>
         <p:spPr>
           <a:xfrm>
-            <a:off x="1097280" y="3291840"/>
+            <a:off x="1097280" y="3108960"/>
             <a:ext cx="9966960" cy="365760"/>
           </a:xfrm>
           <a:prstGeom prst="rect">
@@ -10069,7 +7887,43 @@
           <a:lstStyle/>
           <a:p>
             <a:pPr algn="l">
-              <a:defRPr sz="1400" b="0" i="0">
+              <a:defRPr sz="1400" b="1" i="0">
+                <a:solidFill>
+                  <a:srgbClr val="FFFFFF"/>
+                </a:solidFill>
+                <a:latin typeface="Calibri"/>
+              </a:defRPr>
+            </a:pPr>
+            <a:r>
+              <a:t>to: Mykhailo Kukharskyi, Artem Pchelintsev, Mikita Dzianisevich</a:t>
+            </a:r>
+          </a:p>
+        </p:txBody>
+      </p:sp>
+      <p:sp>
+        <p:nvSpPr>
+          <p:cNvPr id="8" name="TextBox 7"/>
+          <p:cNvSpPr txBox="1"/>
+          <p:nvPr/>
+        </p:nvSpPr>
+        <p:spPr>
+          <a:xfrm>
+            <a:off x="1097280" y="3749039"/>
+            <a:ext cx="9966960" cy="1097280"/>
+          </a:xfrm>
+          <a:prstGeom prst="rect">
+            <a:avLst/>
+          </a:prstGeom>
+          <a:noFill/>
+        </p:spPr>
+        <p:txBody>
+          <a:bodyPr wrap="square">
+            <a:spAutoFit/>
+          </a:bodyPr>
+          <a:lstStyle/>
+          <a:p>
+            <a:pPr algn="l">
+              <a:defRPr sz="1500" b="0" i="1">
                 <a:solidFill>
                   <a:srgbClr val="E2E2EA"/>
                 </a:solidFill>
@@ -10077,20 +7931,20 @@
               </a:defRPr>
             </a:pPr>
             <a:r>
-              <a:t>by Jointhis Team</a:t>
-            </a:r>
-          </a:p>
-        </p:txBody>
-      </p:sp>
-      <p:sp>
-        <p:nvSpPr>
-          <p:cNvPr id="8" name="TextBox 7"/>
-          <p:cNvSpPr txBox="1"/>
-          <p:nvPr/>
-        </p:nvSpPr>
-        <p:spPr>
-          <a:xfrm>
-            <a:off x="1097280" y="3840480"/>
+              <a:t>"Outstanding collaboration and problem-solving skills that drive results"</a:t>
+            </a:r>
+          </a:p>
+        </p:txBody>
+      </p:sp>
+      <p:sp>
+        <p:nvSpPr>
+          <p:cNvPr id="9" name="TextBox 8"/>
+          <p:cNvSpPr txBox="1"/>
+          <p:nvPr/>
+        </p:nvSpPr>
+        <p:spPr>
+          <a:xfrm>
+            <a:off x="1097280" y="5120640"/>
             <a:ext cx="9966960" cy="457200"/>
           </a:xfrm>
           <a:prstGeom prst="rect">
@@ -10105,87 +7959,15 @@
           <a:lstStyle/>
           <a:p>
             <a:pPr algn="l">
-              <a:defRPr sz="1800" b="1" i="0">
-                <a:solidFill>
-                  <a:srgbClr val="FFFFFF"/>
-                </a:solidFill>
-                <a:latin typeface="Calibri"/>
-              </a:defRPr>
-            </a:pPr>
-            <a:r>
-              <a:t>Aggressive Growth Strategy Deployed</a:t>
-            </a:r>
-          </a:p>
-        </p:txBody>
-      </p:sp>
-      <p:sp>
-        <p:nvSpPr>
-          <p:cNvPr id="9" name="TextBox 8"/>
-          <p:cNvSpPr txBox="1"/>
-          <p:nvPr/>
-        </p:nvSpPr>
-        <p:spPr>
-          <a:xfrm>
-            <a:off x="1097280" y="4389120"/>
-            <a:ext cx="9966960" cy="914400"/>
-          </a:xfrm>
-          <a:prstGeom prst="rect">
-            <a:avLst/>
-          </a:prstGeom>
-          <a:noFill/>
-        </p:spPr>
-        <p:txBody>
-          <a:bodyPr wrap="square">
-            <a:spAutoFit/>
-          </a:bodyPr>
-          <a:lstStyle/>
-          <a:p>
-            <a:pPr algn="l">
-              <a:defRPr sz="1400" b="0" i="0">
-                <a:solidFill>
-                  <a:srgbClr val="E2E2EA"/>
-                </a:solidFill>
-                <a:latin typeface="Calibri"/>
-              </a:defRPr>
-            </a:pPr>
-            <a:r>
-              <a:t>Daily ad spend jumped from €2k to €10k to close a €25k profit gap, with Minesweeper achieving stable 256% ROAS on Android.</a:t>
-            </a:r>
-          </a:p>
-        </p:txBody>
-      </p:sp>
-      <p:sp>
-        <p:nvSpPr>
-          <p:cNvPr id="10" name="TextBox 9"/>
-          <p:cNvSpPr txBox="1"/>
-          <p:nvPr/>
-        </p:nvSpPr>
-        <p:spPr>
-          <a:xfrm>
-            <a:off x="1097280" y="5486400"/>
-            <a:ext cx="9966960" cy="457200"/>
-          </a:xfrm>
-          <a:prstGeom prst="rect">
-            <a:avLst/>
-          </a:prstGeom>
-          <a:noFill/>
-        </p:spPr>
-        <p:txBody>
-          <a:bodyPr wrap="square">
-            <a:spAutoFit/>
-          </a:bodyPr>
-          <a:lstStyle/>
-          <a:p>
-            <a:pPr algn="l">
-              <a:defRPr sz="1300" b="0" i="1">
-                <a:solidFill>
-                  <a:srgbClr val="8F95A3"/>
-                </a:solidFill>
-                <a:latin typeface="Calibri"/>
-              </a:defRPr>
-            </a:pPr>
-            <a:r>
-              <a:t>💬 "Bold moves in advertising are delivering strong returns and closing profit gaps fast"</a:t>
+              <a:defRPr sz="1200" b="1" i="0">
+                <a:solidFill>
+                  <a:srgbClr val="8B5CF6"/>
+                </a:solidFill>
+                <a:latin typeface="Calibri"/>
+              </a:defRPr>
+            </a:pPr>
+            <a:r>
+              <a:t>EXCELLENCE · TEAMWORK</a:t>
             </a:r>
           </a:p>
         </p:txBody>
@@ -10231,7 +8013,7 @@
             <a:avLst/>
           </a:prstGeom>
           <a:solidFill>
-            <a:srgbClr val="9C27B0"/>
+            <a:srgbClr val="F59E0B"/>
           </a:solidFill>
           <a:ln>
             <a:noFill/>
@@ -10284,13 +8066,13 @@
             <a:pPr algn="l">
               <a:defRPr sz="1000" b="1">
                 <a:solidFill>
-                  <a:srgbClr val="9C27B0"/>
-                </a:solidFill>
-                <a:latin typeface="Calibri"/>
-              </a:defRPr>
-            </a:pPr>
-            <a:r>
-              <a:t>👏  CLAPS</a:t>
+                  <a:srgbClr val="F59E0B"/>
+                </a:solidFill>
+                <a:latin typeface="Calibri"/>
+              </a:defRPr>
+            </a:pPr>
+            <a:r>
+              <a:t>🌟  CLAPS</a:t>
             </a:r>
           </a:p>
         </p:txBody>
@@ -10320,13 +8102,13 @@
             <a:pPr algn="l">
               <a:defRPr sz="3200" b="1" i="0">
                 <a:solidFill>
-                  <a:srgbClr val="9C27B0"/>
-                </a:solidFill>
-                <a:latin typeface="Calibri"/>
-              </a:defRPr>
-            </a:pPr>
-            <a:r>
-              <a:t>Team Recognition</a:t>
+                  <a:srgbClr val="F59E0B"/>
+                </a:solidFill>
+                <a:latin typeface="Calibri"/>
+              </a:defRPr>
+            </a:pPr>
+            <a:r>
+              <a:t>Recognition Wave</a:t>
             </a:r>
           </a:p>
         </p:txBody>
@@ -10356,13 +8138,13 @@
             <a:pPr algn="l">
               <a:defRPr sz="2800" b="1" i="0">
                 <a:solidFill>
-                  <a:srgbClr val="9C27B0"/>
-                </a:solidFill>
-                <a:latin typeface="Calibri"/>
-              </a:defRPr>
-            </a:pPr>
-            <a:r>
-              <a:t>50</a:t>
+                  <a:srgbClr val="F59E0B"/>
+                </a:solidFill>
+                <a:latin typeface="Calibri"/>
+              </a:defRPr>
+            </a:pPr>
+            <a:r>
+              <a:t>90</a:t>
             </a:r>
           </a:p>
         </p:txBody>
@@ -10398,7 +8180,7 @@
               </a:defRPr>
             </a:pPr>
             <a:r>
-              <a:t>from Mykhailo Kukharskyi</a:t>
+              <a:t>from Iurii Kotov</a:t>
             </a:r>
           </a:p>
         </p:txBody>
@@ -10434,7 +8216,7 @@
               </a:defRPr>
             </a:pPr>
             <a:r>
-              <a:t>to: Gleb Krahotkin</a:t>
+              <a:t>to: Viktor Trykolenko, Artur Kipel, Miguel Perez</a:t>
             </a:r>
           </a:p>
         </p:txBody>
@@ -10470,7 +8252,7 @@
               </a:defRPr>
             </a:pPr>
             <a:r>
-              <a:t>"Outstanding technical contributions and problem-solving"</a:t>
+              <a:t>"Exceptional dedication and expertise that elevates our entire team performance"</a:t>
             </a:r>
           </a:p>
         </p:txBody>
@@ -10500,13 +8282,13 @@
             <a:pPr algn="l">
               <a:defRPr sz="1200" b="1" i="0">
                 <a:solidFill>
-                  <a:srgbClr val="9C27B0"/>
-                </a:solidFill>
-                <a:latin typeface="Calibri"/>
-              </a:defRPr>
-            </a:pPr>
-            <a:r>
-              <a:t>Excellence · Innovation</a:t>
+                  <a:srgbClr val="F59E0B"/>
+                </a:solidFill>
+                <a:latin typeface="Calibri"/>
+              </a:defRPr>
+            </a:pPr>
+            <a:r>
+              <a:t>COMMITMENT · EXPERTISE</a:t>
             </a:r>
           </a:p>
         </p:txBody>
@@ -10552,7 +8334,7 @@
             <a:avLst/>
           </a:prstGeom>
           <a:solidFill>
-            <a:srgbClr val="FF5722"/>
+            <a:srgbClr val="EC4899"/>
           </a:solidFill>
           <a:ln>
             <a:noFill/>
@@ -10605,13 +8387,13 @@
             <a:pPr algn="l">
               <a:defRPr sz="1000" b="1">
                 <a:solidFill>
-                  <a:srgbClr val="FF5722"/>
-                </a:solidFill>
-                <a:latin typeface="Calibri"/>
-              </a:defRPr>
-            </a:pPr>
-            <a:r>
-              <a:t>🙌  CLAPS</a:t>
+                  <a:srgbClr val="EC4899"/>
+                </a:solidFill>
+                <a:latin typeface="Calibri"/>
+              </a:defRPr>
+            </a:pPr>
+            <a:r>
+              <a:t>⚡  CLAPS</a:t>
             </a:r>
           </a:p>
         </p:txBody>
@@ -10641,13 +8423,13 @@
             <a:pPr algn="l">
               <a:defRPr sz="3200" b="1" i="0">
                 <a:solidFill>
-                  <a:srgbClr val="FF5722"/>
-                </a:solidFill>
-                <a:latin typeface="Calibri"/>
-              </a:defRPr>
-            </a:pPr>
-            <a:r>
-              <a:t>Peer Appreciation</a:t>
+                  <a:srgbClr val="EC4899"/>
+                </a:solidFill>
+                <a:latin typeface="Calibri"/>
+              </a:defRPr>
+            </a:pPr>
+            <a:r>
+              <a:t>Excellence Recognized</a:t>
             </a:r>
           </a:p>
         </p:txBody>
@@ -10677,7 +8459,7 @@
             <a:pPr algn="l">
               <a:defRPr sz="2800" b="1" i="0">
                 <a:solidFill>
-                  <a:srgbClr val="FF5722"/>
+                  <a:srgbClr val="EC4899"/>
                 </a:solidFill>
                 <a:latin typeface="Calibri"/>
               </a:defRPr>
@@ -10719,7 +8501,7 @@
               </a:defRPr>
             </a:pPr>
             <a:r>
-              <a:t>from Viktor Trykolenko</a:t>
+              <a:t>from Sasha Kononenko &amp; Michael Lotfy</a:t>
             </a:r>
           </a:p>
         </p:txBody>
@@ -10755,7 +8537,7 @@
               </a:defRPr>
             </a:pPr>
             <a:r>
-              <a:t>to: Iurii Kotov</a:t>
+              <a:t>to: Alexandr Babich, Issa Isahakyan</a:t>
             </a:r>
           </a:p>
         </p:txBody>
@@ -10791,7 +8573,7 @@
               </a:defRPr>
             </a:pPr>
             <a:r>
-              <a:t>"Exceptional teamwork and dedication to quality"</a:t>
+              <a:t>"Delivering outstanding results and demonstrating leadership in challenging projects"</a:t>
             </a:r>
           </a:p>
         </p:txBody>
@@ -10821,13 +8603,13 @@
             <a:pPr algn="l">
               <a:defRPr sz="1200" b="1" i="0">
                 <a:solidFill>
-                  <a:srgbClr val="FF5722"/>
-                </a:solidFill>
-                <a:latin typeface="Calibri"/>
-              </a:defRPr>
-            </a:pPr>
-            <a:r>
-              <a:t>Collaboration · Quality</a:t>
+                  <a:srgbClr val="EC4899"/>
+                </a:solidFill>
+                <a:latin typeface="Calibri"/>
+              </a:defRPr>
+            </a:pPr>
+            <a:r>
+              <a:t>LEADERSHIP · RESULTS</a:t>
             </a:r>
           </a:p>
         </p:txBody>
@@ -10873,7 +8655,7 @@
             <a:avLst/>
           </a:prstGeom>
           <a:solidFill>
-            <a:srgbClr val="E91E63"/>
+            <a:srgbClr val="3B82F6"/>
           </a:solidFill>
           <a:ln>
             <a:noFill/>
@@ -10926,13 +8708,13 @@
             <a:pPr algn="l">
               <a:defRPr sz="1000" b="1">
                 <a:solidFill>
-                  <a:srgbClr val="E91E63"/>
-                </a:solidFill>
-                <a:latin typeface="Calibri"/>
-              </a:defRPr>
-            </a:pPr>
-            <a:r>
-              <a:t>🔥  CLAPS</a:t>
+                  <a:srgbClr val="3B82F6"/>
+                </a:solidFill>
+                <a:latin typeface="Calibri"/>
+              </a:defRPr>
+            </a:pPr>
+            <a:r>
+              <a:t>🎯  MILESTONE</a:t>
             </a:r>
           </a:p>
         </p:txBody>
@@ -10962,13 +8744,13 @@
             <a:pPr algn="l">
               <a:defRPr sz="3200" b="1" i="0">
                 <a:solidFill>
-                  <a:srgbClr val="E91E63"/>
-                </a:solidFill>
-                <a:latin typeface="Calibri"/>
-              </a:defRPr>
-            </a:pPr>
-            <a:r>
-              <a:t>Recognition Wave</a:t>
+                  <a:srgbClr val="3B82F6"/>
+                </a:solidFill>
+                <a:latin typeface="Calibri"/>
+              </a:defRPr>
+            </a:pPr>
+            <a:r>
+              <a:t>Q1 Performance Excellence</a:t>
             </a:r>
           </a:p>
         </p:txBody>
@@ -10982,29 +8764,29 @@
         <p:spPr>
           <a:xfrm>
             <a:off x="1097280" y="2103120"/>
-            <a:ext cx="2743200" cy="548640"/>
-          </a:xfrm>
-          <a:prstGeom prst="rect">
-            <a:avLst/>
-          </a:prstGeom>
-          <a:noFill/>
-        </p:spPr>
-        <p:txBody>
-          <a:bodyPr wrap="square">
-            <a:spAutoFit/>
-          </a:bodyPr>
-          <a:lstStyle/>
-          <a:p>
-            <a:pPr algn="l">
-              <a:defRPr sz="2800" b="1" i="0">
-                <a:solidFill>
-                  <a:srgbClr val="E91E63"/>
-                </a:solidFill>
-                <a:latin typeface="Calibri"/>
-              </a:defRPr>
-            </a:pPr>
-            <a:r>
-              <a:t>50</a:t>
+            <a:ext cx="4572000" cy="822960"/>
+          </a:xfrm>
+          <a:prstGeom prst="rect">
+            <a:avLst/>
+          </a:prstGeom>
+          <a:noFill/>
+        </p:spPr>
+        <p:txBody>
+          <a:bodyPr wrap="square">
+            <a:spAutoFit/>
+          </a:bodyPr>
+          <a:lstStyle/>
+          <a:p>
+            <a:pPr algn="l">
+              <a:defRPr sz="5200" b="1" i="0">
+                <a:solidFill>
+                  <a:srgbClr val="3B82F6"/>
+                </a:solidFill>
+                <a:latin typeface="Calibri"/>
+              </a:defRPr>
+            </a:pPr>
+            <a:r>
+              <a:t>Historic Low</a:t>
             </a:r>
           </a:p>
         </p:txBody>
@@ -11017,22 +8799,94 @@
         </p:nvSpPr>
         <p:spPr>
           <a:xfrm>
-            <a:off x="1097280" y="2651760"/>
-            <a:ext cx="9966960" cy="365760"/>
-          </a:xfrm>
-          <a:prstGeom prst="rect">
-            <a:avLst/>
-          </a:prstGeom>
-          <a:noFill/>
-        </p:spPr>
-        <p:txBody>
-          <a:bodyPr wrap="square">
-            <a:spAutoFit/>
-          </a:bodyPr>
-          <a:lstStyle/>
-          <a:p>
-            <a:pPr algn="l">
-              <a:defRPr sz="1400" b="0" i="0">
+            <a:off x="1097280" y="2926080"/>
+            <a:ext cx="4572000" cy="365760"/>
+          </a:xfrm>
+          <a:prstGeom prst="rect">
+            <a:avLst/>
+          </a:prstGeom>
+          <a:noFill/>
+        </p:spPr>
+        <p:txBody>
+          <a:bodyPr wrap="square">
+            <a:spAutoFit/>
+          </a:bodyPr>
+          <a:lstStyle/>
+          <a:p>
+            <a:pPr algn="l">
+              <a:defRPr sz="1100" b="0" i="0">
+                <a:solidFill>
+                  <a:srgbClr val="8F95A3"/>
+                </a:solidFill>
+                <a:latin typeface="Calibri"/>
+              </a:defRPr>
+            </a:pPr>
+            <a:r>
+              <a:t>Spend Discrepancy</a:t>
+            </a:r>
+          </a:p>
+        </p:txBody>
+      </p:sp>
+      <p:sp>
+        <p:nvSpPr>
+          <p:cNvPr id="7" name="TextBox 6"/>
+          <p:cNvSpPr txBox="1"/>
+          <p:nvPr/>
+        </p:nvSpPr>
+        <p:spPr>
+          <a:xfrm>
+            <a:off x="1097280" y="3566160"/>
+            <a:ext cx="9966960" cy="457200"/>
+          </a:xfrm>
+          <a:prstGeom prst="rect">
+            <a:avLst/>
+          </a:prstGeom>
+          <a:noFill/>
+        </p:spPr>
+        <p:txBody>
+          <a:bodyPr wrap="square">
+            <a:spAutoFit/>
+          </a:bodyPr>
+          <a:lstStyle/>
+          <a:p>
+            <a:pPr algn="l">
+              <a:defRPr sz="1800" b="1" i="0">
+                <a:solidFill>
+                  <a:srgbClr val="FFFFFF"/>
+                </a:solidFill>
+                <a:latin typeface="Calibri"/>
+              </a:defRPr>
+            </a:pPr>
+            <a:r>
+              <a:t>Record-Low Spend Discrepancies Achieved</a:t>
+            </a:r>
+          </a:p>
+        </p:txBody>
+      </p:sp>
+      <p:sp>
+        <p:nvSpPr>
+          <p:cNvPr id="8" name="TextBox 7"/>
+          <p:cNvSpPr txBox="1"/>
+          <p:nvPr/>
+        </p:nvSpPr>
+        <p:spPr>
+          <a:xfrm>
+            <a:off x="1097280" y="4206240"/>
+            <a:ext cx="9966960" cy="1371600"/>
+          </a:xfrm>
+          <a:prstGeom prst="rect">
+            <a:avLst/>
+          </a:prstGeom>
+          <a:noFill/>
+        </p:spPr>
+        <p:txBody>
+          <a:bodyPr wrap="square">
+            <a:spAutoFit/>
+          </a:bodyPr>
+          <a:lstStyle/>
+          <a:p>
+            <a:pPr algn="l">
+              <a:defRPr sz="1500" b="0" i="0">
                 <a:solidFill>
                   <a:srgbClr val="E2E2EA"/>
                 </a:solidFill>
@@ -11040,115 +8894,7 @@
               </a:defRPr>
             </a:pPr>
             <a:r>
-              <a:t>from Jasmine Nunez</a:t>
-            </a:r>
-          </a:p>
-        </p:txBody>
-      </p:sp>
-      <p:sp>
-        <p:nvSpPr>
-          <p:cNvPr id="7" name="TextBox 6"/>
-          <p:cNvSpPr txBox="1"/>
-          <p:nvPr/>
-        </p:nvSpPr>
-        <p:spPr>
-          <a:xfrm>
-            <a:off x="1097280" y="3108960"/>
-            <a:ext cx="9966960" cy="365760"/>
-          </a:xfrm>
-          <a:prstGeom prst="rect">
-            <a:avLst/>
-          </a:prstGeom>
-          <a:noFill/>
-        </p:spPr>
-        <p:txBody>
-          <a:bodyPr wrap="square">
-            <a:spAutoFit/>
-          </a:bodyPr>
-          <a:lstStyle/>
-          <a:p>
-            <a:pPr algn="l">
-              <a:defRPr sz="1400" b="1" i="0">
-                <a:solidFill>
-                  <a:srgbClr val="FFFFFF"/>
-                </a:solidFill>
-                <a:latin typeface="Calibri"/>
-              </a:defRPr>
-            </a:pPr>
-            <a:r>
-              <a:t>to: Michelle Walter</a:t>
-            </a:r>
-          </a:p>
-        </p:txBody>
-      </p:sp>
-      <p:sp>
-        <p:nvSpPr>
-          <p:cNvPr id="8" name="TextBox 7"/>
-          <p:cNvSpPr txBox="1"/>
-          <p:nvPr/>
-        </p:nvSpPr>
-        <p:spPr>
-          <a:xfrm>
-            <a:off x="1097280" y="3749039"/>
-            <a:ext cx="9966960" cy="1097280"/>
-          </a:xfrm>
-          <a:prstGeom prst="rect">
-            <a:avLst/>
-          </a:prstGeom>
-          <a:noFill/>
-        </p:spPr>
-        <p:txBody>
-          <a:bodyPr wrap="square">
-            <a:spAutoFit/>
-          </a:bodyPr>
-          <a:lstStyle/>
-          <a:p>
-            <a:pPr algn="l">
-              <a:defRPr sz="1500" b="0" i="1">
-                <a:solidFill>
-                  <a:srgbClr val="E2E2EA"/>
-                </a:solidFill>
-                <a:latin typeface="Calibri"/>
-              </a:defRPr>
-            </a:pPr>
-            <a:r>
-              <a:t>"Incredible leadership and cross-team coordination"</a:t>
-            </a:r>
-          </a:p>
-        </p:txBody>
-      </p:sp>
-      <p:sp>
-        <p:nvSpPr>
-          <p:cNvPr id="9" name="TextBox 8"/>
-          <p:cNvSpPr txBox="1"/>
-          <p:nvPr/>
-        </p:nvSpPr>
-        <p:spPr>
-          <a:xfrm>
-            <a:off x="1097280" y="5120640"/>
-            <a:ext cx="9966960" cy="457200"/>
-          </a:xfrm>
-          <a:prstGeom prst="rect">
-            <a:avLst/>
-          </a:prstGeom>
-          <a:noFill/>
-        </p:spPr>
-        <p:txBody>
-          <a:bodyPr wrap="square">
-            <a:spAutoFit/>
-          </a:bodyPr>
-          <a:lstStyle/>
-          <a:p>
-            <a:pPr algn="l">
-              <a:defRPr sz="1200" b="1" i="0">
-                <a:solidFill>
-                  <a:srgbClr val="E91E63"/>
-                </a:solidFill>
-                <a:latin typeface="Calibri"/>
-              </a:defRPr>
-            </a:pPr>
-            <a:r>
-              <a:t>Leadership · Teamwork</a:t>
+              <a:t>January marked historically minimal spend discrepancies, with automated LTV system launch planned in 12 weeks. Our TV Monkey model has been successfully deployed with forecast integration.</a:t>
             </a:r>
           </a:p>
         </p:txBody>
